--- a/demo_session/deck_cophi_edit.pptx
+++ b/demo_session/deck_cophi_edit.pptx
@@ -4364,7 +4364,7 @@
                 </a:solidFill>
                 <a:latin typeface="Arial"/>
               </a:rPr>
-              <a:t>–  below ~1.5 px per actuator the actuator fit collapses (the blur demo's box kernel) — 5 px per actuator is the floor on this table</a:t>
+              <a:t>–  measured (slide 18): 1 px per actuator fails the single-actuator row, 1.5–2 px holds at 1.6–2× the time, 3.3 and 4 are the same — 5 px per actuator is the floor on this table</a:t>
             </a:r>
           </a:p>
           <a:p>
@@ -5760,7 +5760,7 @@
         </p:nvGraphicFramePr>
         <p:xfrm>
           <a:off x="411480" y="1298448"/>
-          <a:ext cx="5806438" cy="4320540"/>
+          <a:ext cx="5806438" cy="4509135"/>
         </p:xfrm>
         <a:graphic>
           <a:graphicData uri="http://schemas.openxmlformats.org/drawingml/2006/table">
@@ -5769,11 +5769,11 @@
                 <a:tableStyleId>{5C22544A-7EE6-4342-B048-85BDC9FD1C3A}</a:tableStyleId>
               </a:tblPr>
               <a:tblGrid>
-                <a:gridCol w="1471460"/>
-                <a:gridCol w="1010520"/>
-                <a:gridCol w="868693"/>
-                <a:gridCol w="407754"/>
-                <a:gridCol w="957335"/>
+                <a:gridCol w="1363792"/>
+                <a:gridCol w="936580"/>
+                <a:gridCol w="805130"/>
+                <a:gridCol w="377918"/>
+                <a:gridCol w="1232342"/>
                 <a:gridCol w="1090676"/>
               </a:tblGrid>
               <a:tr h="1034415">
@@ -6044,7 +6044,7 @@
                   </a:tcPr>
                 </a:tc>
               </a:tr>
-              <a:tr h="468630">
+              <a:tr h="657225">
                 <a:tc>
                   <a:txBody>
                     <a:bodyPr wrap="square"/>
@@ -6547,7 +6547,7 @@
                           </a:solidFill>
                           <a:latin typeface="Arial"/>
                         </a:rPr>
-                        <a:t>3.73 / 3.35 (4.4 / 4.0 at read 100; ×1.11 square-wave)</a:t>
+                        <a:t>3.73 / 3.35 (4.4 / 4.0 at read 100; ×1.23 in time for two-tap demodulation)</a:t>
                       </a:r>
                     </a:p>
                   </a:txBody>
@@ -6592,7 +6592,7 @@
         </p:nvSpPr>
         <p:spPr>
           <a:xfrm>
-            <a:off x="411480" y="5765292"/>
+            <a:off x="411480" y="5953887"/>
             <a:ext cx="5806440" cy="274320"/>
           </a:xfrm>
           <a:prstGeom prst="rect">
@@ -10722,7 +10722,7 @@
                 </a:solidFill>
                 <a:latin typeface="Arial"/>
               </a:rPr>
-              <a:t>How much resolution? IFO, vector ZWFS, HET</a:t>
+              <a:t>How much resolution? IFO, vector ZWFS, HET — the sweep's records</a:t>
             </a:r>
           </a:p>
           <a:p>
@@ -10738,7 +10738,7 @@
                 </a:solidFill>
                 <a:latin typeface="Arial"/>
               </a:rPr>
-              <a:t>Pixels per actuator above ~2 are free in photons and hold, cost data and processing, and buy the single-actuator scale; between 1 and 1.5 the actuator fit collapses; the three approaches pay differently</a:t>
+              <a:t>Camera pixels per actuator swept at 1 / 1.5 / 2 / 3.3 / 4 for all six readings, the matrix measured through the resampled reading: 1 px fails the single-actuator row, 1.5–2 px cost 1.6–2× the time, above 3.3 nothing changes</a:t>
             </a:r>
           </a:p>
         </p:txBody>
@@ -10787,1106 +10787,30 @@
           </a:p>
         </p:txBody>
       </p:sp>
-      <p:graphicFrame>
-        <p:nvGraphicFramePr>
-          <p:cNvPr id="4" name="Table 3"/>
-          <p:cNvGraphicFramePr>
-            <a:graphicFrameLocks noGrp="1"/>
-          </p:cNvGraphicFramePr>
+      <p:pic>
+        <p:nvPicPr>
+          <p:cNvPr id="4" name="Picture 3" descr="cophi_ressweep_composite.png"/>
+          <p:cNvPicPr>
+            <a:picLocks noChangeAspect="1"/>
+          </p:cNvPicPr>
           <p:nvPr/>
-        </p:nvGraphicFramePr>
-        <p:xfrm>
-          <a:off x="411480" y="1298448"/>
-          <a:ext cx="11368731" cy="2811780"/>
-        </p:xfrm>
-        <a:graphic>
-          <a:graphicData uri="http://schemas.openxmlformats.org/drawingml/2006/table">
-            <a:tbl>
-              <a:tblPr firstRow="1" bandRow="1">
-                <a:tableStyleId>{5C22544A-7EE6-4342-B048-85BDC9FD1C3A}</a:tableStyleId>
-              </a:tblPr>
-              <a:tblGrid>
-                <a:gridCol w="598354"/>
-                <a:gridCol w="3669907"/>
-                <a:gridCol w="917476"/>
-                <a:gridCol w="877586"/>
-                <a:gridCol w="1874844"/>
-                <a:gridCol w="1196708"/>
-                <a:gridCol w="1116928"/>
-                <a:gridCol w="1116928"/>
-              </a:tblGrid>
-              <a:tr h="468630">
-                <a:tc>
-                  <a:txBody>
-                    <a:bodyPr wrap="square"/>
-                    <a:lstStyle/>
-                    <a:p>
-                      <a:r>
-                        <a:rPr sz="1100" b="1">
-                          <a:solidFill>
-                            <a:srgbClr val="FFFFFF"/>
-                          </a:solidFill>
-                          <a:latin typeface="Arial"/>
-                        </a:rPr>
-                        <a:t>px per actuator</a:t>
-                      </a:r>
-                    </a:p>
-                  </a:txBody>
-                  <a:tcPr marL="54864" marR="54864" marT="18288" marB="18288">
-                    <a:solidFill>
-                      <a:srgbClr val="1F4E79"/>
-                    </a:solidFill>
-                  </a:tcPr>
-                </a:tc>
-                <a:tc>
-                  <a:txBody>
-                    <a:bodyPr wrap="square"/>
-                    <a:lstStyle/>
-                    <a:p>
-                      <a:r>
-                        <a:rPr sz="1100" b="1">
-                          <a:solidFill>
-                            <a:srgbClr val="FFFFFF"/>
-                          </a:solidFill>
-                          <a:latin typeface="Arial"/>
-                        </a:rPr>
-                        <a:t>the fit</a:t>
-                      </a:r>
-                    </a:p>
-                  </a:txBody>
-                  <a:tcPr marL="54864" marR="54864" marT="18288" marB="18288">
-                    <a:solidFill>
-                      <a:srgbClr val="1F4E79"/>
-                    </a:solidFill>
-                  </a:tcPr>
-                </a:tc>
-                <a:tc>
-                  <a:txBody>
-                    <a:bodyPr wrap="square"/>
-                    <a:lstStyle/>
-                    <a:p>
-                      <a:r>
-                        <a:rPr sz="1100" b="1">
-                          <a:solidFill>
-                            <a:srgbClr val="FFFFFF"/>
-                          </a:solidFill>
-                          <a:latin typeface="Arial"/>
-                        </a:rPr>
-                        <a:t>hold at 3 pm</a:t>
-                      </a:r>
-                    </a:p>
-                  </a:txBody>
-                  <a:tcPr marL="54864" marR="54864" marT="18288" marB="18288">
-                    <a:solidFill>
-                      <a:srgbClr val="1F4E79"/>
-                    </a:solidFill>
-                  </a:tcPr>
-                </a:tc>
-                <a:tc>
-                  <a:txBody>
-                    <a:bodyPr wrap="square"/>
-                    <a:lstStyle/>
-                    <a:p>
-                      <a:r>
-                        <a:rPr sz="1100" b="1">
-                          <a:solidFill>
-                            <a:srgbClr val="FFFFFF"/>
-                          </a:solidFill>
-                          <a:latin typeface="Arial"/>
-                        </a:rPr>
-                        <a:t>speed, s per pm</a:t>
-                      </a:r>
-                    </a:p>
-                  </a:txBody>
-                  <a:tcPr marL="54864" marR="54864" marT="18288" marB="18288">
-                    <a:solidFill>
-                      <a:srgbClr val="1F4E79"/>
-                    </a:solidFill>
-                  </a:tcPr>
-                </a:tc>
-                <a:tc>
-                  <a:txBody>
-                    <a:bodyPr wrap="square"/>
-                    <a:lstStyle/>
-                    <a:p>
-                      <a:r>
-                        <a:rPr sz="1100" b="1">
-                          <a:solidFill>
-                            <a:srgbClr val="FFFFFF"/>
-                          </a:solidFill>
-                          <a:latin typeface="Arial"/>
-                        </a:rPr>
-                        <a:t>complexity</a:t>
-                      </a:r>
-                    </a:p>
-                  </a:txBody>
-                  <a:tcPr marL="54864" marR="54864" marT="18288" marB="18288">
-                    <a:solidFill>
-                      <a:srgbClr val="1F4E79"/>
-                    </a:solidFill>
-                  </a:tcPr>
-                </a:tc>
-                <a:tc>
-                  <a:txBody>
-                    <a:bodyPr wrap="square"/>
-                    <a:lstStyle/>
-                    <a:p>
-                      <a:r>
-                        <a:rPr sz="1100" b="1">
-                          <a:solidFill>
-                            <a:srgbClr val="FFFFFF"/>
-                          </a:solidFill>
-                          <a:latin typeface="Arial"/>
-                        </a:rPr>
-                        <a:t>IFO (pol. camera)</a:t>
-                      </a:r>
-                    </a:p>
-                  </a:txBody>
-                  <a:tcPr marL="54864" marR="54864" marT="18288" marB="18288">
-                    <a:solidFill>
-                      <a:srgbClr val="1F4E79"/>
-                    </a:solidFill>
-                  </a:tcPr>
-                </a:tc>
-                <a:tc>
-                  <a:txBody>
-                    <a:bodyPr wrap="square"/>
-                    <a:lstStyle/>
-                    <a:p>
-                      <a:r>
-                        <a:rPr sz="1100" b="1">
-                          <a:solidFill>
-                            <a:srgbClr val="FFFFFF"/>
-                          </a:solidFill>
-                          <a:latin typeface="Arial"/>
-                        </a:rPr>
-                        <a:t>vector ZWFS (pol. camera)</a:t>
-                      </a:r>
-                    </a:p>
-                  </a:txBody>
-                  <a:tcPr marL="54864" marR="54864" marT="18288" marB="18288">
-                    <a:solidFill>
-                      <a:srgbClr val="1F4E79"/>
-                    </a:solidFill>
-                  </a:tcPr>
-                </a:tc>
-                <a:tc>
-                  <a:txBody>
-                    <a:bodyPr wrap="square"/>
-                    <a:lstStyle/>
-                    <a:p>
-                      <a:r>
-                        <a:rPr sz="1100" b="1">
-                          <a:solidFill>
-                            <a:srgbClr val="FFFFFF"/>
-                          </a:solidFill>
-                          <a:latin typeface="Arial"/>
-                        </a:rPr>
-                        <a:t>HET camera / lock-in</a:t>
-                      </a:r>
-                    </a:p>
-                  </a:txBody>
-                  <a:tcPr marL="54864" marR="54864" marT="18288" marB="18288">
-                    <a:solidFill>
-                      <a:srgbClr val="1F4E79"/>
-                    </a:solidFill>
-                  </a:tcPr>
-                </a:tc>
-              </a:tr>
-              <a:tr h="468630">
-                <a:tc>
-                  <a:txBody>
-                    <a:bodyPr wrap="square"/>
-                    <a:lstStyle/>
-                    <a:p>
-                      <a:r>
-                        <a:rPr sz="1100" b="0">
-                          <a:solidFill>
-                            <a:srgbClr val="282828"/>
-                          </a:solidFill>
-                          <a:latin typeface="Arial"/>
-                        </a:rPr>
-                        <a:t>&lt; 1</a:t>
-                      </a:r>
-                    </a:p>
-                  </a:txBody>
-                  <a:tcPr marL="54864" marR="54864" marT="18288" marB="18288">
-                    <a:solidFill>
-                      <a:srgbClr val="FFFFFF"/>
-                    </a:solidFill>
-                  </a:tcPr>
-                </a:tc>
-                <a:tc>
-                  <a:txBody>
-                    <a:bodyPr wrap="square"/>
-                    <a:lstStyle/>
-                    <a:p>
-                      <a:r>
-                        <a:rPr sz="1100" b="0">
-                          <a:solidFill>
-                            <a:srgbClr val="282828"/>
-                          </a:solidFill>
-                          <a:latin typeface="Arial"/>
-                        </a:rPr>
-                        <a:t>modes only</a:t>
-                      </a:r>
-                    </a:p>
-                  </a:txBody>
-                  <a:tcPr marL="54864" marR="54864" marT="18288" marB="18288">
-                    <a:solidFill>
-                      <a:srgbClr val="FFFFFF"/>
-                    </a:solidFill>
-                  </a:tcPr>
-                </a:tc>
-                <a:tc>
-                  <a:txBody>
-                    <a:bodyPr wrap="square"/>
-                    <a:lstStyle/>
-                    <a:p>
-                      <a:r>
-                        <a:rPr sz="1100" b="0">
-                          <a:solidFill>
-                            <a:srgbClr val="282828"/>
-                          </a:solidFill>
-                          <a:latin typeface="Arial"/>
-                        </a:rPr>
-                        <a:t>—</a:t>
-                      </a:r>
-                    </a:p>
-                  </a:txBody>
-                  <a:tcPr marL="54864" marR="54864" marT="18288" marB="18288">
-                    <a:solidFill>
-                      <a:srgbClr val="FFFFFF"/>
-                    </a:solidFill>
-                  </a:tcPr>
-                </a:tc>
-                <a:tc>
-                  <a:txBody>
-                    <a:bodyPr wrap="square"/>
-                    <a:lstStyle/>
-                    <a:p>
-                      <a:r>
-                        <a:rPr sz="1100" b="0">
-                          <a:solidFill>
-                            <a:srgbClr val="282828"/>
-                          </a:solidFill>
-                          <a:latin typeface="Arial"/>
-                        </a:rPr>
-                        <a:t>—</a:t>
-                      </a:r>
-                    </a:p>
-                  </a:txBody>
-                  <a:tcPr marL="54864" marR="54864" marT="18288" marB="18288">
-                    <a:solidFill>
-                      <a:srgbClr val="FFFFFF"/>
-                    </a:solidFill>
-                  </a:tcPr>
-                </a:tc>
-                <a:tc>
-                  <a:txBody>
-                    <a:bodyPr wrap="square"/>
-                    <a:lstStyle/>
-                    <a:p>
-                      <a:r>
-                        <a:rPr sz="1100" b="0">
-                          <a:solidFill>
-                            <a:srgbClr val="282828"/>
-                          </a:solidFill>
-                          <a:latin typeface="Arial"/>
-                        </a:rPr>
-                        <a:t>least</a:t>
-                      </a:r>
-                    </a:p>
-                  </a:txBody>
-                  <a:tcPr marL="54864" marR="54864" marT="18288" marB="18288">
-                    <a:solidFill>
-                      <a:srgbClr val="FFFFFF"/>
-                    </a:solidFill>
-                  </a:tcPr>
-                </a:tc>
-                <a:tc>
-                  <a:txBody>
-                    <a:bodyPr wrap="square"/>
-                    <a:lstStyle/>
-                    <a:p>
-                      <a:r>
-                        <a:rPr sz="1100" b="0">
-                          <a:solidFill>
-                            <a:srgbClr val="282828"/>
-                          </a:solidFill>
-                          <a:latin typeface="Arial"/>
-                        </a:rPr>
-                        <a:t>not a gauge</a:t>
-                      </a:r>
-                    </a:p>
-                  </a:txBody>
-                  <a:tcPr marL="54864" marR="54864" marT="18288" marB="18288">
-                    <a:solidFill>
-                      <a:srgbClr val="FFFFFF"/>
-                    </a:solidFill>
-                  </a:tcPr>
-                </a:tc>
-                <a:tc>
-                  <a:txBody>
-                    <a:bodyPr wrap="square"/>
-                    <a:lstStyle/>
-                    <a:p>
-                      <a:r>
-                        <a:rPr sz="1100" b="0">
-                          <a:solidFill>
-                            <a:srgbClr val="282828"/>
-                          </a:solidFill>
-                          <a:latin typeface="Arial"/>
-                        </a:rPr>
-                        <a:t>not a gauge</a:t>
-                      </a:r>
-                    </a:p>
-                  </a:txBody>
-                  <a:tcPr marL="54864" marR="54864" marT="18288" marB="18288">
-                    <a:solidFill>
-                      <a:srgbClr val="FFFFFF"/>
-                    </a:solidFill>
-                  </a:tcPr>
-                </a:tc>
-                <a:tc>
-                  <a:txBody>
-                    <a:bodyPr wrap="square"/>
-                    <a:lstStyle/>
-                    <a:p>
-                      <a:r>
-                        <a:rPr sz="1100" b="0">
-                          <a:solidFill>
-                            <a:srgbClr val="282828"/>
-                          </a:solidFill>
-                          <a:latin typeface="Arial"/>
-                        </a:rPr>
-                        <a:t>not modeled (ruling 6)</a:t>
-                      </a:r>
-                    </a:p>
-                  </a:txBody>
-                  <a:tcPr marL="54864" marR="54864" marT="18288" marB="18288">
-                    <a:solidFill>
-                      <a:srgbClr val="FFFFFF"/>
-                    </a:solidFill>
-                  </a:tcPr>
-                </a:tc>
-              </a:tr>
-              <a:tr h="468630">
-                <a:tc>
-                  <a:txBody>
-                    <a:bodyPr wrap="square"/>
-                    <a:lstStyle/>
-                    <a:p>
-                      <a:r>
-                        <a:rPr sz="1100" b="0">
-                          <a:solidFill>
-                            <a:srgbClr val="282828"/>
-                          </a:solidFill>
-                          <a:latin typeface="Arial"/>
-                        </a:rPr>
-                        <a:t>1 – 1.5</a:t>
-                      </a:r>
-                    </a:p>
-                  </a:txBody>
-                  <a:tcPr marL="54864" marR="54864" marT="18288" marB="18288">
-                    <a:solidFill>
-                      <a:srgbClr val="ECF1F6"/>
-                    </a:solidFill>
-                  </a:tcPr>
-                </a:tc>
-                <a:tc>
-                  <a:txBody>
-                    <a:bodyPr wrap="square"/>
-                    <a:lstStyle/>
-                    <a:p>
-                      <a:r>
-                        <a:rPr sz="1100" b="0">
-                          <a:solidFill>
-                            <a:srgbClr val="282828"/>
-                          </a:solidFill>
-                          <a:latin typeface="Arial"/>
-                        </a:rPr>
-                        <a:t>collapses (fewer readings than lit actuators; a registration error reads the wrong actuator)</a:t>
-                      </a:r>
-                    </a:p>
-                  </a:txBody>
-                  <a:tcPr marL="54864" marR="54864" marT="18288" marB="18288">
-                    <a:solidFill>
-                      <a:srgbClr val="ECF1F6"/>
-                    </a:solidFill>
-                  </a:tcPr>
-                </a:tc>
-                <a:tc>
-                  <a:txBody>
-                    <a:bodyPr wrap="square"/>
-                    <a:lstStyle/>
-                    <a:p>
-                      <a:r>
-                        <a:rPr sz="1100" b="0">
-                          <a:solidFill>
-                            <a:srgbClr val="282828"/>
-                          </a:solidFill>
-                          <a:latin typeface="Arial"/>
-                        </a:rPr>
-                        <a:t>fails</a:t>
-                      </a:r>
-                    </a:p>
-                  </a:txBody>
-                  <a:tcPr marL="54864" marR="54864" marT="18288" marB="18288">
-                    <a:solidFill>
-                      <a:srgbClr val="ECF1F6"/>
-                    </a:solidFill>
-                  </a:tcPr>
-                </a:tc>
-                <a:tc>
-                  <a:txBody>
-                    <a:bodyPr wrap="square"/>
-                    <a:lstStyle/>
-                    <a:p>
-                      <a:r>
-                        <a:rPr sz="1100" b="0">
-                          <a:solidFill>
-                            <a:srgbClr val="282828"/>
-                          </a:solidFill>
-                          <a:latin typeface="Arial"/>
-                        </a:rPr>
-                        <a:t>—</a:t>
-                      </a:r>
-                    </a:p>
-                  </a:txBody>
-                  <a:tcPr marL="54864" marR="54864" marT="18288" marB="18288">
-                    <a:solidFill>
-                      <a:srgbClr val="ECF1F6"/>
-                    </a:solidFill>
-                  </a:tcPr>
-                </a:tc>
-                <a:tc>
-                  <a:txBody>
-                    <a:bodyPr wrap="square"/>
-                    <a:lstStyle/>
-                    <a:p>
-                      <a:r>
-                        <a:rPr sz="1100" b="0">
-                          <a:solidFill>
-                            <a:srgbClr val="282828"/>
-                          </a:solidFill>
-                          <a:latin typeface="Arial"/>
-                        </a:rPr>
-                        <a:t>—</a:t>
-                      </a:r>
-                    </a:p>
-                  </a:txBody>
-                  <a:tcPr marL="54864" marR="54864" marT="18288" marB="18288">
-                    <a:solidFill>
-                      <a:srgbClr val="ECF1F6"/>
-                    </a:solidFill>
-                  </a:tcPr>
-                </a:tc>
-                <a:tc>
-                  <a:txBody>
-                    <a:bodyPr wrap="square"/>
-                    <a:lstStyle/>
-                    <a:p>
-                      <a:r>
-                        <a:rPr sz="1100" b="0">
-                          <a:solidFill>
-                            <a:srgbClr val="282828"/>
-                          </a:solidFill>
-                          <a:latin typeface="Arial"/>
-                        </a:rPr>
-                        <a:t>blur demo: box-kernel collapse</a:t>
-                      </a:r>
-                    </a:p>
-                  </a:txBody>
-                  <a:tcPr marL="54864" marR="54864" marT="18288" marB="18288">
-                    <a:solidFill>
-                      <a:srgbClr val="ECF1F6"/>
-                    </a:solidFill>
-                  </a:tcPr>
-                </a:tc>
-                <a:tc>
-                  <a:txBody>
-                    <a:bodyPr wrap="square"/>
-                    <a:lstStyle/>
-                    <a:p>
-                      <a:r>
-                        <a:rPr sz="1100" b="0">
-                          <a:solidFill>
-                            <a:srgbClr val="282828"/>
-                          </a:solidFill>
-                          <a:latin typeface="Arial"/>
-                        </a:rPr>
-                        <a:t>same</a:t>
-                      </a:r>
-                    </a:p>
-                  </a:txBody>
-                  <a:tcPr marL="54864" marR="54864" marT="18288" marB="18288">
-                    <a:solidFill>
-                      <a:srgbClr val="ECF1F6"/>
-                    </a:solidFill>
-                  </a:tcPr>
-                </a:tc>
-                <a:tc>
-                  <a:txBody>
-                    <a:bodyPr wrap="square"/>
-                    <a:lstStyle/>
-                    <a:p>
-                      <a:r>
-                        <a:rPr sz="1100" b="0">
-                          <a:solidFill>
-                            <a:srgbClr val="282828"/>
-                          </a:solidFill>
-                          <a:latin typeface="Arial"/>
-                        </a:rPr>
-                        <a:t>same</a:t>
-                      </a:r>
-                    </a:p>
-                  </a:txBody>
-                  <a:tcPr marL="54864" marR="54864" marT="18288" marB="18288">
-                    <a:solidFill>
-                      <a:srgbClr val="ECF1F6"/>
-                    </a:solidFill>
-                  </a:tcPr>
-                </a:tc>
-              </a:tr>
-              <a:tr h="468630">
-                <a:tc>
-                  <a:txBody>
-                    <a:bodyPr wrap="square"/>
-                    <a:lstStyle/>
-                    <a:p>
-                      <a:r>
-                        <a:rPr sz="1100" b="0">
-                          <a:solidFill>
-                            <a:srgbClr val="282828"/>
-                          </a:solidFill>
-                          <a:latin typeface="Arial"/>
-                        </a:rPr>
-                        <a:t>~2</a:t>
-                      </a:r>
-                    </a:p>
-                  </a:txBody>
-                  <a:tcPr marL="54864" marR="54864" marT="18288" marB="18288">
-                    <a:solidFill>
-                      <a:srgbClr val="FFFFFF"/>
-                    </a:solidFill>
-                  </a:tcPr>
-                </a:tc>
-                <a:tc>
-                  <a:txBody>
-                    <a:bodyPr wrap="square"/>
-                    <a:lstStyle/>
-                    <a:p>
-                      <a:r>
-                        <a:rPr sz="1100" b="0">
-                          <a:solidFill>
-                            <a:srgbClr val="282828"/>
-                          </a:solidFill>
-                          <a:latin typeface="Arial"/>
-                        </a:rPr>
-                        <a:t>complete; blur and registration absorbed by the matrix measured on the surface</a:t>
-                      </a:r>
-                    </a:p>
-                  </a:txBody>
-                  <a:tcPr marL="54864" marR="54864" marT="18288" marB="18288">
-                    <a:solidFill>
-                      <a:srgbClr val="FFFFFF"/>
-                    </a:solidFill>
-                  </a:tcPr>
-                </a:tc>
-                <a:tc>
-                  <a:txBody>
-                    <a:bodyPr wrap="square"/>
-                    <a:lstStyle/>
-                    <a:p>
-                      <a:r>
-                        <a:rPr sz="1100" b="0">
-                          <a:solidFill>
-                            <a:srgbClr val="282828"/>
-                          </a:solidFill>
-                          <a:latin typeface="Arial"/>
-                        </a:rPr>
-                        <a:t>held (records at 3.3–4)</a:t>
-                      </a:r>
-                    </a:p>
-                  </a:txBody>
-                  <a:tcPr marL="54864" marR="54864" marT="18288" marB="18288">
-                    <a:solidFill>
-                      <a:srgbClr val="FFFFFF"/>
-                    </a:solidFill>
-                  </a:tcPr>
-                </a:tc>
-                <a:tc>
-                  <a:txBody>
-                    <a:bodyPr wrap="square"/>
-                    <a:lstStyle/>
-                    <a:p>
-                      <a:r>
-                        <a:rPr sz="1100" b="0">
-                          <a:solidFill>
-                            <a:srgbClr val="282828"/>
-                          </a:solidFill>
-                          <a:latin typeface="Arial"/>
-                        </a:rPr>
-                        <a:t>unchanged (well-bound)</a:t>
-                      </a:r>
-                    </a:p>
-                  </a:txBody>
-                  <a:tcPr marL="54864" marR="54864" marT="18288" marB="18288">
-                    <a:solidFill>
-                      <a:srgbClr val="FFFFFF"/>
-                    </a:solidFill>
-                  </a:tcPr>
-                </a:tc>
-                <a:tc>
-                  <a:txBody>
-                    <a:bodyPr wrap="square"/>
-                    <a:lstStyle/>
-                    <a:p>
-                      <a:r>
-                        <a:rPr sz="1100" b="0">
-                          <a:solidFill>
-                            <a:srgbClr val="282828"/>
-                          </a:solidFill>
-                          <a:latin typeface="Arial"/>
-                        </a:rPr>
-                        <a:t>0.04 Mpx</a:t>
-                      </a:r>
-                    </a:p>
-                  </a:txBody>
-                  <a:tcPr marL="54864" marR="54864" marT="18288" marB="18288">
-                    <a:solidFill>
-                      <a:srgbClr val="FFFFFF"/>
-                    </a:solidFill>
-                  </a:tcPr>
-                </a:tc>
-                <a:tc>
-                  <a:txBody>
-                    <a:bodyPr wrap="square"/>
-                    <a:lstStyle/>
-                    <a:p>
-                      <a:r>
-                        <a:rPr sz="1100" b="0">
-                          <a:solidFill>
-                            <a:srgbClr val="282828"/>
-                          </a:solidFill>
-                          <a:latin typeface="Arial"/>
-                        </a:rPr>
-                        <a:t>2 pm floor (record, 4 px)</a:t>
-                      </a:r>
-                    </a:p>
-                  </a:txBody>
-                  <a:tcPr marL="54864" marR="54864" marT="18288" marB="18288">
-                    <a:solidFill>
-                      <a:srgbClr val="FFFFFF"/>
-                    </a:solidFill>
-                  </a:tcPr>
-                </a:tc>
-                <a:tc>
-                  <a:txBody>
-                    <a:bodyPr wrap="square"/>
-                    <a:lstStyle/>
-                    <a:p>
-                      <a:r>
-                        <a:rPr sz="1100" b="0">
-                          <a:solidFill>
-                            <a:srgbClr val="282828"/>
-                          </a:solidFill>
-                          <a:latin typeface="Arial"/>
-                        </a:rPr>
-                        <a:t>2 pm floor (record)</a:t>
-                      </a:r>
-                    </a:p>
-                  </a:txBody>
-                  <a:tcPr marL="54864" marR="54864" marT="18288" marB="18288">
-                    <a:solidFill>
-                      <a:srgbClr val="FFFFFF"/>
-                    </a:solidFill>
-                  </a:tcPr>
-                </a:tc>
-                <a:tc>
-                  <a:txBody>
-                    <a:bodyPr wrap="square"/>
-                    <a:lstStyle/>
-                    <a:p>
-                      <a:r>
-                        <a:rPr sz="1100" b="0">
-                          <a:solidFill>
-                            <a:srgbClr val="282828"/>
-                          </a:solidFill>
-                          <a:latin typeface="Arial"/>
-                        </a:rPr>
-                        <a:t>2 pm floor; lock-in C4 = 5.3</a:t>
-                      </a:r>
-                    </a:p>
-                  </a:txBody>
-                  <a:tcPr marL="54864" marR="54864" marT="18288" marB="18288">
-                    <a:solidFill>
-                      <a:srgbClr val="FFFFFF"/>
-                    </a:solidFill>
-                  </a:tcPr>
-                </a:tc>
-              </a:tr>
-              <a:tr h="468630">
-                <a:tc>
-                  <a:txBody>
-                    <a:bodyPr wrap="square"/>
-                    <a:lstStyle/>
-                    <a:p>
-                      <a:r>
-                        <a:rPr sz="1100" b="0">
-                          <a:solidFill>
-                            <a:srgbClr val="282828"/>
-                          </a:solidFill>
-                          <a:latin typeface="Arial"/>
-                        </a:rPr>
-                        <a:t>5 – 10</a:t>
-                      </a:r>
-                    </a:p>
-                  </a:txBody>
-                  <a:tcPr marL="54864" marR="54864" marT="18288" marB="18288">
-                    <a:solidFill>
-                      <a:srgbClr val="ECF1F6"/>
-                    </a:solidFill>
-                  </a:tcPr>
-                </a:tc>
-                <a:tc>
-                  <a:txBody>
-                    <a:bodyPr wrap="square"/>
-                    <a:lstStyle/>
-                    <a:p>
-                      <a:r>
-                        <a:rPr sz="1100" b="0">
-                          <a:solidFill>
-                            <a:srgbClr val="282828"/>
-                          </a:solidFill>
-                          <a:latin typeface="Arial"/>
-                        </a:rPr>
-                        <a:t>single actuators resolved with margin; ±1 px = ±0.1 pitch registration</a:t>
-                      </a:r>
-                    </a:p>
-                  </a:txBody>
-                  <a:tcPr marL="54864" marR="54864" marT="18288" marB="18288">
-                    <a:solidFill>
-                      <a:srgbClr val="ECF1F6"/>
-                    </a:solidFill>
-                  </a:tcPr>
-                </a:tc>
-                <a:tc>
-                  <a:txBody>
-                    <a:bodyPr wrap="square"/>
-                    <a:lstStyle/>
-                    <a:p>
-                      <a:r>
-                        <a:rPr sz="1100" b="0">
-                          <a:solidFill>
-                            <a:srgbClr val="282828"/>
-                          </a:solidFill>
-                          <a:latin typeface="Arial"/>
-                        </a:rPr>
-                        <a:t>same</a:t>
-                      </a:r>
-                    </a:p>
-                  </a:txBody>
-                  <a:tcPr marL="54864" marR="54864" marT="18288" marB="18288">
-                    <a:solidFill>
-                      <a:srgbClr val="ECF1F6"/>
-                    </a:solidFill>
-                  </a:tcPr>
-                </a:tc>
-                <a:tc>
-                  <a:txBody>
-                    <a:bodyPr wrap="square"/>
-                    <a:lstStyle/>
-                    <a:p>
-                      <a:r>
-                        <a:rPr sz="1100" b="0">
-                          <a:solidFill>
-                            <a:srgbClr val="282828"/>
-                          </a:solidFill>
-                          <a:latin typeface="Arial"/>
-                        </a:rPr>
-                        <a:t>same</a:t>
-                      </a:r>
-                    </a:p>
-                  </a:txBody>
-                  <a:tcPr marL="54864" marR="54864" marT="18288" marB="18288">
-                    <a:solidFill>
-                      <a:srgbClr val="ECF1F6"/>
-                    </a:solidFill>
-                  </a:tcPr>
-                </a:tc>
-                <a:tc>
-                  <a:txBody>
-                    <a:bodyPr wrap="square"/>
-                    <a:lstStyle/>
-                    <a:p>
-                      <a:r>
-                        <a:rPr sz="1100" b="0">
-                          <a:solidFill>
-                            <a:srgbClr val="282828"/>
-                          </a:solidFill>
-                          <a:latin typeface="Arial"/>
-                        </a:rPr>
-                        <a:t>0.25–1 Mpx, ~0.5 Gb/s; per-pixel solve ∝ pixels</a:t>
-                      </a:r>
-                    </a:p>
-                  </a:txBody>
-                  <a:tcPr marL="54864" marR="54864" marT="18288" marB="18288">
-                    <a:solidFill>
-                      <a:srgbClr val="ECF1F6"/>
-                    </a:solidFill>
-                  </a:tcPr>
-                </a:tc>
-                <a:tc>
-                  <a:txBody>
-                    <a:bodyPr wrap="square"/>
-                    <a:lstStyle/>
-                    <a:p>
-                      <a:r>
-                        <a:rPr sz="1100" b="0">
-                          <a:solidFill>
-                            <a:srgbClr val="282828"/>
-                          </a:solidFill>
-                          <a:latin typeface="Arial"/>
-                        </a:rPr>
-                        <a:t>✓ 1k²</a:t>
-                      </a:r>
-                    </a:p>
-                  </a:txBody>
-                  <a:tcPr marL="54864" marR="54864" marT="18288" marB="18288">
-                    <a:solidFill>
-                      <a:srgbClr val="ECF1F6"/>
-                    </a:solidFill>
-                  </a:tcPr>
-                </a:tc>
-                <a:tc>
-                  <a:txBody>
-                    <a:bodyPr wrap="square"/>
-                    <a:lstStyle/>
-                    <a:p>
-                      <a:r>
-                        <a:rPr sz="1100" b="0">
-                          <a:solidFill>
-                            <a:srgbClr val="282828"/>
-                          </a:solidFill>
-                          <a:latin typeface="Arial"/>
-                        </a:rPr>
-                        <a:t>✓ two images per pol. camera</a:t>
-                      </a:r>
-                    </a:p>
-                  </a:txBody>
-                  <a:tcPr marL="54864" marR="54864" marT="18288" marB="18288">
-                    <a:solidFill>
-                      <a:srgbClr val="ECF1F6"/>
-                    </a:solidFill>
-                  </a:tcPr>
-                </a:tc>
-                <a:tc>
-                  <a:txBody>
-                    <a:bodyPr wrap="square"/>
-                    <a:lstStyle/>
-                    <a:p>
-                      <a:r>
-                        <a:rPr sz="1100" b="0">
-                          <a:solidFill>
-                            <a:srgbClr val="282828"/>
-                          </a:solidFill>
-                          <a:latin typeface="Arial"/>
-                        </a:rPr>
-                        <a:t>Feng 9.4; C4M 10.6</a:t>
-                      </a:r>
-                    </a:p>
-                  </a:txBody>
-                  <a:tcPr marL="54864" marR="54864" marT="18288" marB="18288">
-                    <a:solidFill>
-                      <a:srgbClr val="ECF1F6"/>
-                    </a:solidFill>
-                  </a:tcPr>
-                </a:tc>
-              </a:tr>
-              <a:tr h="468630">
-                <a:tc>
-                  <a:txBody>
-                    <a:bodyPr wrap="square"/>
-                    <a:lstStyle/>
-                    <a:p>
-                      <a:r>
-                        <a:rPr sz="1100" b="0">
-                          <a:solidFill>
-                            <a:srgbClr val="282828"/>
-                          </a:solidFill>
-                          <a:latin typeface="Arial"/>
-                        </a:rPr>
-                        <a:t>20</a:t>
-                      </a:r>
-                    </a:p>
-                  </a:txBody>
-                  <a:tcPr marL="54864" marR="54864" marT="18288" marB="18288">
-                    <a:solidFill>
-                      <a:srgbClr val="FFFFFF"/>
-                    </a:solidFill>
-                  </a:tcPr>
-                </a:tc>
-                <a:tc>
-                  <a:txBody>
-                    <a:bodyPr wrap="square"/>
-                    <a:lstStyle/>
-                    <a:p>
-                      <a:r>
-                        <a:rPr sz="1100" b="0">
-                          <a:solidFill>
-                            <a:srgbClr val="282828"/>
-                          </a:solidFill>
-                          <a:latin typeface="Arial"/>
-                        </a:rPr>
-                        <a:t>no gauge gain; read noise per sample ↑ (binning restores it)</a:t>
-                      </a:r>
-                    </a:p>
-                  </a:txBody>
-                  <a:tcPr marL="54864" marR="54864" marT="18288" marB="18288">
-                    <a:solidFill>
-                      <a:srgbClr val="FFFFFF"/>
-                    </a:solidFill>
-                  </a:tcPr>
-                </a:tc>
-                <a:tc>
-                  <a:txBody>
-                    <a:bodyPr wrap="square"/>
-                    <a:lstStyle/>
-                    <a:p>
-                      <a:r>
-                        <a:rPr sz="1100" b="0">
-                          <a:solidFill>
-                            <a:srgbClr val="282828"/>
-                          </a:solidFill>
-                          <a:latin typeface="Arial"/>
-                        </a:rPr>
-                        <a:t>same</a:t>
-                      </a:r>
-                    </a:p>
-                  </a:txBody>
-                  <a:tcPr marL="54864" marR="54864" marT="18288" marB="18288">
-                    <a:solidFill>
-                      <a:srgbClr val="FFFFFF"/>
-                    </a:solidFill>
-                  </a:tcPr>
-                </a:tc>
-                <a:tc>
-                  <a:txBody>
-                    <a:bodyPr wrap="square"/>
-                    <a:lstStyle/>
-                    <a:p>
-                      <a:r>
-                        <a:rPr sz="1100" b="0">
-                          <a:solidFill>
-                            <a:srgbClr val="282828"/>
-                          </a:solidFill>
-                          <a:latin typeface="Arial"/>
-                        </a:rPr>
-                        <a:t>same</a:t>
-                      </a:r>
-                    </a:p>
-                  </a:txBody>
-                  <a:tcPr marL="54864" marR="54864" marT="18288" marB="18288">
-                    <a:solidFill>
-                      <a:srgbClr val="FFFFFF"/>
-                    </a:solidFill>
-                  </a:tcPr>
-                </a:tc>
-                <a:tc>
-                  <a:txBody>
-                    <a:bodyPr wrap="square"/>
-                    <a:lstStyle/>
-                    <a:p>
-                      <a:r>
-                        <a:rPr sz="1100" b="0">
-                          <a:solidFill>
-                            <a:srgbClr val="282828"/>
-                          </a:solidFill>
-                          <a:latin typeface="Arial"/>
-                        </a:rPr>
-                        <a:t>5 Mpx, 2–5 Gb/s</a:t>
-                      </a:r>
-                    </a:p>
-                  </a:txBody>
-                  <a:tcPr marL="54864" marR="54864" marT="18288" marB="18288">
-                    <a:solidFill>
-                      <a:srgbClr val="FFFFFF"/>
-                    </a:solidFill>
-                  </a:tcPr>
-                </a:tc>
-                <a:tc>
-                  <a:txBody>
-                    <a:bodyPr wrap="square"/>
-                    <a:lstStyle/>
-                    <a:p>
-                      <a:r>
-                        <a:rPr sz="1100" b="0">
-                          <a:solidFill>
-                            <a:srgbClr val="282828"/>
-                          </a:solidFill>
-                          <a:latin typeface="Arial"/>
-                        </a:rPr>
-                        <a:t>pco.edge class</a:t>
-                      </a:r>
-                    </a:p>
-                  </a:txBody>
-                  <a:tcPr marL="54864" marR="54864" marT="18288" marB="18288">
-                    <a:solidFill>
-                      <a:srgbClr val="FFFFFF"/>
-                    </a:solidFill>
-                  </a:tcPr>
-                </a:tc>
-                <a:tc>
-                  <a:txBody>
-                    <a:bodyPr wrap="square"/>
-                    <a:lstStyle/>
-                    <a:p>
-                      <a:r>
-                        <a:rPr sz="1100" b="0">
-                          <a:solidFill>
-                            <a:srgbClr val="282828"/>
-                          </a:solidFill>
-                          <a:latin typeface="Arial"/>
-                        </a:rPr>
-                        <a:t>—</a:t>
-                      </a:r>
-                    </a:p>
-                  </a:txBody>
-                  <a:tcPr marL="54864" marR="54864" marT="18288" marB="18288">
-                    <a:solidFill>
-                      <a:srgbClr val="FFFFFF"/>
-                    </a:solidFill>
-                  </a:tcPr>
-                </a:tc>
-                <a:tc>
-                  <a:txBody>
-                    <a:bodyPr wrap="square"/>
-                    <a:lstStyle/>
-                    <a:p>
-                      <a:r>
-                        <a:rPr sz="1100" b="0">
-                          <a:solidFill>
-                            <a:srgbClr val="282828"/>
-                          </a:solidFill>
-                          <a:latin typeface="Arial"/>
-                        </a:rPr>
-                        <a:t>pco.edge GS 21</a:t>
-                      </a:r>
-                    </a:p>
-                  </a:txBody>
-                  <a:tcPr marL="54864" marR="54864" marT="18288" marB="18288">
-                    <a:solidFill>
-                      <a:srgbClr val="FFFFFF"/>
-                    </a:solidFill>
-                  </a:tcPr>
-                </a:tc>
-              </a:tr>
-            </a:tbl>
-          </a:graphicData>
-        </a:graphic>
-      </p:graphicFrame>
+        </p:nvPicPr>
+        <p:blipFill>
+          <a:blip r:embed="rId2"/>
+          <a:stretch>
+            <a:fillRect/>
+          </a:stretch>
+        </p:blipFill>
+        <p:spPr>
+          <a:xfrm>
+            <a:off x="2756478" y="1298448"/>
+            <a:ext cx="6678737" cy="2897632"/>
+          </a:xfrm>
+          <a:prstGeom prst="rect">
+            <a:avLst/>
+          </a:prstGeom>
+        </p:spPr>
+      </p:pic>
       <p:sp>
         <p:nvSpPr>
           <p:cNvPr id="5" name="TextBox 4"/>
@@ -11895,8 +10819,8 @@
         </p:nvSpPr>
         <p:spPr>
           <a:xfrm>
-            <a:off x="411480" y="4256532"/>
-            <a:ext cx="11368735" cy="274320"/>
+            <a:off x="411480" y="4214368"/>
+            <a:ext cx="11368735" cy="394208"/>
           </a:xfrm>
           <a:prstGeom prst="rect">
             <a:avLst/>
@@ -11909,96 +10833,19 @@
           </a:bodyPr>
           <a:lstStyle/>
           <a:p>
-            <a:pPr>
+            <a:pPr algn="ctr">
               <a:spcAft>
-                <a:spcPts val="600"/>
+                <a:spcPts val="0"/>
               </a:spcAft>
             </a:pPr>
             <a:r>
-              <a:rPr sz="1500" b="0">
-                <a:solidFill>
-                  <a:srgbClr val="282828"/>
-                </a:solidFill>
-                <a:latin typeface="Arial"/>
-              </a:rPr>
-              <a:t>•  </a:t>
-            </a:r>
-            <a:r>
-              <a:rPr sz="1500" b="1">
-                <a:solidFill>
-                  <a:srgbClr val="282828"/>
-                </a:solidFill>
-                <a:latin typeface="Arial"/>
-              </a:rPr>
-              <a:t>Measured vs inferred:</a:t>
-            </a:r>
-            <a:r>
-              <a:rPr sz="1500" b="0">
-                <a:solidFill>
-                  <a:srgbClr val="282828"/>
-                </a:solidFill>
-                <a:latin typeface="Arial"/>
-              </a:rPr>
-              <a:t> every record is at 3.3–4 px per actuator (the IFO's mirror-rig image, distorted by more than a pitch at the edge, still reads to 2 pm); the collapse band is the blur demo's; the 5–20 rows follow from the well-bound photon rule and the data rates.</a:t>
-            </a:r>
-          </a:p>
-          <a:p>
-            <a:pPr marL="594360" indent="-137160">
-              <a:spcAft>
-                <a:spcPts val="500"/>
-              </a:spcAft>
-            </a:pPr>
-            <a:r>
-              <a:rPr sz="1300" b="0">
+              <a:rPr sz="1000" b="0">
                 <a:solidFill>
                   <a:srgbClr val="6E6E6E"/>
                 </a:solidFill>
                 <a:latin typeface="Arial"/>
               </a:rPr>
-              <a:t>–  </a:t>
-            </a:r>
-            <a:r>
-              <a:rPr sz="1300" b="1">
-                <a:solidFill>
-                  <a:srgbClr val="6E6E6E"/>
-                </a:solidFill>
-                <a:latin typeface="Arial"/>
-              </a:rPr>
-              <a:t>a per-gauge sweep at 1, 1.5, 2 and 4 px per actuator is running now</a:t>
-            </a:r>
-          </a:p>
-          <a:p>
-            <a:pPr marL="0" indent="0">
-              <a:spcAft>
-                <a:spcPts val="600"/>
-              </a:spcAft>
-            </a:pPr>
-            <a:r>
-              <a:rPr sz="1500" b="0">
-                <a:solidFill>
-                  <a:srgbClr val="282828"/>
-                </a:solidFill>
-                <a:latin typeface="Arial"/>
-              </a:rPr>
-              <a:t>•  </a:t>
-            </a:r>
-            <a:r>
-              <a:rPr sz="1500" b="1">
-                <a:solidFill>
-                  <a:srgbClr val="282828"/>
-                </a:solidFill>
-                <a:latin typeface="Arial"/>
-              </a:rPr>
-              <a:t>Where the three differ:</a:t>
-            </a:r>
-            <a:r>
-              <a:rPr sz="1500" b="0">
-                <a:solidFill>
-                  <a:srgbClr val="282828"/>
-                </a:solidFill>
-                <a:latin typeface="Arial"/>
-              </a:rPr>
-              <a:t> the IFO and HET read against a reference and are indifferent above 2 px; the vector ZWFS solves pixel by pixel from two images, wants ≥ 4, and pays processing for more; the lock-in fixes HET's sampling at the device (5.3 / 10.6) with the processing on-chip.  Regularization and calibration do not change with pixel count above 2.</a:t>
+              <a:t>Left: noise-only hold at each sensor's own loop cycle; right: averaging time to 1 pm per actuator — both vs camera pixels per actuator pitch, one line per reading; shaded = the single-actuator row fails; hollow = the ZWFS on a point-sampled grid, not camera pixels.</a:t>
             </a:r>
           </a:p>
         </p:txBody>
@@ -12011,8 +10858,8 @@
         </p:nvSpPr>
         <p:spPr>
           <a:xfrm>
-            <a:off x="411480" y="6401562"/>
-            <a:ext cx="11368735" cy="274320"/>
+            <a:off x="411480" y="4645152"/>
+            <a:ext cx="5806440" cy="274320"/>
           </a:xfrm>
           <a:prstGeom prst="rect">
             <a:avLst/>
@@ -12031,13 +10878,211 @@
               </a:spcAft>
             </a:pPr>
             <a:r>
+              <a:rPr sz="1200" b="0">
+                <a:solidFill>
+                  <a:srgbClr val="282828"/>
+                </a:solidFill>
+                <a:latin typeface="Arial"/>
+              </a:rPr>
+              <a:t>•  </a:t>
+            </a:r>
+            <a:r>
+              <a:rPr sz="1200" b="1">
+                <a:solidFill>
+                  <a:srgbClr val="282828"/>
+                </a:solidFill>
+                <a:latin typeface="Arial"/>
+              </a:rPr>
+              <a:t>1 px per actuator fails every reading the same way:</a:t>
+            </a:r>
+            <a:r>
+              <a:rPr sz="1200" b="0">
+                <a:solidFill>
+                  <a:srgbClr val="282828"/>
+                </a:solidFill>
+                <a:latin typeface="Arial"/>
+              </a:rPr>
+              <a:t> single-actuator floor 13–32 pm (from 1.2–2.6), converged gain off 0.4–0.5 %; the "wrong actuator" never happens — the fit degrades, it does not swap.</a:t>
+            </a:r>
+          </a:p>
+          <a:p>
+            <a:pPr>
+              <a:spcAft>
+                <a:spcPts val="600"/>
+              </a:spcAft>
+            </a:pPr>
+            <a:r>
+              <a:rPr sz="1200" b="0">
+                <a:solidFill>
+                  <a:srgbClr val="282828"/>
+                </a:solidFill>
+                <a:latin typeface="Arial"/>
+              </a:rPr>
+              <a:t>•  </a:t>
+            </a:r>
+            <a:r>
+              <a:rPr sz="1200" b="1">
+                <a:solidFill>
+                  <a:srgbClr val="282828"/>
+                </a:solidFill>
+                <a:latin typeface="Arial"/>
+              </a:rPr>
+              <a:t>1.5–2 px holds but pays in time:</a:t>
+            </a:r>
+            <a:r>
+              <a:rPr sz="1200" b="0">
+                <a:solidFill>
+                  <a:srgbClr val="282828"/>
+                </a:solidFill>
+                <a:latin typeface="Arial"/>
+              </a:rPr>
+              <a:t> HET 69–74 s per pm against 36 at 3.3 (Photonfocus); IFO 266–302 against 161; vector ZWFS 1040–1150 against 639 — 1.6–2×, because a coarser pixel INTEGRATES the fringe (the point-sampled ZWFS at 1.65, hollow, costs nothing).</a:t>
+            </a:r>
+          </a:p>
+        </p:txBody>
+      </p:sp>
+      <p:sp>
+        <p:nvSpPr>
+          <p:cNvPr id="7" name="TextBox 6"/>
+          <p:cNvSpPr txBox="1"/>
+          <p:nvPr/>
+        </p:nvSpPr>
+        <p:spPr>
+          <a:xfrm>
+            <a:off x="6400800" y="4645152"/>
+            <a:ext cx="5394960" cy="274320"/>
+          </a:xfrm>
+          <a:prstGeom prst="rect">
+            <a:avLst/>
+          </a:prstGeom>
+          <a:noFill/>
+        </p:spPr>
+        <p:txBody>
+          <a:bodyPr wrap="square">
+            <a:spAutoFit/>
+          </a:bodyPr>
+          <a:lstStyle/>
+          <a:p>
+            <a:pPr>
+              <a:spcAft>
+                <a:spcPts val="600"/>
+              </a:spcAft>
+            </a:pPr>
+            <a:r>
+              <a:rPr sz="1200" b="0">
+                <a:solidFill>
+                  <a:srgbClr val="282828"/>
+                </a:solidFill>
+                <a:latin typeface="Arial"/>
+              </a:rPr>
+              <a:t>•  </a:t>
+            </a:r>
+            <a:r>
+              <a:rPr sz="1200" b="1">
+                <a:solidFill>
+                  <a:srgbClr val="282828"/>
+                </a:solidFill>
+                <a:latin typeface="Arial"/>
+              </a:rPr>
+              <a:t>Above 3.3 px nothing changes</a:t>
+            </a:r>
+            <a:r>
+              <a:rPr sz="1200" b="0">
+                <a:solidFill>
+                  <a:srgbClr val="282828"/>
+                </a:solidFill>
+                <a:latin typeface="Arial"/>
+              </a:rPr>
+              <a:t> (4 = 3.3 to the digit); the records at 3.3 stand.</a:t>
+            </a:r>
+          </a:p>
+          <a:p>
+            <a:pPr marL="594360" indent="-137160">
+              <a:spcAft>
+                <a:spcPts val="500"/>
+              </a:spcAft>
+            </a:pPr>
+            <a:r>
               <a:rPr sz="1050" b="0">
                 <a:solidFill>
                   <a:srgbClr val="6E6E6E"/>
                 </a:solidFill>
                 <a:latin typeface="Arial"/>
               </a:rPr>
-              <a:t>Blur demo (pupil_blur_demo, REPORT_pupil_blur); gauge deck (IFO, vZWFS); stages noise and format (HET); ruling 6 (2026-10-11).  Data rates: pixels × 16 bit × frame rate.</a:t>
+              <a:t>–  registration: a ±0.1-pitch shift after calibration costs gain 0.95 and a 16–18 pm floor at EVERY sampling ≥ 1.5 — the camera must stay registered to ~0.03 pitch, whatever the pixel count</a:t>
+            </a:r>
+          </a:p>
+          <a:p>
+            <a:pPr marL="0" indent="0">
+              <a:spcAft>
+                <a:spcPts val="600"/>
+              </a:spcAft>
+            </a:pPr>
+            <a:r>
+              <a:rPr sz="1200" b="0">
+                <a:solidFill>
+                  <a:srgbClr val="282828"/>
+                </a:solidFill>
+                <a:latin typeface="Arial"/>
+              </a:rPr>
+              <a:t>•  </a:t>
+            </a:r>
+            <a:r>
+              <a:rPr sz="1200" b="1">
+                <a:solidFill>
+                  <a:srgbClr val="282828"/>
+                </a:solidFill>
+                <a:latin typeface="Arial"/>
+              </a:rPr>
+              <a:t>The lock-in's advantage survives the sweep:</a:t>
+            </a:r>
+            <a:r>
+              <a:rPr sz="1200" b="0">
+                <a:solidFill>
+                  <a:srgbClr val="282828"/>
+                </a:solidFill>
+                <a:latin typeface="Arial"/>
+              </a:rPr>
+              <a:t> 3.4 / 5.4 / 6.3 s per pm at 3.3 / 2 / 1.5 px, holding 3.1 / 4.0 / 4.3 pm at 0.125 s cycles — 10× the Photonfocus at every sampling.</a:t>
+            </a:r>
+          </a:p>
+        </p:txBody>
+      </p:sp>
+      <p:sp>
+        <p:nvSpPr>
+          <p:cNvPr id="8" name="TextBox 7"/>
+          <p:cNvSpPr txBox="1"/>
+          <p:nvPr/>
+        </p:nvSpPr>
+        <p:spPr>
+          <a:xfrm>
+            <a:off x="6400800" y="6600317"/>
+            <a:ext cx="5394960" cy="274320"/>
+          </a:xfrm>
+          <a:prstGeom prst="rect">
+            <a:avLst/>
+          </a:prstGeom>
+          <a:noFill/>
+        </p:spPr>
+        <p:txBody>
+          <a:bodyPr wrap="square">
+            <a:spAutoFit/>
+          </a:bodyPr>
+          <a:lstStyle/>
+          <a:p>
+            <a:pPr>
+              <a:spcAft>
+                <a:spcPts val="600"/>
+              </a:spcAft>
+            </a:pPr>
+            <a:r>
+              <a:rPr sz="1050" b="0">
+                <a:solidFill>
+                  <a:srgbClr val="6E6E6E"/>
+                </a:solidFill>
+                <a:latin typeface="Arial"/>
+              </a:rPr>
+              <a:t>ressweep_run / ressweep_zrun / ressweep_figs (cophi_dm96/runs/ressweep_*, TO 2026-10-13); mechanism dmg_camres (frames box-integrated onto camera pixels, the matrix measured through them); gate tResolutionSweep 7/7.</a:t>
             </a:r>
           </a:p>
         </p:txBody>
@@ -12169,7 +11214,7 @@
         </p:nvGraphicFramePr>
         <p:xfrm>
           <a:off x="411480" y="1298448"/>
-          <a:ext cx="11368734" cy="4034790"/>
+          <a:ext cx="11368734" cy="4223385"/>
         </p:xfrm>
         <a:graphic>
           <a:graphicData uri="http://schemas.openxmlformats.org/drawingml/2006/table">
@@ -12510,7 +11555,7 @@
                   </a:tcPr>
                 </a:tc>
               </a:tr>
-              <a:tr h="468630">
+              <a:tr h="657225">
                 <a:tc>
                   <a:txBody>
                     <a:bodyPr wrap="square"/>
@@ -12611,7 +11656,7 @@
                           </a:solidFill>
                           <a:latin typeface="Arial"/>
                         </a:rPr>
-                        <a:t>3.35 / 3.73 (×1.11 square-wave)</a:t>
+                        <a:t>3.35 / 3.73 (×1.23 in time for two-tap demodulation)</a:t>
                       </a:r>
                     </a:p>
                   </a:txBody>
@@ -13996,7 +13041,7 @@
                 </a:solidFill>
                 <a:latin typeface="Arial"/>
               </a:rPr>
-              <a:t> the lens rig's +0.1–0.2 % converged gain (a matrix-model term); the per-gauge resolution sweep (slide 18); the polarization-camera timings through the noise hook (slide 17).</a:t>
+              <a:t> the lens rig's +0.1–0.2 % converged gain (a matrix-model term); the polarization-camera timings through the noise hook (slide 17); the lock-in's demodulation form from the vendor (two-tap square-wave assumed).</a:t>
             </a:r>
           </a:p>
           <a:p>
@@ -14043,7 +13088,7 @@
         </p:nvSpPr>
         <p:spPr>
           <a:xfrm>
-            <a:off x="6400800" y="3002280"/>
+            <a:off x="6400800" y="3200400"/>
             <a:ext cx="5394960" cy="274320"/>
           </a:xfrm>
           <a:prstGeom prst="rect">
@@ -18397,6 +17442,22 @@
             </a:r>
           </a:p>
           <a:p>
+            <a:pPr marL="594360" indent="-137160">
+              <a:spcAft>
+                <a:spcPts val="500"/>
+              </a:spcAft>
+            </a:pPr>
+            <a:r>
+              <a:rPr sz="1250" b="0">
+                <a:solidFill>
+                  <a:srgbClr val="6E6E6E"/>
+                </a:solidFill>
+                <a:latin typeface="Arial"/>
+              </a:rPr>
+              <a:t>–  a real lock-in pixel (CSEM lineage, heliCam) steers charge between two taps by a square-wave reference — Feng's four-step inside the pixel; the bucket penalty is ×1.11 in σ, carried in every lock-in row</a:t>
+            </a:r>
+          </a:p>
+          <a:p>
             <a:pPr marL="0" indent="0">
               <a:spcAft>
                 <a:spcPts val="600"/>
@@ -18458,7 +17519,7 @@
         </p:nvGraphicFramePr>
         <p:xfrm>
           <a:off x="6400800" y="1298448"/>
-          <a:ext cx="5394959" cy="3646170"/>
+          <a:ext cx="5394959" cy="4160520"/>
         </p:xfrm>
         <a:graphic>
           <a:graphicData uri="http://schemas.openxmlformats.org/drawingml/2006/table">
@@ -18467,11 +17528,11 @@
                 <a:tableStyleId>{5C22544A-7EE6-4342-B048-85BDC9FD1C3A}</a:tableStyleId>
               </a:tblPr>
               <a:tblGrid>
-                <a:gridCol w="1604535"/>
-                <a:gridCol w="720878"/>
-                <a:gridCol w="3069546"/>
+                <a:gridCol w="1363561"/>
+                <a:gridCol w="612614"/>
+                <a:gridCol w="3418784"/>
               </a:tblGrid>
-              <a:tr h="605790">
+              <a:tr h="777240">
                 <a:tc>
                   <a:txBody>
                     <a:bodyPr wrap="square"/>
@@ -18811,7 +17872,7 @@
                   </a:tcPr>
                 </a:tc>
               </a:tr>
-              <a:tr h="605790">
+              <a:tr h="777240">
                 <a:tc>
                   <a:txBody>
                     <a:bodyPr wrap="square"/>
@@ -18868,7 +17929,7 @@
                           </a:solidFill>
                           <a:latin typeface="Arial"/>
                         </a:rPr>
-                        <a:t>3.35 / 3.73 (read 0, mirror / lens; 4.0 / 4.4 at read 100 assumed); ×1.11 for square-wave demodulation — well-capped at the I/Q rate</a:t>
+                        <a:t>3.35 / 3.73 (read 0, mirror / lens; 4.0 / 4.4 at read 100 assumed); ×1.11 in σ (×1.23 in time) for the pixel's two-tap square-wave demodulation — well-capped at the I/Q rate</a:t>
                       </a:r>
                     </a:p>
                   </a:txBody>
@@ -18879,7 +17940,7 @@
                   </a:tcPr>
                 </a:tc>
               </a:tr>
-              <a:tr h="605790">
+              <a:tr h="777240">
                 <a:tc>
                   <a:txBody>
                     <a:bodyPr wrap="square"/>

--- a/demo_session/deck_cophi_edit.pptx
+++ b/demo_session/deck_cophi_edit.pptx
@@ -19088,7 +19088,7 @@
         <p:spPr>
           <a:xfrm>
             <a:off x="411480" y="1298448"/>
-            <a:ext cx="5806440" cy="2120878"/>
+            <a:ext cx="5806440" cy="1906098"/>
           </a:xfrm>
           <a:prstGeom prst="rect">
             <a:avLst/>
@@ -19103,7 +19103,7 @@
         </p:nvSpPr>
         <p:spPr>
           <a:xfrm>
-            <a:off x="411480" y="3437614"/>
+            <a:off x="411480" y="3222834"/>
             <a:ext cx="5806440" cy="559307"/>
           </a:xfrm>
           <a:prstGeom prst="rect">
@@ -19142,7 +19142,7 @@
         </p:nvSpPr>
         <p:spPr>
           <a:xfrm>
-            <a:off x="411480" y="4033498"/>
+            <a:off x="411480" y="3818718"/>
             <a:ext cx="5806440" cy="274320"/>
           </a:xfrm>
           <a:prstGeom prst="rect">

--- a/demo_session/deck_cophi_edit.pptx
+++ b/demo_session/deck_cophi_edit.pptx
@@ -30,6 +30,7 @@
     <p:sldId id="278" r:id="rId29"/>
     <p:sldId id="279" r:id="rId30"/>
     <p:sldId id="280" r:id="rId31"/>
+    <p:sldId id="281" r:id="rId32"/>
   </p:sldIdLst>
   <p:sldSz cx="12191695" cy="6858000" type="screen4x3"/>
   <p:notesSz cx="6858000" cy="9144000"/>
@@ -3306,7 +3307,7 @@
                 </a:solidFill>
                 <a:latin typeface="Arial"/>
               </a:rPr>
-              <a:t>Resolution and timing, camera by camera</a:t>
+              <a:t>Reading the 30 nm working surface, station by station</a:t>
             </a:r>
           </a:p>
           <a:p>
@@ -3322,7 +3323,7 @@
                 </a:solidFill>
                 <a:latin typeface="Arial"/>
               </a:rPr>
-              <a:t>The model samples the pupil at 3.3 pixels per actuator; every camera on the table oversamples the 96 × 96 lattice, so resolution costs no photons — the time to a picometer is well depth × frame rate, not pixel count</a:t>
+              <a:t>The same mirror command through the heterodyne train on the mirror rig, plain splitter; the last column is the raw map against the engine's own field</a:t>
             </a:r>
           </a:p>
         </p:txBody>
@@ -3371,931 +3372,30 @@
           </a:p>
         </p:txBody>
       </p:sp>
-      <p:graphicFrame>
-        <p:nvGraphicFramePr>
-          <p:cNvPr id="4" name="Table 3"/>
-          <p:cNvGraphicFramePr>
-            <a:graphicFrameLocks noGrp="1"/>
-          </p:cNvGraphicFramePr>
+      <p:pic>
+        <p:nvPicPr>
+          <p:cNvPr id="4" name="Picture 3" descr="cophi_stations_oap.png"/>
+          <p:cNvPicPr>
+            <a:picLocks noChangeAspect="1"/>
+          </p:cNvPicPr>
           <p:nvPr/>
-        </p:nvGraphicFramePr>
-        <p:xfrm>
-          <a:off x="411480" y="1298448"/>
-          <a:ext cx="11368734" cy="3183255"/>
-        </p:xfrm>
-        <a:graphic>
-          <a:graphicData uri="http://schemas.openxmlformats.org/drawingml/2006/table">
-            <a:tbl>
-              <a:tblPr firstRow="1" bandRow="1">
-                <a:tableStyleId>{5C22544A-7EE6-4342-B048-85BDC9FD1C3A}</a:tableStyleId>
-              </a:tblPr>
-              <a:tblGrid>
-                <a:gridCol w="3484888"/>
-                <a:gridCol w="1313974"/>
-                <a:gridCol w="1771009"/>
-                <a:gridCol w="1771009"/>
-                <a:gridCol w="3027854"/>
-              </a:tblGrid>
-              <a:tr h="468630">
-                <a:tc>
-                  <a:txBody>
-                    <a:bodyPr wrap="square"/>
-                    <a:lstStyle/>
-                    <a:p>
-                      <a:r>
-                        <a:rPr sz="1100" b="1">
-                          <a:solidFill>
-                            <a:srgbClr val="FFFFFF"/>
-                          </a:solidFill>
-                          <a:latin typeface="Arial"/>
-                        </a:rPr>
-                        <a:t>sensor / camera</a:t>
-                      </a:r>
-                    </a:p>
-                  </a:txBody>
-                  <a:tcPr marL="54864" marR="54864" marT="18288" marB="18288">
-                    <a:solidFill>
-                      <a:srgbClr val="1F4E79"/>
-                    </a:solidFill>
-                  </a:tcPr>
-                </a:tc>
-                <a:tc>
-                  <a:txBody>
-                    <a:bodyPr wrap="square"/>
-                    <a:lstStyle/>
-                    <a:p>
-                      <a:r>
-                        <a:rPr sz="1100" b="1">
-                          <a:solidFill>
-                            <a:srgbClr val="FFFFFF"/>
-                          </a:solidFill>
-                          <a:latin typeface="Arial"/>
-                        </a:rPr>
-                        <a:t>pixels across the pupil</a:t>
-                      </a:r>
-                    </a:p>
-                  </a:txBody>
-                  <a:tcPr marL="54864" marR="54864" marT="18288" marB="18288">
-                    <a:solidFill>
-                      <a:srgbClr val="1F4E79"/>
-                    </a:solidFill>
-                  </a:tcPr>
-                </a:tc>
-                <a:tc>
-                  <a:txBody>
-                    <a:bodyPr wrap="square"/>
-                    <a:lstStyle/>
-                    <a:p>
-                      <a:r>
-                        <a:rPr sz="1100" b="1">
-                          <a:solidFill>
-                            <a:srgbClr val="FFFFFF"/>
-                          </a:solidFill>
-                          <a:latin typeface="Arial"/>
-                        </a:rPr>
-                        <a:t>pixels per actuator (96 across)</a:t>
-                      </a:r>
-                    </a:p>
-                  </a:txBody>
-                  <a:tcPr marL="54864" marR="54864" marT="18288" marB="18288">
-                    <a:solidFill>
-                      <a:srgbClr val="1F4E79"/>
-                    </a:solidFill>
-                  </a:tcPr>
-                </a:tc>
-                <a:tc>
-                  <a:txBody>
-                    <a:bodyPr wrap="square"/>
-                    <a:lstStyle/>
-                    <a:p>
-                      <a:r>
-                        <a:rPr sz="1100" b="1">
-                          <a:solidFill>
-                            <a:srgbClr val="FFFFFF"/>
-                          </a:solidFill>
-                          <a:latin typeface="Arial"/>
-                        </a:rPr>
-                        <a:t>pm per reading</a:t>
-                      </a:r>
-                    </a:p>
-                  </a:txBody>
-                  <a:tcPr marL="54864" marR="54864" marT="18288" marB="18288">
-                    <a:solidFill>
-                      <a:srgbClr val="1F4E79"/>
-                    </a:solidFill>
-                  </a:tcPr>
-                </a:tc>
-                <a:tc>
-                  <a:txBody>
-                    <a:bodyPr wrap="square"/>
-                    <a:lstStyle/>
-                    <a:p>
-                      <a:r>
-                        <a:rPr sz="1100" b="1">
-                          <a:solidFill>
-                            <a:srgbClr val="FFFFFF"/>
-                          </a:solidFill>
-                          <a:latin typeface="Arial"/>
-                        </a:rPr>
-                        <a:t>seconds per pm (SNR 1 at 1 pm)</a:t>
-                      </a:r>
-                    </a:p>
-                  </a:txBody>
-                  <a:tcPr marL="54864" marR="54864" marT="18288" marB="18288">
-                    <a:solidFill>
-                      <a:srgbClr val="1F4E79"/>
-                    </a:solidFill>
-                  </a:tcPr>
-                </a:tc>
-              </a:tr>
-              <a:tr h="468630">
-                <a:tc>
-                  <a:txBody>
-                    <a:bodyPr wrap="square"/>
-                    <a:lstStyle/>
-                    <a:p>
-                      <a:r>
-                        <a:rPr sz="1100" b="0">
-                          <a:solidFill>
-                            <a:srgbClr val="282828"/>
-                          </a:solidFill>
-                          <a:latin typeface="Arial"/>
-                        </a:rPr>
-                        <a:t>the model's grid (both rigs, 1024 grid; the station figure)</a:t>
-                      </a:r>
-                    </a:p>
-                  </a:txBody>
-                  <a:tcPr marL="54864" marR="54864" marT="18288" marB="18288">
-                    <a:solidFill>
-                      <a:srgbClr val="FFFFFF"/>
-                    </a:solidFill>
-                  </a:tcPr>
-                </a:tc>
-                <a:tc>
-                  <a:txBody>
-                    <a:bodyPr wrap="square"/>
-                    <a:lstStyle/>
-                    <a:p>
-                      <a:r>
-                        <a:rPr sz="1100" b="0">
-                          <a:solidFill>
-                            <a:srgbClr val="282828"/>
-                          </a:solidFill>
-                          <a:latin typeface="Arial"/>
-                        </a:rPr>
-                        <a:t>315</a:t>
-                      </a:r>
-                    </a:p>
-                  </a:txBody>
-                  <a:tcPr marL="54864" marR="54864" marT="18288" marB="18288">
-                    <a:solidFill>
-                      <a:srgbClr val="FFFFFF"/>
-                    </a:solidFill>
-                  </a:tcPr>
-                </a:tc>
-                <a:tc>
-                  <a:txBody>
-                    <a:bodyPr wrap="square"/>
-                    <a:lstStyle/>
-                    <a:p>
-                      <a:r>
-                        <a:rPr sz="1100" b="0">
-                          <a:solidFill>
-                            <a:srgbClr val="282828"/>
-                          </a:solidFill>
-                          <a:latin typeface="Arial"/>
-                        </a:rPr>
-                        <a:t>3.3</a:t>
-                      </a:r>
-                    </a:p>
-                  </a:txBody>
-                  <a:tcPr marL="54864" marR="54864" marT="18288" marB="18288">
-                    <a:solidFill>
-                      <a:srgbClr val="FFFFFF"/>
-                    </a:solidFill>
-                  </a:tcPr>
-                </a:tc>
-                <a:tc>
-                  <a:txBody>
-                    <a:bodyPr wrap="square"/>
-                    <a:lstStyle/>
-                    <a:p>
-                      <a:r>
-                        <a:rPr sz="1100" b="0">
-                          <a:solidFill>
-                            <a:srgbClr val="282828"/>
-                          </a:solidFill>
-                          <a:latin typeface="Arial"/>
-                        </a:rPr>
-                        <a:t>—</a:t>
-                      </a:r>
-                    </a:p>
-                  </a:txBody>
-                  <a:tcPr marL="54864" marR="54864" marT="18288" marB="18288">
-                    <a:solidFill>
-                      <a:srgbClr val="FFFFFF"/>
-                    </a:solidFill>
-                  </a:tcPr>
-                </a:tc>
-                <a:tc>
-                  <a:txBody>
-                    <a:bodyPr wrap="square"/>
-                    <a:lstStyle/>
-                    <a:p>
-                      <a:r>
-                        <a:rPr sz="1100" b="0">
-                          <a:solidFill>
-                            <a:srgbClr val="282828"/>
-                          </a:solidFill>
-                          <a:latin typeface="Arial"/>
-                        </a:rPr>
-                        <a:t>—</a:t>
-                      </a:r>
-                    </a:p>
-                  </a:txBody>
-                  <a:tcPr marL="54864" marR="54864" marT="18288" marB="18288">
-                    <a:solidFill>
-                      <a:srgbClr val="FFFFFF"/>
-                    </a:solidFill>
-                  </a:tcPr>
-                </a:tc>
-              </a:tr>
-              <a:tr h="280035">
-                <a:tc>
-                  <a:txBody>
-                    <a:bodyPr wrap="square"/>
-                    <a:lstStyle/>
-                    <a:p>
-                      <a:r>
-                        <a:rPr sz="1100" b="0">
-                          <a:solidFill>
-                            <a:srgbClr val="282828"/>
-                          </a:solidFill>
-                          <a:latin typeface="Arial"/>
-                        </a:rPr>
-                        <a:t>COPHI, Feng's camera, 1k², 60 ke, 30 fps</a:t>
-                      </a:r>
-                    </a:p>
-                  </a:txBody>
-                  <a:tcPr marL="54864" marR="54864" marT="18288" marB="18288">
-                    <a:solidFill>
-                      <a:srgbClr val="ECF1F6"/>
-                    </a:solidFill>
-                  </a:tcPr>
-                </a:tc>
-                <a:tc>
-                  <a:txBody>
-                    <a:bodyPr wrap="square"/>
-                    <a:lstStyle/>
-                    <a:p>
-                      <a:r>
-                        <a:rPr sz="1100" b="0">
-                          <a:solidFill>
-                            <a:srgbClr val="282828"/>
-                          </a:solidFill>
-                          <a:latin typeface="Arial"/>
-                        </a:rPr>
-                        <a:t>~900</a:t>
-                      </a:r>
-                    </a:p>
-                  </a:txBody>
-                  <a:tcPr marL="54864" marR="54864" marT="18288" marB="18288">
-                    <a:solidFill>
-                      <a:srgbClr val="ECF1F6"/>
-                    </a:solidFill>
-                  </a:tcPr>
-                </a:tc>
-                <a:tc>
-                  <a:txBody>
-                    <a:bodyPr wrap="square"/>
-                    <a:lstStyle/>
-                    <a:p>
-                      <a:r>
-                        <a:rPr sz="1100" b="0">
-                          <a:solidFill>
-                            <a:srgbClr val="282828"/>
-                          </a:solidFill>
-                          <a:latin typeface="Arial"/>
-                        </a:rPr>
-                        <a:t>9.4</a:t>
-                      </a:r>
-                    </a:p>
-                  </a:txBody>
-                  <a:tcPr marL="54864" marR="54864" marT="18288" marB="18288">
-                    <a:solidFill>
-                      <a:srgbClr val="ECF1F6"/>
-                    </a:solidFill>
-                  </a:tcPr>
-                </a:tc>
-                <a:tc>
-                  <a:txBody>
-                    <a:bodyPr wrap="square"/>
-                    <a:lstStyle/>
-                    <a:p>
-                      <a:r>
-                        <a:rPr sz="1100" b="0">
-                          <a:solidFill>
-                            <a:srgbClr val="282828"/>
-                          </a:solidFill>
-                          <a:latin typeface="Arial"/>
-                        </a:rPr>
-                        <a:t>57.7 / 53.7</a:t>
-                      </a:r>
-                    </a:p>
-                  </a:txBody>
-                  <a:tcPr marL="54864" marR="54864" marT="18288" marB="18288">
-                    <a:solidFill>
-                      <a:srgbClr val="ECF1F6"/>
-                    </a:solidFill>
-                  </a:tcPr>
-                </a:tc>
-                <a:tc>
-                  <a:txBody>
-                    <a:bodyPr wrap="square"/>
-                    <a:lstStyle/>
-                    <a:p>
-                      <a:r>
-                        <a:rPr sz="1100" b="0">
-                          <a:solidFill>
-                            <a:srgbClr val="282828"/>
-                          </a:solidFill>
-                          <a:latin typeface="Arial"/>
-                        </a:rPr>
-                        <a:t>443 / 385 (≈ 7 min)</a:t>
-                      </a:r>
-                    </a:p>
-                  </a:txBody>
-                  <a:tcPr marL="54864" marR="54864" marT="18288" marB="18288">
-                    <a:solidFill>
-                      <a:srgbClr val="ECF1F6"/>
-                    </a:solidFill>
-                  </a:tcPr>
-                </a:tc>
-              </a:tr>
-              <a:tr h="280035">
-                <a:tc>
-                  <a:txBody>
-                    <a:bodyPr wrap="square"/>
-                    <a:lstStyle/>
-                    <a:p>
-                      <a:r>
-                        <a:rPr sz="1100" b="0">
-                          <a:solidFill>
-                            <a:srgbClr val="282828"/>
-                          </a:solidFill>
-                          <a:latin typeface="Arial"/>
-                        </a:rPr>
-                        <a:t>COPHI, Photonfocus 1024², 200 ke, 150 fps</a:t>
-                      </a:r>
-                    </a:p>
-                  </a:txBody>
-                  <a:tcPr marL="54864" marR="54864" marT="18288" marB="18288">
-                    <a:solidFill>
-                      <a:srgbClr val="FFFFFF"/>
-                    </a:solidFill>
-                  </a:tcPr>
-                </a:tc>
-                <a:tc>
-                  <a:txBody>
-                    <a:bodyPr wrap="square"/>
-                    <a:lstStyle/>
-                    <a:p>
-                      <a:r>
-                        <a:rPr sz="1100" b="0">
-                          <a:solidFill>
-                            <a:srgbClr val="282828"/>
-                          </a:solidFill>
-                          <a:latin typeface="Arial"/>
-                        </a:rPr>
-                        <a:t>~900</a:t>
-                      </a:r>
-                    </a:p>
-                  </a:txBody>
-                  <a:tcPr marL="54864" marR="54864" marT="18288" marB="18288">
-                    <a:solidFill>
-                      <a:srgbClr val="FFFFFF"/>
-                    </a:solidFill>
-                  </a:tcPr>
-                </a:tc>
-                <a:tc>
-                  <a:txBody>
-                    <a:bodyPr wrap="square"/>
-                    <a:lstStyle/>
-                    <a:p>
-                      <a:r>
-                        <a:rPr sz="1100" b="0">
-                          <a:solidFill>
-                            <a:srgbClr val="282828"/>
-                          </a:solidFill>
-                          <a:latin typeface="Arial"/>
-                        </a:rPr>
-                        <a:t>9.4</a:t>
-                      </a:r>
-                    </a:p>
-                  </a:txBody>
-                  <a:tcPr marL="54864" marR="54864" marT="18288" marB="18288">
-                    <a:solidFill>
-                      <a:srgbClr val="FFFFFF"/>
-                    </a:solidFill>
-                  </a:tcPr>
-                </a:tc>
-                <a:tc>
-                  <a:txBody>
-                    <a:bodyPr wrap="square"/>
-                    <a:lstStyle/>
-                    <a:p>
-                      <a:r>
-                        <a:rPr sz="1100" b="0">
-                          <a:solidFill>
-                            <a:srgbClr val="282828"/>
-                          </a:solidFill>
-                          <a:latin typeface="Arial"/>
-                        </a:rPr>
-                        <a:t>39.5 / 36.5</a:t>
-                      </a:r>
-                    </a:p>
-                  </a:txBody>
-                  <a:tcPr marL="54864" marR="54864" marT="18288" marB="18288">
-                    <a:solidFill>
-                      <a:srgbClr val="FFFFFF"/>
-                    </a:solidFill>
-                  </a:tcPr>
-                </a:tc>
-                <a:tc>
-                  <a:txBody>
-                    <a:bodyPr wrap="square"/>
-                    <a:lstStyle/>
-                    <a:p>
-                      <a:r>
-                        <a:rPr sz="1100" b="0">
-                          <a:solidFill>
-                            <a:srgbClr val="282828"/>
-                          </a:solidFill>
-                          <a:latin typeface="Arial"/>
-                        </a:rPr>
-                        <a:t>42 / 36</a:t>
-                      </a:r>
-                    </a:p>
-                  </a:txBody>
-                  <a:tcPr marL="54864" marR="54864" marT="18288" marB="18288">
-                    <a:solidFill>
-                      <a:srgbClr val="FFFFFF"/>
-                    </a:solidFill>
-                  </a:tcPr>
-                </a:tc>
-              </a:tr>
-              <a:tr h="468630">
-                <a:tc>
-                  <a:txBody>
-                    <a:bodyPr wrap="square"/>
-                    <a:lstStyle/>
-                    <a:p>
-                      <a:r>
-                        <a:rPr sz="1100" b="0">
-                          <a:solidFill>
-                            <a:srgbClr val="282828"/>
-                          </a:solidFill>
-                          <a:latin typeface="Arial"/>
-                        </a:rPr>
-                        <a:t>COPHI, pco.edge 5.5 in GS mode, 2560 × 2160, 30 ke, 50 fps</a:t>
-                      </a:r>
-                    </a:p>
-                  </a:txBody>
-                  <a:tcPr marL="54864" marR="54864" marT="18288" marB="18288">
-                    <a:solidFill>
-                      <a:srgbClr val="ECF1F6"/>
-                    </a:solidFill>
-                  </a:tcPr>
-                </a:tc>
-                <a:tc>
-                  <a:txBody>
-                    <a:bodyPr wrap="square"/>
-                    <a:lstStyle/>
-                    <a:p>
-                      <a:r>
-                        <a:rPr sz="1100" b="0">
-                          <a:solidFill>
-                            <a:srgbClr val="282828"/>
-                          </a:solidFill>
-                          <a:latin typeface="Arial"/>
-                        </a:rPr>
-                        <a:t>~2000</a:t>
-                      </a:r>
-                    </a:p>
-                  </a:txBody>
-                  <a:tcPr marL="54864" marR="54864" marT="18288" marB="18288">
-                    <a:solidFill>
-                      <a:srgbClr val="ECF1F6"/>
-                    </a:solidFill>
-                  </a:tcPr>
-                </a:tc>
-                <a:tc>
-                  <a:txBody>
-                    <a:bodyPr wrap="square"/>
-                    <a:lstStyle/>
-                    <a:p>
-                      <a:r>
-                        <a:rPr sz="1100" b="0">
-                          <a:solidFill>
-                            <a:srgbClr val="282828"/>
-                          </a:solidFill>
-                          <a:latin typeface="Arial"/>
-                        </a:rPr>
-                        <a:t>21</a:t>
-                      </a:r>
-                    </a:p>
-                  </a:txBody>
-                  <a:tcPr marL="54864" marR="54864" marT="18288" marB="18288">
-                    <a:solidFill>
-                      <a:srgbClr val="ECF1F6"/>
-                    </a:solidFill>
-                  </a:tcPr>
-                </a:tc>
-                <a:tc>
-                  <a:txBody>
-                    <a:bodyPr wrap="square"/>
-                    <a:lstStyle/>
-                    <a:p>
-                      <a:r>
-                        <a:rPr sz="1100" b="0">
-                          <a:solidFill>
-                            <a:srgbClr val="282828"/>
-                          </a:solidFill>
-                          <a:latin typeface="Arial"/>
-                        </a:rPr>
-                        <a:t>40.2 / 38.3</a:t>
-                      </a:r>
-                    </a:p>
-                  </a:txBody>
-                  <a:tcPr marL="54864" marR="54864" marT="18288" marB="18288">
-                    <a:solidFill>
-                      <a:srgbClr val="ECF1F6"/>
-                    </a:solidFill>
-                  </a:tcPr>
-                </a:tc>
-                <a:tc>
-                  <a:txBody>
-                    <a:bodyPr wrap="square"/>
-                    <a:lstStyle/>
-                    <a:p>
-                      <a:r>
-                        <a:rPr sz="1100" b="0">
-                          <a:solidFill>
-                            <a:srgbClr val="282828"/>
-                          </a:solidFill>
-                          <a:latin typeface="Arial"/>
-                        </a:rPr>
-                        <a:t>129 / 117</a:t>
-                      </a:r>
-                    </a:p>
-                  </a:txBody>
-                  <a:tcPr marL="54864" marR="54864" marT="18288" marB="18288">
-                    <a:solidFill>
-                      <a:srgbClr val="ECF1F6"/>
-                    </a:solidFill>
-                  </a:tcPr>
-                </a:tc>
-              </a:tr>
-              <a:tr h="468630">
-                <a:tc>
-                  <a:txBody>
-                    <a:bodyPr wrap="square"/>
-                    <a:lstStyle/>
-                    <a:p>
-                      <a:r>
-                        <a:rPr sz="1100" b="0">
-                          <a:solidFill>
-                            <a:srgbClr val="282828"/>
-                          </a:solidFill>
-                          <a:latin typeface="Arial"/>
-                        </a:rPr>
-                        <a:t>COPHI at 1.3 µm, C-RED 2, 640 × 512 (placeholder at 632.8 nm)</a:t>
-                      </a:r>
-                    </a:p>
-                  </a:txBody>
-                  <a:tcPr marL="54864" marR="54864" marT="18288" marB="18288">
-                    <a:solidFill>
-                      <a:srgbClr val="FFFFFF"/>
-                    </a:solidFill>
-                  </a:tcPr>
-                </a:tc>
-                <a:tc>
-                  <a:txBody>
-                    <a:bodyPr wrap="square"/>
-                    <a:lstStyle/>
-                    <a:p>
-                      <a:r>
-                        <a:rPr sz="1100" b="0">
-                          <a:solidFill>
-                            <a:srgbClr val="282828"/>
-                          </a:solidFill>
-                          <a:latin typeface="Arial"/>
-                        </a:rPr>
-                        <a:t>~480</a:t>
-                      </a:r>
-                    </a:p>
-                  </a:txBody>
-                  <a:tcPr marL="54864" marR="54864" marT="18288" marB="18288">
-                    <a:solidFill>
-                      <a:srgbClr val="FFFFFF"/>
-                    </a:solidFill>
-                  </a:tcPr>
-                </a:tc>
-                <a:tc>
-                  <a:txBody>
-                    <a:bodyPr wrap="square"/>
-                    <a:lstStyle/>
-                    <a:p>
-                      <a:r>
-                        <a:rPr sz="1100" b="0">
-                          <a:solidFill>
-                            <a:srgbClr val="282828"/>
-                          </a:solidFill>
-                          <a:latin typeface="Arial"/>
-                        </a:rPr>
-                        <a:t>5.0</a:t>
-                      </a:r>
-                    </a:p>
-                  </a:txBody>
-                  <a:tcPr marL="54864" marR="54864" marT="18288" marB="18288">
-                    <a:solidFill>
-                      <a:srgbClr val="FFFFFF"/>
-                    </a:solidFill>
-                  </a:tcPr>
-                </a:tc>
-                <a:tc>
-                  <a:txBody>
-                    <a:bodyPr wrap="square"/>
-                    <a:lstStyle/>
-                    <a:p>
-                      <a:r>
-                        <a:rPr sz="1100" b="0">
-                          <a:solidFill>
-                            <a:srgbClr val="282828"/>
-                          </a:solidFill>
-                          <a:latin typeface="Arial"/>
-                        </a:rPr>
-                        <a:t>19.6 / 18.7</a:t>
-                      </a:r>
-                    </a:p>
-                  </a:txBody>
-                  <a:tcPr marL="54864" marR="54864" marT="18288" marB="18288">
-                    <a:solidFill>
-                      <a:srgbClr val="FFFFFF"/>
-                    </a:solidFill>
-                  </a:tcPr>
-                </a:tc>
-                <a:tc>
-                  <a:txBody>
-                    <a:bodyPr wrap="square"/>
-                    <a:lstStyle/>
-                    <a:p>
-                      <a:r>
-                        <a:rPr sz="1100" b="0">
-                          <a:solidFill>
-                            <a:srgbClr val="282828"/>
-                          </a:solidFill>
-                          <a:latin typeface="Arial"/>
-                        </a:rPr>
-                        <a:t>— (the 1.3 µm stage)</a:t>
-                      </a:r>
-                    </a:p>
-                  </a:txBody>
-                  <a:tcPr marL="54864" marR="54864" marT="18288" marB="18288">
-                    <a:solidFill>
-                      <a:srgbClr val="FFFFFF"/>
-                    </a:solidFill>
-                  </a:tcPr>
-                </a:tc>
-              </a:tr>
-              <a:tr h="468630">
-                <a:tc>
-                  <a:txBody>
-                    <a:bodyPr wrap="square"/>
-                    <a:lstStyle/>
-                    <a:p>
-                      <a:r>
-                        <a:rPr sz="1100" b="0">
-                          <a:solidFill>
-                            <a:srgbClr val="282828"/>
-                          </a:solidFill>
-                          <a:latin typeface="Arial"/>
-                        </a:rPr>
-                        <a:t>COPHI, lock-in camera, heliCam C4, 542 × 512</a:t>
-                      </a:r>
-                    </a:p>
-                  </a:txBody>
-                  <a:tcPr marL="54864" marR="54864" marT="18288" marB="18288">
-                    <a:solidFill>
-                      <a:srgbClr val="ECF1F6"/>
-                    </a:solidFill>
-                  </a:tcPr>
-                </a:tc>
-                <a:tc>
-                  <a:txBody>
-                    <a:bodyPr wrap="square"/>
-                    <a:lstStyle/>
-                    <a:p>
-                      <a:r>
-                        <a:rPr sz="1100" b="0">
-                          <a:solidFill>
-                            <a:srgbClr val="282828"/>
-                          </a:solidFill>
-                          <a:latin typeface="Arial"/>
-                        </a:rPr>
-                        <a:t>512</a:t>
-                      </a:r>
-                    </a:p>
-                  </a:txBody>
-                  <a:tcPr marL="54864" marR="54864" marT="18288" marB="18288">
-                    <a:solidFill>
-                      <a:srgbClr val="ECF1F6"/>
-                    </a:solidFill>
-                  </a:tcPr>
-                </a:tc>
-                <a:tc>
-                  <a:txBody>
-                    <a:bodyPr wrap="square"/>
-                    <a:lstStyle/>
-                    <a:p>
-                      <a:r>
-                        <a:rPr sz="1100" b="0">
-                          <a:solidFill>
-                            <a:srgbClr val="282828"/>
-                          </a:solidFill>
-                          <a:latin typeface="Arial"/>
-                        </a:rPr>
-                        <a:t>5.3</a:t>
-                      </a:r>
-                    </a:p>
-                  </a:txBody>
-                  <a:tcPr marL="54864" marR="54864" marT="18288" marB="18288">
-                    <a:solidFill>
-                      <a:srgbClr val="ECF1F6"/>
-                    </a:solidFill>
-                  </a:tcPr>
-                </a:tc>
-                <a:tc>
-                  <a:txBody>
-                    <a:bodyPr wrap="square"/>
-                    <a:lstStyle/>
-                    <a:p>
-                      <a:r>
-                        <a:rPr sz="1100" b="0">
-                          <a:solidFill>
-                            <a:srgbClr val="282828"/>
-                          </a:solidFill>
-                          <a:latin typeface="Arial"/>
-                        </a:rPr>
-                        <a:t>61.1 / 57.9 per 1 ms I/Q sample</a:t>
-                      </a:r>
-                    </a:p>
-                  </a:txBody>
-                  <a:tcPr marL="54864" marR="54864" marT="18288" marB="18288">
-                    <a:solidFill>
-                      <a:srgbClr val="ECF1F6"/>
-                    </a:solidFill>
-                  </a:tcPr>
-                </a:tc>
-                <a:tc>
-                  <a:txBody>
-                    <a:bodyPr wrap="square"/>
-                    <a:lstStyle/>
-                    <a:p>
-                      <a:r>
-                        <a:rPr sz="1100" b="0">
-                          <a:solidFill>
-                            <a:srgbClr val="282828"/>
-                          </a:solidFill>
-                          <a:latin typeface="Arial"/>
-                        </a:rPr>
-                        <a:t>3.73 / 3.35 (well-capped at 1 kHz; ×1.11 square-wave)</a:t>
-                      </a:r>
-                    </a:p>
-                  </a:txBody>
-                  <a:tcPr marL="54864" marR="54864" marT="18288" marB="18288">
-                    <a:solidFill>
-                      <a:srgbClr val="ECF1F6"/>
-                    </a:solidFill>
-                  </a:tcPr>
-                </a:tc>
-              </a:tr>
-              <a:tr h="280035">
-                <a:tc>
-                  <a:txBody>
-                    <a:bodyPr wrap="square"/>
-                    <a:lstStyle/>
-                    <a:p>
-                      <a:r>
-                        <a:rPr sz="1100" b="0">
-                          <a:solidFill>
-                            <a:srgbClr val="282828"/>
-                          </a:solidFill>
-                          <a:latin typeface="Arial"/>
-                        </a:rPr>
-                        <a:t>COPHI, lock-in camera, heliCam C4M, 1024 × 1102</a:t>
-                      </a:r>
-                    </a:p>
-                  </a:txBody>
-                  <a:tcPr marL="54864" marR="54864" marT="18288" marB="18288">
-                    <a:solidFill>
-                      <a:srgbClr val="FFFFFF"/>
-                    </a:solidFill>
-                  </a:tcPr>
-                </a:tc>
-                <a:tc>
-                  <a:txBody>
-                    <a:bodyPr wrap="square"/>
-                    <a:lstStyle/>
-                    <a:p>
-                      <a:r>
-                        <a:rPr sz="1100" b="0">
-                          <a:solidFill>
-                            <a:srgbClr val="282828"/>
-                          </a:solidFill>
-                          <a:latin typeface="Arial"/>
-                        </a:rPr>
-                        <a:t>~1000</a:t>
-                      </a:r>
-                    </a:p>
-                  </a:txBody>
-                  <a:tcPr marL="54864" marR="54864" marT="18288" marB="18288">
-                    <a:solidFill>
-                      <a:srgbClr val="FFFFFF"/>
-                    </a:solidFill>
-                  </a:tcPr>
-                </a:tc>
-                <a:tc>
-                  <a:txBody>
-                    <a:bodyPr wrap="square"/>
-                    <a:lstStyle/>
-                    <a:p>
-                      <a:r>
-                        <a:rPr sz="1100" b="0">
-                          <a:solidFill>
-                            <a:srgbClr val="282828"/>
-                          </a:solidFill>
-                          <a:latin typeface="Arial"/>
-                        </a:rPr>
-                        <a:t>10.6</a:t>
-                      </a:r>
-                    </a:p>
-                  </a:txBody>
-                  <a:tcPr marL="54864" marR="54864" marT="18288" marB="18288">
-                    <a:solidFill>
-                      <a:srgbClr val="FFFFFF"/>
-                    </a:solidFill>
-                  </a:tcPr>
-                </a:tc>
-                <a:tc>
-                  <a:txBody>
-                    <a:bodyPr wrap="square"/>
-                    <a:lstStyle/>
-                    <a:p>
-                      <a:r>
-                        <a:rPr sz="1100" b="0">
-                          <a:solidFill>
-                            <a:srgbClr val="282828"/>
-                          </a:solidFill>
-                          <a:latin typeface="Arial"/>
-                        </a:rPr>
-                        <a:t>(C4 pixel assumed)</a:t>
-                      </a:r>
-                    </a:p>
-                  </a:txBody>
-                  <a:tcPr marL="54864" marR="54864" marT="18288" marB="18288">
-                    <a:solidFill>
-                      <a:srgbClr val="FFFFFF"/>
-                    </a:solidFill>
-                  </a:tcPr>
-                </a:tc>
-                <a:tc>
-                  <a:txBody>
-                    <a:bodyPr wrap="square"/>
-                    <a:lstStyle/>
-                    <a:p>
-                      <a:r>
-                        <a:rPr sz="1100" b="0">
-                          <a:solidFill>
-                            <a:srgbClr val="282828"/>
-                          </a:solidFill>
-                          <a:latin typeface="Arial"/>
-                        </a:rPr>
-                        <a:t>same (well × rate per element)</a:t>
-                      </a:r>
-                    </a:p>
-                  </a:txBody>
-                  <a:tcPr marL="54864" marR="54864" marT="18288" marB="18288">
-                    <a:solidFill>
-                      <a:srgbClr val="FFFFFF"/>
-                    </a:solidFill>
-                  </a:tcPr>
-                </a:tc>
-              </a:tr>
-            </a:tbl>
-          </a:graphicData>
-        </a:graphic>
-      </p:graphicFrame>
+        </p:nvPicPr>
+        <p:blipFill>
+          <a:blip r:embed="rId2"/>
+          <a:stretch>
+            <a:fillRect/>
+          </a:stretch>
+        </p:blipFill>
+        <p:spPr>
+          <a:xfrm>
+            <a:off x="1293571" y="1298448"/>
+            <a:ext cx="9604553" cy="2897632"/>
+          </a:xfrm>
+          <a:prstGeom prst="rect">
+            <a:avLst/>
+          </a:prstGeom>
+        </p:spPr>
+      </p:pic>
       <p:sp>
         <p:nvSpPr>
           <p:cNvPr id="5" name="TextBox 4"/>
@@ -4304,7 +3404,46 @@
         </p:nvSpPr>
         <p:spPr>
           <a:xfrm>
-            <a:off x="411480" y="4628007"/>
+            <a:off x="411480" y="4214367"/>
+            <a:ext cx="11368735" cy="394208"/>
+          </a:xfrm>
+          <a:prstGeom prst="rect">
+            <a:avLst/>
+          </a:prstGeom>
+          <a:noFill/>
+        </p:spPr>
+        <p:txBody>
+          <a:bodyPr wrap="square">
+            <a:spAutoFit/>
+          </a:bodyPr>
+          <a:lstStyle/>
+          <a:p>
+            <a:pPr algn="ctr">
+              <a:spcAft>
+                <a:spcPts val="0"/>
+              </a:spcAft>
+            </a:pPr>
+            <a:r>
+              <a:rPr sz="1000" b="0">
+                <a:solidFill>
+                  <a:srgbClr val="6E6E6E"/>
+                </a:solidFill>
+                <a:latin typeface="Arial"/>
+              </a:rPr>
+              <a:t>COPHI, mirror rig: the command; the test arm and the LO at the camera; two of the four buckets; the recovered surface, 31.9 nm rms; recovered minus the engine's field, 0.31 pm rms; the flat DM reads 0</a:t>
+            </a:r>
+          </a:p>
+        </p:txBody>
+      </p:sp>
+      <p:sp>
+        <p:nvSpPr>
+          <p:cNvPr id="6" name="TextBox 5"/>
+          <p:cNvSpPr txBox="1"/>
+          <p:nvPr/>
+        </p:nvSpPr>
+        <p:spPr>
+          <a:xfrm>
+            <a:off x="411480" y="4645151"/>
             <a:ext cx="11368735" cy="274320"/>
           </a:xfrm>
           <a:prstGeom prst="rect">
@@ -4339,7 +3478,7 @@
                 </a:solidFill>
                 <a:latin typeface="Arial"/>
               </a:rPr>
-              <a:t>Resolution is free down to ~1.5 pixels per actuator:</a:t>
+              <a:t>Resolution shown:</a:t>
             </a:r>
             <a:r>
               <a:rPr sz="1500" b="0">
@@ -4348,7 +3487,25 @@
                 </a:solidFill>
                 <a:latin typeface="Arial"/>
               </a:rPr>
-              <a:t> a camera's photons per second are pixels × well × rate over the pupil; binning finer pixels onto the lattice changes only the read noise per sample.</a:t>
+              <a:t> camera grid 1024 × 1024, pupil 315 px across — </a:t>
+            </a:r>
+            <a:r>
+              <a:rPr sz="1500" b="1">
+                <a:solidFill>
+                  <a:srgbClr val="282828"/>
+                </a:solidFill>
+                <a:latin typeface="Arial"/>
+              </a:rPr>
+              <a:t>3.3 pixels per actuator across, ~11 per actuator in area</a:t>
+            </a:r>
+            <a:r>
+              <a:rPr sz="1500" b="0">
+                <a:solidFill>
+                  <a:srgbClr val="282828"/>
+                </a:solidFill>
+                <a:latin typeface="Arial"/>
+              </a:rPr>
+              <a:t> (6948 lit actuators on ~77,900 pupil pixels).</a:t>
             </a:r>
           </a:p>
           <a:p>
@@ -4364,70 +3521,20 @@
                 </a:solidFill>
                 <a:latin typeface="Arial"/>
               </a:rPr>
-              <a:t>–  measured (slide 18): 1 px per actuator fails the single-actuator row, 1.5–2 px holds at 1.6–2× the time, 3.3 and 4 are the same — 5 px per actuator is the floor on this table</a:t>
-            </a:r>
-          </a:p>
-          <a:p>
-            <a:pPr marL="594360" indent="-137160">
-              <a:spcAft>
-                <a:spcPts val="500"/>
-              </a:spcAft>
-            </a:pPr>
-            <a:r>
-              <a:rPr sz="1300" b="0">
-                <a:solidFill>
-                  <a:srgbClr val="6E6E6E"/>
-                </a:solidFill>
-                <a:latin typeface="Arial"/>
-              </a:rPr>
-              <a:t>–  nothing coarser is modeled (ruling: every mode of interest is commanded at full actuator resolution)</a:t>
-            </a:r>
-          </a:p>
-          <a:p>
-            <a:pPr marL="0" indent="0">
-              <a:spcAft>
-                <a:spcPts val="600"/>
-              </a:spcAft>
-            </a:pPr>
-            <a:r>
-              <a:rPr sz="1500" b="0">
-                <a:solidFill>
-                  <a:srgbClr val="282828"/>
-                </a:solidFill>
-                <a:latin typeface="Arial"/>
-              </a:rPr>
-              <a:t>•  </a:t>
-            </a:r>
-            <a:r>
-              <a:rPr sz="1500" b="1">
-                <a:solidFill>
-                  <a:srgbClr val="282828"/>
-                </a:solidFill>
-                <a:latin typeface="Arial"/>
-              </a:rPr>
-              <a:t>Cameras were put on the model grid by binning</a:t>
-            </a:r>
-            <a:r>
-              <a:rPr sz="1500" b="0">
-                <a:solidFill>
-                  <a:srgbClr val="282828"/>
-                </a:solidFill>
-                <a:latin typeface="Arial"/>
-              </a:rPr>
-              <a:t> (well × k², read × k): the pm-per-reading rows are the full camera's photons at the model's sampling.</a:t>
+              <a:t>–  every real camera on the table samples finer (5–21 px per actuator, slide 11); what resolution buys and costs is slide 19</a:t>
             </a:r>
           </a:p>
         </p:txBody>
       </p:sp>
       <p:sp>
         <p:nvSpPr>
-          <p:cNvPr id="6" name="TextBox 5"/>
+          <p:cNvPr id="7" name="TextBox 6"/>
           <p:cNvSpPr txBox="1"/>
           <p:nvPr/>
         </p:nvSpPr>
         <p:spPr>
           <a:xfrm>
-            <a:off x="411480" y="6834505"/>
+            <a:off x="411480" y="5659373"/>
             <a:ext cx="11368735" cy="274320"/>
           </a:xfrm>
           <a:prstGeom prst="rect">
@@ -4453,7 +3560,7 @@
                 </a:solidFill>
                 <a:latin typeface="Arial"/>
               </a:rPr>
-              <a:t>Stage noise and format; the pupil in pixels is the camera's short side filled by the pupil image (the tail's magnification is set for it); the model's 315 px = 157.45 px radius (stage bench).</a:t>
+              <a:t>Stage figs (runs/figs_oap_plain), noise-free; the deck's station-figure format (row 1 flat DM, row 2 the working surface).</a:t>
             </a:r>
           </a:p>
         </p:txBody>
@@ -4510,7 +3617,7 @@
                 </a:solidFill>
                 <a:latin typeface="Arial"/>
               </a:rPr>
-              <a:t>Performance side by side: HET against the IFO on the same surface</a:t>
+              <a:t>Resolution and timing, camera by camera</a:t>
             </a:r>
           </a:p>
           <a:p>
@@ -4526,7 +3633,7 @@
                 </a:solidFill>
                 <a:latin typeface="Arial"/>
               </a:rPr>
-              <a:t>HET = the heterodyne (COPHI) reading; IFO = the record's Twyman-Green polarization interferometer.  Same seed, surface and matrix: HET matches the IFO's floor, halves its mirror-rig random-surface error, and is exact where the IFO is not</a:t>
+              <a:t>The model samples the pupil at 3.3 pixels per actuator; every camera on the table oversamples the 96 × 96 lattice, so resolution costs no photons — the time to a picometer is well depth × frame rate, not pixel count</a:t>
             </a:r>
           </a:p>
         </p:txBody>
@@ -4584,8 +3691,8 @@
           <p:nvPr/>
         </p:nvGraphicFramePr>
         <p:xfrm>
-          <a:off x="411480" y="1188720"/>
-          <a:ext cx="11368734" cy="2800350"/>
+          <a:off x="411480" y="1298448"/>
+          <a:ext cx="11368734" cy="3183255"/>
         </p:xfrm>
         <a:graphic>
           <a:graphicData uri="http://schemas.openxmlformats.org/drawingml/2006/table">
@@ -4594,12 +3701,13 @@
                 <a:tableStyleId>{5C22544A-7EE6-4342-B048-85BDC9FD1C3A}</a:tableStyleId>
               </a:tblPr>
               <a:tblGrid>
-                <a:gridCol w="3065461"/>
-                <a:gridCol w="2682278"/>
-                <a:gridCol w="2325624"/>
-                <a:gridCol w="3295371"/>
+                <a:gridCol w="3484888"/>
+                <a:gridCol w="1313974"/>
+                <a:gridCol w="1771009"/>
+                <a:gridCol w="1771009"/>
+                <a:gridCol w="3027854"/>
               </a:tblGrid>
-              <a:tr h="280035">
+              <a:tr h="468630">
                 <a:tc>
                   <a:txBody>
                     <a:bodyPr wrap="square"/>
@@ -4612,7 +3720,7 @@
                           </a:solidFill>
                           <a:latin typeface="Arial"/>
                         </a:rPr>
-                        <a:t>reading, rig (estimator)</a:t>
+                        <a:t>sensor / camera</a:t>
                       </a:r>
                     </a:p>
                   </a:txBody>
@@ -4634,7 +3742,7 @@
                           </a:solidFill>
                           <a:latin typeface="Arial"/>
                         </a:rPr>
-                        <a:t>10 nm on one actuator: gain / floor</a:t>
+                        <a:t>pixels across the pupil</a:t>
                       </a:r>
                     </a:p>
                   </a:txBody>
@@ -4656,7 +3764,7 @@
                           </a:solidFill>
                           <a:latin typeface="Arial"/>
                         </a:rPr>
-                        <a:t>1 nm on the grid: gain / floor</a:t>
+                        <a:t>pixels per actuator (96 across)</a:t>
                       </a:r>
                     </a:p>
                   </a:txBody>
@@ -4678,13 +3786,147 @@
                           </a:solidFill>
                           <a:latin typeface="Arial"/>
                         </a:rPr>
-                        <a:t>dense random 10 nm: gain / error</a:t>
+                        <a:t>pm per reading</a:t>
                       </a:r>
                     </a:p>
                   </a:txBody>
                   <a:tcPr marL="54864" marR="54864" marT="18288" marB="18288">
                     <a:solidFill>
                       <a:srgbClr val="1F4E79"/>
+                    </a:solidFill>
+                  </a:tcPr>
+                </a:tc>
+                <a:tc>
+                  <a:txBody>
+                    <a:bodyPr wrap="square"/>
+                    <a:lstStyle/>
+                    <a:p>
+                      <a:r>
+                        <a:rPr sz="1100" b="1">
+                          <a:solidFill>
+                            <a:srgbClr val="FFFFFF"/>
+                          </a:solidFill>
+                          <a:latin typeface="Arial"/>
+                        </a:rPr>
+                        <a:t>seconds per pm (SNR 1 at 1 pm)</a:t>
+                      </a:r>
+                    </a:p>
+                  </a:txBody>
+                  <a:tcPr marL="54864" marR="54864" marT="18288" marB="18288">
+                    <a:solidFill>
+                      <a:srgbClr val="1F4E79"/>
+                    </a:solidFill>
+                  </a:tcPr>
+                </a:tc>
+              </a:tr>
+              <a:tr h="468630">
+                <a:tc>
+                  <a:txBody>
+                    <a:bodyPr wrap="square"/>
+                    <a:lstStyle/>
+                    <a:p>
+                      <a:r>
+                        <a:rPr sz="1100" b="0">
+                          <a:solidFill>
+                            <a:srgbClr val="282828"/>
+                          </a:solidFill>
+                          <a:latin typeface="Arial"/>
+                        </a:rPr>
+                        <a:t>the model's grid (both rigs, 1024 grid; the station figure)</a:t>
+                      </a:r>
+                    </a:p>
+                  </a:txBody>
+                  <a:tcPr marL="54864" marR="54864" marT="18288" marB="18288">
+                    <a:solidFill>
+                      <a:srgbClr val="FFFFFF"/>
+                    </a:solidFill>
+                  </a:tcPr>
+                </a:tc>
+                <a:tc>
+                  <a:txBody>
+                    <a:bodyPr wrap="square"/>
+                    <a:lstStyle/>
+                    <a:p>
+                      <a:r>
+                        <a:rPr sz="1100" b="0">
+                          <a:solidFill>
+                            <a:srgbClr val="282828"/>
+                          </a:solidFill>
+                          <a:latin typeface="Arial"/>
+                        </a:rPr>
+                        <a:t>315</a:t>
+                      </a:r>
+                    </a:p>
+                  </a:txBody>
+                  <a:tcPr marL="54864" marR="54864" marT="18288" marB="18288">
+                    <a:solidFill>
+                      <a:srgbClr val="FFFFFF"/>
+                    </a:solidFill>
+                  </a:tcPr>
+                </a:tc>
+                <a:tc>
+                  <a:txBody>
+                    <a:bodyPr wrap="square"/>
+                    <a:lstStyle/>
+                    <a:p>
+                      <a:r>
+                        <a:rPr sz="1100" b="0">
+                          <a:solidFill>
+                            <a:srgbClr val="282828"/>
+                          </a:solidFill>
+                          <a:latin typeface="Arial"/>
+                        </a:rPr>
+                        <a:t>3.3</a:t>
+                      </a:r>
+                    </a:p>
+                  </a:txBody>
+                  <a:tcPr marL="54864" marR="54864" marT="18288" marB="18288">
+                    <a:solidFill>
+                      <a:srgbClr val="FFFFFF"/>
+                    </a:solidFill>
+                  </a:tcPr>
+                </a:tc>
+                <a:tc>
+                  <a:txBody>
+                    <a:bodyPr wrap="square"/>
+                    <a:lstStyle/>
+                    <a:p>
+                      <a:r>
+                        <a:rPr sz="1100" b="0">
+                          <a:solidFill>
+                            <a:srgbClr val="282828"/>
+                          </a:solidFill>
+                          <a:latin typeface="Arial"/>
+                        </a:rPr>
+                        <a:t>—</a:t>
+                      </a:r>
+                    </a:p>
+                  </a:txBody>
+                  <a:tcPr marL="54864" marR="54864" marT="18288" marB="18288">
+                    <a:solidFill>
+                      <a:srgbClr val="FFFFFF"/>
+                    </a:solidFill>
+                  </a:tcPr>
+                </a:tc>
+                <a:tc>
+                  <a:txBody>
+                    <a:bodyPr wrap="square"/>
+                    <a:lstStyle/>
+                    <a:p>
+                      <a:r>
+                        <a:rPr sz="1100" b="0">
+                          <a:solidFill>
+                            <a:srgbClr val="282828"/>
+                          </a:solidFill>
+                          <a:latin typeface="Arial"/>
+                        </a:rPr>
+                        <a:t>—</a:t>
+                      </a:r>
+                    </a:p>
+                  </a:txBody>
+                  <a:tcPr marL="54864" marR="54864" marT="18288" marB="18288">
+                    <a:solidFill>
+                      <a:srgbClr val="FFFFFF"/>
                     </a:solidFill>
                   </a:tcPr>
                 </a:tc>
@@ -4702,79 +3944,101 @@
                           </a:solidFill>
                           <a:latin typeface="Arial"/>
                         </a:rPr>
-                        <a:t>HET (COPHI), lens (one-step)</a:t>
-                      </a:r>
-                    </a:p>
-                  </a:txBody>
-                  <a:tcPr marL="54864" marR="54864" marT="18288" marB="18288">
-                    <a:solidFill>
-                      <a:srgbClr val="FFFFFF"/>
-                    </a:solidFill>
-                  </a:tcPr>
-                </a:tc>
-                <a:tc>
-                  <a:txBody>
-                    <a:bodyPr wrap="square"/>
-                    <a:lstStyle/>
-                    <a:p>
-                      <a:r>
-                        <a:rPr sz="1100" b="0">
-                          <a:solidFill>
-                            <a:srgbClr val="282828"/>
-                          </a:solidFill>
-                          <a:latin typeface="Arial"/>
-                        </a:rPr>
-                        <a:t>0.9947 / 2 pm</a:t>
-                      </a:r>
-                    </a:p>
-                  </a:txBody>
-                  <a:tcPr marL="54864" marR="54864" marT="18288" marB="18288">
-                    <a:solidFill>
-                      <a:srgbClr val="FFFFFF"/>
-                    </a:solidFill>
-                  </a:tcPr>
-                </a:tc>
-                <a:tc>
-                  <a:txBody>
-                    <a:bodyPr wrap="square"/>
-                    <a:lstStyle/>
-                    <a:p>
-                      <a:r>
-                        <a:rPr sz="1100" b="0">
-                          <a:solidFill>
-                            <a:srgbClr val="282828"/>
-                          </a:solidFill>
-                          <a:latin typeface="Arial"/>
-                        </a:rPr>
-                        <a:t>0.9964 / 2 pm</a:t>
-                      </a:r>
-                    </a:p>
-                  </a:txBody>
-                  <a:tcPr marL="54864" marR="54864" marT="18288" marB="18288">
-                    <a:solidFill>
-                      <a:srgbClr val="FFFFFF"/>
-                    </a:solidFill>
-                  </a:tcPr>
-                </a:tc>
-                <a:tc>
-                  <a:txBody>
-                    <a:bodyPr wrap="square"/>
-                    <a:lstStyle/>
-                    <a:p>
-                      <a:r>
-                        <a:rPr sz="1100" b="0">
-                          <a:solidFill>
-                            <a:srgbClr val="282828"/>
-                          </a:solidFill>
-                          <a:latin typeface="Arial"/>
-                        </a:rPr>
-                        <a:t>0.9967 / 180 pm</a:t>
-                      </a:r>
-                    </a:p>
-                  </a:txBody>
-                  <a:tcPr marL="54864" marR="54864" marT="18288" marB="18288">
-                    <a:solidFill>
-                      <a:srgbClr val="FFFFFF"/>
+                        <a:t>COPHI, Feng's camera, 1k², 60 ke, 30 fps</a:t>
+                      </a:r>
+                    </a:p>
+                  </a:txBody>
+                  <a:tcPr marL="54864" marR="54864" marT="18288" marB="18288">
+                    <a:solidFill>
+                      <a:srgbClr val="ECF1F6"/>
+                    </a:solidFill>
+                  </a:tcPr>
+                </a:tc>
+                <a:tc>
+                  <a:txBody>
+                    <a:bodyPr wrap="square"/>
+                    <a:lstStyle/>
+                    <a:p>
+                      <a:r>
+                        <a:rPr sz="1100" b="0">
+                          <a:solidFill>
+                            <a:srgbClr val="282828"/>
+                          </a:solidFill>
+                          <a:latin typeface="Arial"/>
+                        </a:rPr>
+                        <a:t>~900</a:t>
+                      </a:r>
+                    </a:p>
+                  </a:txBody>
+                  <a:tcPr marL="54864" marR="54864" marT="18288" marB="18288">
+                    <a:solidFill>
+                      <a:srgbClr val="ECF1F6"/>
+                    </a:solidFill>
+                  </a:tcPr>
+                </a:tc>
+                <a:tc>
+                  <a:txBody>
+                    <a:bodyPr wrap="square"/>
+                    <a:lstStyle/>
+                    <a:p>
+                      <a:r>
+                        <a:rPr sz="1100" b="0">
+                          <a:solidFill>
+                            <a:srgbClr val="282828"/>
+                          </a:solidFill>
+                          <a:latin typeface="Arial"/>
+                        </a:rPr>
+                        <a:t>9.4</a:t>
+                      </a:r>
+                    </a:p>
+                  </a:txBody>
+                  <a:tcPr marL="54864" marR="54864" marT="18288" marB="18288">
+                    <a:solidFill>
+                      <a:srgbClr val="ECF1F6"/>
+                    </a:solidFill>
+                  </a:tcPr>
+                </a:tc>
+                <a:tc>
+                  <a:txBody>
+                    <a:bodyPr wrap="square"/>
+                    <a:lstStyle/>
+                    <a:p>
+                      <a:r>
+                        <a:rPr sz="1100" b="0">
+                          <a:solidFill>
+                            <a:srgbClr val="282828"/>
+                          </a:solidFill>
+                          <a:latin typeface="Arial"/>
+                        </a:rPr>
+                        <a:t>57.7 / 53.7</a:t>
+                      </a:r>
+                    </a:p>
+                  </a:txBody>
+                  <a:tcPr marL="54864" marR="54864" marT="18288" marB="18288">
+                    <a:solidFill>
+                      <a:srgbClr val="ECF1F6"/>
+                    </a:solidFill>
+                  </a:tcPr>
+                </a:tc>
+                <a:tc>
+                  <a:txBody>
+                    <a:bodyPr wrap="square"/>
+                    <a:lstStyle/>
+                    <a:p>
+                      <a:r>
+                        <a:rPr sz="1100" b="0">
+                          <a:solidFill>
+                            <a:srgbClr val="282828"/>
+                          </a:solidFill>
+                          <a:latin typeface="Arial"/>
+                        </a:rPr>
+                        <a:t>443 / 385 (≈ 7 min)</a:t>
+                      </a:r>
+                    </a:p>
+                  </a:txBody>
+                  <a:tcPr marL="54864" marR="54864" marT="18288" marB="18288">
+                    <a:solidFill>
+                      <a:srgbClr val="ECF1F6"/>
                     </a:solidFill>
                   </a:tcPr>
                 </a:tc>
@@ -4792,7 +4056,119 @@
                           </a:solidFill>
                           <a:latin typeface="Arial"/>
                         </a:rPr>
-                        <a:t>IFO (Twyman-Green), lens (one-step)</a:t>
+                        <a:t>COPHI, Photonfocus 1024², 200 ke, 150 fps</a:t>
+                      </a:r>
+                    </a:p>
+                  </a:txBody>
+                  <a:tcPr marL="54864" marR="54864" marT="18288" marB="18288">
+                    <a:solidFill>
+                      <a:srgbClr val="FFFFFF"/>
+                    </a:solidFill>
+                  </a:tcPr>
+                </a:tc>
+                <a:tc>
+                  <a:txBody>
+                    <a:bodyPr wrap="square"/>
+                    <a:lstStyle/>
+                    <a:p>
+                      <a:r>
+                        <a:rPr sz="1100" b="0">
+                          <a:solidFill>
+                            <a:srgbClr val="282828"/>
+                          </a:solidFill>
+                          <a:latin typeface="Arial"/>
+                        </a:rPr>
+                        <a:t>~900</a:t>
+                      </a:r>
+                    </a:p>
+                  </a:txBody>
+                  <a:tcPr marL="54864" marR="54864" marT="18288" marB="18288">
+                    <a:solidFill>
+                      <a:srgbClr val="FFFFFF"/>
+                    </a:solidFill>
+                  </a:tcPr>
+                </a:tc>
+                <a:tc>
+                  <a:txBody>
+                    <a:bodyPr wrap="square"/>
+                    <a:lstStyle/>
+                    <a:p>
+                      <a:r>
+                        <a:rPr sz="1100" b="0">
+                          <a:solidFill>
+                            <a:srgbClr val="282828"/>
+                          </a:solidFill>
+                          <a:latin typeface="Arial"/>
+                        </a:rPr>
+                        <a:t>9.4</a:t>
+                      </a:r>
+                    </a:p>
+                  </a:txBody>
+                  <a:tcPr marL="54864" marR="54864" marT="18288" marB="18288">
+                    <a:solidFill>
+                      <a:srgbClr val="FFFFFF"/>
+                    </a:solidFill>
+                  </a:tcPr>
+                </a:tc>
+                <a:tc>
+                  <a:txBody>
+                    <a:bodyPr wrap="square"/>
+                    <a:lstStyle/>
+                    <a:p>
+                      <a:r>
+                        <a:rPr sz="1100" b="0">
+                          <a:solidFill>
+                            <a:srgbClr val="282828"/>
+                          </a:solidFill>
+                          <a:latin typeface="Arial"/>
+                        </a:rPr>
+                        <a:t>39.5 / 36.5</a:t>
+                      </a:r>
+                    </a:p>
+                  </a:txBody>
+                  <a:tcPr marL="54864" marR="54864" marT="18288" marB="18288">
+                    <a:solidFill>
+                      <a:srgbClr val="FFFFFF"/>
+                    </a:solidFill>
+                  </a:tcPr>
+                </a:tc>
+                <a:tc>
+                  <a:txBody>
+                    <a:bodyPr wrap="square"/>
+                    <a:lstStyle/>
+                    <a:p>
+                      <a:r>
+                        <a:rPr sz="1100" b="0">
+                          <a:solidFill>
+                            <a:srgbClr val="282828"/>
+                          </a:solidFill>
+                          <a:latin typeface="Arial"/>
+                        </a:rPr>
+                        <a:t>42 / 36</a:t>
+                      </a:r>
+                    </a:p>
+                  </a:txBody>
+                  <a:tcPr marL="54864" marR="54864" marT="18288" marB="18288">
+                    <a:solidFill>
+                      <a:srgbClr val="FFFFFF"/>
+                    </a:solidFill>
+                  </a:tcPr>
+                </a:tc>
+              </a:tr>
+              <a:tr h="468630">
+                <a:tc>
+                  <a:txBody>
+                    <a:bodyPr wrap="square"/>
+                    <a:lstStyle/>
+                    <a:p>
+                      <a:r>
+                        <a:rPr sz="1100" b="0">
+                          <a:solidFill>
+                            <a:srgbClr val="282828"/>
+                          </a:solidFill>
+                          <a:latin typeface="Arial"/>
+                        </a:rPr>
+                        <a:t>COPHI, pco.edge 5.5 in GS mode, 2560 × 2160, 30 ke, 50 fps</a:t>
                       </a:r>
                     </a:p>
                   </a:txBody>
@@ -4814,7 +4190,7 @@
                           </a:solidFill>
                           <a:latin typeface="Arial"/>
                         </a:rPr>
-                        <a:t>1.0001 / 1 pm</a:t>
+                        <a:t>~2000</a:t>
                       </a:r>
                     </a:p>
                   </a:txBody>
@@ -4836,7 +4212,7 @@
                           </a:solidFill>
                           <a:latin typeface="Arial"/>
                         </a:rPr>
-                        <a:t>1.0046 / 2 pm</a:t>
+                        <a:t>21</a:t>
                       </a:r>
                     </a:p>
                   </a:txBody>
@@ -4858,7 +4234,253 @@
                           </a:solidFill>
                           <a:latin typeface="Arial"/>
                         </a:rPr>
-                        <a:t>1.0053 / 179 pm</a:t>
+                        <a:t>40.2 / 38.3</a:t>
+                      </a:r>
+                    </a:p>
+                  </a:txBody>
+                  <a:tcPr marL="54864" marR="54864" marT="18288" marB="18288">
+                    <a:solidFill>
+                      <a:srgbClr val="ECF1F6"/>
+                    </a:solidFill>
+                  </a:tcPr>
+                </a:tc>
+                <a:tc>
+                  <a:txBody>
+                    <a:bodyPr wrap="square"/>
+                    <a:lstStyle/>
+                    <a:p>
+                      <a:r>
+                        <a:rPr sz="1100" b="0">
+                          <a:solidFill>
+                            <a:srgbClr val="282828"/>
+                          </a:solidFill>
+                          <a:latin typeface="Arial"/>
+                        </a:rPr>
+                        <a:t>129 / 117</a:t>
+                      </a:r>
+                    </a:p>
+                  </a:txBody>
+                  <a:tcPr marL="54864" marR="54864" marT="18288" marB="18288">
+                    <a:solidFill>
+                      <a:srgbClr val="ECF1F6"/>
+                    </a:solidFill>
+                  </a:tcPr>
+                </a:tc>
+              </a:tr>
+              <a:tr h="468630">
+                <a:tc>
+                  <a:txBody>
+                    <a:bodyPr wrap="square"/>
+                    <a:lstStyle/>
+                    <a:p>
+                      <a:r>
+                        <a:rPr sz="1100" b="0">
+                          <a:solidFill>
+                            <a:srgbClr val="282828"/>
+                          </a:solidFill>
+                          <a:latin typeface="Arial"/>
+                        </a:rPr>
+                        <a:t>COPHI at 1.3 µm, C-RED 2, 640 × 512 (placeholder at 632.8 nm)</a:t>
+                      </a:r>
+                    </a:p>
+                  </a:txBody>
+                  <a:tcPr marL="54864" marR="54864" marT="18288" marB="18288">
+                    <a:solidFill>
+                      <a:srgbClr val="FFFFFF"/>
+                    </a:solidFill>
+                  </a:tcPr>
+                </a:tc>
+                <a:tc>
+                  <a:txBody>
+                    <a:bodyPr wrap="square"/>
+                    <a:lstStyle/>
+                    <a:p>
+                      <a:r>
+                        <a:rPr sz="1100" b="0">
+                          <a:solidFill>
+                            <a:srgbClr val="282828"/>
+                          </a:solidFill>
+                          <a:latin typeface="Arial"/>
+                        </a:rPr>
+                        <a:t>~480</a:t>
+                      </a:r>
+                    </a:p>
+                  </a:txBody>
+                  <a:tcPr marL="54864" marR="54864" marT="18288" marB="18288">
+                    <a:solidFill>
+                      <a:srgbClr val="FFFFFF"/>
+                    </a:solidFill>
+                  </a:tcPr>
+                </a:tc>
+                <a:tc>
+                  <a:txBody>
+                    <a:bodyPr wrap="square"/>
+                    <a:lstStyle/>
+                    <a:p>
+                      <a:r>
+                        <a:rPr sz="1100" b="0">
+                          <a:solidFill>
+                            <a:srgbClr val="282828"/>
+                          </a:solidFill>
+                          <a:latin typeface="Arial"/>
+                        </a:rPr>
+                        <a:t>5.0</a:t>
+                      </a:r>
+                    </a:p>
+                  </a:txBody>
+                  <a:tcPr marL="54864" marR="54864" marT="18288" marB="18288">
+                    <a:solidFill>
+                      <a:srgbClr val="FFFFFF"/>
+                    </a:solidFill>
+                  </a:tcPr>
+                </a:tc>
+                <a:tc>
+                  <a:txBody>
+                    <a:bodyPr wrap="square"/>
+                    <a:lstStyle/>
+                    <a:p>
+                      <a:r>
+                        <a:rPr sz="1100" b="0">
+                          <a:solidFill>
+                            <a:srgbClr val="282828"/>
+                          </a:solidFill>
+                          <a:latin typeface="Arial"/>
+                        </a:rPr>
+                        <a:t>19.6 / 18.7</a:t>
+                      </a:r>
+                    </a:p>
+                  </a:txBody>
+                  <a:tcPr marL="54864" marR="54864" marT="18288" marB="18288">
+                    <a:solidFill>
+                      <a:srgbClr val="FFFFFF"/>
+                    </a:solidFill>
+                  </a:tcPr>
+                </a:tc>
+                <a:tc>
+                  <a:txBody>
+                    <a:bodyPr wrap="square"/>
+                    <a:lstStyle/>
+                    <a:p>
+                      <a:r>
+                        <a:rPr sz="1100" b="0">
+                          <a:solidFill>
+                            <a:srgbClr val="282828"/>
+                          </a:solidFill>
+                          <a:latin typeface="Arial"/>
+                        </a:rPr>
+                        <a:t>— (the 1.3 µm stage)</a:t>
+                      </a:r>
+                    </a:p>
+                  </a:txBody>
+                  <a:tcPr marL="54864" marR="54864" marT="18288" marB="18288">
+                    <a:solidFill>
+                      <a:srgbClr val="FFFFFF"/>
+                    </a:solidFill>
+                  </a:tcPr>
+                </a:tc>
+              </a:tr>
+              <a:tr h="468630">
+                <a:tc>
+                  <a:txBody>
+                    <a:bodyPr wrap="square"/>
+                    <a:lstStyle/>
+                    <a:p>
+                      <a:r>
+                        <a:rPr sz="1100" b="0">
+                          <a:solidFill>
+                            <a:srgbClr val="282828"/>
+                          </a:solidFill>
+                          <a:latin typeface="Arial"/>
+                        </a:rPr>
+                        <a:t>COPHI, lock-in camera, heliCam C4, 542 × 512</a:t>
+                      </a:r>
+                    </a:p>
+                  </a:txBody>
+                  <a:tcPr marL="54864" marR="54864" marT="18288" marB="18288">
+                    <a:solidFill>
+                      <a:srgbClr val="ECF1F6"/>
+                    </a:solidFill>
+                  </a:tcPr>
+                </a:tc>
+                <a:tc>
+                  <a:txBody>
+                    <a:bodyPr wrap="square"/>
+                    <a:lstStyle/>
+                    <a:p>
+                      <a:r>
+                        <a:rPr sz="1100" b="0">
+                          <a:solidFill>
+                            <a:srgbClr val="282828"/>
+                          </a:solidFill>
+                          <a:latin typeface="Arial"/>
+                        </a:rPr>
+                        <a:t>512</a:t>
+                      </a:r>
+                    </a:p>
+                  </a:txBody>
+                  <a:tcPr marL="54864" marR="54864" marT="18288" marB="18288">
+                    <a:solidFill>
+                      <a:srgbClr val="ECF1F6"/>
+                    </a:solidFill>
+                  </a:tcPr>
+                </a:tc>
+                <a:tc>
+                  <a:txBody>
+                    <a:bodyPr wrap="square"/>
+                    <a:lstStyle/>
+                    <a:p>
+                      <a:r>
+                        <a:rPr sz="1100" b="0">
+                          <a:solidFill>
+                            <a:srgbClr val="282828"/>
+                          </a:solidFill>
+                          <a:latin typeface="Arial"/>
+                        </a:rPr>
+                        <a:t>5.3</a:t>
+                      </a:r>
+                    </a:p>
+                  </a:txBody>
+                  <a:tcPr marL="54864" marR="54864" marT="18288" marB="18288">
+                    <a:solidFill>
+                      <a:srgbClr val="ECF1F6"/>
+                    </a:solidFill>
+                  </a:tcPr>
+                </a:tc>
+                <a:tc>
+                  <a:txBody>
+                    <a:bodyPr wrap="square"/>
+                    <a:lstStyle/>
+                    <a:p>
+                      <a:r>
+                        <a:rPr sz="1100" b="0">
+                          <a:solidFill>
+                            <a:srgbClr val="282828"/>
+                          </a:solidFill>
+                          <a:latin typeface="Arial"/>
+                        </a:rPr>
+                        <a:t>61.1 / 57.9 per 1 ms I/Q sample</a:t>
+                      </a:r>
+                    </a:p>
+                  </a:txBody>
+                  <a:tcPr marL="54864" marR="54864" marT="18288" marB="18288">
+                    <a:solidFill>
+                      <a:srgbClr val="ECF1F6"/>
+                    </a:solidFill>
+                  </a:tcPr>
+                </a:tc>
+                <a:tc>
+                  <a:txBody>
+                    <a:bodyPr wrap="square"/>
+                    <a:lstStyle/>
+                    <a:p>
+                      <a:r>
+                        <a:rPr sz="1100" b="0">
+                          <a:solidFill>
+                            <a:srgbClr val="282828"/>
+                          </a:solidFill>
+                          <a:latin typeface="Arial"/>
+                        </a:rPr>
+                        <a:t>3.73 / 3.35 (well-capped at 1 kHz; ×1.11 square-wave)</a:t>
                       </a:r>
                     </a:p>
                   </a:txBody>
@@ -4882,7 +4504,7 @@
                           </a:solidFill>
                           <a:latin typeface="Arial"/>
                         </a:rPr>
-                        <a:t>HET, mirror (one-step)</a:t>
+                        <a:t>COPHI, lock-in camera, heliCam C4M, 1024 × 1102</a:t>
                       </a:r>
                     </a:p>
                   </a:txBody>
@@ -4904,7 +4526,7 @@
                           </a:solidFill>
                           <a:latin typeface="Arial"/>
                         </a:rPr>
-                        <a:t>0.9941 / 1 pm</a:t>
+                        <a:t>~1000</a:t>
                       </a:r>
                     </a:p>
                   </a:txBody>
@@ -4926,7 +4548,7 @@
                           </a:solidFill>
                           <a:latin typeface="Arial"/>
                         </a:rPr>
-                        <a:t>0.9949 / 1 pm</a:t>
+                        <a:t>10.6</a:t>
                       </a:r>
                     </a:p>
                   </a:txBody>
@@ -4948,7 +4570,7 @@
                           </a:solidFill>
                           <a:latin typeface="Arial"/>
                         </a:rPr>
-                        <a:t>0.9950 / 118 pm</a:t>
+                        <a:t>(C4 pixel assumed)</a:t>
                       </a:r>
                     </a:p>
                   </a:txBody>
@@ -4958,537 +4580,19 @@
                     </a:solidFill>
                   </a:tcPr>
                 </a:tc>
-              </a:tr>
-              <a:tr h="280035">
-                <a:tc>
-                  <a:txBody>
-                    <a:bodyPr wrap="square"/>
-                    <a:lstStyle/>
-                    <a:p>
-                      <a:r>
-                        <a:rPr sz="1100" b="0">
-                          <a:solidFill>
-                            <a:srgbClr val="282828"/>
-                          </a:solidFill>
-                          <a:latin typeface="Arial"/>
-                        </a:rPr>
-                        <a:t>IFO, mirror (one-step)</a:t>
-                      </a:r>
-                    </a:p>
-                  </a:txBody>
-                  <a:tcPr marL="54864" marR="54864" marT="18288" marB="18288">
-                    <a:solidFill>
-                      <a:srgbClr val="ECF1F6"/>
-                    </a:solidFill>
-                  </a:tcPr>
-                </a:tc>
-                <a:tc>
-                  <a:txBody>
-                    <a:bodyPr wrap="square"/>
-                    <a:lstStyle/>
-                    <a:p>
-                      <a:r>
-                        <a:rPr sz="1100" b="0">
-                          <a:solidFill>
-                            <a:srgbClr val="282828"/>
-                          </a:solidFill>
-                          <a:latin typeface="Arial"/>
-                        </a:rPr>
-                        <a:t>0.9832 / 2 pm</a:t>
-                      </a:r>
-                    </a:p>
-                  </a:txBody>
-                  <a:tcPr marL="54864" marR="54864" marT="18288" marB="18288">
-                    <a:solidFill>
-                      <a:srgbClr val="ECF1F6"/>
-                    </a:solidFill>
-                  </a:tcPr>
-                </a:tc>
-                <a:tc>
-                  <a:txBody>
-                    <a:bodyPr wrap="square"/>
-                    <a:lstStyle/>
-                    <a:p>
-                      <a:r>
-                        <a:rPr sz="1100" b="0">
-                          <a:solidFill>
-                            <a:srgbClr val="282828"/>
-                          </a:solidFill>
-                          <a:latin typeface="Arial"/>
-                        </a:rPr>
-                        <a:t>0.9838 / 2 pm</a:t>
-                      </a:r>
-                    </a:p>
-                  </a:txBody>
-                  <a:tcPr marL="54864" marR="54864" marT="18288" marB="18288">
-                    <a:solidFill>
-                      <a:srgbClr val="ECF1F6"/>
-                    </a:solidFill>
-                  </a:tcPr>
-                </a:tc>
-                <a:tc>
-                  <a:txBody>
-                    <a:bodyPr wrap="square"/>
-                    <a:lstStyle/>
-                    <a:p>
-                      <a:r>
-                        <a:rPr sz="1100" b="0">
-                          <a:solidFill>
-                            <a:srgbClr val="282828"/>
-                          </a:solidFill>
-                          <a:latin typeface="Arial"/>
-                        </a:rPr>
-                        <a:t>0.9844 / 223 pm</a:t>
-                      </a:r>
-                    </a:p>
-                  </a:txBody>
-                  <a:tcPr marL="54864" marR="54864" marT="18288" marB="18288">
-                    <a:solidFill>
-                      <a:srgbClr val="ECF1F6"/>
-                    </a:solidFill>
-                  </a:tcPr>
-                </a:tc>
-              </a:tr>
-              <a:tr h="280035">
-                <a:tc>
-                  <a:txBody>
-                    <a:bodyPr wrap="square"/>
-                    <a:lstStyle/>
-                    <a:p>
-                      <a:r>
-                        <a:rPr sz="1100" b="0">
-                          <a:solidFill>
-                            <a:srgbClr val="282828"/>
-                          </a:solidFill>
-                          <a:latin typeface="Arial"/>
-                        </a:rPr>
-                        <a:t>HET, lens (converged)</a:t>
-                      </a:r>
-                    </a:p>
-                  </a:txBody>
-                  <a:tcPr marL="54864" marR="54864" marT="18288" marB="18288">
-                    <a:solidFill>
-                      <a:srgbClr val="FFFFFF"/>
-                    </a:solidFill>
-                  </a:tcPr>
-                </a:tc>
-                <a:tc>
-                  <a:txBody>
-                    <a:bodyPr wrap="square"/>
-                    <a:lstStyle/>
-                    <a:p>
-                      <a:r>
-                        <a:rPr sz="1100" b="0">
-                          <a:solidFill>
-                            <a:srgbClr val="282828"/>
-                          </a:solidFill>
-                          <a:latin typeface="Arial"/>
-                        </a:rPr>
-                        <a:t>1.0008</a:t>
-                      </a:r>
-                    </a:p>
-                  </a:txBody>
-                  <a:tcPr marL="54864" marR="54864" marT="18288" marB="18288">
-                    <a:solidFill>
-                      <a:srgbClr val="FFFFFF"/>
-                    </a:solidFill>
-                  </a:tcPr>
-                </a:tc>
-                <a:tc>
-                  <a:txBody>
-                    <a:bodyPr wrap="square"/>
-                    <a:lstStyle/>
-                    <a:p>
-                      <a:r>
-                        <a:rPr sz="1100" b="0">
-                          <a:solidFill>
-                            <a:srgbClr val="282828"/>
-                          </a:solidFill>
-                          <a:latin typeface="Arial"/>
-                        </a:rPr>
-                        <a:t>1.0022</a:t>
-                      </a:r>
-                    </a:p>
-                  </a:txBody>
-                  <a:tcPr marL="54864" marR="54864" marT="18288" marB="18288">
-                    <a:solidFill>
-                      <a:srgbClr val="FFFFFF"/>
-                    </a:solidFill>
-                  </a:tcPr>
-                </a:tc>
-                <a:tc>
-                  <a:txBody>
-                    <a:bodyPr wrap="square"/>
-                    <a:lstStyle/>
-                    <a:p>
-                      <a:r>
-                        <a:rPr sz="1100" b="0">
-                          <a:solidFill>
-                            <a:srgbClr val="282828"/>
-                          </a:solidFill>
-                          <a:latin typeface="Arial"/>
-                        </a:rPr>
-                        <a:t>1.0024</a:t>
-                      </a:r>
-                    </a:p>
-                  </a:txBody>
-                  <a:tcPr marL="54864" marR="54864" marT="18288" marB="18288">
-                    <a:solidFill>
-                      <a:srgbClr val="FFFFFF"/>
-                    </a:solidFill>
-                  </a:tcPr>
-                </a:tc>
-              </a:tr>
-              <a:tr h="280035">
-                <a:tc>
-                  <a:txBody>
-                    <a:bodyPr wrap="square"/>
-                    <a:lstStyle/>
-                    <a:p>
-                      <a:r>
-                        <a:rPr sz="1100" b="0">
-                          <a:solidFill>
-                            <a:srgbClr val="282828"/>
-                          </a:solidFill>
-                          <a:latin typeface="Arial"/>
-                        </a:rPr>
-                        <a:t>HET, mirror (converged)</a:t>
-                      </a:r>
-                    </a:p>
-                  </a:txBody>
-                  <a:tcPr marL="54864" marR="54864" marT="18288" marB="18288">
-                    <a:solidFill>
-                      <a:srgbClr val="ECF1F6"/>
-                    </a:solidFill>
-                  </a:tcPr>
-                </a:tc>
-                <a:tc>
-                  <a:txBody>
-                    <a:bodyPr wrap="square"/>
-                    <a:lstStyle/>
-                    <a:p>
-                      <a:r>
-                        <a:rPr sz="1100" b="0">
-                          <a:solidFill>
-                            <a:srgbClr val="282828"/>
-                          </a:solidFill>
-                          <a:latin typeface="Arial"/>
-                        </a:rPr>
-                        <a:t>1.0000</a:t>
-                      </a:r>
-                    </a:p>
-                  </a:txBody>
-                  <a:tcPr marL="54864" marR="54864" marT="18288" marB="18288">
-                    <a:solidFill>
-                      <a:srgbClr val="ECF1F6"/>
-                    </a:solidFill>
-                  </a:tcPr>
-                </a:tc>
-                <a:tc>
-                  <a:txBody>
-                    <a:bodyPr wrap="square"/>
-                    <a:lstStyle/>
-                    <a:p>
-                      <a:r>
-                        <a:rPr sz="1100" b="0">
-                          <a:solidFill>
-                            <a:srgbClr val="282828"/>
-                          </a:solidFill>
-                          <a:latin typeface="Arial"/>
-                        </a:rPr>
-                        <a:t>1.0005</a:t>
-                      </a:r>
-                    </a:p>
-                  </a:txBody>
-                  <a:tcPr marL="54864" marR="54864" marT="18288" marB="18288">
-                    <a:solidFill>
-                      <a:srgbClr val="ECF1F6"/>
-                    </a:solidFill>
-                  </a:tcPr>
-                </a:tc>
-                <a:tc>
-                  <a:txBody>
-                    <a:bodyPr wrap="square"/>
-                    <a:lstStyle/>
-                    <a:p>
-                      <a:r>
-                        <a:rPr sz="1100" b="0">
-                          <a:solidFill>
-                            <a:srgbClr val="282828"/>
-                          </a:solidFill>
-                          <a:latin typeface="Arial"/>
-                        </a:rPr>
-                        <a:t>1.0005</a:t>
-                      </a:r>
-                    </a:p>
-                  </a:txBody>
-                  <a:tcPr marL="54864" marR="54864" marT="18288" marB="18288">
-                    <a:solidFill>
-                      <a:srgbClr val="ECF1F6"/>
-                    </a:solidFill>
-                  </a:tcPr>
-                </a:tc>
-              </a:tr>
-              <a:tr h="280035">
-                <a:tc>
-                  <a:txBody>
-                    <a:bodyPr wrap="square"/>
-                    <a:lstStyle/>
-                    <a:p>
-                      <a:r>
-                        <a:rPr sz="1100" b="0">
-                          <a:solidFill>
-                            <a:srgbClr val="282828"/>
-                          </a:solidFill>
-                          <a:latin typeface="Arial"/>
-                        </a:rPr>
-                        <a:t>IFO, lens (converged)</a:t>
-                      </a:r>
-                    </a:p>
-                  </a:txBody>
-                  <a:tcPr marL="54864" marR="54864" marT="18288" marB="18288">
-                    <a:solidFill>
-                      <a:srgbClr val="FFFFFF"/>
-                    </a:solidFill>
-                  </a:tcPr>
-                </a:tc>
-                <a:tc>
-                  <a:txBody>
-                    <a:bodyPr wrap="square"/>
-                    <a:lstStyle/>
-                    <a:p>
-                      <a:r>
-                        <a:rPr sz="1100" b="0">
-                          <a:solidFill>
-                            <a:srgbClr val="282828"/>
-                          </a:solidFill>
-                          <a:latin typeface="Arial"/>
-                        </a:rPr>
-                        <a:t>1.0064</a:t>
-                      </a:r>
-                    </a:p>
-                  </a:txBody>
-                  <a:tcPr marL="54864" marR="54864" marT="18288" marB="18288">
-                    <a:solidFill>
-                      <a:srgbClr val="FFFFFF"/>
-                    </a:solidFill>
-                  </a:tcPr>
-                </a:tc>
-                <a:tc>
-                  <a:txBody>
-                    <a:bodyPr wrap="square"/>
-                    <a:lstStyle/>
-                    <a:p>
-                      <a:r>
-                        <a:rPr sz="1100" b="0">
-                          <a:solidFill>
-                            <a:srgbClr val="282828"/>
-                          </a:solidFill>
-                          <a:latin typeface="Arial"/>
-                        </a:rPr>
-                        <a:t>1.0106</a:t>
-                      </a:r>
-                    </a:p>
-                  </a:txBody>
-                  <a:tcPr marL="54864" marR="54864" marT="18288" marB="18288">
-                    <a:solidFill>
-                      <a:srgbClr val="FFFFFF"/>
-                    </a:solidFill>
-                  </a:tcPr>
-                </a:tc>
-                <a:tc>
-                  <a:txBody>
-                    <a:bodyPr wrap="square"/>
-                    <a:lstStyle/>
-                    <a:p>
-                      <a:r>
-                        <a:rPr sz="1100" b="0">
-                          <a:solidFill>
-                            <a:srgbClr val="282828"/>
-                          </a:solidFill>
-                          <a:latin typeface="Arial"/>
-                        </a:rPr>
-                        <a:t>1.0112</a:t>
-                      </a:r>
-                    </a:p>
-                  </a:txBody>
-                  <a:tcPr marL="54864" marR="54864" marT="18288" marB="18288">
-                    <a:solidFill>
-                      <a:srgbClr val="FFFFFF"/>
-                    </a:solidFill>
-                  </a:tcPr>
-                </a:tc>
-              </a:tr>
-              <a:tr h="280035">
-                <a:tc>
-                  <a:txBody>
-                    <a:bodyPr wrap="square"/>
-                    <a:lstStyle/>
-                    <a:p>
-                      <a:r>
-                        <a:rPr sz="1100" b="0">
-                          <a:solidFill>
-                            <a:srgbClr val="282828"/>
-                          </a:solidFill>
-                          <a:latin typeface="Arial"/>
-                        </a:rPr>
-                        <a:t>IFO, mirror (converged)</a:t>
-                      </a:r>
-                    </a:p>
-                  </a:txBody>
-                  <a:tcPr marL="54864" marR="54864" marT="18288" marB="18288">
-                    <a:solidFill>
-                      <a:srgbClr val="ECF1F6"/>
-                    </a:solidFill>
-                  </a:tcPr>
-                </a:tc>
-                <a:tc>
-                  <a:txBody>
-                    <a:bodyPr wrap="square"/>
-                    <a:lstStyle/>
-                    <a:p>
-                      <a:r>
-                        <a:rPr sz="1100" b="0">
-                          <a:solidFill>
-                            <a:srgbClr val="282828"/>
-                          </a:solidFill>
-                          <a:latin typeface="Arial"/>
-                        </a:rPr>
-                        <a:t>0.9887</a:t>
-                      </a:r>
-                    </a:p>
-                  </a:txBody>
-                  <a:tcPr marL="54864" marR="54864" marT="18288" marB="18288">
-                    <a:solidFill>
-                      <a:srgbClr val="ECF1F6"/>
-                    </a:solidFill>
-                  </a:tcPr>
-                </a:tc>
-                <a:tc>
-                  <a:txBody>
-                    <a:bodyPr wrap="square"/>
-                    <a:lstStyle/>
-                    <a:p>
-                      <a:r>
-                        <a:rPr sz="1100" b="0">
-                          <a:solidFill>
-                            <a:srgbClr val="282828"/>
-                          </a:solidFill>
-                          <a:latin typeface="Arial"/>
-                        </a:rPr>
-                        <a:t>0.9892</a:t>
-                      </a:r>
-                    </a:p>
-                  </a:txBody>
-                  <a:tcPr marL="54864" marR="54864" marT="18288" marB="18288">
-                    <a:solidFill>
-                      <a:srgbClr val="ECF1F6"/>
-                    </a:solidFill>
-                  </a:tcPr>
-                </a:tc>
-                <a:tc>
-                  <a:txBody>
-                    <a:bodyPr wrap="square"/>
-                    <a:lstStyle/>
-                    <a:p>
-                      <a:r>
-                        <a:rPr sz="1100" b="0">
-                          <a:solidFill>
-                            <a:srgbClr val="282828"/>
-                          </a:solidFill>
-                          <a:latin typeface="Arial"/>
-                        </a:rPr>
-                        <a:t>0.9896</a:t>
-                      </a:r>
-                    </a:p>
-                  </a:txBody>
-                  <a:tcPr marL="54864" marR="54864" marT="18288" marB="18288">
-                    <a:solidFill>
-                      <a:srgbClr val="ECF1F6"/>
-                    </a:solidFill>
-                  </a:tcPr>
-                </a:tc>
-              </a:tr>
-              <a:tr h="280035">
-                <a:tc>
-                  <a:txBody>
-                    <a:bodyPr wrap="square"/>
-                    <a:lstStyle/>
-                    <a:p>
-                      <a:r>
-                        <a:rPr sz="1100" b="0">
-                          <a:solidFill>
-                            <a:srgbClr val="282828"/>
-                          </a:solidFill>
-                          <a:latin typeface="Arial"/>
-                        </a:rPr>
-                        <a:t>HET, lock-in camera (record, noise-free)</a:t>
-                      </a:r>
-                    </a:p>
-                  </a:txBody>
-                  <a:tcPr marL="54864" marR="54864" marT="18288" marB="18288">
-                    <a:solidFill>
-                      <a:srgbClr val="FFFFFF"/>
-                    </a:solidFill>
-                  </a:tcPr>
-                </a:tc>
-                <a:tc>
-                  <a:txBody>
-                    <a:bodyPr wrap="square"/>
-                    <a:lstStyle/>
-                    <a:p>
-                      <a:r>
-                        <a:rPr sz="1100" b="0">
-                          <a:solidFill>
-                            <a:srgbClr val="282828"/>
-                          </a:solidFill>
-                          <a:latin typeface="Arial"/>
-                        </a:rPr>
-                        <a:t>converged 1.0000</a:t>
-                      </a:r>
-                    </a:p>
-                  </a:txBody>
-                  <a:tcPr marL="54864" marR="54864" marT="18288" marB="18288">
-                    <a:solidFill>
-                      <a:srgbClr val="FFFFFF"/>
-                    </a:solidFill>
-                  </a:tcPr>
-                </a:tc>
-                <a:tc>
-                  <a:txBody>
-                    <a:bodyPr wrap="square"/>
-                    <a:lstStyle/>
-                    <a:p>
-                      <a:r>
-                        <a:rPr sz="1100" b="0">
-                          <a:solidFill>
-                            <a:srgbClr val="282828"/>
-                          </a:solidFill>
-                          <a:latin typeface="Arial"/>
-                        </a:rPr>
-                        <a:t>1.0006</a:t>
-                      </a:r>
-                    </a:p>
-                  </a:txBody>
-                  <a:tcPr marL="54864" marR="54864" marT="18288" marB="18288">
-                    <a:solidFill>
-                      <a:srgbClr val="FFFFFF"/>
-                    </a:solidFill>
-                  </a:tcPr>
-                </a:tc>
-                <a:tc>
-                  <a:txBody>
-                    <a:bodyPr wrap="square"/>
-                    <a:lstStyle/>
-                    <a:p>
-                      <a:r>
-                        <a:rPr sz="1100" b="0">
-                          <a:solidFill>
-                            <a:srgbClr val="282828"/>
-                          </a:solidFill>
-                          <a:latin typeface="Arial"/>
-                        </a:rPr>
-                        <a:t>1.0005 — the same reading, the same algebra</a:t>
+                <a:tc>
+                  <a:txBody>
+                    <a:bodyPr wrap="square"/>
+                    <a:lstStyle/>
+                    <a:p>
+                      <a:r>
+                        <a:rPr sz="1100" b="0">
+                          <a:solidFill>
+                            <a:srgbClr val="282828"/>
+                          </a:solidFill>
+                          <a:latin typeface="Arial"/>
+                        </a:rPr>
+                        <a:t>same (well × rate per element)</a:t>
                       </a:r>
                     </a:p>
                   </a:txBody>
@@ -5511,7 +4615,7 @@
         </p:nvSpPr>
         <p:spPr>
           <a:xfrm>
-            <a:off x="411480" y="4135374"/>
+            <a:off x="411480" y="4628007"/>
             <a:ext cx="11368735" cy="274320"/>
           </a:xfrm>
           <a:prstGeom prst="rect">
@@ -5546,7 +4650,7 @@
                 </a:solidFill>
                 <a:latin typeface="Arial"/>
               </a:rPr>
-              <a:t>The one-step rows sit 0.5 % low for HET on both rigs — the estimator, not the reading:</a:t>
+              <a:t>Resolution is free down to ~1.5 pixels per actuator:</a:t>
             </a:r>
             <a:r>
               <a:rPr sz="1500" b="0">
@@ -5555,11 +4659,43 @@
                 </a:solidFill>
                 <a:latin typeface="Arial"/>
               </a:rPr>
-              <a:t> the reading is exact (a 1.000 nm poke reads at slope 1.000000); the 0.5 % is the one-step Tikhonov shrinkage at the record's λ_m = 10⁻³ (1.0007 at 10⁻⁵) — the "matrix bias" every gauge carries, now a number.</a:t>
-            </a:r>
-          </a:p>
-          <a:p>
-            <a:pPr>
+              <a:t> a camera's photons per second are pixels × well × rate over the pupil; binning finer pixels onto the lattice changes only the read noise per sample.</a:t>
+            </a:r>
+          </a:p>
+          <a:p>
+            <a:pPr marL="594360" indent="-137160">
+              <a:spcAft>
+                <a:spcPts val="500"/>
+              </a:spcAft>
+            </a:pPr>
+            <a:r>
+              <a:rPr sz="1300" b="0">
+                <a:solidFill>
+                  <a:srgbClr val="6E6E6E"/>
+                </a:solidFill>
+                <a:latin typeface="Arial"/>
+              </a:rPr>
+              <a:t>–  measured (slide 19): 1 px per actuator fails the single-actuator row, 1.5–2 px holds at 1.6–2× the time, 3.3 and 4 are the same — 5 px per actuator is the floor on this table</a:t>
+            </a:r>
+          </a:p>
+          <a:p>
+            <a:pPr marL="594360" indent="-137160">
+              <a:spcAft>
+                <a:spcPts val="500"/>
+              </a:spcAft>
+            </a:pPr>
+            <a:r>
+              <a:rPr sz="1300" b="0">
+                <a:solidFill>
+                  <a:srgbClr val="6E6E6E"/>
+                </a:solidFill>
+                <a:latin typeface="Arial"/>
+              </a:rPr>
+              <a:t>–  nothing coarser is modeled (ruling: every mode of interest is commanded at full actuator resolution)</a:t>
+            </a:r>
+          </a:p>
+          <a:p>
+            <a:pPr marL="0" indent="0">
               <a:spcAft>
                 <a:spcPts val="600"/>
               </a:spcAft>
@@ -5580,7 +4716,7 @@
                 </a:solidFill>
                 <a:latin typeface="Arial"/>
               </a:rPr>
-              <a:t>Driven to convergence (the servo use), HET reads exactly on the mirror rig, and the IFO shows its polarization gain in the open:</a:t>
+              <a:t>Cameras were put on the model grid by binning</a:t>
             </a:r>
             <a:r>
               <a:rPr sz="1500" b="0">
@@ -5589,7 +4725,7 @@
                 </a:solidFill>
                 <a:latin typeface="Arial"/>
               </a:rPr>
-              <a:t> IFO/HET = 1.006–1.009 (lens rig), 0.989 (mirror rig); the IFO's lens-rig "1.000" was polarization gain cancelling the shrinkage.</a:t>
+              <a:t> (well × k², read × k): the pm-per-reading rows are the full camera's photons at the model's sampling.</a:t>
             </a:r>
           </a:p>
         </p:txBody>
@@ -5602,7 +4738,7 @@
         </p:nvSpPr>
         <p:spPr>
           <a:xfrm>
-            <a:off x="411480" y="5938266"/>
+            <a:off x="411480" y="6834505"/>
             <a:ext cx="11368735" cy="274320"/>
           </a:xfrm>
           <a:prstGeom prst="rect">
@@ -5628,7 +4764,7 @@
                 </a:solidFill>
                 <a:latin typeface="Arial"/>
               </a:rPr>
-              <a:t>Stage battery (runs/battery_{lens,oap}, the IFO column = redo96_&lt;optics&gt;ph: tail md5, lit 6948, seed 7, the 64-state matrix on the surface); the gain probe (runs/gainprobe_lens); the converged estimator (dm_gauge_lib/dmg_converge, gate tConvergedEst 4/4; runs/conv_H_, tg_psi_dm96_oap/runs/conv_I_; H and I are the reading-class letters in the records); the one-step rows reproduce the record to the digit.</a:t>
+              <a:t>Stage noise and format; the pupil in pixels is the camera's short side filled by the pupil image (the tail's magnification is set for it); the model's 315 px = 157.45 px radius (stage bench).</a:t>
             </a:r>
           </a:p>
         </p:txBody>
@@ -5685,7 +4821,7 @@
                 </a:solidFill>
                 <a:latin typeface="Arial"/>
               </a:rPr>
-              <a:t>Photons for 1 pm, camera by camera</a:t>
+              <a:t>Performance side by side: HET against the IFO on the same surface</a:t>
             </a:r>
           </a:p>
           <a:p>
@@ -5701,7 +4837,7 @@
                 </a:solidFill>
                 <a:latin typeface="Arial"/>
               </a:rPr>
-              <a:t>A heterodyne read is photon-limited at full well: pixels × well × frame rate decides; Feng's baseline camera is seven minutes per picometer, the deepest-well 1k global-shutter part is 40 seconds, the lock-in 3.4 s</a:t>
+              <a:t>HET = the heterodyne (COPHI) reading; IFO = the record's Twyman-Green polarization interferometer.  Same seed, surface and matrix: HET matches the IFO's floor, halves its mirror-rig random-surface error, and is exact where the IFO is not</a:t>
             </a:r>
           </a:p>
         </p:txBody>
@@ -5759,8 +4895,8 @@
           <p:nvPr/>
         </p:nvGraphicFramePr>
         <p:xfrm>
-          <a:off x="411480" y="1298448"/>
-          <a:ext cx="5806438" cy="4509135"/>
+          <a:off x="411480" y="1188720"/>
+          <a:ext cx="11368734" cy="2800350"/>
         </p:xfrm>
         <a:graphic>
           <a:graphicData uri="http://schemas.openxmlformats.org/drawingml/2006/table">
@@ -5769,14 +4905,12 @@
                 <a:tableStyleId>{5C22544A-7EE6-4342-B048-85BDC9FD1C3A}</a:tableStyleId>
               </a:tblPr>
               <a:tblGrid>
-                <a:gridCol w="1363792"/>
-                <a:gridCol w="936580"/>
-                <a:gridCol w="805130"/>
-                <a:gridCol w="377918"/>
-                <a:gridCol w="1232342"/>
-                <a:gridCol w="1090676"/>
+                <a:gridCol w="3065461"/>
+                <a:gridCol w="2682278"/>
+                <a:gridCol w="2325624"/>
+                <a:gridCol w="3295371"/>
               </a:tblGrid>
-              <a:tr h="1034415">
+              <a:tr h="280035">
                 <a:tc>
                   <a:txBody>
                     <a:bodyPr wrap="square"/>
@@ -5789,7 +4923,7 @@
                           </a:solidFill>
                           <a:latin typeface="Arial"/>
                         </a:rPr>
-                        <a:t>camera (survey, to verify)</a:t>
+                        <a:t>reading, rig (estimator)</a:t>
                       </a:r>
                     </a:p>
                   </a:txBody>
@@ -5811,7 +4945,7 @@
                           </a:solidFill>
                           <a:latin typeface="Arial"/>
                         </a:rPr>
-                        <a:t>read noise r, e⁻ (σ penalty √((I₀ + r²)/I₀) at half well)</a:t>
+                        <a:t>10 nm on one actuator: gain / floor</a:t>
                       </a:r>
                     </a:p>
                   </a:txBody>
@@ -5833,7 +4967,7 @@
                           </a:solidFill>
                           <a:latin typeface="Arial"/>
                         </a:rPr>
-                        <a:t>pm per reading, lens / mirror</a:t>
+                        <a:t>1 nm on the grid: gain / floor</a:t>
                       </a:r>
                     </a:p>
                   </a:txBody>
@@ -5855,7 +4989,7 @@
                           </a:solidFill>
                           <a:latin typeface="Arial"/>
                         </a:rPr>
-                        <a:t>SNR at 1 pm per reading</a:t>
+                        <a:t>dense random 10 nm: gain / error</a:t>
                       </a:r>
                     </a:p>
                   </a:txBody>
@@ -5865,65 +4999,21 @@
                     </a:solidFill>
                   </a:tcPr>
                 </a:tc>
-                <a:tc>
-                  <a:txBody>
-                    <a:bodyPr wrap="square"/>
-                    <a:lstStyle/>
-                    <a:p>
-                      <a:r>
-                        <a:rPr sz="1100" b="1">
-                          <a:solidFill>
-                            <a:srgbClr val="FFFFFF"/>
-                          </a:solidFill>
-                          <a:latin typeface="Arial"/>
-                        </a:rPr>
-                        <a:t>seconds to SNR 1 at 1 pm, lens / mirror</a:t>
-                      </a:r>
-                    </a:p>
-                  </a:txBody>
-                  <a:tcPr marL="54864" marR="54864" marT="18288" marB="18288">
-                    <a:solidFill>
-                      <a:srgbClr val="1F4E79"/>
-                    </a:solidFill>
-                  </a:tcPr>
-                </a:tc>
-                <a:tc>
-                  <a:txBody>
-                    <a:bodyPr wrap="square"/>
-                    <a:lstStyle/>
-                    <a:p>
-                      <a:r>
-                        <a:rPr sz="1100" b="1">
-                          <a:solidFill>
-                            <a:srgbClr val="FFFFFF"/>
-                          </a:solidFill>
-                          <a:latin typeface="Arial"/>
-                        </a:rPr>
-                        <a:t>to SNR 10</a:t>
-                      </a:r>
-                    </a:p>
-                  </a:txBody>
-                  <a:tcPr marL="54864" marR="54864" marT="18288" marB="18288">
-                    <a:solidFill>
-                      <a:srgbClr val="1F4E79"/>
-                    </a:solidFill>
-                  </a:tcPr>
-                </a:tc>
               </a:tr>
-              <a:tr h="468630">
-                <a:tc>
-                  <a:txBody>
-                    <a:bodyPr wrap="square"/>
-                    <a:lstStyle/>
-                    <a:p>
-                      <a:r>
-                        <a:rPr sz="1100" b="0">
-                          <a:solidFill>
-                            <a:srgbClr val="282828"/>
-                          </a:solidFill>
-                          <a:latin typeface="Arial"/>
-                        </a:rPr>
-                        <a:t>as proposed: 1k², 60 ke, 30 fps</a:t>
+              <a:tr h="280035">
+                <a:tc>
+                  <a:txBody>
+                    <a:bodyPr wrap="square"/>
+                    <a:lstStyle/>
+                    <a:p>
+                      <a:r>
+                        <a:rPr sz="1100" b="0">
+                          <a:solidFill>
+                            <a:srgbClr val="282828"/>
+                          </a:solidFill>
+                          <a:latin typeface="Arial"/>
+                        </a:rPr>
+                        <a:t>HET (COPHI), lens (one-step)</a:t>
                       </a:r>
                     </a:p>
                   </a:txBody>
@@ -5945,7 +5035,7 @@
                           </a:solidFill>
                           <a:latin typeface="Arial"/>
                         </a:rPr>
-                        <a:t>5 assumed (1.000)</a:t>
+                        <a:t>0.9947 / 2 pm</a:t>
                       </a:r>
                     </a:p>
                   </a:txBody>
@@ -5967,7 +5057,7 @@
                           </a:solidFill>
                           <a:latin typeface="Arial"/>
                         </a:rPr>
-                        <a:t>57.7 / 53.7</a:t>
+                        <a:t>0.9964 / 2 pm</a:t>
                       </a:r>
                     </a:p>
                   </a:txBody>
@@ -5989,7 +5079,7 @@
                           </a:solidFill>
                           <a:latin typeface="Arial"/>
                         </a:rPr>
-                        <a:t>0.017</a:t>
+                        <a:t>0.9967 / 180 pm</a:t>
                       </a:r>
                     </a:p>
                   </a:txBody>
@@ -5999,19 +5089,111 @@
                     </a:solidFill>
                   </a:tcPr>
                 </a:tc>
-                <a:tc>
-                  <a:txBody>
-                    <a:bodyPr wrap="square"/>
-                    <a:lstStyle/>
-                    <a:p>
-                      <a:r>
-                        <a:rPr sz="1100" b="0">
-                          <a:solidFill>
-                            <a:srgbClr val="282828"/>
-                          </a:solidFill>
-                          <a:latin typeface="Arial"/>
-                        </a:rPr>
-                        <a:t>443 / 385 (≈ 7 min)</a:t>
+              </a:tr>
+              <a:tr h="280035">
+                <a:tc>
+                  <a:txBody>
+                    <a:bodyPr wrap="square"/>
+                    <a:lstStyle/>
+                    <a:p>
+                      <a:r>
+                        <a:rPr sz="1100" b="0">
+                          <a:solidFill>
+                            <a:srgbClr val="282828"/>
+                          </a:solidFill>
+                          <a:latin typeface="Arial"/>
+                        </a:rPr>
+                        <a:t>IFO (Twyman-Green), lens (one-step)</a:t>
+                      </a:r>
+                    </a:p>
+                  </a:txBody>
+                  <a:tcPr marL="54864" marR="54864" marT="18288" marB="18288">
+                    <a:solidFill>
+                      <a:srgbClr val="ECF1F6"/>
+                    </a:solidFill>
+                  </a:tcPr>
+                </a:tc>
+                <a:tc>
+                  <a:txBody>
+                    <a:bodyPr wrap="square"/>
+                    <a:lstStyle/>
+                    <a:p>
+                      <a:r>
+                        <a:rPr sz="1100" b="0">
+                          <a:solidFill>
+                            <a:srgbClr val="282828"/>
+                          </a:solidFill>
+                          <a:latin typeface="Arial"/>
+                        </a:rPr>
+                        <a:t>1.0001 / 1 pm</a:t>
+                      </a:r>
+                    </a:p>
+                  </a:txBody>
+                  <a:tcPr marL="54864" marR="54864" marT="18288" marB="18288">
+                    <a:solidFill>
+                      <a:srgbClr val="ECF1F6"/>
+                    </a:solidFill>
+                  </a:tcPr>
+                </a:tc>
+                <a:tc>
+                  <a:txBody>
+                    <a:bodyPr wrap="square"/>
+                    <a:lstStyle/>
+                    <a:p>
+                      <a:r>
+                        <a:rPr sz="1100" b="0">
+                          <a:solidFill>
+                            <a:srgbClr val="282828"/>
+                          </a:solidFill>
+                          <a:latin typeface="Arial"/>
+                        </a:rPr>
+                        <a:t>1.0046 / 2 pm</a:t>
+                      </a:r>
+                    </a:p>
+                  </a:txBody>
+                  <a:tcPr marL="54864" marR="54864" marT="18288" marB="18288">
+                    <a:solidFill>
+                      <a:srgbClr val="ECF1F6"/>
+                    </a:solidFill>
+                  </a:tcPr>
+                </a:tc>
+                <a:tc>
+                  <a:txBody>
+                    <a:bodyPr wrap="square"/>
+                    <a:lstStyle/>
+                    <a:p>
+                      <a:r>
+                        <a:rPr sz="1100" b="0">
+                          <a:solidFill>
+                            <a:srgbClr val="282828"/>
+                          </a:solidFill>
+                          <a:latin typeface="Arial"/>
+                        </a:rPr>
+                        <a:t>1.0053 / 179 pm</a:t>
+                      </a:r>
+                    </a:p>
+                  </a:txBody>
+                  <a:tcPr marL="54864" marR="54864" marT="18288" marB="18288">
+                    <a:solidFill>
+                      <a:srgbClr val="ECF1F6"/>
+                    </a:solidFill>
+                  </a:tcPr>
+                </a:tc>
+              </a:tr>
+              <a:tr h="280035">
+                <a:tc>
+                  <a:txBody>
+                    <a:bodyPr wrap="square"/>
+                    <a:lstStyle/>
+                    <a:p>
+                      <a:r>
+                        <a:rPr sz="1100" b="0">
+                          <a:solidFill>
+                            <a:srgbClr val="282828"/>
+                          </a:solidFill>
+                          <a:latin typeface="Arial"/>
+                        </a:rPr>
+                        <a:t>HET, mirror (one-step)</a:t>
                       </a:r>
                     </a:p>
                   </a:txBody>
@@ -6033,7 +5215,7 @@
                           </a:solidFill>
                           <a:latin typeface="Arial"/>
                         </a:rPr>
-                        <a:t>12 / 11 h</a:t>
+                        <a:t>0.9941 / 1 pm</a:t>
                       </a:r>
                     </a:p>
                   </a:txBody>
@@ -6043,21 +5225,65 @@
                     </a:solidFill>
                   </a:tcPr>
                 </a:tc>
+                <a:tc>
+                  <a:txBody>
+                    <a:bodyPr wrap="square"/>
+                    <a:lstStyle/>
+                    <a:p>
+                      <a:r>
+                        <a:rPr sz="1100" b="0">
+                          <a:solidFill>
+                            <a:srgbClr val="282828"/>
+                          </a:solidFill>
+                          <a:latin typeface="Arial"/>
+                        </a:rPr>
+                        <a:t>0.9949 / 1 pm</a:t>
+                      </a:r>
+                    </a:p>
+                  </a:txBody>
+                  <a:tcPr marL="54864" marR="54864" marT="18288" marB="18288">
+                    <a:solidFill>
+                      <a:srgbClr val="FFFFFF"/>
+                    </a:solidFill>
+                  </a:tcPr>
+                </a:tc>
+                <a:tc>
+                  <a:txBody>
+                    <a:bodyPr wrap="square"/>
+                    <a:lstStyle/>
+                    <a:p>
+                      <a:r>
+                        <a:rPr sz="1100" b="0">
+                          <a:solidFill>
+                            <a:srgbClr val="282828"/>
+                          </a:solidFill>
+                          <a:latin typeface="Arial"/>
+                        </a:rPr>
+                        <a:t>0.9950 / 118 pm</a:t>
+                      </a:r>
+                    </a:p>
+                  </a:txBody>
+                  <a:tcPr marL="54864" marR="54864" marT="18288" marB="18288">
+                    <a:solidFill>
+                      <a:srgbClr val="FFFFFF"/>
+                    </a:solidFill>
+                  </a:tcPr>
+                </a:tc>
               </a:tr>
-              <a:tr h="657225">
-                <a:tc>
-                  <a:txBody>
-                    <a:bodyPr wrap="square"/>
-                    <a:lstStyle/>
-                    <a:p>
-                      <a:r>
-                        <a:rPr sz="1100" b="0">
-                          <a:solidFill>
-                            <a:srgbClr val="282828"/>
-                          </a:solidFill>
-                          <a:latin typeface="Arial"/>
-                        </a:rPr>
-                        <a:t>Photonfocus MV1-D1024E, 200 ke, 150 fps</a:t>
+              <a:tr h="280035">
+                <a:tc>
+                  <a:txBody>
+                    <a:bodyPr wrap="square"/>
+                    <a:lstStyle/>
+                    <a:p>
+                      <a:r>
+                        <a:rPr sz="1100" b="0">
+                          <a:solidFill>
+                            <a:srgbClr val="282828"/>
+                          </a:solidFill>
+                          <a:latin typeface="Arial"/>
+                        </a:rPr>
+                        <a:t>IFO, mirror (one-step)</a:t>
                       </a:r>
                     </a:p>
                   </a:txBody>
@@ -6079,7 +5305,7 @@
                           </a:solidFill>
                           <a:latin typeface="Arial"/>
                         </a:rPr>
-                        <a:t>220 (1.22)</a:t>
+                        <a:t>0.9832 / 2 pm</a:t>
                       </a:r>
                     </a:p>
                   </a:txBody>
@@ -6101,7 +5327,7 @@
                           </a:solidFill>
                           <a:latin typeface="Arial"/>
                         </a:rPr>
-                        <a:t>39.5 / 36.5</a:t>
+                        <a:t>0.9838 / 2 pm</a:t>
                       </a:r>
                     </a:p>
                   </a:txBody>
@@ -6123,7 +5349,7 @@
                           </a:solidFill>
                           <a:latin typeface="Arial"/>
                         </a:rPr>
-                        <a:t>0.025</a:t>
+                        <a:t>0.9844 / 223 pm</a:t>
                       </a:r>
                     </a:p>
                   </a:txBody>
@@ -6133,19 +5359,111 @@
                     </a:solidFill>
                   </a:tcPr>
                 </a:tc>
-                <a:tc>
-                  <a:txBody>
-                    <a:bodyPr wrap="square"/>
-                    <a:lstStyle/>
-                    <a:p>
-                      <a:r>
-                        <a:rPr sz="1100" b="0">
-                          <a:solidFill>
-                            <a:srgbClr val="282828"/>
-                          </a:solidFill>
-                          <a:latin typeface="Arial"/>
-                        </a:rPr>
-                        <a:t>42 / 36</a:t>
+              </a:tr>
+              <a:tr h="280035">
+                <a:tc>
+                  <a:txBody>
+                    <a:bodyPr wrap="square"/>
+                    <a:lstStyle/>
+                    <a:p>
+                      <a:r>
+                        <a:rPr sz="1100" b="0">
+                          <a:solidFill>
+                            <a:srgbClr val="282828"/>
+                          </a:solidFill>
+                          <a:latin typeface="Arial"/>
+                        </a:rPr>
+                        <a:t>HET, lens (converged)</a:t>
+                      </a:r>
+                    </a:p>
+                  </a:txBody>
+                  <a:tcPr marL="54864" marR="54864" marT="18288" marB="18288">
+                    <a:solidFill>
+                      <a:srgbClr val="FFFFFF"/>
+                    </a:solidFill>
+                  </a:tcPr>
+                </a:tc>
+                <a:tc>
+                  <a:txBody>
+                    <a:bodyPr wrap="square"/>
+                    <a:lstStyle/>
+                    <a:p>
+                      <a:r>
+                        <a:rPr sz="1100" b="0">
+                          <a:solidFill>
+                            <a:srgbClr val="282828"/>
+                          </a:solidFill>
+                          <a:latin typeface="Arial"/>
+                        </a:rPr>
+                        <a:t>1.0008</a:t>
+                      </a:r>
+                    </a:p>
+                  </a:txBody>
+                  <a:tcPr marL="54864" marR="54864" marT="18288" marB="18288">
+                    <a:solidFill>
+                      <a:srgbClr val="FFFFFF"/>
+                    </a:solidFill>
+                  </a:tcPr>
+                </a:tc>
+                <a:tc>
+                  <a:txBody>
+                    <a:bodyPr wrap="square"/>
+                    <a:lstStyle/>
+                    <a:p>
+                      <a:r>
+                        <a:rPr sz="1100" b="0">
+                          <a:solidFill>
+                            <a:srgbClr val="282828"/>
+                          </a:solidFill>
+                          <a:latin typeface="Arial"/>
+                        </a:rPr>
+                        <a:t>1.0022</a:t>
+                      </a:r>
+                    </a:p>
+                  </a:txBody>
+                  <a:tcPr marL="54864" marR="54864" marT="18288" marB="18288">
+                    <a:solidFill>
+                      <a:srgbClr val="FFFFFF"/>
+                    </a:solidFill>
+                  </a:tcPr>
+                </a:tc>
+                <a:tc>
+                  <a:txBody>
+                    <a:bodyPr wrap="square"/>
+                    <a:lstStyle/>
+                    <a:p>
+                      <a:r>
+                        <a:rPr sz="1100" b="0">
+                          <a:solidFill>
+                            <a:srgbClr val="282828"/>
+                          </a:solidFill>
+                          <a:latin typeface="Arial"/>
+                        </a:rPr>
+                        <a:t>1.0024</a:t>
+                      </a:r>
+                    </a:p>
+                  </a:txBody>
+                  <a:tcPr marL="54864" marR="54864" marT="18288" marB="18288">
+                    <a:solidFill>
+                      <a:srgbClr val="FFFFFF"/>
+                    </a:solidFill>
+                  </a:tcPr>
+                </a:tc>
+              </a:tr>
+              <a:tr h="280035">
+                <a:tc>
+                  <a:txBody>
+                    <a:bodyPr wrap="square"/>
+                    <a:lstStyle/>
+                    <a:p>
+                      <a:r>
+                        <a:rPr sz="1100" b="0">
+                          <a:solidFill>
+                            <a:srgbClr val="282828"/>
+                          </a:solidFill>
+                          <a:latin typeface="Arial"/>
+                        </a:rPr>
+                        <a:t>HET, mirror (converged)</a:t>
                       </a:r>
                     </a:p>
                   </a:txBody>
@@ -6167,7 +5485,7 @@
                           </a:solidFill>
                           <a:latin typeface="Arial"/>
                         </a:rPr>
-                        <a:t>70 / 60 min</a:t>
+                        <a:t>1.0000</a:t>
                       </a:r>
                     </a:p>
                   </a:txBody>
@@ -6177,21 +5495,65 @@
                     </a:solidFill>
                   </a:tcPr>
                 </a:tc>
+                <a:tc>
+                  <a:txBody>
+                    <a:bodyPr wrap="square"/>
+                    <a:lstStyle/>
+                    <a:p>
+                      <a:r>
+                        <a:rPr sz="1100" b="0">
+                          <a:solidFill>
+                            <a:srgbClr val="282828"/>
+                          </a:solidFill>
+                          <a:latin typeface="Arial"/>
+                        </a:rPr>
+                        <a:t>1.0005</a:t>
+                      </a:r>
+                    </a:p>
+                  </a:txBody>
+                  <a:tcPr marL="54864" marR="54864" marT="18288" marB="18288">
+                    <a:solidFill>
+                      <a:srgbClr val="ECF1F6"/>
+                    </a:solidFill>
+                  </a:tcPr>
+                </a:tc>
+                <a:tc>
+                  <a:txBody>
+                    <a:bodyPr wrap="square"/>
+                    <a:lstStyle/>
+                    <a:p>
+                      <a:r>
+                        <a:rPr sz="1100" b="0">
+                          <a:solidFill>
+                            <a:srgbClr val="282828"/>
+                          </a:solidFill>
+                          <a:latin typeface="Arial"/>
+                        </a:rPr>
+                        <a:t>1.0005</a:t>
+                      </a:r>
+                    </a:p>
+                  </a:txBody>
+                  <a:tcPr marL="54864" marR="54864" marT="18288" marB="18288">
+                    <a:solidFill>
+                      <a:srgbClr val="ECF1F6"/>
+                    </a:solidFill>
+                  </a:tcPr>
+                </a:tc>
               </a:tr>
-              <a:tr h="657225">
-                <a:tc>
-                  <a:txBody>
-                    <a:bodyPr wrap="square"/>
-                    <a:lstStyle/>
-                    <a:p>
-                      <a:r>
-                        <a:rPr sz="1100" b="0">
-                          <a:solidFill>
-                            <a:srgbClr val="282828"/>
-                          </a:solidFill>
-                          <a:latin typeface="Arial"/>
-                        </a:rPr>
-                        <a:t>pco.edge 5.5, true global-shutter mode, 30 ke, 50 fps</a:t>
+              <a:tr h="280035">
+                <a:tc>
+                  <a:txBody>
+                    <a:bodyPr wrap="square"/>
+                    <a:lstStyle/>
+                    <a:p>
+                      <a:r>
+                        <a:rPr sz="1100" b="0">
+                          <a:solidFill>
+                            <a:srgbClr val="282828"/>
+                          </a:solidFill>
+                          <a:latin typeface="Arial"/>
+                        </a:rPr>
+                        <a:t>IFO, lens (converged)</a:t>
                       </a:r>
                     </a:p>
                   </a:txBody>
@@ -6213,7 +5575,7 @@
                           </a:solidFill>
                           <a:latin typeface="Arial"/>
                         </a:rPr>
-                        <a:t>2.2 (1.000)</a:t>
+                        <a:t>1.0064</a:t>
                       </a:r>
                     </a:p>
                   </a:txBody>
@@ -6235,7 +5597,7 @@
                           </a:solidFill>
                           <a:latin typeface="Arial"/>
                         </a:rPr>
-                        <a:t>40.2 / 38.3</a:t>
+                        <a:t>1.0106</a:t>
                       </a:r>
                     </a:p>
                   </a:txBody>
@@ -6257,7 +5619,7 @@
                           </a:solidFill>
                           <a:latin typeface="Arial"/>
                         </a:rPr>
-                        <a:t>0.025</a:t>
+                        <a:t>1.0112</a:t>
                       </a:r>
                     </a:p>
                   </a:txBody>
@@ -6267,19 +5629,111 @@
                     </a:solidFill>
                   </a:tcPr>
                 </a:tc>
-                <a:tc>
-                  <a:txBody>
-                    <a:bodyPr wrap="square"/>
-                    <a:lstStyle/>
-                    <a:p>
-                      <a:r>
-                        <a:rPr sz="1100" b="0">
-                          <a:solidFill>
-                            <a:srgbClr val="282828"/>
-                          </a:solidFill>
-                          <a:latin typeface="Arial"/>
-                        </a:rPr>
-                        <a:t>129 / 117</a:t>
+              </a:tr>
+              <a:tr h="280035">
+                <a:tc>
+                  <a:txBody>
+                    <a:bodyPr wrap="square"/>
+                    <a:lstStyle/>
+                    <a:p>
+                      <a:r>
+                        <a:rPr sz="1100" b="0">
+                          <a:solidFill>
+                            <a:srgbClr val="282828"/>
+                          </a:solidFill>
+                          <a:latin typeface="Arial"/>
+                        </a:rPr>
+                        <a:t>IFO, mirror (converged)</a:t>
+                      </a:r>
+                    </a:p>
+                  </a:txBody>
+                  <a:tcPr marL="54864" marR="54864" marT="18288" marB="18288">
+                    <a:solidFill>
+                      <a:srgbClr val="ECF1F6"/>
+                    </a:solidFill>
+                  </a:tcPr>
+                </a:tc>
+                <a:tc>
+                  <a:txBody>
+                    <a:bodyPr wrap="square"/>
+                    <a:lstStyle/>
+                    <a:p>
+                      <a:r>
+                        <a:rPr sz="1100" b="0">
+                          <a:solidFill>
+                            <a:srgbClr val="282828"/>
+                          </a:solidFill>
+                          <a:latin typeface="Arial"/>
+                        </a:rPr>
+                        <a:t>0.9887</a:t>
+                      </a:r>
+                    </a:p>
+                  </a:txBody>
+                  <a:tcPr marL="54864" marR="54864" marT="18288" marB="18288">
+                    <a:solidFill>
+                      <a:srgbClr val="ECF1F6"/>
+                    </a:solidFill>
+                  </a:tcPr>
+                </a:tc>
+                <a:tc>
+                  <a:txBody>
+                    <a:bodyPr wrap="square"/>
+                    <a:lstStyle/>
+                    <a:p>
+                      <a:r>
+                        <a:rPr sz="1100" b="0">
+                          <a:solidFill>
+                            <a:srgbClr val="282828"/>
+                          </a:solidFill>
+                          <a:latin typeface="Arial"/>
+                        </a:rPr>
+                        <a:t>0.9892</a:t>
+                      </a:r>
+                    </a:p>
+                  </a:txBody>
+                  <a:tcPr marL="54864" marR="54864" marT="18288" marB="18288">
+                    <a:solidFill>
+                      <a:srgbClr val="ECF1F6"/>
+                    </a:solidFill>
+                  </a:tcPr>
+                </a:tc>
+                <a:tc>
+                  <a:txBody>
+                    <a:bodyPr wrap="square"/>
+                    <a:lstStyle/>
+                    <a:p>
+                      <a:r>
+                        <a:rPr sz="1100" b="0">
+                          <a:solidFill>
+                            <a:srgbClr val="282828"/>
+                          </a:solidFill>
+                          <a:latin typeface="Arial"/>
+                        </a:rPr>
+                        <a:t>0.9896</a:t>
+                      </a:r>
+                    </a:p>
+                  </a:txBody>
+                  <a:tcPr marL="54864" marR="54864" marT="18288" marB="18288">
+                    <a:solidFill>
+                      <a:srgbClr val="ECF1F6"/>
+                    </a:solidFill>
+                  </a:tcPr>
+                </a:tc>
+              </a:tr>
+              <a:tr h="280035">
+                <a:tc>
+                  <a:txBody>
+                    <a:bodyPr wrap="square"/>
+                    <a:lstStyle/>
+                    <a:p>
+                      <a:r>
+                        <a:rPr sz="1100" b="0">
+                          <a:solidFill>
+                            <a:srgbClr val="282828"/>
+                          </a:solidFill>
+                          <a:latin typeface="Arial"/>
+                        </a:rPr>
+                        <a:t>HET, lock-in camera (record, noise-free)</a:t>
                       </a:r>
                     </a:p>
                   </a:txBody>
@@ -6301,7 +5755,7 @@
                           </a:solidFill>
                           <a:latin typeface="Arial"/>
                         </a:rPr>
-                        <a:t>3.6 / 3.3 h</a:t>
+                        <a:t>converged 1.0000</a:t>
                       </a:r>
                     </a:p>
                   </a:txBody>
@@ -6311,155 +5765,19 @@
                     </a:solidFill>
                   </a:tcPr>
                 </a:tc>
-              </a:tr>
-              <a:tr h="657225">
-                <a:tc>
-                  <a:txBody>
-                    <a:bodyPr wrap="square"/>
-                    <a:lstStyle/>
-                    <a:p>
-                      <a:r>
-                        <a:rPr sz="1100" b="0">
-                          <a:solidFill>
-                            <a:srgbClr val="282828"/>
-                          </a:solidFill>
-                          <a:latin typeface="Arial"/>
-                        </a:rPr>
-                        <a:t>C-RED 2 (InGaAs), at 632.8 nm as a placeholder</a:t>
-                      </a:r>
-                    </a:p>
-                  </a:txBody>
-                  <a:tcPr marL="54864" marR="54864" marT="18288" marB="18288">
-                    <a:solidFill>
-                      <a:srgbClr val="ECF1F6"/>
-                    </a:solidFill>
-                  </a:tcPr>
-                </a:tc>
-                <a:tc>
-                  <a:txBody>
-                    <a:bodyPr wrap="square"/>
-                    <a:lstStyle/>
-                    <a:p>
-                      <a:r>
-                        <a:rPr sz="1100" b="0">
-                          <a:solidFill>
-                            <a:srgbClr val="282828"/>
-                          </a:solidFill>
-                          <a:latin typeface="Arial"/>
-                        </a:rPr>
-                        <a:t>30 assumed (1.001)</a:t>
-                      </a:r>
-                    </a:p>
-                  </a:txBody>
-                  <a:tcPr marL="54864" marR="54864" marT="18288" marB="18288">
-                    <a:solidFill>
-                      <a:srgbClr val="ECF1F6"/>
-                    </a:solidFill>
-                  </a:tcPr>
-                </a:tc>
-                <a:tc>
-                  <a:txBody>
-                    <a:bodyPr wrap="square"/>
-                    <a:lstStyle/>
-                    <a:p>
-                      <a:r>
-                        <a:rPr sz="1100" b="0">
-                          <a:solidFill>
-                            <a:srgbClr val="282828"/>
-                          </a:solidFill>
-                          <a:latin typeface="Arial"/>
-                        </a:rPr>
-                        <a:t>19.6 / 18.7</a:t>
-                      </a:r>
-                    </a:p>
-                  </a:txBody>
-                  <a:tcPr marL="54864" marR="54864" marT="18288" marB="18288">
-                    <a:solidFill>
-                      <a:srgbClr val="ECF1F6"/>
-                    </a:solidFill>
-                  </a:tcPr>
-                </a:tc>
-                <a:tc>
-                  <a:txBody>
-                    <a:bodyPr wrap="square"/>
-                    <a:lstStyle/>
-                    <a:p>
-                      <a:r>
-                        <a:rPr sz="1100" b="0">
-                          <a:solidFill>
-                            <a:srgbClr val="282828"/>
-                          </a:solidFill>
-                          <a:latin typeface="Arial"/>
-                        </a:rPr>
-                        <a:t>0.051</a:t>
-                      </a:r>
-                    </a:p>
-                  </a:txBody>
-                  <a:tcPr marL="54864" marR="54864" marT="18288" marB="18288">
-                    <a:solidFill>
-                      <a:srgbClr val="ECF1F6"/>
-                    </a:solidFill>
-                  </a:tcPr>
-                </a:tc>
-                <a:tc>
-                  <a:txBody>
-                    <a:bodyPr wrap="square"/>
-                    <a:lstStyle/>
-                    <a:p>
-                      <a:r>
-                        <a:rPr sz="1100" b="0">
-                          <a:solidFill>
-                            <a:srgbClr val="282828"/>
-                          </a:solidFill>
-                          <a:latin typeface="Arial"/>
-                        </a:rPr>
-                        <a:t>— (the 1.3 µm stage)</a:t>
-                      </a:r>
-                    </a:p>
-                  </a:txBody>
-                  <a:tcPr marL="54864" marR="54864" marT="18288" marB="18288">
-                    <a:solidFill>
-                      <a:srgbClr val="ECF1F6"/>
-                    </a:solidFill>
-                  </a:tcPr>
-                </a:tc>
-                <a:tc>
-                  <a:txBody>
-                    <a:bodyPr wrap="square"/>
-                    <a:lstStyle/>
-                    <a:p>
-                      <a:r>
-                        <a:rPr sz="1100" b="0">
-                          <a:solidFill>
-                            <a:srgbClr val="282828"/>
-                          </a:solidFill>
-                          <a:latin typeface="Arial"/>
-                        </a:rPr>
-                        <a:t>—</a:t>
-                      </a:r>
-                    </a:p>
-                  </a:txBody>
-                  <a:tcPr marL="54864" marR="54864" marT="18288" marB="18288">
-                    <a:solidFill>
-                      <a:srgbClr val="ECF1F6"/>
-                    </a:solidFill>
-                  </a:tcPr>
-                </a:tc>
-              </a:tr>
-              <a:tr h="1034415">
-                <a:tc>
-                  <a:txBody>
-                    <a:bodyPr wrap="square"/>
-                    <a:lstStyle/>
-                    <a:p>
-                      <a:r>
-                        <a:rPr sz="1100" b="0">
-                          <a:solidFill>
-                            <a:srgbClr val="282828"/>
-                          </a:solidFill>
-                          <a:latin typeface="Arial"/>
-                        </a:rPr>
-                        <a:t>lock-in camera, heliCam C4, 500 ke, I/Q at 1 kHz (the lock-in reading; well-capped)</a:t>
+                <a:tc>
+                  <a:txBody>
+                    <a:bodyPr wrap="square"/>
+                    <a:lstStyle/>
+                    <a:p>
+                      <a:r>
+                        <a:rPr sz="1100" b="0">
+                          <a:solidFill>
+                            <a:srgbClr val="282828"/>
+                          </a:solidFill>
+                          <a:latin typeface="Arial"/>
+                        </a:rPr>
+                        <a:t>1.0006</a:t>
                       </a:r>
                     </a:p>
                   </a:txBody>
@@ -6481,95 +5799,7 @@
                           </a:solidFill>
                           <a:latin typeface="Arial"/>
                         </a:rPr>
-                        <a:t>n/s: run at 0 and at 100 assumed (1.09)</a:t>
-                      </a:r>
-                    </a:p>
-                  </a:txBody>
-                  <a:tcPr marL="54864" marR="54864" marT="18288" marB="18288">
-                    <a:solidFill>
-                      <a:srgbClr val="FFFFFF"/>
-                    </a:solidFill>
-                  </a:tcPr>
-                </a:tc>
-                <a:tc>
-                  <a:txBody>
-                    <a:bodyPr wrap="square"/>
-                    <a:lstStyle/>
-                    <a:p>
-                      <a:r>
-                        <a:rPr sz="1100" b="0">
-                          <a:solidFill>
-                            <a:srgbClr val="282828"/>
-                          </a:solidFill>
-                          <a:latin typeface="Arial"/>
-                        </a:rPr>
-                        <a:t>61.1 / 57.9 per 1 ms sample (66 / 63 at read 100)</a:t>
-                      </a:r>
-                    </a:p>
-                  </a:txBody>
-                  <a:tcPr marL="54864" marR="54864" marT="18288" marB="18288">
-                    <a:solidFill>
-                      <a:srgbClr val="FFFFFF"/>
-                    </a:solidFill>
-                  </a:tcPr>
-                </a:tc>
-                <a:tc>
-                  <a:txBody>
-                    <a:bodyPr wrap="square"/>
-                    <a:lstStyle/>
-                    <a:p>
-                      <a:r>
-                        <a:rPr sz="1100" b="0">
-                          <a:solidFill>
-                            <a:srgbClr val="282828"/>
-                          </a:solidFill>
-                          <a:latin typeface="Arial"/>
-                        </a:rPr>
-                        <a:t>0.017 per sample</a:t>
-                      </a:r>
-                    </a:p>
-                  </a:txBody>
-                  <a:tcPr marL="54864" marR="54864" marT="18288" marB="18288">
-                    <a:solidFill>
-                      <a:srgbClr val="FFFFFF"/>
-                    </a:solidFill>
-                  </a:tcPr>
-                </a:tc>
-                <a:tc>
-                  <a:txBody>
-                    <a:bodyPr wrap="square"/>
-                    <a:lstStyle/>
-                    <a:p>
-                      <a:r>
-                        <a:rPr sz="1100" b="0">
-                          <a:solidFill>
-                            <a:srgbClr val="282828"/>
-                          </a:solidFill>
-                          <a:latin typeface="Arial"/>
-                        </a:rPr>
-                        <a:t>3.73 / 3.35 (4.4 / 4.0 at read 100; ×1.23 in time for two-tap demodulation)</a:t>
-                      </a:r>
-                    </a:p>
-                  </a:txBody>
-                  <a:tcPr marL="54864" marR="54864" marT="18288" marB="18288">
-                    <a:solidFill>
-                      <a:srgbClr val="FFFFFF"/>
-                    </a:solidFill>
-                  </a:tcPr>
-                </a:tc>
-                <a:tc>
-                  <a:txBody>
-                    <a:bodyPr wrap="square"/>
-                    <a:lstStyle/>
-                    <a:p>
-                      <a:r>
-                        <a:rPr sz="1100" b="0">
-                          <a:solidFill>
-                            <a:srgbClr val="282828"/>
-                          </a:solidFill>
-                          <a:latin typeface="Arial"/>
-                        </a:rPr>
-                        <a:t>6.2 / 5.6 min</a:t>
+                        <a:t>1.0005 — the same reading, the same algebra</a:t>
                       </a:r>
                     </a:p>
                   </a:txBody>
@@ -6592,8 +5822,8 @@
         </p:nvSpPr>
         <p:spPr>
           <a:xfrm>
-            <a:off x="411480" y="5953887"/>
-            <a:ext cx="5806440" cy="274320"/>
+            <a:off x="411480" y="4135374"/>
+            <a:ext cx="11368735" cy="274320"/>
           </a:xfrm>
           <a:prstGeom prst="rect">
             <a:avLst/>
@@ -6612,7 +5842,7 @@
               </a:spcAft>
             </a:pPr>
             <a:r>
-              <a:rPr sz="1200" b="0">
+              <a:rPr sz="1500" b="0">
                 <a:solidFill>
                   <a:srgbClr val="282828"/>
                 </a:solidFill>
@@ -6621,38 +5851,56 @@
               <a:t>•  </a:t>
             </a:r>
             <a:r>
-              <a:rPr sz="1200" b="1">
+              <a:rPr sz="1500" b="1">
                 <a:solidFill>
                   <a:srgbClr val="282828"/>
                 </a:solidFill>
                 <a:latin typeface="Arial"/>
               </a:rPr>
-              <a:t>The metric:</a:t>
-            </a:r>
-            <a:r>
-              <a:rPr sz="1200" b="0">
+              <a:t>The one-step rows sit 0.5 % low for HET on both rigs — the estimator, not the reading:</a:t>
+            </a:r>
+            <a:r>
+              <a:rPr sz="1500" b="0">
                 <a:solidFill>
                   <a:srgbClr val="282828"/>
                 </a:solidFill>
                 <a:latin typeface="Arial"/>
               </a:rPr>
-              <a:t> the piston-free robust floor over the unpoked actuators (1.48 MAD, median of 12 draws).</a:t>
-            </a:r>
-          </a:p>
-          <a:p>
-            <a:pPr marL="594360" indent="-137160">
+              <a:t> the reading is exact (a 1.000 nm poke reads at slope 1.000000); the 0.5 % is the one-step Tikhonov shrinkage at the record's λ_m = 10⁻³ (1.0007 at 10⁻⁵) — the "matrix bias" every gauge carries, now a number.</a:t>
+            </a:r>
+          </a:p>
+          <a:p>
+            <a:pPr>
               <a:spcAft>
-                <a:spcPts val="500"/>
+                <a:spcPts val="600"/>
               </a:spcAft>
             </a:pPr>
             <a:r>
-              <a:rPr sz="1050" b="0">
-                <a:solidFill>
-                  <a:srgbClr val="6E6E6E"/>
-                </a:solidFill>
-                <a:latin typeface="Arial"/>
-              </a:rPr>
-              <a:t>–  the raw single-actuator noise is mostly a common piston (165 vs 76 pm) — unobservable and inert on a DM; the composite deck puts every gauge on this metric</a:t>
+              <a:rPr sz="1500" b="0">
+                <a:solidFill>
+                  <a:srgbClr val="282828"/>
+                </a:solidFill>
+                <a:latin typeface="Arial"/>
+              </a:rPr>
+              <a:t>•  </a:t>
+            </a:r>
+            <a:r>
+              <a:rPr sz="1500" b="1">
+                <a:solidFill>
+                  <a:srgbClr val="282828"/>
+                </a:solidFill>
+                <a:latin typeface="Arial"/>
+              </a:rPr>
+              <a:t>Driven to convergence (the servo use), HET reads exactly on the mirror rig, and the IFO shows its polarization gain in the open:</a:t>
+            </a:r>
+            <a:r>
+              <a:rPr sz="1500" b="0">
+                <a:solidFill>
+                  <a:srgbClr val="282828"/>
+                </a:solidFill>
+                <a:latin typeface="Arial"/>
+              </a:rPr>
+              <a:t> IFO/HET = 1.006–1.009 (lens rig), 0.989 (mirror rig); the IFO's lens-rig "1.000" was polarization gain cancelling the shrinkage.</a:t>
             </a:r>
           </a:p>
         </p:txBody>
@@ -6665,8 +5913,8 @@
         </p:nvSpPr>
         <p:spPr>
           <a:xfrm>
-            <a:off x="7315200" y="1298448"/>
-            <a:ext cx="4480560" cy="274320"/>
+            <a:off x="411480" y="5938266"/>
+            <a:ext cx="11368735" cy="274320"/>
           </a:xfrm>
           <a:prstGeom prst="rect">
             <a:avLst/>
@@ -6685,238 +5933,13 @@
               </a:spcAft>
             </a:pPr>
             <a:r>
-              <a:rPr sz="1150" b="0">
-                <a:solidFill>
-                  <a:srgbClr val="282828"/>
-                </a:solidFill>
-                <a:latin typeface="Arial"/>
-              </a:rPr>
-              <a:t>•  </a:t>
-            </a:r>
-            <a:r>
-              <a:rPr sz="1150" b="1">
-                <a:solidFill>
-                  <a:srgbClr val="282828"/>
-                </a:solidFill>
-                <a:latin typeface="Arial"/>
-              </a:rPr>
-              <a:t>Read noise is in every row</a:t>
-            </a:r>
-            <a:r>
-              <a:rPr sz="1150" b="0">
-                <a:solidFill>
-                  <a:srgbClr val="282828"/>
-                </a:solidFill>
-                <a:latin typeface="Arial"/>
-              </a:rPr>
-              <a:t> (σ_φ² ∝ I₀ + r²): the Photonfocus's 220 e⁻ costs 22 % in σ at half well and it still wins on well × rate.</a:t>
-            </a:r>
-          </a:p>
-          <a:p>
-            <a:pPr marL="594360" indent="-137160">
-              <a:spcAft>
-                <a:spcPts val="500"/>
-              </a:spcAft>
-            </a:pPr>
-            <a:r>
-              <a:rPr sz="1000" b="0">
+              <a:rPr sz="1050" b="0">
                 <a:solidFill>
                   <a:srgbClr val="6E6E6E"/>
                 </a:solidFill>
                 <a:latin typeface="Arial"/>
               </a:rPr>
-              <a:t>–  the baseline's and the C-RED's read noise are assumed (not in Feng's deck; the survey's value unconfirmed)</a:t>
-            </a:r>
-          </a:p>
-          <a:p>
-            <a:pPr marL="0" indent="0">
-              <a:spcAft>
-                <a:spcPts val="600"/>
-              </a:spcAft>
-            </a:pPr>
-            <a:r>
-              <a:rPr sz="1150" b="0">
-                <a:solidFill>
-                  <a:srgbClr val="282828"/>
-                </a:solidFill>
-                <a:latin typeface="Arial"/>
-              </a:rPr>
-              <a:t>•  </a:t>
-            </a:r>
-            <a:r>
-              <a:rPr sz="1150" b="1">
-                <a:solidFill>
-                  <a:srgbClr val="282828"/>
-                </a:solidFill>
-                <a:latin typeface="Arial"/>
-              </a:rPr>
-              <a:t>SNR at the 1 pm target:</a:t>
-            </a:r>
-            <a:r>
-              <a:rPr sz="1150" b="0">
-                <a:solidFill>
-                  <a:srgbClr val="282828"/>
-                </a:solidFill>
-                <a:latin typeface="Arial"/>
-              </a:rPr>
-              <a:t> one reading gives SNR 0.02–0.05; SNR 1 takes (pm per reading)² readings — the seconds-per-pm column; SNR 10 takes 100× that.</a:t>
-            </a:r>
-          </a:p>
-          <a:p>
-            <a:pPr marL="594360" indent="-137160">
-              <a:spcAft>
-                <a:spcPts val="500"/>
-              </a:spcAft>
-            </a:pPr>
-            <a:r>
-              <a:rPr sz="1000" b="0">
-                <a:solidFill>
-                  <a:srgbClr val="6E6E6E"/>
-                </a:solidFill>
-                <a:latin typeface="Arial"/>
-              </a:rPr>
-              <a:t>–  a hold loop never needs SNR 10 in one measurement: it integrates readings (next slide)</a:t>
-            </a:r>
-          </a:p>
-          <a:p>
-            <a:pPr marL="0" indent="0">
-              <a:spcAft>
-                <a:spcPts val="600"/>
-              </a:spcAft>
-            </a:pPr>
-            <a:r>
-              <a:rPr sz="1150" b="0">
-                <a:solidFill>
-                  <a:srgbClr val="282828"/>
-                </a:solidFill>
-                <a:latin typeface="Arial"/>
-              </a:rPr>
-              <a:t>•  </a:t>
-            </a:r>
-            <a:r>
-              <a:rPr sz="1150" b="1">
-                <a:solidFill>
-                  <a:srgbClr val="282828"/>
-                </a:solidFill>
-                <a:latin typeface="Arial"/>
-              </a:rPr>
-              <a:t>Model and bench agree:</a:t>
-            </a:r>
-            <a:r>
-              <a:rPr sz="1150" b="0">
-                <a:solidFill>
-                  <a:srgbClr val="282828"/>
-                </a:solidFill>
-                <a:latin typeface="Arial"/>
-              </a:rPr>
-              <a:t> the per-pixel noise on the bench equals the tCophi formula to 1.000 ± 0.002 on every camera, rig and train.</a:t>
-            </a:r>
-          </a:p>
-          <a:p>
-            <a:pPr>
-              <a:spcAft>
-                <a:spcPts val="600"/>
-              </a:spcAft>
-            </a:pPr>
-            <a:r>
-              <a:rPr sz="1150" b="0">
-                <a:solidFill>
-                  <a:srgbClr val="282828"/>
-                </a:solidFill>
-                <a:latin typeface="Arial"/>
-              </a:rPr>
-              <a:t>•  </a:t>
-            </a:r>
-            <a:r>
-              <a:rPr sz="1150" b="1">
-                <a:solidFill>
-                  <a:srgbClr val="282828"/>
-                </a:solidFill>
-                <a:latin typeface="Arial"/>
-              </a:rPr>
-              <a:t>Rolling-shutter cameras are out:</a:t>
-            </a:r>
-            <a:r>
-              <a:rPr sz="1150" b="0">
-                <a:solidFill>
-                  <a:srgbClr val="282828"/>
-                </a:solidFill>
-                <a:latin typeface="Arial"/>
-              </a:rPr>
-              <a:t> rows exposed in sequence see different beat phases — a phase ramp across the image.  Needed: true global shutter, hardware trigger from the Rb clock, full-frame streaming.</a:t>
-            </a:r>
-          </a:p>
-          <a:p>
-            <a:pPr>
-              <a:spcAft>
-                <a:spcPts val="600"/>
-              </a:spcAft>
-            </a:pPr>
-            <a:r>
-              <a:rPr sz="1150" b="0">
-                <a:solidFill>
-                  <a:srgbClr val="282828"/>
-                </a:solidFill>
-                <a:latin typeface="Arial"/>
-              </a:rPr>
-              <a:t>•  </a:t>
-            </a:r>
-            <a:r>
-              <a:rPr sz="1150" b="1">
-                <a:solidFill>
-                  <a:srgbClr val="282828"/>
-                </a:solidFill>
-                <a:latin typeface="Arial"/>
-              </a:rPr>
-              <a:t>Why the camera, not the pixel count:</a:t>
-            </a:r>
-            <a:r>
-              <a:rPr sz="1150" b="0">
-                <a:solidFill>
-                  <a:srgbClr val="282828"/>
-                </a:solidFill>
-                <a:latin typeface="Arial"/>
-              </a:rPr>
-              <a:t> a 1k camera oversamples the lattice ten to one; well depth × frame rate is the budget.</a:t>
-            </a:r>
-          </a:p>
-        </p:txBody>
-      </p:sp>
-      <p:sp>
-        <p:nvSpPr>
-          <p:cNvPr id="7" name="TextBox 6"/>
-          <p:cNvSpPr txBox="1"/>
-          <p:nvPr/>
-        </p:nvSpPr>
-        <p:spPr>
-          <a:xfrm>
-            <a:off x="7315200" y="5358384"/>
-            <a:ext cx="4480560" cy="274320"/>
-          </a:xfrm>
-          <a:prstGeom prst="rect">
-            <a:avLst/>
-          </a:prstGeom>
-          <a:noFill/>
-        </p:spPr>
-        <p:txBody>
-          <a:bodyPr wrap="square">
-            <a:spAutoFit/>
-          </a:bodyPr>
-          <a:lstStyle/>
-          <a:p>
-            <a:pPr>
-              <a:spcAft>
-                <a:spcPts val="600"/>
-              </a:spcAft>
-            </a:pPr>
-            <a:r>
-              <a:rPr sz="1050" b="0">
-                <a:solidFill>
-                  <a:srgbClr val="6E6E6E"/>
-                </a:solidFill>
-                <a:latin typeface="Arial"/>
-              </a:rPr>
-              <a:t>Stage noise (runs/noise_{lens,oap}[_plain]), 12 draws, cameras binned onto the model grid (well × k², read × k, frame mean at half well).  Mask convention from the lock-in runs on: the LO-only annulus (no test light) is filled with the fringe pixels' median, not zero — a zero there made any common phase a pupil-edge step the edge actuators fit; the bucket camera's electronics rows move ≤ 9 % under it.</a:t>
+              <a:t>Stage battery (runs/battery_{lens,oap}, the IFO column = redo96_&lt;optics&gt;ph: tail md5, lit 6948, seed 7, the 64-state matrix on the surface); the gain probe (runs/gainprobe_lens); the converged estimator (dm_gauge_lib/dmg_converge, gate tConvergedEst 4/4; runs/conv_H_, tg_psi_dm96_oap/runs/conv_I_; H and I are the reading-class letters in the records); the one-step rows reproduce the record to the digit.</a:t>
             </a:r>
           </a:p>
         </p:txBody>
@@ -6973,7 +5996,7 @@
                 </a:solidFill>
                 <a:latin typeface="Arial"/>
               </a:rPr>
-              <a:t>Holding 3 pm: the servo at the camera's cadence</a:t>
+              <a:t>Photons for 1 pm, camera by camera</a:t>
             </a:r>
           </a:p>
           <a:p>
@@ -6989,7 +6012,7 @@
                 </a:solidFill>
                 <a:latin typeface="Arial"/>
               </a:rPr>
-              <a:t>COPHI holds 3 pm against the record's drifts: Feng's baseline camera needs a 16 s cycle, the Photonfocus 1.6 s, the lock-in camera 0.125 s (3.09 pm, fiber term inert); the LO's pointing is the term the loop cannot see past</a:t>
+              <a:t>A heterodyne read is photon-limited at full well: pixels × well × frame rate decides; Feng's baseline camera is seven minutes per picometer, the deepest-well 1k global-shutter part is 40 seconds, the lock-in 3.4 s</a:t>
             </a:r>
           </a:p>
         </p:txBody>
@@ -7048,6 +6071,1294 @@
         </p:nvGraphicFramePr>
         <p:xfrm>
           <a:off x="411480" y="1298448"/>
+          <a:ext cx="5806438" cy="4509135"/>
+        </p:xfrm>
+        <a:graphic>
+          <a:graphicData uri="http://schemas.openxmlformats.org/drawingml/2006/table">
+            <a:tbl>
+              <a:tblPr firstRow="1" bandRow="1">
+                <a:tableStyleId>{5C22544A-7EE6-4342-B048-85BDC9FD1C3A}</a:tableStyleId>
+              </a:tblPr>
+              <a:tblGrid>
+                <a:gridCol w="1363792"/>
+                <a:gridCol w="936580"/>
+                <a:gridCol w="805130"/>
+                <a:gridCol w="377918"/>
+                <a:gridCol w="1232342"/>
+                <a:gridCol w="1090676"/>
+              </a:tblGrid>
+              <a:tr h="1034415">
+                <a:tc>
+                  <a:txBody>
+                    <a:bodyPr wrap="square"/>
+                    <a:lstStyle/>
+                    <a:p>
+                      <a:r>
+                        <a:rPr sz="1100" b="1">
+                          <a:solidFill>
+                            <a:srgbClr val="FFFFFF"/>
+                          </a:solidFill>
+                          <a:latin typeface="Arial"/>
+                        </a:rPr>
+                        <a:t>camera (survey, to verify)</a:t>
+                      </a:r>
+                    </a:p>
+                  </a:txBody>
+                  <a:tcPr marL="54864" marR="54864" marT="18288" marB="18288">
+                    <a:solidFill>
+                      <a:srgbClr val="1F4E79"/>
+                    </a:solidFill>
+                  </a:tcPr>
+                </a:tc>
+                <a:tc>
+                  <a:txBody>
+                    <a:bodyPr wrap="square"/>
+                    <a:lstStyle/>
+                    <a:p>
+                      <a:r>
+                        <a:rPr sz="1100" b="1">
+                          <a:solidFill>
+                            <a:srgbClr val="FFFFFF"/>
+                          </a:solidFill>
+                          <a:latin typeface="Arial"/>
+                        </a:rPr>
+                        <a:t>read noise r, e⁻ (σ penalty √((I₀ + r²)/I₀) at half well)</a:t>
+                      </a:r>
+                    </a:p>
+                  </a:txBody>
+                  <a:tcPr marL="54864" marR="54864" marT="18288" marB="18288">
+                    <a:solidFill>
+                      <a:srgbClr val="1F4E79"/>
+                    </a:solidFill>
+                  </a:tcPr>
+                </a:tc>
+                <a:tc>
+                  <a:txBody>
+                    <a:bodyPr wrap="square"/>
+                    <a:lstStyle/>
+                    <a:p>
+                      <a:r>
+                        <a:rPr sz="1100" b="1">
+                          <a:solidFill>
+                            <a:srgbClr val="FFFFFF"/>
+                          </a:solidFill>
+                          <a:latin typeface="Arial"/>
+                        </a:rPr>
+                        <a:t>pm per reading, lens / mirror</a:t>
+                      </a:r>
+                    </a:p>
+                  </a:txBody>
+                  <a:tcPr marL="54864" marR="54864" marT="18288" marB="18288">
+                    <a:solidFill>
+                      <a:srgbClr val="1F4E79"/>
+                    </a:solidFill>
+                  </a:tcPr>
+                </a:tc>
+                <a:tc>
+                  <a:txBody>
+                    <a:bodyPr wrap="square"/>
+                    <a:lstStyle/>
+                    <a:p>
+                      <a:r>
+                        <a:rPr sz="1100" b="1">
+                          <a:solidFill>
+                            <a:srgbClr val="FFFFFF"/>
+                          </a:solidFill>
+                          <a:latin typeface="Arial"/>
+                        </a:rPr>
+                        <a:t>SNR at 1 pm per reading</a:t>
+                      </a:r>
+                    </a:p>
+                  </a:txBody>
+                  <a:tcPr marL="54864" marR="54864" marT="18288" marB="18288">
+                    <a:solidFill>
+                      <a:srgbClr val="1F4E79"/>
+                    </a:solidFill>
+                  </a:tcPr>
+                </a:tc>
+                <a:tc>
+                  <a:txBody>
+                    <a:bodyPr wrap="square"/>
+                    <a:lstStyle/>
+                    <a:p>
+                      <a:r>
+                        <a:rPr sz="1100" b="1">
+                          <a:solidFill>
+                            <a:srgbClr val="FFFFFF"/>
+                          </a:solidFill>
+                          <a:latin typeface="Arial"/>
+                        </a:rPr>
+                        <a:t>seconds to SNR 1 at 1 pm, lens / mirror</a:t>
+                      </a:r>
+                    </a:p>
+                  </a:txBody>
+                  <a:tcPr marL="54864" marR="54864" marT="18288" marB="18288">
+                    <a:solidFill>
+                      <a:srgbClr val="1F4E79"/>
+                    </a:solidFill>
+                  </a:tcPr>
+                </a:tc>
+                <a:tc>
+                  <a:txBody>
+                    <a:bodyPr wrap="square"/>
+                    <a:lstStyle/>
+                    <a:p>
+                      <a:r>
+                        <a:rPr sz="1100" b="1">
+                          <a:solidFill>
+                            <a:srgbClr val="FFFFFF"/>
+                          </a:solidFill>
+                          <a:latin typeface="Arial"/>
+                        </a:rPr>
+                        <a:t>to SNR 10</a:t>
+                      </a:r>
+                    </a:p>
+                  </a:txBody>
+                  <a:tcPr marL="54864" marR="54864" marT="18288" marB="18288">
+                    <a:solidFill>
+                      <a:srgbClr val="1F4E79"/>
+                    </a:solidFill>
+                  </a:tcPr>
+                </a:tc>
+              </a:tr>
+              <a:tr h="468630">
+                <a:tc>
+                  <a:txBody>
+                    <a:bodyPr wrap="square"/>
+                    <a:lstStyle/>
+                    <a:p>
+                      <a:r>
+                        <a:rPr sz="1100" b="0">
+                          <a:solidFill>
+                            <a:srgbClr val="282828"/>
+                          </a:solidFill>
+                          <a:latin typeface="Arial"/>
+                        </a:rPr>
+                        <a:t>as proposed: 1k², 60 ke, 30 fps</a:t>
+                      </a:r>
+                    </a:p>
+                  </a:txBody>
+                  <a:tcPr marL="54864" marR="54864" marT="18288" marB="18288">
+                    <a:solidFill>
+                      <a:srgbClr val="FFFFFF"/>
+                    </a:solidFill>
+                  </a:tcPr>
+                </a:tc>
+                <a:tc>
+                  <a:txBody>
+                    <a:bodyPr wrap="square"/>
+                    <a:lstStyle/>
+                    <a:p>
+                      <a:r>
+                        <a:rPr sz="1100" b="0">
+                          <a:solidFill>
+                            <a:srgbClr val="282828"/>
+                          </a:solidFill>
+                          <a:latin typeface="Arial"/>
+                        </a:rPr>
+                        <a:t>5 assumed (1.000)</a:t>
+                      </a:r>
+                    </a:p>
+                  </a:txBody>
+                  <a:tcPr marL="54864" marR="54864" marT="18288" marB="18288">
+                    <a:solidFill>
+                      <a:srgbClr val="FFFFFF"/>
+                    </a:solidFill>
+                  </a:tcPr>
+                </a:tc>
+                <a:tc>
+                  <a:txBody>
+                    <a:bodyPr wrap="square"/>
+                    <a:lstStyle/>
+                    <a:p>
+                      <a:r>
+                        <a:rPr sz="1100" b="0">
+                          <a:solidFill>
+                            <a:srgbClr val="282828"/>
+                          </a:solidFill>
+                          <a:latin typeface="Arial"/>
+                        </a:rPr>
+                        <a:t>57.7 / 53.7</a:t>
+                      </a:r>
+                    </a:p>
+                  </a:txBody>
+                  <a:tcPr marL="54864" marR="54864" marT="18288" marB="18288">
+                    <a:solidFill>
+                      <a:srgbClr val="FFFFFF"/>
+                    </a:solidFill>
+                  </a:tcPr>
+                </a:tc>
+                <a:tc>
+                  <a:txBody>
+                    <a:bodyPr wrap="square"/>
+                    <a:lstStyle/>
+                    <a:p>
+                      <a:r>
+                        <a:rPr sz="1100" b="0">
+                          <a:solidFill>
+                            <a:srgbClr val="282828"/>
+                          </a:solidFill>
+                          <a:latin typeface="Arial"/>
+                        </a:rPr>
+                        <a:t>0.017</a:t>
+                      </a:r>
+                    </a:p>
+                  </a:txBody>
+                  <a:tcPr marL="54864" marR="54864" marT="18288" marB="18288">
+                    <a:solidFill>
+                      <a:srgbClr val="FFFFFF"/>
+                    </a:solidFill>
+                  </a:tcPr>
+                </a:tc>
+                <a:tc>
+                  <a:txBody>
+                    <a:bodyPr wrap="square"/>
+                    <a:lstStyle/>
+                    <a:p>
+                      <a:r>
+                        <a:rPr sz="1100" b="0">
+                          <a:solidFill>
+                            <a:srgbClr val="282828"/>
+                          </a:solidFill>
+                          <a:latin typeface="Arial"/>
+                        </a:rPr>
+                        <a:t>443 / 385 (≈ 7 min)</a:t>
+                      </a:r>
+                    </a:p>
+                  </a:txBody>
+                  <a:tcPr marL="54864" marR="54864" marT="18288" marB="18288">
+                    <a:solidFill>
+                      <a:srgbClr val="FFFFFF"/>
+                    </a:solidFill>
+                  </a:tcPr>
+                </a:tc>
+                <a:tc>
+                  <a:txBody>
+                    <a:bodyPr wrap="square"/>
+                    <a:lstStyle/>
+                    <a:p>
+                      <a:r>
+                        <a:rPr sz="1100" b="0">
+                          <a:solidFill>
+                            <a:srgbClr val="282828"/>
+                          </a:solidFill>
+                          <a:latin typeface="Arial"/>
+                        </a:rPr>
+                        <a:t>12 / 11 h</a:t>
+                      </a:r>
+                    </a:p>
+                  </a:txBody>
+                  <a:tcPr marL="54864" marR="54864" marT="18288" marB="18288">
+                    <a:solidFill>
+                      <a:srgbClr val="FFFFFF"/>
+                    </a:solidFill>
+                  </a:tcPr>
+                </a:tc>
+              </a:tr>
+              <a:tr h="657225">
+                <a:tc>
+                  <a:txBody>
+                    <a:bodyPr wrap="square"/>
+                    <a:lstStyle/>
+                    <a:p>
+                      <a:r>
+                        <a:rPr sz="1100" b="0">
+                          <a:solidFill>
+                            <a:srgbClr val="282828"/>
+                          </a:solidFill>
+                          <a:latin typeface="Arial"/>
+                        </a:rPr>
+                        <a:t>Photonfocus MV1-D1024E, 200 ke, 150 fps</a:t>
+                      </a:r>
+                    </a:p>
+                  </a:txBody>
+                  <a:tcPr marL="54864" marR="54864" marT="18288" marB="18288">
+                    <a:solidFill>
+                      <a:srgbClr val="ECF1F6"/>
+                    </a:solidFill>
+                  </a:tcPr>
+                </a:tc>
+                <a:tc>
+                  <a:txBody>
+                    <a:bodyPr wrap="square"/>
+                    <a:lstStyle/>
+                    <a:p>
+                      <a:r>
+                        <a:rPr sz="1100" b="0">
+                          <a:solidFill>
+                            <a:srgbClr val="282828"/>
+                          </a:solidFill>
+                          <a:latin typeface="Arial"/>
+                        </a:rPr>
+                        <a:t>220 (1.22)</a:t>
+                      </a:r>
+                    </a:p>
+                  </a:txBody>
+                  <a:tcPr marL="54864" marR="54864" marT="18288" marB="18288">
+                    <a:solidFill>
+                      <a:srgbClr val="ECF1F6"/>
+                    </a:solidFill>
+                  </a:tcPr>
+                </a:tc>
+                <a:tc>
+                  <a:txBody>
+                    <a:bodyPr wrap="square"/>
+                    <a:lstStyle/>
+                    <a:p>
+                      <a:r>
+                        <a:rPr sz="1100" b="0">
+                          <a:solidFill>
+                            <a:srgbClr val="282828"/>
+                          </a:solidFill>
+                          <a:latin typeface="Arial"/>
+                        </a:rPr>
+                        <a:t>39.5 / 36.5</a:t>
+                      </a:r>
+                    </a:p>
+                  </a:txBody>
+                  <a:tcPr marL="54864" marR="54864" marT="18288" marB="18288">
+                    <a:solidFill>
+                      <a:srgbClr val="ECF1F6"/>
+                    </a:solidFill>
+                  </a:tcPr>
+                </a:tc>
+                <a:tc>
+                  <a:txBody>
+                    <a:bodyPr wrap="square"/>
+                    <a:lstStyle/>
+                    <a:p>
+                      <a:r>
+                        <a:rPr sz="1100" b="0">
+                          <a:solidFill>
+                            <a:srgbClr val="282828"/>
+                          </a:solidFill>
+                          <a:latin typeface="Arial"/>
+                        </a:rPr>
+                        <a:t>0.025</a:t>
+                      </a:r>
+                    </a:p>
+                  </a:txBody>
+                  <a:tcPr marL="54864" marR="54864" marT="18288" marB="18288">
+                    <a:solidFill>
+                      <a:srgbClr val="ECF1F6"/>
+                    </a:solidFill>
+                  </a:tcPr>
+                </a:tc>
+                <a:tc>
+                  <a:txBody>
+                    <a:bodyPr wrap="square"/>
+                    <a:lstStyle/>
+                    <a:p>
+                      <a:r>
+                        <a:rPr sz="1100" b="0">
+                          <a:solidFill>
+                            <a:srgbClr val="282828"/>
+                          </a:solidFill>
+                          <a:latin typeface="Arial"/>
+                        </a:rPr>
+                        <a:t>42 / 36</a:t>
+                      </a:r>
+                    </a:p>
+                  </a:txBody>
+                  <a:tcPr marL="54864" marR="54864" marT="18288" marB="18288">
+                    <a:solidFill>
+                      <a:srgbClr val="ECF1F6"/>
+                    </a:solidFill>
+                  </a:tcPr>
+                </a:tc>
+                <a:tc>
+                  <a:txBody>
+                    <a:bodyPr wrap="square"/>
+                    <a:lstStyle/>
+                    <a:p>
+                      <a:r>
+                        <a:rPr sz="1100" b="0">
+                          <a:solidFill>
+                            <a:srgbClr val="282828"/>
+                          </a:solidFill>
+                          <a:latin typeface="Arial"/>
+                        </a:rPr>
+                        <a:t>70 / 60 min</a:t>
+                      </a:r>
+                    </a:p>
+                  </a:txBody>
+                  <a:tcPr marL="54864" marR="54864" marT="18288" marB="18288">
+                    <a:solidFill>
+                      <a:srgbClr val="ECF1F6"/>
+                    </a:solidFill>
+                  </a:tcPr>
+                </a:tc>
+              </a:tr>
+              <a:tr h="657225">
+                <a:tc>
+                  <a:txBody>
+                    <a:bodyPr wrap="square"/>
+                    <a:lstStyle/>
+                    <a:p>
+                      <a:r>
+                        <a:rPr sz="1100" b="0">
+                          <a:solidFill>
+                            <a:srgbClr val="282828"/>
+                          </a:solidFill>
+                          <a:latin typeface="Arial"/>
+                        </a:rPr>
+                        <a:t>pco.edge 5.5, true global-shutter mode, 30 ke, 50 fps</a:t>
+                      </a:r>
+                    </a:p>
+                  </a:txBody>
+                  <a:tcPr marL="54864" marR="54864" marT="18288" marB="18288">
+                    <a:solidFill>
+                      <a:srgbClr val="FFFFFF"/>
+                    </a:solidFill>
+                  </a:tcPr>
+                </a:tc>
+                <a:tc>
+                  <a:txBody>
+                    <a:bodyPr wrap="square"/>
+                    <a:lstStyle/>
+                    <a:p>
+                      <a:r>
+                        <a:rPr sz="1100" b="0">
+                          <a:solidFill>
+                            <a:srgbClr val="282828"/>
+                          </a:solidFill>
+                          <a:latin typeface="Arial"/>
+                        </a:rPr>
+                        <a:t>2.2 (1.000)</a:t>
+                      </a:r>
+                    </a:p>
+                  </a:txBody>
+                  <a:tcPr marL="54864" marR="54864" marT="18288" marB="18288">
+                    <a:solidFill>
+                      <a:srgbClr val="FFFFFF"/>
+                    </a:solidFill>
+                  </a:tcPr>
+                </a:tc>
+                <a:tc>
+                  <a:txBody>
+                    <a:bodyPr wrap="square"/>
+                    <a:lstStyle/>
+                    <a:p>
+                      <a:r>
+                        <a:rPr sz="1100" b="0">
+                          <a:solidFill>
+                            <a:srgbClr val="282828"/>
+                          </a:solidFill>
+                          <a:latin typeface="Arial"/>
+                        </a:rPr>
+                        <a:t>40.2 / 38.3</a:t>
+                      </a:r>
+                    </a:p>
+                  </a:txBody>
+                  <a:tcPr marL="54864" marR="54864" marT="18288" marB="18288">
+                    <a:solidFill>
+                      <a:srgbClr val="FFFFFF"/>
+                    </a:solidFill>
+                  </a:tcPr>
+                </a:tc>
+                <a:tc>
+                  <a:txBody>
+                    <a:bodyPr wrap="square"/>
+                    <a:lstStyle/>
+                    <a:p>
+                      <a:r>
+                        <a:rPr sz="1100" b="0">
+                          <a:solidFill>
+                            <a:srgbClr val="282828"/>
+                          </a:solidFill>
+                          <a:latin typeface="Arial"/>
+                        </a:rPr>
+                        <a:t>0.025</a:t>
+                      </a:r>
+                    </a:p>
+                  </a:txBody>
+                  <a:tcPr marL="54864" marR="54864" marT="18288" marB="18288">
+                    <a:solidFill>
+                      <a:srgbClr val="FFFFFF"/>
+                    </a:solidFill>
+                  </a:tcPr>
+                </a:tc>
+                <a:tc>
+                  <a:txBody>
+                    <a:bodyPr wrap="square"/>
+                    <a:lstStyle/>
+                    <a:p>
+                      <a:r>
+                        <a:rPr sz="1100" b="0">
+                          <a:solidFill>
+                            <a:srgbClr val="282828"/>
+                          </a:solidFill>
+                          <a:latin typeface="Arial"/>
+                        </a:rPr>
+                        <a:t>129 / 117</a:t>
+                      </a:r>
+                    </a:p>
+                  </a:txBody>
+                  <a:tcPr marL="54864" marR="54864" marT="18288" marB="18288">
+                    <a:solidFill>
+                      <a:srgbClr val="FFFFFF"/>
+                    </a:solidFill>
+                  </a:tcPr>
+                </a:tc>
+                <a:tc>
+                  <a:txBody>
+                    <a:bodyPr wrap="square"/>
+                    <a:lstStyle/>
+                    <a:p>
+                      <a:r>
+                        <a:rPr sz="1100" b="0">
+                          <a:solidFill>
+                            <a:srgbClr val="282828"/>
+                          </a:solidFill>
+                          <a:latin typeface="Arial"/>
+                        </a:rPr>
+                        <a:t>3.6 / 3.3 h</a:t>
+                      </a:r>
+                    </a:p>
+                  </a:txBody>
+                  <a:tcPr marL="54864" marR="54864" marT="18288" marB="18288">
+                    <a:solidFill>
+                      <a:srgbClr val="FFFFFF"/>
+                    </a:solidFill>
+                  </a:tcPr>
+                </a:tc>
+              </a:tr>
+              <a:tr h="657225">
+                <a:tc>
+                  <a:txBody>
+                    <a:bodyPr wrap="square"/>
+                    <a:lstStyle/>
+                    <a:p>
+                      <a:r>
+                        <a:rPr sz="1100" b="0">
+                          <a:solidFill>
+                            <a:srgbClr val="282828"/>
+                          </a:solidFill>
+                          <a:latin typeface="Arial"/>
+                        </a:rPr>
+                        <a:t>C-RED 2 (InGaAs), at 632.8 nm as a placeholder</a:t>
+                      </a:r>
+                    </a:p>
+                  </a:txBody>
+                  <a:tcPr marL="54864" marR="54864" marT="18288" marB="18288">
+                    <a:solidFill>
+                      <a:srgbClr val="ECF1F6"/>
+                    </a:solidFill>
+                  </a:tcPr>
+                </a:tc>
+                <a:tc>
+                  <a:txBody>
+                    <a:bodyPr wrap="square"/>
+                    <a:lstStyle/>
+                    <a:p>
+                      <a:r>
+                        <a:rPr sz="1100" b="0">
+                          <a:solidFill>
+                            <a:srgbClr val="282828"/>
+                          </a:solidFill>
+                          <a:latin typeface="Arial"/>
+                        </a:rPr>
+                        <a:t>30 assumed (1.001)</a:t>
+                      </a:r>
+                    </a:p>
+                  </a:txBody>
+                  <a:tcPr marL="54864" marR="54864" marT="18288" marB="18288">
+                    <a:solidFill>
+                      <a:srgbClr val="ECF1F6"/>
+                    </a:solidFill>
+                  </a:tcPr>
+                </a:tc>
+                <a:tc>
+                  <a:txBody>
+                    <a:bodyPr wrap="square"/>
+                    <a:lstStyle/>
+                    <a:p>
+                      <a:r>
+                        <a:rPr sz="1100" b="0">
+                          <a:solidFill>
+                            <a:srgbClr val="282828"/>
+                          </a:solidFill>
+                          <a:latin typeface="Arial"/>
+                        </a:rPr>
+                        <a:t>19.6 / 18.7</a:t>
+                      </a:r>
+                    </a:p>
+                  </a:txBody>
+                  <a:tcPr marL="54864" marR="54864" marT="18288" marB="18288">
+                    <a:solidFill>
+                      <a:srgbClr val="ECF1F6"/>
+                    </a:solidFill>
+                  </a:tcPr>
+                </a:tc>
+                <a:tc>
+                  <a:txBody>
+                    <a:bodyPr wrap="square"/>
+                    <a:lstStyle/>
+                    <a:p>
+                      <a:r>
+                        <a:rPr sz="1100" b="0">
+                          <a:solidFill>
+                            <a:srgbClr val="282828"/>
+                          </a:solidFill>
+                          <a:latin typeface="Arial"/>
+                        </a:rPr>
+                        <a:t>0.051</a:t>
+                      </a:r>
+                    </a:p>
+                  </a:txBody>
+                  <a:tcPr marL="54864" marR="54864" marT="18288" marB="18288">
+                    <a:solidFill>
+                      <a:srgbClr val="ECF1F6"/>
+                    </a:solidFill>
+                  </a:tcPr>
+                </a:tc>
+                <a:tc>
+                  <a:txBody>
+                    <a:bodyPr wrap="square"/>
+                    <a:lstStyle/>
+                    <a:p>
+                      <a:r>
+                        <a:rPr sz="1100" b="0">
+                          <a:solidFill>
+                            <a:srgbClr val="282828"/>
+                          </a:solidFill>
+                          <a:latin typeface="Arial"/>
+                        </a:rPr>
+                        <a:t>— (the 1.3 µm stage)</a:t>
+                      </a:r>
+                    </a:p>
+                  </a:txBody>
+                  <a:tcPr marL="54864" marR="54864" marT="18288" marB="18288">
+                    <a:solidFill>
+                      <a:srgbClr val="ECF1F6"/>
+                    </a:solidFill>
+                  </a:tcPr>
+                </a:tc>
+                <a:tc>
+                  <a:txBody>
+                    <a:bodyPr wrap="square"/>
+                    <a:lstStyle/>
+                    <a:p>
+                      <a:r>
+                        <a:rPr sz="1100" b="0">
+                          <a:solidFill>
+                            <a:srgbClr val="282828"/>
+                          </a:solidFill>
+                          <a:latin typeface="Arial"/>
+                        </a:rPr>
+                        <a:t>—</a:t>
+                      </a:r>
+                    </a:p>
+                  </a:txBody>
+                  <a:tcPr marL="54864" marR="54864" marT="18288" marB="18288">
+                    <a:solidFill>
+                      <a:srgbClr val="ECF1F6"/>
+                    </a:solidFill>
+                  </a:tcPr>
+                </a:tc>
+              </a:tr>
+              <a:tr h="1034415">
+                <a:tc>
+                  <a:txBody>
+                    <a:bodyPr wrap="square"/>
+                    <a:lstStyle/>
+                    <a:p>
+                      <a:r>
+                        <a:rPr sz="1100" b="0">
+                          <a:solidFill>
+                            <a:srgbClr val="282828"/>
+                          </a:solidFill>
+                          <a:latin typeface="Arial"/>
+                        </a:rPr>
+                        <a:t>lock-in camera, heliCam C4, 500 ke, I/Q at 1 kHz (the lock-in reading; well-capped)</a:t>
+                      </a:r>
+                    </a:p>
+                  </a:txBody>
+                  <a:tcPr marL="54864" marR="54864" marT="18288" marB="18288">
+                    <a:solidFill>
+                      <a:srgbClr val="FFFFFF"/>
+                    </a:solidFill>
+                  </a:tcPr>
+                </a:tc>
+                <a:tc>
+                  <a:txBody>
+                    <a:bodyPr wrap="square"/>
+                    <a:lstStyle/>
+                    <a:p>
+                      <a:r>
+                        <a:rPr sz="1100" b="0">
+                          <a:solidFill>
+                            <a:srgbClr val="282828"/>
+                          </a:solidFill>
+                          <a:latin typeface="Arial"/>
+                        </a:rPr>
+                        <a:t>n/s: run at 0 and at 100 assumed (1.09)</a:t>
+                      </a:r>
+                    </a:p>
+                  </a:txBody>
+                  <a:tcPr marL="54864" marR="54864" marT="18288" marB="18288">
+                    <a:solidFill>
+                      <a:srgbClr val="FFFFFF"/>
+                    </a:solidFill>
+                  </a:tcPr>
+                </a:tc>
+                <a:tc>
+                  <a:txBody>
+                    <a:bodyPr wrap="square"/>
+                    <a:lstStyle/>
+                    <a:p>
+                      <a:r>
+                        <a:rPr sz="1100" b="0">
+                          <a:solidFill>
+                            <a:srgbClr val="282828"/>
+                          </a:solidFill>
+                          <a:latin typeface="Arial"/>
+                        </a:rPr>
+                        <a:t>61.1 / 57.9 per 1 ms sample (66 / 63 at read 100)</a:t>
+                      </a:r>
+                    </a:p>
+                  </a:txBody>
+                  <a:tcPr marL="54864" marR="54864" marT="18288" marB="18288">
+                    <a:solidFill>
+                      <a:srgbClr val="FFFFFF"/>
+                    </a:solidFill>
+                  </a:tcPr>
+                </a:tc>
+                <a:tc>
+                  <a:txBody>
+                    <a:bodyPr wrap="square"/>
+                    <a:lstStyle/>
+                    <a:p>
+                      <a:r>
+                        <a:rPr sz="1100" b="0">
+                          <a:solidFill>
+                            <a:srgbClr val="282828"/>
+                          </a:solidFill>
+                          <a:latin typeface="Arial"/>
+                        </a:rPr>
+                        <a:t>0.017 per sample</a:t>
+                      </a:r>
+                    </a:p>
+                  </a:txBody>
+                  <a:tcPr marL="54864" marR="54864" marT="18288" marB="18288">
+                    <a:solidFill>
+                      <a:srgbClr val="FFFFFF"/>
+                    </a:solidFill>
+                  </a:tcPr>
+                </a:tc>
+                <a:tc>
+                  <a:txBody>
+                    <a:bodyPr wrap="square"/>
+                    <a:lstStyle/>
+                    <a:p>
+                      <a:r>
+                        <a:rPr sz="1100" b="0">
+                          <a:solidFill>
+                            <a:srgbClr val="282828"/>
+                          </a:solidFill>
+                          <a:latin typeface="Arial"/>
+                        </a:rPr>
+                        <a:t>3.73 / 3.35 (4.4 / 4.0 at read 100; ×1.23 in time for two-tap demodulation)</a:t>
+                      </a:r>
+                    </a:p>
+                  </a:txBody>
+                  <a:tcPr marL="54864" marR="54864" marT="18288" marB="18288">
+                    <a:solidFill>
+                      <a:srgbClr val="FFFFFF"/>
+                    </a:solidFill>
+                  </a:tcPr>
+                </a:tc>
+                <a:tc>
+                  <a:txBody>
+                    <a:bodyPr wrap="square"/>
+                    <a:lstStyle/>
+                    <a:p>
+                      <a:r>
+                        <a:rPr sz="1100" b="0">
+                          <a:solidFill>
+                            <a:srgbClr val="282828"/>
+                          </a:solidFill>
+                          <a:latin typeface="Arial"/>
+                        </a:rPr>
+                        <a:t>6.2 / 5.6 min</a:t>
+                      </a:r>
+                    </a:p>
+                  </a:txBody>
+                  <a:tcPr marL="54864" marR="54864" marT="18288" marB="18288">
+                    <a:solidFill>
+                      <a:srgbClr val="FFFFFF"/>
+                    </a:solidFill>
+                  </a:tcPr>
+                </a:tc>
+              </a:tr>
+            </a:tbl>
+          </a:graphicData>
+        </a:graphic>
+      </p:graphicFrame>
+      <p:sp>
+        <p:nvSpPr>
+          <p:cNvPr id="5" name="TextBox 4"/>
+          <p:cNvSpPr txBox="1"/>
+          <p:nvPr/>
+        </p:nvSpPr>
+        <p:spPr>
+          <a:xfrm>
+            <a:off x="411480" y="5953887"/>
+            <a:ext cx="5806440" cy="274320"/>
+          </a:xfrm>
+          <a:prstGeom prst="rect">
+            <a:avLst/>
+          </a:prstGeom>
+          <a:noFill/>
+        </p:spPr>
+        <p:txBody>
+          <a:bodyPr wrap="square">
+            <a:spAutoFit/>
+          </a:bodyPr>
+          <a:lstStyle/>
+          <a:p>
+            <a:pPr>
+              <a:spcAft>
+                <a:spcPts val="600"/>
+              </a:spcAft>
+            </a:pPr>
+            <a:r>
+              <a:rPr sz="1200" b="0">
+                <a:solidFill>
+                  <a:srgbClr val="282828"/>
+                </a:solidFill>
+                <a:latin typeface="Arial"/>
+              </a:rPr>
+              <a:t>•  </a:t>
+            </a:r>
+            <a:r>
+              <a:rPr sz="1200" b="1">
+                <a:solidFill>
+                  <a:srgbClr val="282828"/>
+                </a:solidFill>
+                <a:latin typeface="Arial"/>
+              </a:rPr>
+              <a:t>The metric:</a:t>
+            </a:r>
+            <a:r>
+              <a:rPr sz="1200" b="0">
+                <a:solidFill>
+                  <a:srgbClr val="282828"/>
+                </a:solidFill>
+                <a:latin typeface="Arial"/>
+              </a:rPr>
+              <a:t> the piston-free robust floor over the unpoked actuators (1.48 MAD, median of 12 draws).</a:t>
+            </a:r>
+          </a:p>
+          <a:p>
+            <a:pPr marL="594360" indent="-137160">
+              <a:spcAft>
+                <a:spcPts val="500"/>
+              </a:spcAft>
+            </a:pPr>
+            <a:r>
+              <a:rPr sz="1050" b="0">
+                <a:solidFill>
+                  <a:srgbClr val="6E6E6E"/>
+                </a:solidFill>
+                <a:latin typeface="Arial"/>
+              </a:rPr>
+              <a:t>–  the raw single-actuator noise is mostly a common piston (165 vs 76 pm) — unobservable and inert on a DM; the composite deck puts every gauge on this metric</a:t>
+            </a:r>
+          </a:p>
+        </p:txBody>
+      </p:sp>
+      <p:sp>
+        <p:nvSpPr>
+          <p:cNvPr id="6" name="TextBox 5"/>
+          <p:cNvSpPr txBox="1"/>
+          <p:nvPr/>
+        </p:nvSpPr>
+        <p:spPr>
+          <a:xfrm>
+            <a:off x="7315200" y="1298448"/>
+            <a:ext cx="4480560" cy="274320"/>
+          </a:xfrm>
+          <a:prstGeom prst="rect">
+            <a:avLst/>
+          </a:prstGeom>
+          <a:noFill/>
+        </p:spPr>
+        <p:txBody>
+          <a:bodyPr wrap="square">
+            <a:spAutoFit/>
+          </a:bodyPr>
+          <a:lstStyle/>
+          <a:p>
+            <a:pPr>
+              <a:spcAft>
+                <a:spcPts val="600"/>
+              </a:spcAft>
+            </a:pPr>
+            <a:r>
+              <a:rPr sz="1150" b="0">
+                <a:solidFill>
+                  <a:srgbClr val="282828"/>
+                </a:solidFill>
+                <a:latin typeface="Arial"/>
+              </a:rPr>
+              <a:t>•  </a:t>
+            </a:r>
+            <a:r>
+              <a:rPr sz="1150" b="1">
+                <a:solidFill>
+                  <a:srgbClr val="282828"/>
+                </a:solidFill>
+                <a:latin typeface="Arial"/>
+              </a:rPr>
+              <a:t>Read noise is in every row</a:t>
+            </a:r>
+            <a:r>
+              <a:rPr sz="1150" b="0">
+                <a:solidFill>
+                  <a:srgbClr val="282828"/>
+                </a:solidFill>
+                <a:latin typeface="Arial"/>
+              </a:rPr>
+              <a:t> (σ_φ² ∝ I₀ + r²): the Photonfocus's 220 e⁻ costs 22 % in σ at half well and it still wins on well × rate.</a:t>
+            </a:r>
+          </a:p>
+          <a:p>
+            <a:pPr marL="594360" indent="-137160">
+              <a:spcAft>
+                <a:spcPts val="500"/>
+              </a:spcAft>
+            </a:pPr>
+            <a:r>
+              <a:rPr sz="1000" b="0">
+                <a:solidFill>
+                  <a:srgbClr val="6E6E6E"/>
+                </a:solidFill>
+                <a:latin typeface="Arial"/>
+              </a:rPr>
+              <a:t>–  the baseline's and the C-RED's read noise are assumed (not in Feng's deck; the survey's value unconfirmed)</a:t>
+            </a:r>
+          </a:p>
+          <a:p>
+            <a:pPr marL="0" indent="0">
+              <a:spcAft>
+                <a:spcPts val="600"/>
+              </a:spcAft>
+            </a:pPr>
+            <a:r>
+              <a:rPr sz="1150" b="0">
+                <a:solidFill>
+                  <a:srgbClr val="282828"/>
+                </a:solidFill>
+                <a:latin typeface="Arial"/>
+              </a:rPr>
+              <a:t>•  </a:t>
+            </a:r>
+            <a:r>
+              <a:rPr sz="1150" b="1">
+                <a:solidFill>
+                  <a:srgbClr val="282828"/>
+                </a:solidFill>
+                <a:latin typeface="Arial"/>
+              </a:rPr>
+              <a:t>SNR at the 1 pm target:</a:t>
+            </a:r>
+            <a:r>
+              <a:rPr sz="1150" b="0">
+                <a:solidFill>
+                  <a:srgbClr val="282828"/>
+                </a:solidFill>
+                <a:latin typeface="Arial"/>
+              </a:rPr>
+              <a:t> one reading gives SNR 0.02–0.05; SNR 1 takes (pm per reading)² readings — the seconds-per-pm column; SNR 10 takes 100× that.</a:t>
+            </a:r>
+          </a:p>
+          <a:p>
+            <a:pPr marL="594360" indent="-137160">
+              <a:spcAft>
+                <a:spcPts val="500"/>
+              </a:spcAft>
+            </a:pPr>
+            <a:r>
+              <a:rPr sz="1000" b="0">
+                <a:solidFill>
+                  <a:srgbClr val="6E6E6E"/>
+                </a:solidFill>
+                <a:latin typeface="Arial"/>
+              </a:rPr>
+              <a:t>–  a hold loop never needs SNR 10 in one measurement: it integrates readings (next slide)</a:t>
+            </a:r>
+          </a:p>
+          <a:p>
+            <a:pPr marL="0" indent="0">
+              <a:spcAft>
+                <a:spcPts val="600"/>
+              </a:spcAft>
+            </a:pPr>
+            <a:r>
+              <a:rPr sz="1150" b="0">
+                <a:solidFill>
+                  <a:srgbClr val="282828"/>
+                </a:solidFill>
+                <a:latin typeface="Arial"/>
+              </a:rPr>
+              <a:t>•  </a:t>
+            </a:r>
+            <a:r>
+              <a:rPr sz="1150" b="1">
+                <a:solidFill>
+                  <a:srgbClr val="282828"/>
+                </a:solidFill>
+                <a:latin typeface="Arial"/>
+              </a:rPr>
+              <a:t>Model and bench agree:</a:t>
+            </a:r>
+            <a:r>
+              <a:rPr sz="1150" b="0">
+                <a:solidFill>
+                  <a:srgbClr val="282828"/>
+                </a:solidFill>
+                <a:latin typeface="Arial"/>
+              </a:rPr>
+              <a:t> the per-pixel noise on the bench equals the tCophi formula to 1.000 ± 0.002 on every camera, rig and train.</a:t>
+            </a:r>
+          </a:p>
+          <a:p>
+            <a:pPr>
+              <a:spcAft>
+                <a:spcPts val="600"/>
+              </a:spcAft>
+            </a:pPr>
+            <a:r>
+              <a:rPr sz="1150" b="0">
+                <a:solidFill>
+                  <a:srgbClr val="282828"/>
+                </a:solidFill>
+                <a:latin typeface="Arial"/>
+              </a:rPr>
+              <a:t>•  </a:t>
+            </a:r>
+            <a:r>
+              <a:rPr sz="1150" b="1">
+                <a:solidFill>
+                  <a:srgbClr val="282828"/>
+                </a:solidFill>
+                <a:latin typeface="Arial"/>
+              </a:rPr>
+              <a:t>Rolling-shutter cameras are out:</a:t>
+            </a:r>
+            <a:r>
+              <a:rPr sz="1150" b="0">
+                <a:solidFill>
+                  <a:srgbClr val="282828"/>
+                </a:solidFill>
+                <a:latin typeface="Arial"/>
+              </a:rPr>
+              <a:t> rows exposed in sequence see different beat phases — a phase ramp across the image.  Needed: true global shutter, hardware trigger from the Rb clock, full-frame streaming.</a:t>
+            </a:r>
+          </a:p>
+          <a:p>
+            <a:pPr>
+              <a:spcAft>
+                <a:spcPts val="600"/>
+              </a:spcAft>
+            </a:pPr>
+            <a:r>
+              <a:rPr sz="1150" b="0">
+                <a:solidFill>
+                  <a:srgbClr val="282828"/>
+                </a:solidFill>
+                <a:latin typeface="Arial"/>
+              </a:rPr>
+              <a:t>•  </a:t>
+            </a:r>
+            <a:r>
+              <a:rPr sz="1150" b="1">
+                <a:solidFill>
+                  <a:srgbClr val="282828"/>
+                </a:solidFill>
+                <a:latin typeface="Arial"/>
+              </a:rPr>
+              <a:t>Why the camera, not the pixel count:</a:t>
+            </a:r>
+            <a:r>
+              <a:rPr sz="1150" b="0">
+                <a:solidFill>
+                  <a:srgbClr val="282828"/>
+                </a:solidFill>
+                <a:latin typeface="Arial"/>
+              </a:rPr>
+              <a:t> a 1k camera oversamples the lattice ten to one; well depth × frame rate is the budget.</a:t>
+            </a:r>
+          </a:p>
+        </p:txBody>
+      </p:sp>
+      <p:sp>
+        <p:nvSpPr>
+          <p:cNvPr id="7" name="TextBox 6"/>
+          <p:cNvSpPr txBox="1"/>
+          <p:nvPr/>
+        </p:nvSpPr>
+        <p:spPr>
+          <a:xfrm>
+            <a:off x="7315200" y="5358384"/>
+            <a:ext cx="4480560" cy="274320"/>
+          </a:xfrm>
+          <a:prstGeom prst="rect">
+            <a:avLst/>
+          </a:prstGeom>
+          <a:noFill/>
+        </p:spPr>
+        <p:txBody>
+          <a:bodyPr wrap="square">
+            <a:spAutoFit/>
+          </a:bodyPr>
+          <a:lstStyle/>
+          <a:p>
+            <a:pPr>
+              <a:spcAft>
+                <a:spcPts val="600"/>
+              </a:spcAft>
+            </a:pPr>
+            <a:r>
+              <a:rPr sz="1050" b="0">
+                <a:solidFill>
+                  <a:srgbClr val="6E6E6E"/>
+                </a:solidFill>
+                <a:latin typeface="Arial"/>
+              </a:rPr>
+              <a:t>Stage noise (runs/noise_{lens,oap}[_plain]), 12 draws, cameras binned onto the model grid (well × k², read × k, frame mean at half well).  Mask convention from the lock-in runs on: the LO-only annulus (no test light) is filled with the fringe pixels' median, not zero — a zero there made any common phase a pupil-edge step the edge actuators fit; the bucket camera's electronics rows move ≤ 9 % under it.</a:t>
+            </a:r>
+          </a:p>
+        </p:txBody>
+      </p:sp>
+    </p:spTree>
+  </p:cSld>
+  <p:clrMapOvr>
+    <a:masterClrMapping/>
+  </p:clrMapOvr>
+</p:sld>
+</file>
+
+<file path=ppt/slides/slide14.xml><?xml version="1.0" encoding="utf-8"?>
+<p:sld xmlns:a="http://schemas.openxmlformats.org/drawingml/2006/main" xmlns:p="http://schemas.openxmlformats.org/presentationml/2006/main" xmlns:r="http://schemas.openxmlformats.org/officeDocument/2006/relationships">
+  <p:cSld>
+    <p:spTree>
+      <p:nvGrpSpPr>
+        <p:cNvPr id="1" name=""/>
+        <p:cNvGrpSpPr/>
+        <p:nvPr/>
+      </p:nvGrpSpPr>
+      <p:grpSpPr/>
+      <p:sp>
+        <p:nvSpPr>
+          <p:cNvPr id="2" name="TextBox 1"/>
+          <p:cNvSpPr txBox="1"/>
+          <p:nvPr/>
+        </p:nvSpPr>
+        <p:spPr>
+          <a:xfrm>
+            <a:off x="411480" y="201168"/>
+            <a:ext cx="11368735" cy="914400"/>
+          </a:xfrm>
+          <a:prstGeom prst="rect">
+            <a:avLst/>
+          </a:prstGeom>
+          <a:noFill/>
+        </p:spPr>
+        <p:txBody>
+          <a:bodyPr wrap="square">
+            <a:spAutoFit/>
+          </a:bodyPr>
+          <a:lstStyle/>
+          <a:p>
+            <a:pPr>
+              <a:spcAft>
+                <a:spcPts val="400"/>
+              </a:spcAft>
+            </a:pPr>
+            <a:r>
+              <a:rPr sz="2400" b="1">
+                <a:solidFill>
+                  <a:srgbClr val="1F4E79"/>
+                </a:solidFill>
+                <a:latin typeface="Arial"/>
+              </a:rPr>
+              <a:t>Holding 3 pm: the servo at the camera's cadence</a:t>
+            </a:r>
+          </a:p>
+          <a:p>
+            <a:pPr>
+              <a:spcAft>
+                <a:spcPts val="0"/>
+              </a:spcAft>
+            </a:pPr>
+            <a:r>
+              <a:rPr sz="1250" b="0">
+                <a:solidFill>
+                  <a:srgbClr val="6E6E6E"/>
+                </a:solidFill>
+                <a:latin typeface="Arial"/>
+              </a:rPr>
+              <a:t>COPHI holds 3 pm against the record's drifts: Feng's baseline camera needs a 16 s cycle, the Photonfocus 1.6 s, the lock-in camera 0.125 s (3.09 pm, fiber term inert); the LO's pointing is the term the loop cannot see past</a:t>
+            </a:r>
+          </a:p>
+        </p:txBody>
+      </p:sp>
+      <p:sp>
+        <p:nvSpPr>
+          <p:cNvPr id="3" name="Rectangle 2"/>
+          <p:cNvSpPr/>
+          <p:nvPr/>
+        </p:nvSpPr>
+        <p:spPr>
+          <a:xfrm>
+            <a:off x="411480" y="1133856"/>
+            <a:ext cx="11368735" cy="20320"/>
+          </a:xfrm>
+          <a:prstGeom prst="rect">
+            <a:avLst/>
+          </a:prstGeom>
+          <a:solidFill>
+            <a:srgbClr val="B8C6D4"/>
+          </a:solidFill>
+          <a:ln>
+            <a:noFill/>
+          </a:ln>
+          <a:effectLst/>
+        </p:spPr>
+        <p:style>
+          <a:lnRef idx="1">
+            <a:schemeClr val="accent1"/>
+          </a:lnRef>
+          <a:fillRef idx="3">
+            <a:schemeClr val="accent1"/>
+          </a:fillRef>
+          <a:effectRef idx="2">
+            <a:schemeClr val="accent1"/>
+          </a:effectRef>
+          <a:fontRef idx="minor">
+            <a:schemeClr val="lt1"/>
+          </a:fontRef>
+        </p:style>
+        <p:txBody>
+          <a:bodyPr rtlCol="0" anchor="ctr"/>
+          <a:lstStyle/>
+          <a:p>
+            <a:pPr algn="ctr"/>
+          </a:p>
+        </p:txBody>
+      </p:sp>
+      <p:graphicFrame>
+        <p:nvGraphicFramePr>
+          <p:cNvPr id="4" name="Table 3"/>
+          <p:cNvGraphicFramePr>
+            <a:graphicFrameLocks noGrp="1"/>
+          </p:cNvGraphicFramePr>
+          <p:nvPr/>
+        </p:nvGraphicFramePr>
+        <p:xfrm>
+          <a:off x="411480" y="1298448"/>
           <a:ext cx="5806439" cy="4686300"/>
         </p:xfrm>
         <a:graphic>
@@ -7837,7 +8148,7 @@
 </p:sld>
 </file>
 
-<file path=ppt/slides/slide14.xml><?xml version="1.0" encoding="utf-8"?>
+<file path=ppt/slides/slide15.xml><?xml version="1.0" encoding="utf-8"?>
 <p:sld xmlns:a="http://schemas.openxmlformats.org/drawingml/2006/main" xmlns:p="http://schemas.openxmlformats.org/presentationml/2006/main" xmlns:r="http://schemas.openxmlformats.org/officeDocument/2006/relationships">
   <p:cSld>
     <p:spTree>
@@ -8170,7 +8481,7 @@
 </p:sld>
 </file>
 
-<file path=ppt/slides/slide15.xml><?xml version="1.0" encoding="utf-8"?>
+<file path=ppt/slides/slide16.xml><?xml version="1.0" encoding="utf-8"?>
 <p:sld xmlns:a="http://schemas.openxmlformats.org/drawingml/2006/main" xmlns:p="http://schemas.openxmlformats.org/presentationml/2006/main" xmlns:r="http://schemas.openxmlformats.org/officeDocument/2006/relationships">
   <p:cSld>
     <p:spTree>
@@ -8447,7 +8758,7 @@
 </p:sld>
 </file>
 
-<file path=ppt/slides/slide16.xml><?xml version="1.0" encoding="utf-8"?>
+<file path=ppt/slides/slide17.xml><?xml version="1.0" encoding="utf-8"?>
 <p:sld xmlns:a="http://schemas.openxmlformats.org/drawingml/2006/main" xmlns:p="http://schemas.openxmlformats.org/presentationml/2006/main" xmlns:r="http://schemas.openxmlformats.org/officeDocument/2006/relationships">
   <p:cSld>
     <p:spTree>
@@ -9296,7 +9607,7 @@
 </p:sld>
 </file>
 
-<file path=ppt/slides/slide17.xml><?xml version="1.0" encoding="utf-8"?>
+<file path=ppt/slides/slide18.xml><?xml version="1.0" encoding="utf-8"?>
 <p:sld xmlns:a="http://schemas.openxmlformats.org/drawingml/2006/main" xmlns:p="http://schemas.openxmlformats.org/presentationml/2006/main" xmlns:r="http://schemas.openxmlformats.org/officeDocument/2006/relationships">
   <p:cSld>
     <p:spTree>
@@ -10678,7 +10989,7 @@
 </p:sld>
 </file>
 
-<file path=ppt/slides/slide18.xml><?xml version="1.0" encoding="utf-8"?>
+<file path=ppt/slides/slide19.xml><?xml version="1.0" encoding="utf-8"?>
 <p:sld xmlns:a="http://schemas.openxmlformats.org/drawingml/2006/main" xmlns:p="http://schemas.openxmlformats.org/presentationml/2006/main" xmlns:r="http://schemas.openxmlformats.org/officeDocument/2006/relationships">
   <p:cSld>
     <p:spTree>
@@ -11095,7 +11406,7 @@
 </p:sld>
 </file>
 
-<file path=ppt/slides/slide19.xml><?xml version="1.0" encoding="utf-8"?>
+<file path=ppt/slides/slide2.xml><?xml version="1.0" encoding="utf-8"?>
 <p:sld xmlns:a="http://schemas.openxmlformats.org/drawingml/2006/main" xmlns:p="http://schemas.openxmlformats.org/presentationml/2006/main" xmlns:r="http://schemas.openxmlformats.org/officeDocument/2006/relationships">
   <p:cSld>
     <p:spTree>
@@ -11139,7 +11450,7 @@
                 </a:solidFill>
                 <a:latin typeface="Arial"/>
               </a:rPr>
-              <a:t>COPHI against the Zernike sensor with a dedicated laser, for the hold job</a:t>
+              <a:t>Feng's proposal, in one slide</a:t>
             </a:r>
           </a:p>
           <a:p>
@@ -11155,7 +11466,7 @@
                 </a:solidFill>
                 <a:latin typeface="Arial"/>
               </a:rPr>
-              <a:t>Feng's deck poses this comparison; on our bench the answer is photons and time: the vector Zernike holds 3 pm from 2 × 10¹² photons per cycle, COPHI with Feng's camera from ~1 × 10¹⁴ — and COPHI with a lock-in camera reaches a picometer faster than any of them, captures from cold, and reads absolutely</a:t>
+              <a:t>A heterodyne interferometer whose phase steps are set by frequency, not by a piezo, with a fiber-fed local oscillator at the camera, and an array detector providing many parallel channels to resolve 96 × 96 actuators</a:t>
             </a:r>
           </a:p>
         </p:txBody>
@@ -11204,819 +11515,16 @@
           </a:p>
         </p:txBody>
       </p:sp>
-      <p:graphicFrame>
-        <p:nvGraphicFramePr>
-          <p:cNvPr id="4" name="Table 3"/>
-          <p:cNvGraphicFramePr>
-            <a:graphicFrameLocks noGrp="1"/>
-          </p:cNvGraphicFramePr>
-          <p:nvPr/>
-        </p:nvGraphicFramePr>
-        <p:xfrm>
-          <a:off x="411480" y="1298448"/>
-          <a:ext cx="11368734" cy="4223385"/>
-        </p:xfrm>
-        <a:graphic>
-          <a:graphicData uri="http://schemas.openxmlformats.org/drawingml/2006/table">
-            <a:tbl>
-              <a:tblPr firstRow="1" bandRow="1">
-                <a:tableStyleId>{5C22544A-7EE6-4342-B048-85BDC9FD1C3A}</a:tableStyleId>
-              </a:tblPr>
-              <a:tblGrid>
-                <a:gridCol w="2107692"/>
-                <a:gridCol w="4370487"/>
-                <a:gridCol w="1268851"/>
-                <a:gridCol w="1817116"/>
-                <a:gridCol w="1804588"/>
-              </a:tblGrid>
-              <a:tr h="468630">
-                <a:tc>
-                  <a:txBody>
-                    <a:bodyPr wrap="square"/>
-                    <a:lstStyle/>
-                    <a:p/>
-                  </a:txBody>
-                  <a:tcPr marL="54864" marR="54864" marT="18288" marB="18288">
-                    <a:solidFill>
-                      <a:srgbClr val="1F4E79"/>
-                    </a:solidFill>
-                  </a:tcPr>
-                </a:tc>
-                <a:tc>
-                  <a:txBody>
-                    <a:bodyPr wrap="square"/>
-                    <a:lstStyle/>
-                    <a:p>
-                      <a:r>
-                        <a:rPr sz="1100" b="1">
-                          <a:solidFill>
-                            <a:srgbClr val="FFFFFF"/>
-                          </a:solidFill>
-                          <a:latin typeface="Arial"/>
-                        </a:rPr>
-                        <a:t>vector Zernike (dedicated laser, pol. camera)</a:t>
-                      </a:r>
-                    </a:p>
-                  </a:txBody>
-                  <a:tcPr marL="54864" marR="54864" marT="18288" marB="18288">
-                    <a:solidFill>
-                      <a:srgbClr val="1F4E79"/>
-                    </a:solidFill>
-                  </a:tcPr>
-                </a:tc>
-                <a:tc>
-                  <a:txBody>
-                    <a:bodyPr wrap="square"/>
-                    <a:lstStyle/>
-                    <a:p>
-                      <a:r>
-                        <a:rPr sz="1100" b="1">
-                          <a:solidFill>
-                            <a:srgbClr val="FFFFFF"/>
-                          </a:solidFill>
-                          <a:latin typeface="Arial"/>
-                        </a:rPr>
-                        <a:t>COPHI, Feng's camera</a:t>
-                      </a:r>
-                    </a:p>
-                  </a:txBody>
-                  <a:tcPr marL="54864" marR="54864" marT="18288" marB="18288">
-                    <a:solidFill>
-                      <a:srgbClr val="1F4E79"/>
-                    </a:solidFill>
-                  </a:tcPr>
-                </a:tc>
-                <a:tc>
-                  <a:txBody>
-                    <a:bodyPr wrap="square"/>
-                    <a:lstStyle/>
-                    <a:p>
-                      <a:r>
-                        <a:rPr sz="1100" b="1">
-                          <a:solidFill>
-                            <a:srgbClr val="FFFFFF"/>
-                          </a:solidFill>
-                          <a:latin typeface="Arial"/>
-                        </a:rPr>
-                        <a:t>COPHI, Photonfocus</a:t>
-                      </a:r>
-                    </a:p>
-                  </a:txBody>
-                  <a:tcPr marL="54864" marR="54864" marT="18288" marB="18288">
-                    <a:solidFill>
-                      <a:srgbClr val="1F4E79"/>
-                    </a:solidFill>
-                  </a:tcPr>
-                </a:tc>
-                <a:tc>
-                  <a:txBody>
-                    <a:bodyPr wrap="square"/>
-                    <a:lstStyle/>
-                    <a:p>
-                      <a:r>
-                        <a:rPr sz="1100" b="1">
-                          <a:solidFill>
-                            <a:srgbClr val="FFFFFF"/>
-                          </a:solidFill>
-                          <a:latin typeface="Arial"/>
-                        </a:rPr>
-                        <a:t>COPHI, lock-in camera (C4, as surveyed)</a:t>
-                      </a:r>
-                    </a:p>
-                  </a:txBody>
-                  <a:tcPr marL="54864" marR="54864" marT="18288" marB="18288">
-                    <a:solidFill>
-                      <a:srgbClr val="1F4E79"/>
-                    </a:solidFill>
-                  </a:tcPr>
-                </a:tc>
-              </a:tr>
-              <a:tr h="468630">
-                <a:tc>
-                  <a:txBody>
-                    <a:bodyPr wrap="square"/>
-                    <a:lstStyle/>
-                    <a:p>
-                      <a:r>
-                        <a:rPr sz="1100" b="0">
-                          <a:solidFill>
-                            <a:srgbClr val="282828"/>
-                          </a:solidFill>
-                          <a:latin typeface="Arial"/>
-                        </a:rPr>
-                        <a:t>photons per 3 pm hold cycle</a:t>
-                      </a:r>
-                    </a:p>
-                  </a:txBody>
-                  <a:tcPr marL="54864" marR="54864" marT="18288" marB="18288">
-                    <a:solidFill>
-                      <a:srgbClr val="FFFFFF"/>
-                    </a:solidFill>
-                  </a:tcPr>
-                </a:tc>
-                <a:tc>
-                  <a:txBody>
-                    <a:bodyPr wrap="square"/>
-                    <a:lstStyle/>
-                    <a:p>
-                      <a:r>
-                        <a:rPr sz="1100" b="0">
-                          <a:solidFill>
-                            <a:srgbClr val="282828"/>
-                          </a:solidFill>
-                          <a:latin typeface="Arial"/>
-                        </a:rPr>
-                        <a:t>2.2 × 10¹² (gauge deck)</a:t>
-                      </a:r>
-                    </a:p>
-                  </a:txBody>
-                  <a:tcPr marL="54864" marR="54864" marT="18288" marB="18288">
-                    <a:solidFill>
-                      <a:srgbClr val="FFFFFF"/>
-                    </a:solidFill>
-                  </a:tcPr>
-                </a:tc>
-                <a:tc>
-                  <a:txBody>
-                    <a:bodyPr wrap="square"/>
-                    <a:lstStyle/>
-                    <a:p>
-                      <a:r>
-                        <a:rPr sz="1100" b="0">
-                          <a:solidFill>
-                            <a:srgbClr val="282828"/>
-                          </a:solidFill>
-                          <a:latin typeface="Arial"/>
-                        </a:rPr>
-                        <a:t>~1 × 10¹⁴ (120 readings)</a:t>
-                      </a:r>
-                    </a:p>
-                  </a:txBody>
-                  <a:tcPr marL="54864" marR="54864" marT="18288" marB="18288">
-                    <a:solidFill>
-                      <a:srgbClr val="FFFFFF"/>
-                    </a:solidFill>
-                  </a:tcPr>
-                </a:tc>
-                <a:tc>
-                  <a:txBody>
-                    <a:bodyPr wrap="square"/>
-                    <a:lstStyle/>
-                    <a:p>
-                      <a:r>
-                        <a:rPr sz="1100" b="0">
-                          <a:solidFill>
-                            <a:srgbClr val="282828"/>
-                          </a:solidFill>
-                          <a:latin typeface="Arial"/>
-                        </a:rPr>
-                        <a:t>~1 × 10¹⁴ (60 readings)</a:t>
-                      </a:r>
-                    </a:p>
-                  </a:txBody>
-                  <a:tcPr marL="54864" marR="54864" marT="18288" marB="18288">
-                    <a:solidFill>
-                      <a:srgbClr val="FFFFFF"/>
-                    </a:solidFill>
-                  </a:tcPr>
-                </a:tc>
-                <a:tc>
-                  <a:txBody>
-                    <a:bodyPr wrap="square"/>
-                    <a:lstStyle/>
-                    <a:p>
-                      <a:r>
-                        <a:rPr sz="1100" b="0">
-                          <a:solidFill>
-                            <a:srgbClr val="282828"/>
-                          </a:solidFill>
-                          <a:latin typeface="Arial"/>
-                        </a:rPr>
-                        <a:t>~9 × 10¹² (125 samples, capped well)</a:t>
-                      </a:r>
-                    </a:p>
-                  </a:txBody>
-                  <a:tcPr marL="54864" marR="54864" marT="18288" marB="18288">
-                    <a:solidFill>
-                      <a:srgbClr val="FFFFFF"/>
-                    </a:solidFill>
-                  </a:tcPr>
-                </a:tc>
-              </a:tr>
-              <a:tr h="657225">
-                <a:tc>
-                  <a:txBody>
-                    <a:bodyPr wrap="square"/>
-                    <a:lstStyle/>
-                    <a:p>
-                      <a:r>
-                        <a:rPr sz="1100" b="0">
-                          <a:solidFill>
-                            <a:srgbClr val="282828"/>
-                          </a:solidFill>
-                          <a:latin typeface="Arial"/>
-                        </a:rPr>
-                        <a:t>time per 3 pm hold cycle</a:t>
-                      </a:r>
-                    </a:p>
-                  </a:txBody>
-                  <a:tcPr marL="54864" marR="54864" marT="18288" marB="18288">
-                    <a:solidFill>
-                      <a:srgbClr val="ECF1F6"/>
-                    </a:solidFill>
-                  </a:tcPr>
-                </a:tc>
-                <a:tc>
-                  <a:txBody>
-                    <a:bodyPr wrap="square"/>
-                    <a:lstStyle/>
-                    <a:p>
-                      <a:r>
-                        <a:rPr sz="1100" b="0">
-                          <a:solidFill>
-                            <a:srgbClr val="282828"/>
-                          </a:solidFill>
-                          <a:latin typeface="Arial"/>
-                        </a:rPr>
-                        <a:t>~60 s on the assumed pol. camera (519 s/pm ÷ 9: its 10 ke⁻ well, the core's dynamic range, two unused orientations — the camera is the ZWFS's own question)</a:t>
-                      </a:r>
-                    </a:p>
-                  </a:txBody>
-                  <a:tcPr marL="54864" marR="54864" marT="18288" marB="18288">
-                    <a:solidFill>
-                      <a:srgbClr val="ECF1F6"/>
-                    </a:solidFill>
-                  </a:tcPr>
-                </a:tc>
-                <a:tc>
-                  <a:txBody>
-                    <a:bodyPr wrap="square"/>
-                    <a:lstStyle/>
-                    <a:p>
-                      <a:r>
-                        <a:rPr sz="1100" b="0">
-                          <a:solidFill>
-                            <a:srgbClr val="282828"/>
-                          </a:solidFill>
-                          <a:latin typeface="Arial"/>
-                        </a:rPr>
-                        <a:t>16 s</a:t>
-                      </a:r>
-                    </a:p>
-                  </a:txBody>
-                  <a:tcPr marL="54864" marR="54864" marT="18288" marB="18288">
-                    <a:solidFill>
-                      <a:srgbClr val="ECF1F6"/>
-                    </a:solidFill>
-                  </a:tcPr>
-                </a:tc>
-                <a:tc>
-                  <a:txBody>
-                    <a:bodyPr wrap="square"/>
-                    <a:lstStyle/>
-                    <a:p>
-                      <a:r>
-                        <a:rPr sz="1100" b="0">
-                          <a:solidFill>
-                            <a:srgbClr val="282828"/>
-                          </a:solidFill>
-                          <a:latin typeface="Arial"/>
-                        </a:rPr>
-                        <a:t>1.6 s</a:t>
-                      </a:r>
-                    </a:p>
-                  </a:txBody>
-                  <a:tcPr marL="54864" marR="54864" marT="18288" marB="18288">
-                    <a:solidFill>
-                      <a:srgbClr val="ECF1F6"/>
-                    </a:solidFill>
-                  </a:tcPr>
-                </a:tc>
-                <a:tc>
-                  <a:txBody>
-                    <a:bodyPr wrap="square"/>
-                    <a:lstStyle/>
-                    <a:p>
-                      <a:r>
-                        <a:rPr sz="1100" b="0">
-                          <a:solidFill>
-                            <a:srgbClr val="282828"/>
-                          </a:solidFill>
-                          <a:latin typeface="Arial"/>
-                        </a:rPr>
-                        <a:t>0.125 s (record: 3.09 pm)</a:t>
-                      </a:r>
-                    </a:p>
-                  </a:txBody>
-                  <a:tcPr marL="54864" marR="54864" marT="18288" marB="18288">
-                    <a:solidFill>
-                      <a:srgbClr val="ECF1F6"/>
-                    </a:solidFill>
-                  </a:tcPr>
-                </a:tc>
-              </a:tr>
-              <a:tr h="657225">
-                <a:tc>
-                  <a:txBody>
-                    <a:bodyPr wrap="square"/>
-                    <a:lstStyle/>
-                    <a:p>
-                      <a:r>
-                        <a:rPr sz="1100" b="0">
-                          <a:solidFill>
-                            <a:srgbClr val="282828"/>
-                          </a:solidFill>
-                          <a:latin typeface="Arial"/>
-                        </a:rPr>
-                        <a:t>seconds to SNR 1 at 1 pm</a:t>
-                      </a:r>
-                    </a:p>
-                  </a:txBody>
-                  <a:tcPr marL="54864" marR="54864" marT="18288" marB="18288">
-                    <a:solidFill>
-                      <a:srgbClr val="FFFFFF"/>
-                    </a:solidFill>
-                  </a:tcPr>
-                </a:tc>
-                <a:tc>
-                  <a:txBody>
-                    <a:bodyPr wrap="square"/>
-                    <a:lstStyle/>
-                    <a:p>
-                      <a:r>
-                        <a:rPr sz="1100" b="0">
-                          <a:solidFill>
-                            <a:srgbClr val="282828"/>
-                          </a:solidFill>
-                          <a:latin typeface="Arial"/>
-                        </a:rPr>
-                        <a:t>519 (pol. camera, record)</a:t>
-                      </a:r>
-                    </a:p>
-                  </a:txBody>
-                  <a:tcPr marL="54864" marR="54864" marT="18288" marB="18288">
-                    <a:solidFill>
-                      <a:srgbClr val="FFFFFF"/>
-                    </a:solidFill>
-                  </a:tcPr>
-                </a:tc>
-                <a:tc>
-                  <a:txBody>
-                    <a:bodyPr wrap="square"/>
-                    <a:lstStyle/>
-                    <a:p>
-                      <a:r>
-                        <a:rPr sz="1100" b="0">
-                          <a:solidFill>
-                            <a:srgbClr val="282828"/>
-                          </a:solidFill>
-                          <a:latin typeface="Arial"/>
-                        </a:rPr>
-                        <a:t>443 / 385</a:t>
-                      </a:r>
-                    </a:p>
-                  </a:txBody>
-                  <a:tcPr marL="54864" marR="54864" marT="18288" marB="18288">
-                    <a:solidFill>
-                      <a:srgbClr val="FFFFFF"/>
-                    </a:solidFill>
-                  </a:tcPr>
-                </a:tc>
-                <a:tc>
-                  <a:txBody>
-                    <a:bodyPr wrap="square"/>
-                    <a:lstStyle/>
-                    <a:p>
-                      <a:r>
-                        <a:rPr sz="1100" b="0">
-                          <a:solidFill>
-                            <a:srgbClr val="282828"/>
-                          </a:solidFill>
-                          <a:latin typeface="Arial"/>
-                        </a:rPr>
-                        <a:t>42 / 36</a:t>
-                      </a:r>
-                    </a:p>
-                  </a:txBody>
-                  <a:tcPr marL="54864" marR="54864" marT="18288" marB="18288">
-                    <a:solidFill>
-                      <a:srgbClr val="FFFFFF"/>
-                    </a:solidFill>
-                  </a:tcPr>
-                </a:tc>
-                <a:tc>
-                  <a:txBody>
-                    <a:bodyPr wrap="square"/>
-                    <a:lstStyle/>
-                    <a:p>
-                      <a:r>
-                        <a:rPr sz="1100" b="0">
-                          <a:solidFill>
-                            <a:srgbClr val="282828"/>
-                          </a:solidFill>
-                          <a:latin typeface="Arial"/>
-                        </a:rPr>
-                        <a:t>3.35 / 3.73 (×1.23 in time for two-tap demodulation)</a:t>
-                      </a:r>
-                    </a:p>
-                  </a:txBody>
-                  <a:tcPr marL="54864" marR="54864" marT="18288" marB="18288">
-                    <a:solidFill>
-                      <a:srgbClr val="FFFFFF"/>
-                    </a:solidFill>
-                  </a:tcPr>
-                </a:tc>
-              </a:tr>
-              <a:tr h="657225">
-                <a:tc>
-                  <a:txBody>
-                    <a:bodyPr wrap="square"/>
-                    <a:lstStyle/>
-                    <a:p>
-                      <a:r>
-                        <a:rPr sz="1100" b="0">
-                          <a:solidFill>
-                            <a:srgbClr val="282828"/>
-                          </a:solidFill>
-                          <a:latin typeface="Arial"/>
-                        </a:rPr>
-                        <a:t>capture from cold</a:t>
-                      </a:r>
-                    </a:p>
-                  </a:txBody>
-                  <a:tcPr marL="54864" marR="54864" marT="18288" marB="18288">
-                    <a:solidFill>
-                      <a:srgbClr val="ECF1F6"/>
-                    </a:solidFill>
-                  </a:tcPr>
-                </a:tc>
-                <a:tc>
-                  <a:txBody>
-                    <a:bodyPr wrap="square"/>
-                    <a:lstStyle/>
-                    <a:p>
-                      <a:r>
-                        <a:rPr sz="1100" b="0">
-                          <a:solidFill>
-                            <a:srgbClr val="282828"/>
-                          </a:solidFill>
-                          <a:latin typeface="Arial"/>
-                        </a:rPr>
-                        <a:t>no: the reference ages past 36–70 nm</a:t>
-                      </a:r>
-                    </a:p>
-                  </a:txBody>
-                  <a:tcPr marL="54864" marR="54864" marT="18288" marB="18288">
-                    <a:solidFill>
-                      <a:srgbClr val="ECF1F6"/>
-                    </a:solidFill>
-                  </a:tcPr>
-                </a:tc>
-                <a:tc>
-                  <a:txBody>
-                    <a:bodyPr wrap="square"/>
-                    <a:lstStyle/>
-                    <a:p>
-                      <a:r>
-                        <a:rPr sz="1100" b="0">
-                          <a:solidFill>
-                            <a:srgbClr val="282828"/>
-                          </a:solidFill>
-                          <a:latin typeface="Arial"/>
-                        </a:rPr>
-                        <a:t>two colors, one 0.27 s reading</a:t>
-                      </a:r>
-                    </a:p>
-                  </a:txBody>
-                  <a:tcPr marL="54864" marR="54864" marT="18288" marB="18288">
-                    <a:solidFill>
-                      <a:srgbClr val="ECF1F6"/>
-                    </a:solidFill>
-                  </a:tcPr>
-                </a:tc>
-                <a:tc>
-                  <a:txBody>
-                    <a:bodyPr wrap="square"/>
-                    <a:lstStyle/>
-                    <a:p>
-                      <a:r>
-                        <a:rPr sz="1100" b="0">
-                          <a:solidFill>
-                            <a:srgbClr val="282828"/>
-                          </a:solidFill>
-                          <a:latin typeface="Arial"/>
-                        </a:rPr>
-                        <a:t>same</a:t>
-                      </a:r>
-                    </a:p>
-                  </a:txBody>
-                  <a:tcPr marL="54864" marR="54864" marT="18288" marB="18288">
-                    <a:solidFill>
-                      <a:srgbClr val="ECF1F6"/>
-                    </a:solidFill>
-                  </a:tcPr>
-                </a:tc>
-                <a:tc>
-                  <a:txBody>
-                    <a:bodyPr wrap="square"/>
-                    <a:lstStyle/>
-                    <a:p>
-                      <a:r>
-                        <a:rPr sz="1100" b="0">
-                          <a:solidFill>
-                            <a:srgbClr val="282828"/>
-                          </a:solidFill>
-                          <a:latin typeface="Arial"/>
-                        </a:rPr>
-                        <a:t>two colors on alternate samples; zero wrong orders to 480 nm</a:t>
-                      </a:r>
-                    </a:p>
-                  </a:txBody>
-                  <a:tcPr marL="54864" marR="54864" marT="18288" marB="18288">
-                    <a:solidFill>
-                      <a:srgbClr val="ECF1F6"/>
-                    </a:solidFill>
-                  </a:tcPr>
-                </a:tc>
-              </a:tr>
-              <a:tr h="657225">
-                <a:tc>
-                  <a:txBody>
-                    <a:bodyPr wrap="square"/>
-                    <a:lstStyle/>
-                    <a:p>
-                      <a:r>
-                        <a:rPr sz="1100" b="0">
-                          <a:solidFill>
-                            <a:srgbClr val="282828"/>
-                          </a:solidFill>
-                          <a:latin typeface="Arial"/>
-                        </a:rPr>
-                        <a:t>absolute read</a:t>
-                      </a:r>
-                    </a:p>
-                  </a:txBody>
-                  <a:tcPr marL="54864" marR="54864" marT="18288" marB="18288">
-                    <a:solidFill>
-                      <a:srgbClr val="FFFFFF"/>
-                    </a:solidFill>
-                  </a:tcPr>
-                </a:tc>
-                <a:tc>
-                  <a:txBody>
-                    <a:bodyPr wrap="square"/>
-                    <a:lstStyle/>
-                    <a:p>
-                      <a:r>
-                        <a:rPr sz="1100" b="0">
-                          <a:solidFill>
-                            <a:srgbClr val="282828"/>
-                          </a:solidFill>
-                          <a:latin typeface="Arial"/>
-                        </a:rPr>
-                        <a:t>reference iterated or matrix re-measured</a:t>
-                      </a:r>
-                    </a:p>
-                  </a:txBody>
-                  <a:tcPr marL="54864" marR="54864" marT="18288" marB="18288">
-                    <a:solidFill>
-                      <a:srgbClr val="FFFFFF"/>
-                    </a:solidFill>
-                  </a:tcPr>
-                </a:tc>
-                <a:tc>
-                  <a:txBody>
-                    <a:bodyPr wrap="square"/>
-                    <a:lstStyle/>
-                    <a:p>
-                      <a:r>
-                        <a:rPr sz="1100" b="0">
-                          <a:solidFill>
-                            <a:srgbClr val="282828"/>
-                          </a:solidFill>
-                          <a:latin typeface="Arial"/>
-                        </a:rPr>
-                        <a:t>exact (slope 1.000000) against the LO</a:t>
-                      </a:r>
-                    </a:p>
-                  </a:txBody>
-                  <a:tcPr marL="54864" marR="54864" marT="18288" marB="18288">
-                    <a:solidFill>
-                      <a:srgbClr val="FFFFFF"/>
-                    </a:solidFill>
-                  </a:tcPr>
-                </a:tc>
-                <a:tc>
-                  <a:txBody>
-                    <a:bodyPr wrap="square"/>
-                    <a:lstStyle/>
-                    <a:p>
-                      <a:r>
-                        <a:rPr sz="1100" b="0">
-                          <a:solidFill>
-                            <a:srgbClr val="282828"/>
-                          </a:solidFill>
-                          <a:latin typeface="Arial"/>
-                        </a:rPr>
-                        <a:t>exact</a:t>
-                      </a:r>
-                    </a:p>
-                  </a:txBody>
-                  <a:tcPr marL="54864" marR="54864" marT="18288" marB="18288">
-                    <a:solidFill>
-                      <a:srgbClr val="FFFFFF"/>
-                    </a:solidFill>
-                  </a:tcPr>
-                </a:tc>
-                <a:tc>
-                  <a:txBody>
-                    <a:bodyPr wrap="square"/>
-                    <a:lstStyle/>
-                    <a:p>
-                      <a:r>
-                        <a:rPr sz="1100" b="0">
-                          <a:solidFill>
-                            <a:srgbClr val="282828"/>
-                          </a:solidFill>
-                          <a:latin typeface="Arial"/>
-                        </a:rPr>
-                        <a:t>exact</a:t>
-                      </a:r>
-                    </a:p>
-                  </a:txBody>
-                  <a:tcPr marL="54864" marR="54864" marT="18288" marB="18288">
-                    <a:solidFill>
-                      <a:srgbClr val="FFFFFF"/>
-                    </a:solidFill>
-                  </a:tcPr>
-                </a:tc>
-              </a:tr>
-              <a:tr h="657225">
-                <a:tc>
-                  <a:txBody>
-                    <a:bodyPr wrap="square"/>
-                    <a:lstStyle/>
-                    <a:p>
-                      <a:r>
-                        <a:rPr sz="1100" b="0">
-                          <a:solidFill>
-                            <a:srgbClr val="282828"/>
-                          </a:solidFill>
-                          <a:latin typeface="Arial"/>
-                        </a:rPr>
-                        <a:t>its own stabilities</a:t>
-                      </a:r>
-                    </a:p>
-                  </a:txBody>
-                  <a:tcPr marL="54864" marR="54864" marT="18288" marB="18288">
-                    <a:solidFill>
-                      <a:srgbClr val="ECF1F6"/>
-                    </a:solidFill>
-                  </a:tcPr>
-                </a:tc>
-                <a:tc>
-                  <a:txBody>
-                    <a:bodyPr wrap="square"/>
-                    <a:lstStyle/>
-                    <a:p>
-                      <a:r>
-                        <a:rPr sz="1100" b="0">
-                          <a:solidFill>
-                            <a:srgbClr val="282828"/>
-                          </a:solidFill>
-                          <a:latin typeface="Arial"/>
-                        </a:rPr>
-                        <a:t>none beyond the bench</a:t>
-                      </a:r>
-                    </a:p>
-                  </a:txBody>
-                  <a:tcPr marL="54864" marR="54864" marT="18288" marB="18288">
-                    <a:solidFill>
-                      <a:srgbClr val="ECF1F6"/>
-                    </a:solidFill>
-                  </a:tcPr>
-                </a:tc>
-                <a:tc>
-                  <a:txBody>
-                    <a:bodyPr wrap="square"/>
-                    <a:lstStyle/>
-                    <a:p>
-                      <a:r>
-                        <a:rPr sz="1100" b="0">
-                          <a:solidFill>
-                            <a:srgbClr val="282828"/>
-                          </a:solidFill>
-                          <a:latin typeface="Arial"/>
-                        </a:rPr>
-                        <a:t>fiber 0.39 nm per frame; LO 10 prad per cycle</a:t>
-                      </a:r>
-                    </a:p>
-                  </a:txBody>
-                  <a:tcPr marL="54864" marR="54864" marT="18288" marB="18288">
-                    <a:solidFill>
-                      <a:srgbClr val="ECF1F6"/>
-                    </a:solidFill>
-                  </a:tcPr>
-                </a:tc>
-                <a:tc>
-                  <a:txBody>
-                    <a:bodyPr wrap="square"/>
-                    <a:lstStyle/>
-                    <a:p>
-                      <a:r>
-                        <a:rPr sz="1100" b="0">
-                          <a:solidFill>
-                            <a:srgbClr val="282828"/>
-                          </a:solidFill>
-                          <a:latin typeface="Arial"/>
-                        </a:rPr>
-                        <a:t>same</a:t>
-                      </a:r>
-                    </a:p>
-                  </a:txBody>
-                  <a:tcPr marL="54864" marR="54864" marT="18288" marB="18288">
-                    <a:solidFill>
-                      <a:srgbClr val="ECF1F6"/>
-                    </a:solidFill>
-                  </a:tcPr>
-                </a:tc>
-                <a:tc>
-                  <a:txBody>
-                    <a:bodyPr wrap="square"/>
-                    <a:lstStyle/>
-                    <a:p>
-                      <a:r>
-                        <a:rPr sz="1100" b="0">
-                          <a:solidFill>
-                            <a:srgbClr val="282828"/>
-                          </a:solidFill>
-                          <a:latin typeface="Arial"/>
-                        </a:rPr>
-                        <a:t>LO the same (29.4 pm); fiber a per-sample piston, inert (record)</a:t>
-                      </a:r>
-                    </a:p>
-                  </a:txBody>
-                  <a:tcPr marL="54864" marR="54864" marT="18288" marB="18288">
-                    <a:solidFill>
-                      <a:srgbClr val="ECF1F6"/>
-                    </a:solidFill>
-                  </a:tcPr>
-                </a:tc>
-              </a:tr>
-            </a:tbl>
-          </a:graphicData>
-        </a:graphic>
-      </p:graphicFrame>
       <p:sp>
         <p:nvSpPr>
-          <p:cNvPr id="5" name="TextBox 4"/>
+          <p:cNvPr id="4" name="TextBox 3"/>
           <p:cNvSpPr txBox="1"/>
           <p:nvPr/>
         </p:nvSpPr>
         <p:spPr>
           <a:xfrm>
-            <a:off x="411480" y="5257800"/>
-            <a:ext cx="11368735" cy="274320"/>
+            <a:off x="411480" y="1298448"/>
+            <a:ext cx="5806440" cy="274320"/>
           </a:xfrm>
           <a:prstGeom prst="rect">
             <a:avLst/>
@@ -12035,7 +11543,7 @@
               </a:spcAft>
             </a:pPr>
             <a:r>
-              <a:rPr sz="1100" b="0">
+              <a:rPr sz="1200" b="0">
                 <a:solidFill>
                   <a:srgbClr val="282828"/>
                 </a:solidFill>
@@ -12044,40 +11552,22 @@
               <a:t>•  </a:t>
             </a:r>
             <a:r>
-              <a:rPr sz="1100" b="1">
+              <a:rPr sz="1200" b="1">
                 <a:solidFill>
                   <a:srgbClr val="282828"/>
                 </a:solidFill>
                 <a:latin typeface="Arial"/>
               </a:rPr>
-              <a:t>For hold alone, the vector Zernike is cheapest in photons</a:t>
-            </a:r>
-            <a:r>
-              <a:rPr sz="1100" b="0">
+              <a:t>Layout:</a:t>
+            </a:r>
+            <a:r>
+              <a:rPr sz="1200" b="0">
                 <a:solidFill>
                   <a:srgbClr val="282828"/>
                 </a:solidFill>
                 <a:latin typeface="Arial"/>
               </a:rPr>
-              <a:t> (~50×) and needs no stabilities of its own — but on the assumed polarization camera it is the slowest (~60 s per cycle).  Feng's camera makes COPHI slow (16 s), the Photonfocus fast (1.6 s), </a:t>
-            </a:r>
-            <a:r>
-              <a:rPr sz="1100" b="1">
-                <a:solidFill>
-                  <a:srgbClr val="282828"/>
-                </a:solidFill>
-                <a:latin typeface="Arial"/>
-              </a:rPr>
-              <a:t>the lock-in the fastest on the table (0.125 s)</a:t>
-            </a:r>
-            <a:r>
-              <a:rPr sz="1100" b="0">
-                <a:solidFill>
-                  <a:srgbClr val="282828"/>
-                </a:solidFill>
-                <a:latin typeface="Arial"/>
-              </a:rPr>
-              <a:t> if its well is as surveyed.</a:t>
+              <a:t> laser → 1×2 coupler → AOM-1 (80 MHz) and AOM-2 (80 MHz + 7.5 Hz), both synthesizers on a 10 MHz Rb standard; the measurement beam to the DM, the LO fiber to a splitter before the camera; the ×4 multipliers mixed to a 30 Hz camera trigger: four frames per 7.5 Hz fringe cycle – see next slide.</a:t>
             </a:r>
           </a:p>
           <a:p>
@@ -12087,7 +11577,7 @@
               </a:spcAft>
             </a:pPr>
             <a:r>
-              <a:rPr sz="1100" b="0">
+              <a:rPr sz="1200" b="0">
                 <a:solidFill>
                   <a:srgbClr val="282828"/>
                 </a:solidFill>
@@ -12096,22 +11586,22 @@
               <a:t>•  </a:t>
             </a:r>
             <a:r>
-              <a:rPr sz="1100" b="1">
+              <a:rPr sz="1200" b="1">
                 <a:solidFill>
                   <a:srgbClr val="282828"/>
                 </a:solidFill>
                 <a:latin typeface="Arial"/>
               </a:rPr>
-              <a:t>For capture and the absolute figure:</a:t>
-            </a:r>
-            <a:r>
-              <a:rPr sz="1100" b="0">
+              <a:t>Algorithm:</a:t>
+            </a:r>
+            <a:r>
+              <a:rPr sz="1200" b="0">
                 <a:solidFill>
                   <a:srgbClr val="282828"/>
                 </a:solidFill>
                 <a:latin typeface="Arial"/>
               </a:rPr>
-              <a:t> COPHI in either form.</a:t>
+              <a:t> I = I₀ (1 + γ cos(φ + 2π f t)); frames at α = 0, π/2, π, 3π/2; φ = atan2(I₄ − I₂, I₁ − I₃); surface = ½ (φ/2π) λ (double pass).  Backup: the N-frame least-squares solution (Zygo's four-step is N = 4).</a:t>
             </a:r>
           </a:p>
           <a:p>
@@ -12121,7 +11611,7 @@
               </a:spcAft>
             </a:pPr>
             <a:r>
-              <a:rPr sz="1100" b="0">
+              <a:rPr sz="1200" b="0">
                 <a:solidFill>
                   <a:srgbClr val="282828"/>
                 </a:solidFill>
@@ -12130,54 +11620,36 @@
               <a:t>•  </a:t>
             </a:r>
             <a:r>
-              <a:rPr sz="1100" b="1">
+              <a:rPr sz="1200" b="1">
                 <a:solidFill>
                   <a:srgbClr val="282828"/>
                 </a:solidFill>
                 <a:latin typeface="Arial"/>
               </a:rPr>
-              <a:t>For a flight DM:</a:t>
-            </a:r>
-            <a:r>
-              <a:rPr sz="1100" b="0">
+              <a:t>Main purpose: stabilize the DM!</a:t>
+            </a:r>
+            <a:r>
+              <a:rPr sz="1200" b="0">
                 <a:solidFill>
                   <a:srgbClr val="282828"/>
                 </a:solidFill>
                 <a:latin typeface="Arial"/>
               </a:rPr>
-              <a:t> hold only and photons scarce → the Zernike sensor with a camera chosen for it; hold + capture + absolute, or speed → COPHI (the lock-in fastest by 20–500×).  </a:t>
-            </a:r>
-            <a:r>
-              <a:rPr sz="1100" b="1">
-                <a:solidFill>
-                  <a:srgbClr val="282828"/>
-                </a:solidFill>
-                <a:latin typeface="Arial"/>
-              </a:rPr>
-              <a:t>The hybrid</a:t>
-            </a:r>
-            <a:r>
-              <a:rPr sz="1100" b="0">
-                <a:solidFill>
-                  <a:srgbClr val="282828"/>
-                </a:solidFill>
-                <a:latin typeface="Arial"/>
-              </a:rPr>
-              <a:t> — Zernike for the hold, COPHI's two-color read for capture and commissioning — stays the conservative answer until the lock-in's vendor numbers are in.</a:t>
+              <a:t>  Run each DM in a local loop to hold it — our job 3.  For us to figure out: the camera, the photon budget, the error terms, estimated performance.</a:t>
             </a:r>
           </a:p>
         </p:txBody>
       </p:sp>
       <p:sp>
         <p:nvSpPr>
-          <p:cNvPr id="6" name="TextBox 5"/>
+          <p:cNvPr id="5" name="TextBox 4"/>
           <p:cNvSpPr txBox="1"/>
           <p:nvPr/>
         </p:nvSpPr>
         <p:spPr>
           <a:xfrm>
-            <a:off x="411480" y="6986270"/>
-            <a:ext cx="11368735" cy="274320"/>
+            <a:off x="6400800" y="1298448"/>
+            <a:ext cx="5394960" cy="274320"/>
           </a:xfrm>
           <a:prstGeom prst="rect">
             <a:avLst/>
@@ -12196,13 +11668,172 @@
               </a:spcAft>
             </a:pPr>
             <a:r>
+              <a:rPr sz="1200" b="0">
+                <a:solidFill>
+                  <a:srgbClr val="282828"/>
+                </a:solidFill>
+                <a:latin typeface="Arial"/>
+              </a:rPr>
+              <a:t>•  </a:t>
+            </a:r>
+            <a:r>
+              <a:rPr sz="1200" b="1">
+                <a:solidFill>
+                  <a:srgbClr val="282828"/>
+                </a:solidFill>
+                <a:latin typeface="Arial"/>
+              </a:rPr>
+              <a:t>Built on our DM Gauge bench:</a:t>
+            </a:r>
+            <a:r>
+              <a:rPr sz="1200" b="0">
+                <a:solidFill>
+                  <a:srgbClr val="282828"/>
+                </a:solidFill>
+                <a:latin typeface="Arial"/>
+              </a:rPr>
+              <a:t> the bench with mirror and lens layouts, the 96 × 96 DM, swappable sensors: the core Twyman-Green interferometer (IFO), scalar and vector Zernike wavefront sensors (ZWFS), point-diffraction interferometers.</a:t>
+            </a:r>
+          </a:p>
+          <a:p>
+            <a:pPr>
+              <a:spcAft>
+                <a:spcPts val="600"/>
+              </a:spcAft>
+            </a:pPr>
+            <a:r>
+              <a:rPr sz="1200" b="0">
+                <a:solidFill>
+                  <a:srgbClr val="282828"/>
+                </a:solidFill>
+                <a:latin typeface="Arial"/>
+              </a:rPr>
+              <a:t>•  </a:t>
+            </a:r>
+            <a:r>
+              <a:rPr sz="1200" b="1">
+                <a:solidFill>
+                  <a:srgbClr val="282828"/>
+                </a:solidFill>
+                <a:latin typeface="Arial"/>
+              </a:rPr>
+              <a:t>The same scoring:</a:t>
+            </a:r>
+            <a:r>
+              <a:rPr sz="1200" b="0">
+                <a:solidFill>
+                  <a:srgbClr val="282828"/>
+                </a:solidFill>
+                <a:latin typeface="Arial"/>
+              </a:rPr>
+              <a:t> on a 30 nm working surface, the response matrix measured through the reading, the hold loop, the capture ladder, the photon rows.</a:t>
+            </a:r>
+          </a:p>
+          <a:p>
+            <a:pPr>
+              <a:spcAft>
+                <a:spcPts val="600"/>
+              </a:spcAft>
+            </a:pPr>
+            <a:r>
+              <a:rPr sz="1200" b="0">
+                <a:solidFill>
+                  <a:srgbClr val="282828"/>
+                </a:solidFill>
+                <a:latin typeface="Arial"/>
+              </a:rPr>
+              <a:t>•  </a:t>
+            </a:r>
+            <a:r>
+              <a:rPr sz="1200" b="1">
+                <a:solidFill>
+                  <a:srgbClr val="282828"/>
+                </a:solidFill>
+                <a:latin typeface="Arial"/>
+              </a:rPr>
+              <a:t>What is new:</a:t>
+            </a:r>
+            <a:r>
+              <a:rPr sz="1200" b="0">
+                <a:solidFill>
+                  <a:srgbClr val="282828"/>
+                </a:solidFill>
+                <a:latin typeface="Arial"/>
+              </a:rPr>
+              <a:t> the Local Oscillator (LO) arm (a fiber tip and collimator where the reference flat sat); frequency-set steps; each frame integrating a quarter of the beat; the LO's wavefront drift; the differential fiber phase within a scan; trigger jitter; a camera chosen for the job.</a:t>
+            </a:r>
+          </a:p>
+          <a:p>
+            <a:pPr>
+              <a:spcAft>
+                <a:spcPts val="600"/>
+              </a:spcAft>
+            </a:pPr>
+            <a:r>
+              <a:rPr sz="1200" b="0">
+                <a:solidFill>
+                  <a:srgbClr val="282828"/>
+                </a:solidFill>
+                <a:latin typeface="Arial"/>
+              </a:rPr>
+              <a:t>•  </a:t>
+            </a:r>
+            <a:r>
+              <a:rPr sz="1200" b="1">
+                <a:solidFill>
+                  <a:srgbClr val="282828"/>
+                </a:solidFill>
+                <a:latin typeface="Arial"/>
+              </a:rPr>
+              <a:t>What is absent:</a:t>
+            </a:r>
+            <a:r>
+              <a:rPr sz="1200" b="0">
+                <a:solidFill>
+                  <a:srgbClr val="282828"/>
+                </a:solidFill>
+                <a:latin typeface="Arial"/>
+              </a:rPr>
+              <a:t> the polarizing train — no analyzer, no quarter-wave plates, the same polarization in both arms — so the polarization gain the IFO carries (0.983–1.004) does not exist here.</a:t>
+            </a:r>
+          </a:p>
+        </p:txBody>
+      </p:sp>
+      <p:sp>
+        <p:nvSpPr>
+          <p:cNvPr id="6" name="TextBox 5"/>
+          <p:cNvSpPr txBox="1"/>
+          <p:nvPr/>
+        </p:nvSpPr>
+        <p:spPr>
+          <a:xfrm>
+            <a:off x="6400800" y="5074920"/>
+            <a:ext cx="5394960" cy="274320"/>
+          </a:xfrm>
+          <a:prstGeom prst="rect">
+            <a:avLst/>
+          </a:prstGeom>
+          <a:noFill/>
+        </p:spPr>
+        <p:txBody>
+          <a:bodyPr wrap="square">
+            <a:spAutoFit/>
+          </a:bodyPr>
+          <a:lstStyle/>
+          <a:p>
+            <a:pPr>
+              <a:spcAft>
+                <a:spcPts val="600"/>
+              </a:spcAft>
+            </a:pPr>
+            <a:r>
               <a:rPr sz="1050" b="0">
                 <a:solidFill>
                   <a:srgbClr val="6E6E6E"/>
                 </a:solidFill>
                 <a:latin typeface="Arial"/>
               </a:rPr>
-              <a:t>The Zernike rows are the gauge deck's (redo96_sens, zloop) with the polarization-camera timing from camS_oap; the COPHI rows this deck's; the lock-in rows are records (runs/lockin_, resources 2a07af9).</a:t>
+              <a:t>Feng's slide 8 is the implementation example this deck's block diagrams follow; TOM3 (SPIE 6268) is the photodiode heritage.</a:t>
             </a:r>
           </a:p>
         </p:txBody>
@@ -12215,7 +11846,7 @@
 </p:sld>
 </file>
 
-<file path=ppt/slides/slide2.xml><?xml version="1.0" encoding="utf-8"?>
+<file path=ppt/slides/slide20.xml><?xml version="1.0" encoding="utf-8"?>
 <p:sld xmlns:a="http://schemas.openxmlformats.org/drawingml/2006/main" xmlns:p="http://schemas.openxmlformats.org/presentationml/2006/main" xmlns:r="http://schemas.openxmlformats.org/officeDocument/2006/relationships">
   <p:cSld>
     <p:spTree>
@@ -12259,7 +11890,7 @@
                 </a:solidFill>
                 <a:latin typeface="Arial"/>
               </a:rPr>
-              <a:t>Feng's proposal, in one slide</a:t>
+              <a:t>COPHI against the Zernike sensor with a dedicated laser, for the hold job</a:t>
             </a:r>
           </a:p>
           <a:p>
@@ -12275,7 +11906,7 @@
                 </a:solidFill>
                 <a:latin typeface="Arial"/>
               </a:rPr>
-              <a:t>A heterodyne interferometer whose phase steps are set by frequency, not by a piezo, with a fiber-fed local oscillator at the camera, and an array detector providing many parallel channels to resolve 96 × 96 actuators</a:t>
+              <a:t>Feng's deck poses this comparison; on our bench the answer is photons and time: the vector Zernike holds 3 pm from 2 × 10¹² photons per cycle, COPHI with Feng's camera from ~1 × 10¹⁴ — and COPHI with a lock-in camera reaches a picometer faster than any of them, captures from cold, and reads absolutely</a:t>
             </a:r>
           </a:p>
         </p:txBody>
@@ -12324,16 +11955,819 @@
           </a:p>
         </p:txBody>
       </p:sp>
+      <p:graphicFrame>
+        <p:nvGraphicFramePr>
+          <p:cNvPr id="4" name="Table 3"/>
+          <p:cNvGraphicFramePr>
+            <a:graphicFrameLocks noGrp="1"/>
+          </p:cNvGraphicFramePr>
+          <p:nvPr/>
+        </p:nvGraphicFramePr>
+        <p:xfrm>
+          <a:off x="411480" y="1298448"/>
+          <a:ext cx="11368734" cy="4223385"/>
+        </p:xfrm>
+        <a:graphic>
+          <a:graphicData uri="http://schemas.openxmlformats.org/drawingml/2006/table">
+            <a:tbl>
+              <a:tblPr firstRow="1" bandRow="1">
+                <a:tableStyleId>{5C22544A-7EE6-4342-B048-85BDC9FD1C3A}</a:tableStyleId>
+              </a:tblPr>
+              <a:tblGrid>
+                <a:gridCol w="2107692"/>
+                <a:gridCol w="4370487"/>
+                <a:gridCol w="1268851"/>
+                <a:gridCol w="1817116"/>
+                <a:gridCol w="1804588"/>
+              </a:tblGrid>
+              <a:tr h="468630">
+                <a:tc>
+                  <a:txBody>
+                    <a:bodyPr wrap="square"/>
+                    <a:lstStyle/>
+                    <a:p/>
+                  </a:txBody>
+                  <a:tcPr marL="54864" marR="54864" marT="18288" marB="18288">
+                    <a:solidFill>
+                      <a:srgbClr val="1F4E79"/>
+                    </a:solidFill>
+                  </a:tcPr>
+                </a:tc>
+                <a:tc>
+                  <a:txBody>
+                    <a:bodyPr wrap="square"/>
+                    <a:lstStyle/>
+                    <a:p>
+                      <a:r>
+                        <a:rPr sz="1100" b="1">
+                          <a:solidFill>
+                            <a:srgbClr val="FFFFFF"/>
+                          </a:solidFill>
+                          <a:latin typeface="Arial"/>
+                        </a:rPr>
+                        <a:t>vector Zernike (dedicated laser, pol. camera)</a:t>
+                      </a:r>
+                    </a:p>
+                  </a:txBody>
+                  <a:tcPr marL="54864" marR="54864" marT="18288" marB="18288">
+                    <a:solidFill>
+                      <a:srgbClr val="1F4E79"/>
+                    </a:solidFill>
+                  </a:tcPr>
+                </a:tc>
+                <a:tc>
+                  <a:txBody>
+                    <a:bodyPr wrap="square"/>
+                    <a:lstStyle/>
+                    <a:p>
+                      <a:r>
+                        <a:rPr sz="1100" b="1">
+                          <a:solidFill>
+                            <a:srgbClr val="FFFFFF"/>
+                          </a:solidFill>
+                          <a:latin typeface="Arial"/>
+                        </a:rPr>
+                        <a:t>COPHI, Feng's camera</a:t>
+                      </a:r>
+                    </a:p>
+                  </a:txBody>
+                  <a:tcPr marL="54864" marR="54864" marT="18288" marB="18288">
+                    <a:solidFill>
+                      <a:srgbClr val="1F4E79"/>
+                    </a:solidFill>
+                  </a:tcPr>
+                </a:tc>
+                <a:tc>
+                  <a:txBody>
+                    <a:bodyPr wrap="square"/>
+                    <a:lstStyle/>
+                    <a:p>
+                      <a:r>
+                        <a:rPr sz="1100" b="1">
+                          <a:solidFill>
+                            <a:srgbClr val="FFFFFF"/>
+                          </a:solidFill>
+                          <a:latin typeface="Arial"/>
+                        </a:rPr>
+                        <a:t>COPHI, Photonfocus</a:t>
+                      </a:r>
+                    </a:p>
+                  </a:txBody>
+                  <a:tcPr marL="54864" marR="54864" marT="18288" marB="18288">
+                    <a:solidFill>
+                      <a:srgbClr val="1F4E79"/>
+                    </a:solidFill>
+                  </a:tcPr>
+                </a:tc>
+                <a:tc>
+                  <a:txBody>
+                    <a:bodyPr wrap="square"/>
+                    <a:lstStyle/>
+                    <a:p>
+                      <a:r>
+                        <a:rPr sz="1100" b="1">
+                          <a:solidFill>
+                            <a:srgbClr val="FFFFFF"/>
+                          </a:solidFill>
+                          <a:latin typeface="Arial"/>
+                        </a:rPr>
+                        <a:t>COPHI, lock-in camera (C4, as surveyed)</a:t>
+                      </a:r>
+                    </a:p>
+                  </a:txBody>
+                  <a:tcPr marL="54864" marR="54864" marT="18288" marB="18288">
+                    <a:solidFill>
+                      <a:srgbClr val="1F4E79"/>
+                    </a:solidFill>
+                  </a:tcPr>
+                </a:tc>
+              </a:tr>
+              <a:tr h="468630">
+                <a:tc>
+                  <a:txBody>
+                    <a:bodyPr wrap="square"/>
+                    <a:lstStyle/>
+                    <a:p>
+                      <a:r>
+                        <a:rPr sz="1100" b="0">
+                          <a:solidFill>
+                            <a:srgbClr val="282828"/>
+                          </a:solidFill>
+                          <a:latin typeface="Arial"/>
+                        </a:rPr>
+                        <a:t>photons per 3 pm hold cycle</a:t>
+                      </a:r>
+                    </a:p>
+                  </a:txBody>
+                  <a:tcPr marL="54864" marR="54864" marT="18288" marB="18288">
+                    <a:solidFill>
+                      <a:srgbClr val="FFFFFF"/>
+                    </a:solidFill>
+                  </a:tcPr>
+                </a:tc>
+                <a:tc>
+                  <a:txBody>
+                    <a:bodyPr wrap="square"/>
+                    <a:lstStyle/>
+                    <a:p>
+                      <a:r>
+                        <a:rPr sz="1100" b="0">
+                          <a:solidFill>
+                            <a:srgbClr val="282828"/>
+                          </a:solidFill>
+                          <a:latin typeface="Arial"/>
+                        </a:rPr>
+                        <a:t>2.2 × 10¹² (gauge deck)</a:t>
+                      </a:r>
+                    </a:p>
+                  </a:txBody>
+                  <a:tcPr marL="54864" marR="54864" marT="18288" marB="18288">
+                    <a:solidFill>
+                      <a:srgbClr val="FFFFFF"/>
+                    </a:solidFill>
+                  </a:tcPr>
+                </a:tc>
+                <a:tc>
+                  <a:txBody>
+                    <a:bodyPr wrap="square"/>
+                    <a:lstStyle/>
+                    <a:p>
+                      <a:r>
+                        <a:rPr sz="1100" b="0">
+                          <a:solidFill>
+                            <a:srgbClr val="282828"/>
+                          </a:solidFill>
+                          <a:latin typeface="Arial"/>
+                        </a:rPr>
+                        <a:t>~1 × 10¹⁴ (120 readings)</a:t>
+                      </a:r>
+                    </a:p>
+                  </a:txBody>
+                  <a:tcPr marL="54864" marR="54864" marT="18288" marB="18288">
+                    <a:solidFill>
+                      <a:srgbClr val="FFFFFF"/>
+                    </a:solidFill>
+                  </a:tcPr>
+                </a:tc>
+                <a:tc>
+                  <a:txBody>
+                    <a:bodyPr wrap="square"/>
+                    <a:lstStyle/>
+                    <a:p>
+                      <a:r>
+                        <a:rPr sz="1100" b="0">
+                          <a:solidFill>
+                            <a:srgbClr val="282828"/>
+                          </a:solidFill>
+                          <a:latin typeface="Arial"/>
+                        </a:rPr>
+                        <a:t>~1 × 10¹⁴ (60 readings)</a:t>
+                      </a:r>
+                    </a:p>
+                  </a:txBody>
+                  <a:tcPr marL="54864" marR="54864" marT="18288" marB="18288">
+                    <a:solidFill>
+                      <a:srgbClr val="FFFFFF"/>
+                    </a:solidFill>
+                  </a:tcPr>
+                </a:tc>
+                <a:tc>
+                  <a:txBody>
+                    <a:bodyPr wrap="square"/>
+                    <a:lstStyle/>
+                    <a:p>
+                      <a:r>
+                        <a:rPr sz="1100" b="0">
+                          <a:solidFill>
+                            <a:srgbClr val="282828"/>
+                          </a:solidFill>
+                          <a:latin typeface="Arial"/>
+                        </a:rPr>
+                        <a:t>~9 × 10¹² (125 samples, capped well)</a:t>
+                      </a:r>
+                    </a:p>
+                  </a:txBody>
+                  <a:tcPr marL="54864" marR="54864" marT="18288" marB="18288">
+                    <a:solidFill>
+                      <a:srgbClr val="FFFFFF"/>
+                    </a:solidFill>
+                  </a:tcPr>
+                </a:tc>
+              </a:tr>
+              <a:tr h="657225">
+                <a:tc>
+                  <a:txBody>
+                    <a:bodyPr wrap="square"/>
+                    <a:lstStyle/>
+                    <a:p>
+                      <a:r>
+                        <a:rPr sz="1100" b="0">
+                          <a:solidFill>
+                            <a:srgbClr val="282828"/>
+                          </a:solidFill>
+                          <a:latin typeface="Arial"/>
+                        </a:rPr>
+                        <a:t>time per 3 pm hold cycle</a:t>
+                      </a:r>
+                    </a:p>
+                  </a:txBody>
+                  <a:tcPr marL="54864" marR="54864" marT="18288" marB="18288">
+                    <a:solidFill>
+                      <a:srgbClr val="ECF1F6"/>
+                    </a:solidFill>
+                  </a:tcPr>
+                </a:tc>
+                <a:tc>
+                  <a:txBody>
+                    <a:bodyPr wrap="square"/>
+                    <a:lstStyle/>
+                    <a:p>
+                      <a:r>
+                        <a:rPr sz="1100" b="0">
+                          <a:solidFill>
+                            <a:srgbClr val="282828"/>
+                          </a:solidFill>
+                          <a:latin typeface="Arial"/>
+                        </a:rPr>
+                        <a:t>~60 s on the assumed pol. camera (519 s/pm ÷ 9: its 10 ke⁻ well, the core's dynamic range, two unused orientations — the camera is the ZWFS's own question)</a:t>
+                      </a:r>
+                    </a:p>
+                  </a:txBody>
+                  <a:tcPr marL="54864" marR="54864" marT="18288" marB="18288">
+                    <a:solidFill>
+                      <a:srgbClr val="ECF1F6"/>
+                    </a:solidFill>
+                  </a:tcPr>
+                </a:tc>
+                <a:tc>
+                  <a:txBody>
+                    <a:bodyPr wrap="square"/>
+                    <a:lstStyle/>
+                    <a:p>
+                      <a:r>
+                        <a:rPr sz="1100" b="0">
+                          <a:solidFill>
+                            <a:srgbClr val="282828"/>
+                          </a:solidFill>
+                          <a:latin typeface="Arial"/>
+                        </a:rPr>
+                        <a:t>16 s</a:t>
+                      </a:r>
+                    </a:p>
+                  </a:txBody>
+                  <a:tcPr marL="54864" marR="54864" marT="18288" marB="18288">
+                    <a:solidFill>
+                      <a:srgbClr val="ECF1F6"/>
+                    </a:solidFill>
+                  </a:tcPr>
+                </a:tc>
+                <a:tc>
+                  <a:txBody>
+                    <a:bodyPr wrap="square"/>
+                    <a:lstStyle/>
+                    <a:p>
+                      <a:r>
+                        <a:rPr sz="1100" b="0">
+                          <a:solidFill>
+                            <a:srgbClr val="282828"/>
+                          </a:solidFill>
+                          <a:latin typeface="Arial"/>
+                        </a:rPr>
+                        <a:t>1.6 s</a:t>
+                      </a:r>
+                    </a:p>
+                  </a:txBody>
+                  <a:tcPr marL="54864" marR="54864" marT="18288" marB="18288">
+                    <a:solidFill>
+                      <a:srgbClr val="ECF1F6"/>
+                    </a:solidFill>
+                  </a:tcPr>
+                </a:tc>
+                <a:tc>
+                  <a:txBody>
+                    <a:bodyPr wrap="square"/>
+                    <a:lstStyle/>
+                    <a:p>
+                      <a:r>
+                        <a:rPr sz="1100" b="0">
+                          <a:solidFill>
+                            <a:srgbClr val="282828"/>
+                          </a:solidFill>
+                          <a:latin typeface="Arial"/>
+                        </a:rPr>
+                        <a:t>0.125 s (record: 3.09 pm)</a:t>
+                      </a:r>
+                    </a:p>
+                  </a:txBody>
+                  <a:tcPr marL="54864" marR="54864" marT="18288" marB="18288">
+                    <a:solidFill>
+                      <a:srgbClr val="ECF1F6"/>
+                    </a:solidFill>
+                  </a:tcPr>
+                </a:tc>
+              </a:tr>
+              <a:tr h="657225">
+                <a:tc>
+                  <a:txBody>
+                    <a:bodyPr wrap="square"/>
+                    <a:lstStyle/>
+                    <a:p>
+                      <a:r>
+                        <a:rPr sz="1100" b="0">
+                          <a:solidFill>
+                            <a:srgbClr val="282828"/>
+                          </a:solidFill>
+                          <a:latin typeface="Arial"/>
+                        </a:rPr>
+                        <a:t>seconds to SNR 1 at 1 pm</a:t>
+                      </a:r>
+                    </a:p>
+                  </a:txBody>
+                  <a:tcPr marL="54864" marR="54864" marT="18288" marB="18288">
+                    <a:solidFill>
+                      <a:srgbClr val="FFFFFF"/>
+                    </a:solidFill>
+                  </a:tcPr>
+                </a:tc>
+                <a:tc>
+                  <a:txBody>
+                    <a:bodyPr wrap="square"/>
+                    <a:lstStyle/>
+                    <a:p>
+                      <a:r>
+                        <a:rPr sz="1100" b="0">
+                          <a:solidFill>
+                            <a:srgbClr val="282828"/>
+                          </a:solidFill>
+                          <a:latin typeface="Arial"/>
+                        </a:rPr>
+                        <a:t>519 (pol. camera, record)</a:t>
+                      </a:r>
+                    </a:p>
+                  </a:txBody>
+                  <a:tcPr marL="54864" marR="54864" marT="18288" marB="18288">
+                    <a:solidFill>
+                      <a:srgbClr val="FFFFFF"/>
+                    </a:solidFill>
+                  </a:tcPr>
+                </a:tc>
+                <a:tc>
+                  <a:txBody>
+                    <a:bodyPr wrap="square"/>
+                    <a:lstStyle/>
+                    <a:p>
+                      <a:r>
+                        <a:rPr sz="1100" b="0">
+                          <a:solidFill>
+                            <a:srgbClr val="282828"/>
+                          </a:solidFill>
+                          <a:latin typeface="Arial"/>
+                        </a:rPr>
+                        <a:t>443 / 385</a:t>
+                      </a:r>
+                    </a:p>
+                  </a:txBody>
+                  <a:tcPr marL="54864" marR="54864" marT="18288" marB="18288">
+                    <a:solidFill>
+                      <a:srgbClr val="FFFFFF"/>
+                    </a:solidFill>
+                  </a:tcPr>
+                </a:tc>
+                <a:tc>
+                  <a:txBody>
+                    <a:bodyPr wrap="square"/>
+                    <a:lstStyle/>
+                    <a:p>
+                      <a:r>
+                        <a:rPr sz="1100" b="0">
+                          <a:solidFill>
+                            <a:srgbClr val="282828"/>
+                          </a:solidFill>
+                          <a:latin typeface="Arial"/>
+                        </a:rPr>
+                        <a:t>42 / 36</a:t>
+                      </a:r>
+                    </a:p>
+                  </a:txBody>
+                  <a:tcPr marL="54864" marR="54864" marT="18288" marB="18288">
+                    <a:solidFill>
+                      <a:srgbClr val="FFFFFF"/>
+                    </a:solidFill>
+                  </a:tcPr>
+                </a:tc>
+                <a:tc>
+                  <a:txBody>
+                    <a:bodyPr wrap="square"/>
+                    <a:lstStyle/>
+                    <a:p>
+                      <a:r>
+                        <a:rPr sz="1100" b="0">
+                          <a:solidFill>
+                            <a:srgbClr val="282828"/>
+                          </a:solidFill>
+                          <a:latin typeface="Arial"/>
+                        </a:rPr>
+                        <a:t>3.35 / 3.73 (×1.23 in time for two-tap demodulation)</a:t>
+                      </a:r>
+                    </a:p>
+                  </a:txBody>
+                  <a:tcPr marL="54864" marR="54864" marT="18288" marB="18288">
+                    <a:solidFill>
+                      <a:srgbClr val="FFFFFF"/>
+                    </a:solidFill>
+                  </a:tcPr>
+                </a:tc>
+              </a:tr>
+              <a:tr h="657225">
+                <a:tc>
+                  <a:txBody>
+                    <a:bodyPr wrap="square"/>
+                    <a:lstStyle/>
+                    <a:p>
+                      <a:r>
+                        <a:rPr sz="1100" b="0">
+                          <a:solidFill>
+                            <a:srgbClr val="282828"/>
+                          </a:solidFill>
+                          <a:latin typeface="Arial"/>
+                        </a:rPr>
+                        <a:t>capture from cold</a:t>
+                      </a:r>
+                    </a:p>
+                  </a:txBody>
+                  <a:tcPr marL="54864" marR="54864" marT="18288" marB="18288">
+                    <a:solidFill>
+                      <a:srgbClr val="ECF1F6"/>
+                    </a:solidFill>
+                  </a:tcPr>
+                </a:tc>
+                <a:tc>
+                  <a:txBody>
+                    <a:bodyPr wrap="square"/>
+                    <a:lstStyle/>
+                    <a:p>
+                      <a:r>
+                        <a:rPr sz="1100" b="0">
+                          <a:solidFill>
+                            <a:srgbClr val="282828"/>
+                          </a:solidFill>
+                          <a:latin typeface="Arial"/>
+                        </a:rPr>
+                        <a:t>no: the reference ages past 36–70 nm</a:t>
+                      </a:r>
+                    </a:p>
+                  </a:txBody>
+                  <a:tcPr marL="54864" marR="54864" marT="18288" marB="18288">
+                    <a:solidFill>
+                      <a:srgbClr val="ECF1F6"/>
+                    </a:solidFill>
+                  </a:tcPr>
+                </a:tc>
+                <a:tc>
+                  <a:txBody>
+                    <a:bodyPr wrap="square"/>
+                    <a:lstStyle/>
+                    <a:p>
+                      <a:r>
+                        <a:rPr sz="1100" b="0">
+                          <a:solidFill>
+                            <a:srgbClr val="282828"/>
+                          </a:solidFill>
+                          <a:latin typeface="Arial"/>
+                        </a:rPr>
+                        <a:t>two colors, one 0.27 s reading</a:t>
+                      </a:r>
+                    </a:p>
+                  </a:txBody>
+                  <a:tcPr marL="54864" marR="54864" marT="18288" marB="18288">
+                    <a:solidFill>
+                      <a:srgbClr val="ECF1F6"/>
+                    </a:solidFill>
+                  </a:tcPr>
+                </a:tc>
+                <a:tc>
+                  <a:txBody>
+                    <a:bodyPr wrap="square"/>
+                    <a:lstStyle/>
+                    <a:p>
+                      <a:r>
+                        <a:rPr sz="1100" b="0">
+                          <a:solidFill>
+                            <a:srgbClr val="282828"/>
+                          </a:solidFill>
+                          <a:latin typeface="Arial"/>
+                        </a:rPr>
+                        <a:t>same</a:t>
+                      </a:r>
+                    </a:p>
+                  </a:txBody>
+                  <a:tcPr marL="54864" marR="54864" marT="18288" marB="18288">
+                    <a:solidFill>
+                      <a:srgbClr val="ECF1F6"/>
+                    </a:solidFill>
+                  </a:tcPr>
+                </a:tc>
+                <a:tc>
+                  <a:txBody>
+                    <a:bodyPr wrap="square"/>
+                    <a:lstStyle/>
+                    <a:p>
+                      <a:r>
+                        <a:rPr sz="1100" b="0">
+                          <a:solidFill>
+                            <a:srgbClr val="282828"/>
+                          </a:solidFill>
+                          <a:latin typeface="Arial"/>
+                        </a:rPr>
+                        <a:t>two colors on alternate samples; zero wrong orders to 480 nm</a:t>
+                      </a:r>
+                    </a:p>
+                  </a:txBody>
+                  <a:tcPr marL="54864" marR="54864" marT="18288" marB="18288">
+                    <a:solidFill>
+                      <a:srgbClr val="ECF1F6"/>
+                    </a:solidFill>
+                  </a:tcPr>
+                </a:tc>
+              </a:tr>
+              <a:tr h="657225">
+                <a:tc>
+                  <a:txBody>
+                    <a:bodyPr wrap="square"/>
+                    <a:lstStyle/>
+                    <a:p>
+                      <a:r>
+                        <a:rPr sz="1100" b="0">
+                          <a:solidFill>
+                            <a:srgbClr val="282828"/>
+                          </a:solidFill>
+                          <a:latin typeface="Arial"/>
+                        </a:rPr>
+                        <a:t>absolute read</a:t>
+                      </a:r>
+                    </a:p>
+                  </a:txBody>
+                  <a:tcPr marL="54864" marR="54864" marT="18288" marB="18288">
+                    <a:solidFill>
+                      <a:srgbClr val="FFFFFF"/>
+                    </a:solidFill>
+                  </a:tcPr>
+                </a:tc>
+                <a:tc>
+                  <a:txBody>
+                    <a:bodyPr wrap="square"/>
+                    <a:lstStyle/>
+                    <a:p>
+                      <a:r>
+                        <a:rPr sz="1100" b="0">
+                          <a:solidFill>
+                            <a:srgbClr val="282828"/>
+                          </a:solidFill>
+                          <a:latin typeface="Arial"/>
+                        </a:rPr>
+                        <a:t>reference iterated or matrix re-measured</a:t>
+                      </a:r>
+                    </a:p>
+                  </a:txBody>
+                  <a:tcPr marL="54864" marR="54864" marT="18288" marB="18288">
+                    <a:solidFill>
+                      <a:srgbClr val="FFFFFF"/>
+                    </a:solidFill>
+                  </a:tcPr>
+                </a:tc>
+                <a:tc>
+                  <a:txBody>
+                    <a:bodyPr wrap="square"/>
+                    <a:lstStyle/>
+                    <a:p>
+                      <a:r>
+                        <a:rPr sz="1100" b="0">
+                          <a:solidFill>
+                            <a:srgbClr val="282828"/>
+                          </a:solidFill>
+                          <a:latin typeface="Arial"/>
+                        </a:rPr>
+                        <a:t>exact (slope 1.000000) against the LO</a:t>
+                      </a:r>
+                    </a:p>
+                  </a:txBody>
+                  <a:tcPr marL="54864" marR="54864" marT="18288" marB="18288">
+                    <a:solidFill>
+                      <a:srgbClr val="FFFFFF"/>
+                    </a:solidFill>
+                  </a:tcPr>
+                </a:tc>
+                <a:tc>
+                  <a:txBody>
+                    <a:bodyPr wrap="square"/>
+                    <a:lstStyle/>
+                    <a:p>
+                      <a:r>
+                        <a:rPr sz="1100" b="0">
+                          <a:solidFill>
+                            <a:srgbClr val="282828"/>
+                          </a:solidFill>
+                          <a:latin typeface="Arial"/>
+                        </a:rPr>
+                        <a:t>exact</a:t>
+                      </a:r>
+                    </a:p>
+                  </a:txBody>
+                  <a:tcPr marL="54864" marR="54864" marT="18288" marB="18288">
+                    <a:solidFill>
+                      <a:srgbClr val="FFFFFF"/>
+                    </a:solidFill>
+                  </a:tcPr>
+                </a:tc>
+                <a:tc>
+                  <a:txBody>
+                    <a:bodyPr wrap="square"/>
+                    <a:lstStyle/>
+                    <a:p>
+                      <a:r>
+                        <a:rPr sz="1100" b="0">
+                          <a:solidFill>
+                            <a:srgbClr val="282828"/>
+                          </a:solidFill>
+                          <a:latin typeface="Arial"/>
+                        </a:rPr>
+                        <a:t>exact</a:t>
+                      </a:r>
+                    </a:p>
+                  </a:txBody>
+                  <a:tcPr marL="54864" marR="54864" marT="18288" marB="18288">
+                    <a:solidFill>
+                      <a:srgbClr val="FFFFFF"/>
+                    </a:solidFill>
+                  </a:tcPr>
+                </a:tc>
+              </a:tr>
+              <a:tr h="657225">
+                <a:tc>
+                  <a:txBody>
+                    <a:bodyPr wrap="square"/>
+                    <a:lstStyle/>
+                    <a:p>
+                      <a:r>
+                        <a:rPr sz="1100" b="0">
+                          <a:solidFill>
+                            <a:srgbClr val="282828"/>
+                          </a:solidFill>
+                          <a:latin typeface="Arial"/>
+                        </a:rPr>
+                        <a:t>its own stabilities</a:t>
+                      </a:r>
+                    </a:p>
+                  </a:txBody>
+                  <a:tcPr marL="54864" marR="54864" marT="18288" marB="18288">
+                    <a:solidFill>
+                      <a:srgbClr val="ECF1F6"/>
+                    </a:solidFill>
+                  </a:tcPr>
+                </a:tc>
+                <a:tc>
+                  <a:txBody>
+                    <a:bodyPr wrap="square"/>
+                    <a:lstStyle/>
+                    <a:p>
+                      <a:r>
+                        <a:rPr sz="1100" b="0">
+                          <a:solidFill>
+                            <a:srgbClr val="282828"/>
+                          </a:solidFill>
+                          <a:latin typeface="Arial"/>
+                        </a:rPr>
+                        <a:t>none beyond the bench</a:t>
+                      </a:r>
+                    </a:p>
+                  </a:txBody>
+                  <a:tcPr marL="54864" marR="54864" marT="18288" marB="18288">
+                    <a:solidFill>
+                      <a:srgbClr val="ECF1F6"/>
+                    </a:solidFill>
+                  </a:tcPr>
+                </a:tc>
+                <a:tc>
+                  <a:txBody>
+                    <a:bodyPr wrap="square"/>
+                    <a:lstStyle/>
+                    <a:p>
+                      <a:r>
+                        <a:rPr sz="1100" b="0">
+                          <a:solidFill>
+                            <a:srgbClr val="282828"/>
+                          </a:solidFill>
+                          <a:latin typeface="Arial"/>
+                        </a:rPr>
+                        <a:t>fiber 0.39 nm per frame; LO 10 prad per cycle</a:t>
+                      </a:r>
+                    </a:p>
+                  </a:txBody>
+                  <a:tcPr marL="54864" marR="54864" marT="18288" marB="18288">
+                    <a:solidFill>
+                      <a:srgbClr val="ECF1F6"/>
+                    </a:solidFill>
+                  </a:tcPr>
+                </a:tc>
+                <a:tc>
+                  <a:txBody>
+                    <a:bodyPr wrap="square"/>
+                    <a:lstStyle/>
+                    <a:p>
+                      <a:r>
+                        <a:rPr sz="1100" b="0">
+                          <a:solidFill>
+                            <a:srgbClr val="282828"/>
+                          </a:solidFill>
+                          <a:latin typeface="Arial"/>
+                        </a:rPr>
+                        <a:t>same</a:t>
+                      </a:r>
+                    </a:p>
+                  </a:txBody>
+                  <a:tcPr marL="54864" marR="54864" marT="18288" marB="18288">
+                    <a:solidFill>
+                      <a:srgbClr val="ECF1F6"/>
+                    </a:solidFill>
+                  </a:tcPr>
+                </a:tc>
+                <a:tc>
+                  <a:txBody>
+                    <a:bodyPr wrap="square"/>
+                    <a:lstStyle/>
+                    <a:p>
+                      <a:r>
+                        <a:rPr sz="1100" b="0">
+                          <a:solidFill>
+                            <a:srgbClr val="282828"/>
+                          </a:solidFill>
+                          <a:latin typeface="Arial"/>
+                        </a:rPr>
+                        <a:t>LO the same (29.4 pm); fiber a per-sample piston, inert (record)</a:t>
+                      </a:r>
+                    </a:p>
+                  </a:txBody>
+                  <a:tcPr marL="54864" marR="54864" marT="18288" marB="18288">
+                    <a:solidFill>
+                      <a:srgbClr val="ECF1F6"/>
+                    </a:solidFill>
+                  </a:tcPr>
+                </a:tc>
+              </a:tr>
+            </a:tbl>
+          </a:graphicData>
+        </a:graphic>
+      </p:graphicFrame>
       <p:sp>
         <p:nvSpPr>
-          <p:cNvPr id="4" name="TextBox 3"/>
+          <p:cNvPr id="5" name="TextBox 4"/>
           <p:cNvSpPr txBox="1"/>
           <p:nvPr/>
         </p:nvSpPr>
         <p:spPr>
           <a:xfrm>
-            <a:off x="411480" y="1298448"/>
-            <a:ext cx="5806440" cy="274320"/>
+            <a:off x="411480" y="5257800"/>
+            <a:ext cx="11368735" cy="274320"/>
           </a:xfrm>
           <a:prstGeom prst="rect">
             <a:avLst/>
@@ -12352,7 +12786,7 @@
               </a:spcAft>
             </a:pPr>
             <a:r>
-              <a:rPr sz="1200" b="0">
+              <a:rPr sz="1100" b="0">
                 <a:solidFill>
                   <a:srgbClr val="282828"/>
                 </a:solidFill>
@@ -12361,22 +12795,40 @@
               <a:t>•  </a:t>
             </a:r>
             <a:r>
-              <a:rPr sz="1200" b="1">
+              <a:rPr sz="1100" b="1">
                 <a:solidFill>
                   <a:srgbClr val="282828"/>
                 </a:solidFill>
                 <a:latin typeface="Arial"/>
               </a:rPr>
-              <a:t>Layout:</a:t>
-            </a:r>
-            <a:r>
-              <a:rPr sz="1200" b="0">
+              <a:t>For hold alone, the vector Zernike is cheapest in photons</a:t>
+            </a:r>
+            <a:r>
+              <a:rPr sz="1100" b="0">
                 <a:solidFill>
                   <a:srgbClr val="282828"/>
                 </a:solidFill>
                 <a:latin typeface="Arial"/>
               </a:rPr>
-              <a:t> laser → 1×2 coupler → AOM-1 (80 MHz) and AOM-2 (80 MHz + 7.5 Hz), both synthesizers on a 10 MHz Rb standard; the measurement beam to the DM, the LO fiber to a splitter before the camera; the ×4 multipliers mixed to a 30 Hz camera trigger: four frames per 7.5 Hz fringe cycle – see next slide.</a:t>
+              <a:t> (~50×) and needs no stabilities of its own — but on the assumed polarization camera it is the slowest (~60 s per cycle).  Feng's camera makes COPHI slow (16 s), the Photonfocus fast (1.6 s), </a:t>
+            </a:r>
+            <a:r>
+              <a:rPr sz="1100" b="1">
+                <a:solidFill>
+                  <a:srgbClr val="282828"/>
+                </a:solidFill>
+                <a:latin typeface="Arial"/>
+              </a:rPr>
+              <a:t>the lock-in the fastest on the table (0.125 s)</a:t>
+            </a:r>
+            <a:r>
+              <a:rPr sz="1100" b="0">
+                <a:solidFill>
+                  <a:srgbClr val="282828"/>
+                </a:solidFill>
+                <a:latin typeface="Arial"/>
+              </a:rPr>
+              <a:t> if its well is as surveyed.</a:t>
             </a:r>
           </a:p>
           <a:p>
@@ -12386,7 +12838,7 @@
               </a:spcAft>
             </a:pPr>
             <a:r>
-              <a:rPr sz="1200" b="0">
+              <a:rPr sz="1100" b="0">
                 <a:solidFill>
                   <a:srgbClr val="282828"/>
                 </a:solidFill>
@@ -12395,22 +12847,22 @@
               <a:t>•  </a:t>
             </a:r>
             <a:r>
-              <a:rPr sz="1200" b="1">
+              <a:rPr sz="1100" b="1">
                 <a:solidFill>
                   <a:srgbClr val="282828"/>
                 </a:solidFill>
                 <a:latin typeface="Arial"/>
               </a:rPr>
-              <a:t>Algorithm:</a:t>
-            </a:r>
-            <a:r>
-              <a:rPr sz="1200" b="0">
+              <a:t>For capture and the absolute figure:</a:t>
+            </a:r>
+            <a:r>
+              <a:rPr sz="1100" b="0">
                 <a:solidFill>
                   <a:srgbClr val="282828"/>
                 </a:solidFill>
                 <a:latin typeface="Arial"/>
               </a:rPr>
-              <a:t> I = I₀ (1 + γ cos(φ + 2π f t)); frames at α = 0, π/2, π, 3π/2; φ = atan2(I₄ − I₂, I₁ − I₃); surface = ½ (φ/2π) λ (double pass).  Backup: the N-frame least-squares solution (Zygo's four-step is N = 4).</a:t>
+              <a:t> COPHI in either form.</a:t>
             </a:r>
           </a:p>
           <a:p>
@@ -12420,7 +12872,7 @@
               </a:spcAft>
             </a:pPr>
             <a:r>
-              <a:rPr sz="1200" b="0">
+              <a:rPr sz="1100" b="0">
                 <a:solidFill>
                   <a:srgbClr val="282828"/>
                 </a:solidFill>
@@ -12429,36 +12881,54 @@
               <a:t>•  </a:t>
             </a:r>
             <a:r>
-              <a:rPr sz="1200" b="1">
+              <a:rPr sz="1100" b="1">
                 <a:solidFill>
                   <a:srgbClr val="282828"/>
                 </a:solidFill>
                 <a:latin typeface="Arial"/>
               </a:rPr>
-              <a:t>Main purpose: stabilize the DM!</a:t>
-            </a:r>
-            <a:r>
-              <a:rPr sz="1200" b="0">
+              <a:t>For a flight DM:</a:t>
+            </a:r>
+            <a:r>
+              <a:rPr sz="1100" b="0">
                 <a:solidFill>
                   <a:srgbClr val="282828"/>
                 </a:solidFill>
                 <a:latin typeface="Arial"/>
               </a:rPr>
-              <a:t>  Run each DM in a local loop to hold it — our job 3.  For us to figure out: the camera, the photon budget, the error terms, estimated performance.</a:t>
+              <a:t> hold only and photons scarce → the Zernike sensor with a camera chosen for it; hold + capture + absolute, or speed → COPHI (the lock-in fastest by 20–500×).  </a:t>
+            </a:r>
+            <a:r>
+              <a:rPr sz="1100" b="1">
+                <a:solidFill>
+                  <a:srgbClr val="282828"/>
+                </a:solidFill>
+                <a:latin typeface="Arial"/>
+              </a:rPr>
+              <a:t>The hybrid</a:t>
+            </a:r>
+            <a:r>
+              <a:rPr sz="1100" b="0">
+                <a:solidFill>
+                  <a:srgbClr val="282828"/>
+                </a:solidFill>
+                <a:latin typeface="Arial"/>
+              </a:rPr>
+              <a:t> — Zernike for the hold, COPHI's two-color read for capture and commissioning — stays the conservative answer until the lock-in's vendor numbers are in.</a:t>
             </a:r>
           </a:p>
         </p:txBody>
       </p:sp>
       <p:sp>
         <p:nvSpPr>
-          <p:cNvPr id="5" name="TextBox 4"/>
+          <p:cNvPr id="6" name="TextBox 5"/>
           <p:cNvSpPr txBox="1"/>
           <p:nvPr/>
         </p:nvSpPr>
         <p:spPr>
           <a:xfrm>
-            <a:off x="6400800" y="1298448"/>
-            <a:ext cx="5394960" cy="274320"/>
+            <a:off x="411480" y="6986270"/>
+            <a:ext cx="11368735" cy="274320"/>
           </a:xfrm>
           <a:prstGeom prst="rect">
             <a:avLst/>
@@ -12477,172 +12947,13 @@
               </a:spcAft>
             </a:pPr>
             <a:r>
-              <a:rPr sz="1200" b="0">
-                <a:solidFill>
-                  <a:srgbClr val="282828"/>
-                </a:solidFill>
-                <a:latin typeface="Arial"/>
-              </a:rPr>
-              <a:t>•  </a:t>
-            </a:r>
-            <a:r>
-              <a:rPr sz="1200" b="1">
-                <a:solidFill>
-                  <a:srgbClr val="282828"/>
-                </a:solidFill>
-                <a:latin typeface="Arial"/>
-              </a:rPr>
-              <a:t>Built on our DM Gauge bench:</a:t>
-            </a:r>
-            <a:r>
-              <a:rPr sz="1200" b="0">
-                <a:solidFill>
-                  <a:srgbClr val="282828"/>
-                </a:solidFill>
-                <a:latin typeface="Arial"/>
-              </a:rPr>
-              <a:t> the bench with mirror and lens layouts, the 96 × 96 DM, swappable sensors: the core Twyman-Green interferometer (IFO), scalar and vector Zernike wavefront sensors (ZWFS), point-diffraction interferometers.</a:t>
-            </a:r>
-          </a:p>
-          <a:p>
-            <a:pPr>
-              <a:spcAft>
-                <a:spcPts val="600"/>
-              </a:spcAft>
-            </a:pPr>
-            <a:r>
-              <a:rPr sz="1200" b="0">
-                <a:solidFill>
-                  <a:srgbClr val="282828"/>
-                </a:solidFill>
-                <a:latin typeface="Arial"/>
-              </a:rPr>
-              <a:t>•  </a:t>
-            </a:r>
-            <a:r>
-              <a:rPr sz="1200" b="1">
-                <a:solidFill>
-                  <a:srgbClr val="282828"/>
-                </a:solidFill>
-                <a:latin typeface="Arial"/>
-              </a:rPr>
-              <a:t>The same scoring:</a:t>
-            </a:r>
-            <a:r>
-              <a:rPr sz="1200" b="0">
-                <a:solidFill>
-                  <a:srgbClr val="282828"/>
-                </a:solidFill>
-                <a:latin typeface="Arial"/>
-              </a:rPr>
-              <a:t> on a 30 nm working surface, the response matrix measured through the reading, the hold loop, the capture ladder, the photon rows.</a:t>
-            </a:r>
-          </a:p>
-          <a:p>
-            <a:pPr>
-              <a:spcAft>
-                <a:spcPts val="600"/>
-              </a:spcAft>
-            </a:pPr>
-            <a:r>
-              <a:rPr sz="1200" b="0">
-                <a:solidFill>
-                  <a:srgbClr val="282828"/>
-                </a:solidFill>
-                <a:latin typeface="Arial"/>
-              </a:rPr>
-              <a:t>•  </a:t>
-            </a:r>
-            <a:r>
-              <a:rPr sz="1200" b="1">
-                <a:solidFill>
-                  <a:srgbClr val="282828"/>
-                </a:solidFill>
-                <a:latin typeface="Arial"/>
-              </a:rPr>
-              <a:t>What is new:</a:t>
-            </a:r>
-            <a:r>
-              <a:rPr sz="1200" b="0">
-                <a:solidFill>
-                  <a:srgbClr val="282828"/>
-                </a:solidFill>
-                <a:latin typeface="Arial"/>
-              </a:rPr>
-              <a:t> the Local Oscillator (LO) arm (a fiber tip and collimator where the reference flat sat); frequency-set steps; each frame integrating a quarter of the beat; the LO's wavefront drift; the differential fiber phase within a scan; trigger jitter; a camera chosen for the job.</a:t>
-            </a:r>
-          </a:p>
-          <a:p>
-            <a:pPr>
-              <a:spcAft>
-                <a:spcPts val="600"/>
-              </a:spcAft>
-            </a:pPr>
-            <a:r>
-              <a:rPr sz="1200" b="0">
-                <a:solidFill>
-                  <a:srgbClr val="282828"/>
-                </a:solidFill>
-                <a:latin typeface="Arial"/>
-              </a:rPr>
-              <a:t>•  </a:t>
-            </a:r>
-            <a:r>
-              <a:rPr sz="1200" b="1">
-                <a:solidFill>
-                  <a:srgbClr val="282828"/>
-                </a:solidFill>
-                <a:latin typeface="Arial"/>
-              </a:rPr>
-              <a:t>What is absent:</a:t>
-            </a:r>
-            <a:r>
-              <a:rPr sz="1200" b="0">
-                <a:solidFill>
-                  <a:srgbClr val="282828"/>
-                </a:solidFill>
-                <a:latin typeface="Arial"/>
-              </a:rPr>
-              <a:t> the polarizing train — no analyzer, no quarter-wave plates, the same polarization in both arms — so the polarization gain the IFO carries (0.983–1.004) does not exist here.</a:t>
-            </a:r>
-          </a:p>
-        </p:txBody>
-      </p:sp>
-      <p:sp>
-        <p:nvSpPr>
-          <p:cNvPr id="6" name="TextBox 5"/>
-          <p:cNvSpPr txBox="1"/>
-          <p:nvPr/>
-        </p:nvSpPr>
-        <p:spPr>
-          <a:xfrm>
-            <a:off x="6400800" y="5074920"/>
-            <a:ext cx="5394960" cy="274320"/>
-          </a:xfrm>
-          <a:prstGeom prst="rect">
-            <a:avLst/>
-          </a:prstGeom>
-          <a:noFill/>
-        </p:spPr>
-        <p:txBody>
-          <a:bodyPr wrap="square">
-            <a:spAutoFit/>
-          </a:bodyPr>
-          <a:lstStyle/>
-          <a:p>
-            <a:pPr>
-              <a:spcAft>
-                <a:spcPts val="600"/>
-              </a:spcAft>
-            </a:pPr>
-            <a:r>
               <a:rPr sz="1050" b="0">
                 <a:solidFill>
                   <a:srgbClr val="6E6E6E"/>
                 </a:solidFill>
                 <a:latin typeface="Arial"/>
               </a:rPr>
-              <a:t>Feng's slide 8 is the implementation example this deck's block diagrams follow; TOM3 (SPIE 6268) is the photodiode heritage.</a:t>
+              <a:t>The Zernike rows are the gauge deck's (redo96_sens, zloop) with the polarization-camera timing from camS_oap; the COPHI rows this deck's; the lock-in rows are records (runs/lockin_, resources 2a07af9).</a:t>
             </a:r>
           </a:p>
         </p:txBody>
@@ -12655,7 +12966,7 @@
 </p:sld>
 </file>
 
-<file path=ppt/slides/slide20.xml><?xml version="1.0" encoding="utf-8"?>
+<file path=ppt/slides/slide21.xml><?xml version="1.0" encoding="utf-8"?>
 <p:sld xmlns:a="http://schemas.openxmlformats.org/drawingml/2006/main" xmlns:p="http://schemas.openxmlformats.org/presentationml/2006/main" xmlns:r="http://schemas.openxmlformats.org/officeDocument/2006/relationships">
   <p:cSld>
     <p:spTree>
@@ -13041,7 +13352,7 @@
                 </a:solidFill>
                 <a:latin typeface="Arial"/>
               </a:rPr>
-              <a:t> the lens rig's +0.1–0.2 % converged gain (a matrix-model term); the polarization-camera timings through the noise hook (slide 17); the lock-in's demodulation form from the vendor (two-tap square-wave assumed).</a:t>
+              <a:t> the lens rig's +0.1–0.2 % converged gain (a matrix-model term); the polarization-camera timings through the noise hook (slide 18); the lock-in's demodulation form from the vendor (two-tap square-wave assumed).</a:t>
             </a:r>
           </a:p>
           <a:p>
@@ -13127,7 +13438,7 @@
 </p:sld>
 </file>
 
-<file path=ppt/slides/slide21.xml><?xml version="1.0" encoding="utf-8"?>
+<file path=ppt/slides/slide22.xml><?xml version="1.0" encoding="utf-8"?>
 <p:sld xmlns:a="http://schemas.openxmlformats.org/drawingml/2006/main" xmlns:p="http://schemas.openxmlformats.org/presentationml/2006/main" xmlns:r="http://schemas.openxmlformats.org/officeDocument/2006/relationships">
   <p:cSld>
     <p:spTree>
@@ -13984,7 +14295,7 @@
 </p:sld>
 </file>
 
-<file path=ppt/slides/slide22.xml><?xml version="1.0" encoding="utf-8"?>
+<file path=ppt/slides/slide23.xml><?xml version="1.0" encoding="utf-8"?>
 <p:sld xmlns:a="http://schemas.openxmlformats.org/drawingml/2006/main" xmlns:p="http://schemas.openxmlformats.org/presentationml/2006/main" xmlns:r="http://schemas.openxmlformats.org/officeDocument/2006/relationships">
   <p:cSld>
     <p:spTree>
@@ -14085,7 +14396,7 @@
 </p:sld>
 </file>
 
-<file path=ppt/slides/slide23.xml><?xml version="1.0" encoding="utf-8"?>
+<file path=ppt/slides/slide24.xml><?xml version="1.0" encoding="utf-8"?>
 <p:sld xmlns:a="http://schemas.openxmlformats.org/drawingml/2006/main" xmlns:p="http://schemas.openxmlformats.org/presentationml/2006/main" xmlns:r="http://schemas.openxmlformats.org/officeDocument/2006/relationships">
   <p:cSld>
     <p:spTree>
@@ -14312,7 +14623,7 @@
 </p:sld>
 </file>
 
-<file path=ppt/slides/slide24.xml><?xml version="1.0" encoding="utf-8"?>
+<file path=ppt/slides/slide25.xml><?xml version="1.0" encoding="utf-8"?>
 <p:sld xmlns:a="http://schemas.openxmlformats.org/drawingml/2006/main" xmlns:p="http://schemas.openxmlformats.org/presentationml/2006/main" xmlns:r="http://schemas.openxmlformats.org/officeDocument/2006/relationships">
   <p:cSld>
     <p:spTree>
@@ -14903,7 +15214,7 @@
 </p:sld>
 </file>
 
-<file path=ppt/slides/slide25.xml><?xml version="1.0" encoding="utf-8"?>
+<file path=ppt/slides/slide26.xml><?xml version="1.0" encoding="utf-8"?>
 <p:sld xmlns:a="http://schemas.openxmlformats.org/drawingml/2006/main" xmlns:p="http://schemas.openxmlformats.org/presentationml/2006/main" xmlns:r="http://schemas.openxmlformats.org/officeDocument/2006/relationships">
   <p:cSld>
     <p:spTree>
@@ -16072,8 +16383,8 @@
         </p:nvSpPr>
         <p:spPr>
           <a:xfrm>
-            <a:off x="6172200" y="2103120"/>
-            <a:ext cx="4343400" cy="274320"/>
+            <a:off x="6400800" y="1999488"/>
+            <a:ext cx="5394960" cy="274320"/>
           </a:xfrm>
           <a:prstGeom prst="rect">
             <a:avLst/>
@@ -16098,7 +16409,7 @@
                 </a:solidFill>
                 <a:latin typeface="Arial"/>
               </a:rPr>
-              <a:t>make_cophi_block_fig.py; the camera rows name the surveyed parts; the lock-in alternative has its own diagram (slide 6).</a:t>
+              <a:t>make_cophi_block_fig.py; the camera rows name the surveyed parts; the lock-in alternative has its own diagram (slide 7).</a:t>
             </a:r>
           </a:p>
         </p:txBody>
@@ -16661,7 +16972,7 @@
                           </a:solidFill>
                           <a:latin typeface="Arial"/>
                         </a:rPr>
-                        <a:t>PM fiber tip + collimator at the reference flat's seat (slide 8); LO/test ~1, contrast 0.98</a:t>
+                        <a:t>PM fiber tip + collimator at the reference flat's seat (slide 9); LO/test ~1, contrast 0.98</a:t>
                       </a:r>
                     </a:p>
                   </a:txBody>
@@ -16863,7 +17174,7 @@
                           </a:solidFill>
                           <a:latin typeface="Arial"/>
                         </a:rPr>
-                        <a:t>well × frame rate decides (slide 12)</a:t>
+                        <a:t>well × frame rate decides (slide 13)</a:t>
                       </a:r>
                     </a:p>
                   </a:txBody>
@@ -16953,7 +17264,7 @@
                           </a:solidFill>
                           <a:latin typeface="Arial"/>
                         </a:rPr>
-                        <a:t>oversampling costs no photons (slide 10)</a:t>
+                        <a:t>oversampling costs no photons (slide 11)</a:t>
                       </a:r>
                     </a:p>
                   </a:txBody>
@@ -17111,7 +17422,7 @@
                           </a:solidFill>
                           <a:latin typeface="Arial"/>
                         </a:rPr>
-                        <a:t>fiber walk, jitter, LO drift, shot + read noise, the record's drifts (slide 13); the record's loop at the camera's cadence; two colors from cold (slides 15–16)</a:t>
+                        <a:t>fiber walk, jitter, LO drift, shot + read noise, the record's drifts (slide 14); the record's loop at the camera's cadence; two colors from cold (slides 16–17)</a:t>
                       </a:r>
                     </a:p>
                   </a:txBody>
@@ -18226,6 +18537,300 @@
 </file>
 
 <file path=ppt/slides/slide6.xml><?xml version="1.0" encoding="utf-8"?>
+<p:sld xmlns:a="http://schemas.openxmlformats.org/drawingml/2006/main" xmlns:p="http://schemas.openxmlformats.org/presentationml/2006/main" xmlns:r="http://schemas.openxmlformats.org/officeDocument/2006/relationships">
+  <p:cSld>
+    <p:spTree>
+      <p:nvGrpSpPr>
+        <p:cNvPr id="1" name=""/>
+        <p:cNvGrpSpPr/>
+        <p:nvPr/>
+      </p:nvGrpSpPr>
+      <p:grpSpPr/>
+      <p:sp>
+        <p:nvSpPr>
+          <p:cNvPr id="2" name="TextBox 1"/>
+          <p:cNvSpPr txBox="1"/>
+          <p:nvPr/>
+        </p:nvSpPr>
+        <p:spPr>
+          <a:xfrm>
+            <a:off x="411480" y="201168"/>
+            <a:ext cx="11368735" cy="914400"/>
+          </a:xfrm>
+          <a:prstGeom prst="rect">
+            <a:avLst/>
+          </a:prstGeom>
+          <a:noFill/>
+        </p:spPr>
+        <p:txBody>
+          <a:bodyPr wrap="square">
+            <a:spAutoFit/>
+          </a:bodyPr>
+          <a:lstStyle/>
+          <a:p>
+            <a:pPr>
+              <a:spcAft>
+                <a:spcPts val="400"/>
+              </a:spcAft>
+            </a:pPr>
+            <a:r>
+              <a:rPr sz="2400" b="1">
+                <a:solidFill>
+                  <a:srgbClr val="1F4E79"/>
+                </a:solidFill>
+                <a:latin typeface="Arial"/>
+              </a:rPr>
+              <a:t>How the lock-in detector works</a:t>
+            </a:r>
+          </a:p>
+          <a:p>
+            <a:pPr>
+              <a:spcAft>
+                <a:spcPts val="0"/>
+              </a:spcAft>
+            </a:pPr>
+            <a:r>
+              <a:rPr sz="1250" b="0">
+                <a:solidFill>
+                  <a:srgbClr val="6E6E6E"/>
+                </a:solidFill>
+                <a:latin typeface="Arial"/>
+              </a:rPr>
+              <a:t>One pixel sorts its photoelectrons into two storage nodes by a square-wave reference at the beat frequency; the node difference IS the lock-in product, formed before any readout — Feng's four-step inside the pixel, integrated over thousands of cycles</a:t>
+            </a:r>
+          </a:p>
+        </p:txBody>
+      </p:sp>
+      <p:sp>
+        <p:nvSpPr>
+          <p:cNvPr id="3" name="Rectangle 2"/>
+          <p:cNvSpPr/>
+          <p:nvPr/>
+        </p:nvSpPr>
+        <p:spPr>
+          <a:xfrm>
+            <a:off x="411480" y="1133856"/>
+            <a:ext cx="11368735" cy="20320"/>
+          </a:xfrm>
+          <a:prstGeom prst="rect">
+            <a:avLst/>
+          </a:prstGeom>
+          <a:solidFill>
+            <a:srgbClr val="B8C6D4"/>
+          </a:solidFill>
+          <a:ln>
+            <a:noFill/>
+          </a:ln>
+          <a:effectLst/>
+        </p:spPr>
+        <p:style>
+          <a:lnRef idx="1">
+            <a:schemeClr val="accent1"/>
+          </a:lnRef>
+          <a:fillRef idx="3">
+            <a:schemeClr val="accent1"/>
+          </a:fillRef>
+          <a:effectRef idx="2">
+            <a:schemeClr val="accent1"/>
+          </a:effectRef>
+          <a:fontRef idx="minor">
+            <a:schemeClr val="lt1"/>
+          </a:fontRef>
+        </p:style>
+        <p:txBody>
+          <a:bodyPr rtlCol="0" anchor="ctr"/>
+          <a:lstStyle/>
+          <a:p>
+            <a:pPr algn="ctr"/>
+          </a:p>
+        </p:txBody>
+      </p:sp>
+      <p:pic>
+        <p:nvPicPr>
+          <p:cNvPr id="4" name="Picture 3" descr="cophi_lid.png"/>
+          <p:cNvPicPr>
+            <a:picLocks noChangeAspect="1"/>
+          </p:cNvPicPr>
+          <p:nvPr/>
+        </p:nvPicPr>
+        <p:blipFill>
+          <a:blip r:embed="rId2"/>
+          <a:stretch>
+            <a:fillRect/>
+          </a:stretch>
+        </p:blipFill>
+        <p:spPr>
+          <a:xfrm>
+            <a:off x="1219047" y="1298448"/>
+            <a:ext cx="9753600" cy="4572000"/>
+          </a:xfrm>
+          <a:prstGeom prst="rect">
+            <a:avLst/>
+          </a:prstGeom>
+        </p:spPr>
+      </p:pic>
+      <p:sp>
+        <p:nvSpPr>
+          <p:cNvPr id="5" name="TextBox 4"/>
+          <p:cNvSpPr txBox="1"/>
+          <p:nvPr/>
+        </p:nvSpPr>
+        <p:spPr>
+          <a:xfrm>
+            <a:off x="411480" y="5870448"/>
+            <a:ext cx="5806440" cy="274320"/>
+          </a:xfrm>
+          <a:prstGeom prst="rect">
+            <a:avLst/>
+          </a:prstGeom>
+          <a:noFill/>
+        </p:spPr>
+        <p:txBody>
+          <a:bodyPr wrap="square">
+            <a:spAutoFit/>
+          </a:bodyPr>
+          <a:lstStyle/>
+          <a:p>
+            <a:pPr>
+              <a:spcAft>
+                <a:spcPts val="600"/>
+              </a:spcAft>
+            </a:pPr>
+            <a:r>
+              <a:rPr sz="1200" b="0">
+                <a:solidFill>
+                  <a:srgbClr val="282828"/>
+                </a:solidFill>
+                <a:latin typeface="Arial"/>
+              </a:rPr>
+              <a:t>•  </a:t>
+            </a:r>
+            <a:r>
+              <a:rPr sz="1200" b="1">
+                <a:solidFill>
+                  <a:srgbClr val="282828"/>
+                </a:solidFill>
+                <a:latin typeface="Arial"/>
+              </a:rPr>
+              <a:t>The reference:</a:t>
+            </a:r>
+            <a:r>
+              <a:rPr sz="1200" b="0">
+                <a:solidFill>
+                  <a:srgbClr val="282828"/>
+                </a:solidFill>
+                <a:latin typeface="Arial"/>
+              </a:rPr>
+              <a:t> a square wave at the beat f_b = |f₁ − f₂| (5 kHz), locked to the AOMs through the Rb clock, fed to the camera's reference input — one clock; software does only atan2(Q, I).</a:t>
+            </a:r>
+          </a:p>
+        </p:txBody>
+      </p:sp>
+      <p:sp>
+        <p:nvSpPr>
+          <p:cNvPr id="6" name="TextBox 5"/>
+          <p:cNvSpPr txBox="1"/>
+          <p:nvPr/>
+        </p:nvSpPr>
+        <p:spPr>
+          <a:xfrm>
+            <a:off x="6400800" y="5870448"/>
+            <a:ext cx="5394960" cy="274320"/>
+          </a:xfrm>
+          <a:prstGeom prst="rect">
+            <a:avLst/>
+          </a:prstGeom>
+          <a:noFill/>
+        </p:spPr>
+        <p:txBody>
+          <a:bodyPr wrap="square">
+            <a:spAutoFit/>
+          </a:bodyPr>
+          <a:lstStyle/>
+          <a:p>
+            <a:pPr>
+              <a:spcAft>
+                <a:spcPts val="600"/>
+              </a:spcAft>
+            </a:pPr>
+            <a:r>
+              <a:rPr sz="1200" b="0">
+                <a:solidFill>
+                  <a:srgbClr val="282828"/>
+                </a:solidFill>
+                <a:latin typeface="Arial"/>
+              </a:rPr>
+              <a:t>•  </a:t>
+            </a:r>
+            <a:r>
+              <a:rPr sz="1200" b="1">
+                <a:solidFill>
+                  <a:srgbClr val="282828"/>
+                </a:solidFill>
+                <a:latin typeface="Arial"/>
+              </a:rPr>
+              <a:t>Against a frame camera:</a:t>
+            </a:r>
+            <a:r>
+              <a:rPr sz="1200" b="0">
+                <a:solidFill>
+                  <a:srgbClr val="282828"/>
+                </a:solidFill>
+                <a:latin typeface="Arial"/>
+              </a:rPr>
+              <a:t> N cycles per sample, not a quarter cycle; the DC cancels in the difference (does it fill the nodes? vendor question 2); the square wave costs ×1.11 in σ (eq. 6).</a:t>
+            </a:r>
+          </a:p>
+        </p:txBody>
+      </p:sp>
+      <p:sp>
+        <p:nvSpPr>
+          <p:cNvPr id="7" name="TextBox 6"/>
+          <p:cNvSpPr txBox="1"/>
+          <p:nvPr/>
+        </p:nvSpPr>
+        <p:spPr>
+          <a:xfrm>
+            <a:off x="6400800" y="6641592"/>
+            <a:ext cx="5394960" cy="274320"/>
+          </a:xfrm>
+          <a:prstGeom prst="rect">
+            <a:avLst/>
+          </a:prstGeom>
+          <a:noFill/>
+        </p:spPr>
+        <p:txBody>
+          <a:bodyPr wrap="square">
+            <a:spAutoFit/>
+          </a:bodyPr>
+          <a:lstStyle/>
+          <a:p>
+            <a:pPr>
+              <a:spcAft>
+                <a:spcPts val="600"/>
+              </a:spcAft>
+            </a:pPr>
+            <a:r>
+              <a:rPr sz="1050" b="0">
+                <a:solidFill>
+                  <a:srgbClr val="6E6E6E"/>
+                </a:solidFill>
+                <a:latin typeface="Arial"/>
+              </a:rPr>
+              <a:t>make_cophi_lid_fig.py; the pixel is CSEM's demodulation pixel (Lange &amp; Seitz 2001), the heliCam's "dual-phase lock-in".</a:t>
+            </a:r>
+          </a:p>
+        </p:txBody>
+      </p:sp>
+    </p:spTree>
+  </p:cSld>
+  <p:clrMapOvr>
+    <a:masterClrMapping/>
+  </p:clrMapOvr>
+</p:sld>
+</file>
+
+<file path=ppt/slides/slide7.xml><?xml version="1.0" encoding="utf-8"?>
 <p:sld xmlns:a="http://schemas.openxmlformats.org/drawingml/2006/main" xmlns:p="http://schemas.openxmlformats.org/presentationml/2006/main" xmlns:r="http://schemas.openxmlformats.org/officeDocument/2006/relationships">
   <p:cSld>
     <p:spTree>
@@ -18502,7 +19107,7 @@
 </p:sld>
 </file>
 
-<file path=ppt/slides/slide7.xml><?xml version="1.0" encoding="utf-8"?>
+<file path=ppt/slides/slide8.xml><?xml version="1.0" encoding="utf-8"?>
 <p:sld xmlns:a="http://schemas.openxmlformats.org/drawingml/2006/main" xmlns:p="http://schemas.openxmlformats.org/presentationml/2006/main" xmlns:r="http://schemas.openxmlformats.org/officeDocument/2006/relationships">
   <p:cSld>
     <p:spTree>
@@ -18962,7 +19567,7 @@
 </p:sld>
 </file>
 
-<file path=ppt/slides/slide8.xml><?xml version="1.0" encoding="utf-8"?>
+<file path=ppt/slides/slide9.xml><?xml version="1.0" encoding="utf-8"?>
 <p:sld xmlns:a="http://schemas.openxmlformats.org/drawingml/2006/main" xmlns:p="http://schemas.openxmlformats.org/presentationml/2006/main" xmlns:r="http://schemas.openxmlformats.org/officeDocument/2006/relationships">
   <p:cSld>
     <p:spTree>
@@ -19236,7 +19841,7 @@
                 </a:solidFill>
                 <a:latin typeface="Arial"/>
               </a:rPr>
-              <a:t>–  the LO collimator's own wavefront, frozen into the null as the IFO freezes its reference; its motion is the LO-drift row (slide 13)</a:t>
+              <a:t>–  the LO collimator's own wavefront, frozen into the null as the IFO freezes its reference; its motion is the LO-drift row (slide 14)</a:t>
             </a:r>
           </a:p>
           <a:p>
@@ -19487,316 +20092,6 @@
                 <a:latin typeface="Arial"/>
               </a:rPr>
               <a:t>Stage bench (runs/bench_{lens,oap}; the layouts = bench_{lens,oap}_vlayout.png, the engine's own renders), gate tCophiBench 9/9 (registration, poke 1.001 converged, LO tilt, no-fringe refused by name, dark camera refused).</a:t>
-            </a:r>
-          </a:p>
-        </p:txBody>
-      </p:sp>
-    </p:spTree>
-  </p:cSld>
-  <p:clrMapOvr>
-    <a:masterClrMapping/>
-  </p:clrMapOvr>
-</p:sld>
-</file>
-
-<file path=ppt/slides/slide9.xml><?xml version="1.0" encoding="utf-8"?>
-<p:sld xmlns:a="http://schemas.openxmlformats.org/drawingml/2006/main" xmlns:p="http://schemas.openxmlformats.org/presentationml/2006/main" xmlns:r="http://schemas.openxmlformats.org/officeDocument/2006/relationships">
-  <p:cSld>
-    <p:spTree>
-      <p:nvGrpSpPr>
-        <p:cNvPr id="1" name=""/>
-        <p:cNvGrpSpPr/>
-        <p:nvPr/>
-      </p:nvGrpSpPr>
-      <p:grpSpPr/>
-      <p:sp>
-        <p:nvSpPr>
-          <p:cNvPr id="2" name="TextBox 1"/>
-          <p:cNvSpPr txBox="1"/>
-          <p:nvPr/>
-        </p:nvSpPr>
-        <p:spPr>
-          <a:xfrm>
-            <a:off x="411480" y="201168"/>
-            <a:ext cx="11368735" cy="914400"/>
-          </a:xfrm>
-          <a:prstGeom prst="rect">
-            <a:avLst/>
-          </a:prstGeom>
-          <a:noFill/>
-        </p:spPr>
-        <p:txBody>
-          <a:bodyPr wrap="square">
-            <a:spAutoFit/>
-          </a:bodyPr>
-          <a:lstStyle/>
-          <a:p>
-            <a:pPr>
-              <a:spcAft>
-                <a:spcPts val="400"/>
-              </a:spcAft>
-            </a:pPr>
-            <a:r>
-              <a:rPr sz="2400" b="1">
-                <a:solidFill>
-                  <a:srgbClr val="1F4E79"/>
-                </a:solidFill>
-                <a:latin typeface="Arial"/>
-              </a:rPr>
-              <a:t>Reading the 30 nm working surface, station by station</a:t>
-            </a:r>
-          </a:p>
-          <a:p>
-            <a:pPr>
-              <a:spcAft>
-                <a:spcPts val="0"/>
-              </a:spcAft>
-            </a:pPr>
-            <a:r>
-              <a:rPr sz="1250" b="0">
-                <a:solidFill>
-                  <a:srgbClr val="6E6E6E"/>
-                </a:solidFill>
-                <a:latin typeface="Arial"/>
-              </a:rPr>
-              <a:t>The same mirror command through the heterodyne train on the mirror rig, plain splitter; the last column is the raw map against the engine's own field</a:t>
-            </a:r>
-          </a:p>
-        </p:txBody>
-      </p:sp>
-      <p:sp>
-        <p:nvSpPr>
-          <p:cNvPr id="3" name="Rectangle 2"/>
-          <p:cNvSpPr/>
-          <p:nvPr/>
-        </p:nvSpPr>
-        <p:spPr>
-          <a:xfrm>
-            <a:off x="411480" y="1133856"/>
-            <a:ext cx="11368735" cy="20320"/>
-          </a:xfrm>
-          <a:prstGeom prst="rect">
-            <a:avLst/>
-          </a:prstGeom>
-          <a:solidFill>
-            <a:srgbClr val="B8C6D4"/>
-          </a:solidFill>
-          <a:ln>
-            <a:noFill/>
-          </a:ln>
-          <a:effectLst/>
-        </p:spPr>
-        <p:style>
-          <a:lnRef idx="1">
-            <a:schemeClr val="accent1"/>
-          </a:lnRef>
-          <a:fillRef idx="3">
-            <a:schemeClr val="accent1"/>
-          </a:fillRef>
-          <a:effectRef idx="2">
-            <a:schemeClr val="accent1"/>
-          </a:effectRef>
-          <a:fontRef idx="minor">
-            <a:schemeClr val="lt1"/>
-          </a:fontRef>
-        </p:style>
-        <p:txBody>
-          <a:bodyPr rtlCol="0" anchor="ctr"/>
-          <a:lstStyle/>
-          <a:p>
-            <a:pPr algn="ctr"/>
-          </a:p>
-        </p:txBody>
-      </p:sp>
-      <p:pic>
-        <p:nvPicPr>
-          <p:cNvPr id="4" name="Picture 3" descr="cophi_stations_oap.png"/>
-          <p:cNvPicPr>
-            <a:picLocks noChangeAspect="1"/>
-          </p:cNvPicPr>
-          <p:nvPr/>
-        </p:nvPicPr>
-        <p:blipFill>
-          <a:blip r:embed="rId2"/>
-          <a:stretch>
-            <a:fillRect/>
-          </a:stretch>
-        </p:blipFill>
-        <p:spPr>
-          <a:xfrm>
-            <a:off x="1293571" y="1298448"/>
-            <a:ext cx="9604553" cy="2897632"/>
-          </a:xfrm>
-          <a:prstGeom prst="rect">
-            <a:avLst/>
-          </a:prstGeom>
-        </p:spPr>
-      </p:pic>
-      <p:sp>
-        <p:nvSpPr>
-          <p:cNvPr id="5" name="TextBox 4"/>
-          <p:cNvSpPr txBox="1"/>
-          <p:nvPr/>
-        </p:nvSpPr>
-        <p:spPr>
-          <a:xfrm>
-            <a:off x="411480" y="4214367"/>
-            <a:ext cx="11368735" cy="394208"/>
-          </a:xfrm>
-          <a:prstGeom prst="rect">
-            <a:avLst/>
-          </a:prstGeom>
-          <a:noFill/>
-        </p:spPr>
-        <p:txBody>
-          <a:bodyPr wrap="square">
-            <a:spAutoFit/>
-          </a:bodyPr>
-          <a:lstStyle/>
-          <a:p>
-            <a:pPr algn="ctr">
-              <a:spcAft>
-                <a:spcPts val="0"/>
-              </a:spcAft>
-            </a:pPr>
-            <a:r>
-              <a:rPr sz="1000" b="0">
-                <a:solidFill>
-                  <a:srgbClr val="6E6E6E"/>
-                </a:solidFill>
-                <a:latin typeface="Arial"/>
-              </a:rPr>
-              <a:t>COPHI, mirror rig: the command; the test arm and the LO at the camera; two of the four buckets; the recovered surface, 31.9 nm rms; recovered minus the engine's field, 0.31 pm rms; the flat DM reads 0</a:t>
-            </a:r>
-          </a:p>
-        </p:txBody>
-      </p:sp>
-      <p:sp>
-        <p:nvSpPr>
-          <p:cNvPr id="6" name="TextBox 5"/>
-          <p:cNvSpPr txBox="1"/>
-          <p:nvPr/>
-        </p:nvSpPr>
-        <p:spPr>
-          <a:xfrm>
-            <a:off x="411480" y="4645151"/>
-            <a:ext cx="11368735" cy="274320"/>
-          </a:xfrm>
-          <a:prstGeom prst="rect">
-            <a:avLst/>
-          </a:prstGeom>
-          <a:noFill/>
-        </p:spPr>
-        <p:txBody>
-          <a:bodyPr wrap="square">
-            <a:spAutoFit/>
-          </a:bodyPr>
-          <a:lstStyle/>
-          <a:p>
-            <a:pPr>
-              <a:spcAft>
-                <a:spcPts val="600"/>
-              </a:spcAft>
-            </a:pPr>
-            <a:r>
-              <a:rPr sz="1500" b="0">
-                <a:solidFill>
-                  <a:srgbClr val="282828"/>
-                </a:solidFill>
-                <a:latin typeface="Arial"/>
-              </a:rPr>
-              <a:t>•  </a:t>
-            </a:r>
-            <a:r>
-              <a:rPr sz="1500" b="1">
-                <a:solidFill>
-                  <a:srgbClr val="282828"/>
-                </a:solidFill>
-                <a:latin typeface="Arial"/>
-              </a:rPr>
-              <a:t>Resolution shown:</a:t>
-            </a:r>
-            <a:r>
-              <a:rPr sz="1500" b="0">
-                <a:solidFill>
-                  <a:srgbClr val="282828"/>
-                </a:solidFill>
-                <a:latin typeface="Arial"/>
-              </a:rPr>
-              <a:t> camera grid 1024 × 1024, pupil 315 px across — </a:t>
-            </a:r>
-            <a:r>
-              <a:rPr sz="1500" b="1">
-                <a:solidFill>
-                  <a:srgbClr val="282828"/>
-                </a:solidFill>
-                <a:latin typeface="Arial"/>
-              </a:rPr>
-              <a:t>3.3 pixels per actuator across, ~11 per actuator in area</a:t>
-            </a:r>
-            <a:r>
-              <a:rPr sz="1500" b="0">
-                <a:solidFill>
-                  <a:srgbClr val="282828"/>
-                </a:solidFill>
-                <a:latin typeface="Arial"/>
-              </a:rPr>
-              <a:t> (6948 lit actuators on ~77,900 pupil pixels).</a:t>
-            </a:r>
-          </a:p>
-          <a:p>
-            <a:pPr marL="594360" indent="-137160">
-              <a:spcAft>
-                <a:spcPts val="500"/>
-              </a:spcAft>
-            </a:pPr>
-            <a:r>
-              <a:rPr sz="1300" b="0">
-                <a:solidFill>
-                  <a:srgbClr val="6E6E6E"/>
-                </a:solidFill>
-                <a:latin typeface="Arial"/>
-              </a:rPr>
-              <a:t>–  every real camera on the table samples finer (5–21 px per actuator, slide 10); what resolution buys and costs is slide 18</a:t>
-            </a:r>
-          </a:p>
-        </p:txBody>
-      </p:sp>
-      <p:sp>
-        <p:nvSpPr>
-          <p:cNvPr id="7" name="TextBox 6"/>
-          <p:cNvSpPr txBox="1"/>
-          <p:nvPr/>
-        </p:nvSpPr>
-        <p:spPr>
-          <a:xfrm>
-            <a:off x="411480" y="5659373"/>
-            <a:ext cx="11368735" cy="274320"/>
-          </a:xfrm>
-          <a:prstGeom prst="rect">
-            <a:avLst/>
-          </a:prstGeom>
-          <a:noFill/>
-        </p:spPr>
-        <p:txBody>
-          <a:bodyPr wrap="square">
-            <a:spAutoFit/>
-          </a:bodyPr>
-          <a:lstStyle/>
-          <a:p>
-            <a:pPr>
-              <a:spcAft>
-                <a:spcPts val="600"/>
-              </a:spcAft>
-            </a:pPr>
-            <a:r>
-              <a:rPr sz="1050" b="0">
-                <a:solidFill>
-                  <a:srgbClr val="6E6E6E"/>
-                </a:solidFill>
-                <a:latin typeface="Arial"/>
-              </a:rPr>
-              <a:t>Stage figs (runs/figs_oap_plain), noise-free; the deck's station-figure format (row 1 flat DM, row 2 the working surface).</a:t>
             </a:r>
           </a:p>
         </p:txBody>

--- a/demo_session/deck_cophi_edit.pptx
+++ b/demo_session/deck_cophi_edit.pptx
@@ -18661,8 +18661,8 @@
         </p:blipFill>
         <p:spPr>
           <a:xfrm>
-            <a:off x="1219047" y="1298448"/>
-            <a:ext cx="9753600" cy="4572000"/>
+            <a:off x="978891" y="1298448"/>
+            <a:ext cx="10233911" cy="4572000"/>
           </a:xfrm>
           <a:prstGeom prst="rect">
             <a:avLst/>
@@ -18972,7 +18972,7 @@
         </p:nvSpPr>
         <p:spPr>
           <a:xfrm>
-            <a:off x="4251960" y="1234440"/>
+            <a:off x="411480" y="6720840"/>
             <a:ext cx="5806440" cy="274320"/>
           </a:xfrm>
           <a:prstGeom prst="rect">
@@ -19016,7 +19016,7 @@
                 </a:solidFill>
                 <a:latin typeface="Arial"/>
               </a:rPr>
-              <a:t> synthesizer 2 at 80 MHz + 5 kHz; the ×4 / 30 Hz trigger chain becomes the 5 kHz reference; the camera is the lock-in device; the processing is atan2(Q, I) per frame, decimated to the loop rate.  Fiber, LO and hold loop are unchanged.</a:t>
+              <a:t> synthesizer 2 at 80 MHz + 5 kHz; the ×4 / 30 Hz trigger chain becomes the 5 kHz reference, fed to the pixels' transfer gates; the camera is drawn as the chain inside one pixel (slide 6: photodiode → gates → nodes → A − B, C − D) in series with the frame grabber; the processing is atan2(Q, I) per sample, decimated to the loop rate.  Fiber, LO and hold loop are unchanged.</a:t>
             </a:r>
           </a:p>
         </p:txBody>
@@ -19068,8 +19068,8 @@
         </p:nvSpPr>
         <p:spPr>
           <a:xfrm>
-            <a:off x="6172200" y="6611112"/>
-            <a:ext cx="5650992" cy="274320"/>
+            <a:off x="6400800" y="2660904"/>
+            <a:ext cx="5394960" cy="274320"/>
           </a:xfrm>
           <a:prstGeom prst="rect">
             <a:avLst/>
@@ -19094,7 +19094,7 @@
                 </a:solidFill>
                 <a:latin typeface="Arial"/>
               </a:rPr>
-              <a:t>make_cophi_block_fig.py (lock-in variant); the well-free device is the dashed alternative.</a:t>
+              <a:t>make_cophi_block_fig.py (lock-in variant); the pixel chain's inputs and outputs are slide 6's.</a:t>
             </a:r>
           </a:p>
         </p:txBody>

--- a/demo_session/deck_cophi_edit.pptx
+++ b/demo_session/deck_cophi_edit.pptx
@@ -11367,8 +11367,8 @@
         </p:nvSpPr>
         <p:spPr>
           <a:xfrm>
-            <a:off x="6400800" y="6600317"/>
-            <a:ext cx="5394960" cy="274320"/>
+            <a:off x="457200" y="6400800"/>
+            <a:ext cx="11338560" cy="274320"/>
           </a:xfrm>
           <a:prstGeom prst="rect">
             <a:avLst/>
@@ -18459,7 +18459,7 @@
                 </a:solidFill>
                 <a:latin typeface="Arial"/>
               </a:rPr>
-              <a:t>The vendor question:</a:t>
+              <a:t>Questions for the vendor:</a:t>
             </a:r>
             <a:r>
               <a:rPr sz="1400" b="0">
@@ -18468,7 +18468,7 @@
                 </a:solidFill>
                 <a:latin typeface="Arial"/>
               </a:rPr>
-              <a:t> phase noise per pixel vs flux at t_c = 100 ms, and whether the full well bounds each internal 1 MSa/s sample or the 5.6 kSa/s output — for Heliotis, through Dave.</a:t>
+              <a:t> phase noise per pixel vs flux at t_c = 100 ms, and whether the full well bounds each internal 1 MSa/s sample or the 5.6 kSa/s output</a:t>
             </a:r>
           </a:p>
         </p:txBody>
@@ -18957,7 +18957,7 @@
         </p:nvSpPr>
         <p:spPr>
           <a:xfrm>
-            <a:off x="4251960" y="1234440"/>
+            <a:off x="3200400" y="1133856"/>
             <a:ext cx="5806440" cy="274320"/>
           </a:xfrm>
           <a:prstGeom prst="rect">
@@ -19014,7 +19014,7 @@
         </p:nvSpPr>
         <p:spPr>
           <a:xfrm>
-            <a:off x="4206240" y="2286000"/>
+            <a:off x="3200400" y="2240280"/>
             <a:ext cx="6080760" cy="274320"/>
           </a:xfrm>
           <a:prstGeom prst="rect">
@@ -19217,8 +19217,8 @@
         </p:blipFill>
         <p:spPr>
           <a:xfrm>
-            <a:off x="761847" y="1298448"/>
-            <a:ext cx="10668000" cy="3200400"/>
+            <a:off x="301752" y="1152144"/>
+            <a:ext cx="11585448" cy="3648456"/>
           </a:xfrm>
           <a:prstGeom prst="rect">
             <a:avLst/>
@@ -19233,7 +19233,7 @@
         </p:nvSpPr>
         <p:spPr>
           <a:xfrm>
-            <a:off x="411480" y="4498848"/>
+            <a:off x="411480" y="4572000"/>
             <a:ext cx="5806440" cy="274320"/>
           </a:xfrm>
           <a:prstGeom prst="rect">
@@ -19374,7 +19374,7 @@
         </p:nvSpPr>
         <p:spPr>
           <a:xfrm>
-            <a:off x="6400800" y="4498848"/>
+            <a:off x="6400800" y="4572000"/>
             <a:ext cx="5394960" cy="274320"/>
           </a:xfrm>
           <a:prstGeom prst="rect">
@@ -19513,7 +19513,7 @@
         </p:nvSpPr>
         <p:spPr>
           <a:xfrm>
-            <a:off x="6400800" y="7229094"/>
+            <a:off x="6400800" y="7302246"/>
             <a:ext cx="5394960" cy="274320"/>
           </a:xfrm>
           <a:prstGeom prst="rect">

--- a/demo_session/deck_cophi_edit.pptx
+++ b/demo_session/deck_cophi_edit.pptx
@@ -18957,7 +18957,7 @@
         </p:nvSpPr>
         <p:spPr>
           <a:xfrm>
-            <a:off x="3200400" y="1133856"/>
+            <a:off x="411480" y="6720840"/>
             <a:ext cx="5806440" cy="274320"/>
           </a:xfrm>
           <a:prstGeom prst="rect">
@@ -19001,7 +19001,7 @@
                 </a:solidFill>
                 <a:latin typeface="Arial"/>
               </a:rPr>
-              <a:t> synthesizer 2 at 80 MHz + 5 kHz; the ×4 / 30 Hz trigger chain becomes the 5 kHz reference, fed to the pixels' transfer gates; the camera is drawn as the chain inside one pixel (slide 6: photodiode → gates → nodes → A − B, C − D) in series with the frame grabber; the processing is atan2(Q, I) per sample, decimated to the loop rate.  Fiber, LO and hold loop are unchanged.</a:t>
+              <a:t> synthesizer 2 at 80 MHz + 5 kHz; the ×4 / 30 Hz trigger chain becomes the 5 kHz reference, fed to the pixels' transfer gates; the camera is drawn as the chain inside one pixel (slide 6: photodiode → gates → nodes → A − B, C − D → the sensor's own ADCs, 2 × 10 bit per pixel) so only digital I/Q leaves the camera, into a GigE receiver; the processing is atan2(Q, I) per sample, decimated to the loop rate.  Fiber, LO and hold loop are unchanged.</a:t>
             </a:r>
           </a:p>
         </p:txBody>

--- a/demo_session/deck_cophi_edit.pptx
+++ b/demo_session/deck_cophi_edit.pptx
@@ -5822,7 +5822,7 @@
         </p:nvSpPr>
         <p:spPr>
           <a:xfrm>
-            <a:off x="411480" y="4135374"/>
+            <a:off x="411480" y="5257800"/>
             <a:ext cx="11368735" cy="274320"/>
           </a:xfrm>
           <a:prstGeom prst="rect">
@@ -5842,7 +5842,7 @@
               </a:spcAft>
             </a:pPr>
             <a:r>
-              <a:rPr sz="1500" b="0">
+              <a:rPr sz="1200" b="0">
                 <a:solidFill>
                   <a:srgbClr val="282828"/>
                 </a:solidFill>
@@ -5851,7 +5851,7 @@
               <a:t>•  </a:t>
             </a:r>
             <a:r>
-              <a:rPr sz="1500" b="1">
+              <a:rPr sz="1200" b="1">
                 <a:solidFill>
                   <a:srgbClr val="282828"/>
                 </a:solidFill>
@@ -5860,7 +5860,7 @@
               <a:t>The one-step rows sit 0.5 % low for HET on both rigs — the estimator, not the reading:</a:t>
             </a:r>
             <a:r>
-              <a:rPr sz="1500" b="0">
+              <a:rPr sz="1200" b="0">
                 <a:solidFill>
                   <a:srgbClr val="282828"/>
                 </a:solidFill>
@@ -5876,7 +5876,7 @@
               </a:spcAft>
             </a:pPr>
             <a:r>
-              <a:rPr sz="1500" b="0">
+              <a:rPr sz="1200" b="0">
                 <a:solidFill>
                   <a:srgbClr val="282828"/>
                 </a:solidFill>
@@ -5885,7 +5885,7 @@
               <a:t>•  </a:t>
             </a:r>
             <a:r>
-              <a:rPr sz="1500" b="1">
+              <a:rPr sz="1200" b="1">
                 <a:solidFill>
                   <a:srgbClr val="282828"/>
                 </a:solidFill>
@@ -5894,7 +5894,7 @@
               <a:t>Driven to convergence (the servo use), HET reads exactly on the mirror rig, and the IFO shows its polarization gain in the open:</a:t>
             </a:r>
             <a:r>
-              <a:rPr sz="1500" b="0">
+              <a:rPr sz="1200" b="0">
                 <a:solidFill>
                   <a:srgbClr val="282828"/>
                 </a:solidFill>
@@ -5913,7 +5913,7 @@
         </p:nvSpPr>
         <p:spPr>
           <a:xfrm>
-            <a:off x="411480" y="5938266"/>
+            <a:off x="411480" y="6565392"/>
             <a:ext cx="11368735" cy="274320"/>
           </a:xfrm>
           <a:prstGeom prst="rect">
@@ -8607,8 +8607,8 @@
         </p:blipFill>
         <p:spPr>
           <a:xfrm>
-            <a:off x="731520" y="1179576"/>
-            <a:ext cx="9098280" cy="5623560"/>
+            <a:off x="731520" y="2286000"/>
+            <a:ext cx="10972800" cy="4389120"/>
           </a:xfrm>
           <a:prstGeom prst="rect">
             <a:avLst/>
@@ -8623,8 +8623,8 @@
         </p:nvSpPr>
         <p:spPr>
           <a:xfrm>
-            <a:off x="3657600" y="1152144"/>
-            <a:ext cx="8229600" cy="274320"/>
+            <a:off x="411480" y="1115568"/>
+            <a:ext cx="11338560" cy="274320"/>
           </a:xfrm>
           <a:prstGeom prst="rect">
             <a:avLst/>
@@ -8643,7 +8643,7 @@
               </a:spcAft>
             </a:pPr>
             <a:r>
-              <a:rPr sz="1200" b="0">
+              <a:rPr sz="1500" b="0">
                 <a:solidFill>
                   <a:srgbClr val="282828"/>
                 </a:solidFill>
@@ -8652,7 +8652,7 @@
               <a:t>•  </a:t>
             </a:r>
             <a:r>
-              <a:rPr sz="1200" b="1">
+              <a:rPr sz="1500" b="1">
                 <a:solidFill>
                   <a:srgbClr val="282828"/>
                 </a:solidFill>
@@ -8661,7 +8661,7 @@
               <a:t>Two colors, one camera, one 8-frame set:</a:t>
             </a:r>
             <a:r>
-              <a:rPr sz="1200" b="0">
+              <a:rPr sz="1500" b="0">
                 <a:solidFill>
                   <a:srgbClr val="282828"/>
                 </a:solidFill>
@@ -8680,7 +8680,7 @@
         </p:nvSpPr>
         <p:spPr>
           <a:xfrm>
-            <a:off x="5257800" y="2468880"/>
+            <a:off x="411480" y="1828800"/>
             <a:ext cx="5852160" cy="274320"/>
           </a:xfrm>
           <a:prstGeom prst="rect">
@@ -8719,8 +8719,8 @@
         </p:nvSpPr>
         <p:spPr>
           <a:xfrm>
-            <a:off x="4572000" y="1828800"/>
-            <a:ext cx="7315200" cy="274320"/>
+            <a:off x="6400800" y="1828800"/>
+            <a:ext cx="5394960" cy="274320"/>
           </a:xfrm>
           <a:prstGeom prst="rect">
             <a:avLst/>
@@ -16344,7 +16344,7 @@
         </p:nvSpPr>
         <p:spPr>
           <a:xfrm>
-            <a:off x="3429000" y="1426464"/>
+            <a:off x="5486400" y="1371600"/>
             <a:ext cx="5852160" cy="274320"/>
           </a:xfrm>
           <a:prstGeom prst="rect">
@@ -16383,8 +16383,8 @@
         </p:nvSpPr>
         <p:spPr>
           <a:xfrm>
-            <a:off x="6400800" y="1999488"/>
-            <a:ext cx="5394960" cy="274320"/>
+            <a:off x="6172200" y="2103120"/>
+            <a:ext cx="4343400" cy="274320"/>
           </a:xfrm>
           <a:prstGeom prst="rect">
             <a:avLst/>
@@ -18957,8 +18957,8 @@
         </p:nvSpPr>
         <p:spPr>
           <a:xfrm>
-            <a:off x="411480" y="6720840"/>
-            <a:ext cx="5806440" cy="274320"/>
+            <a:off x="5760720" y="1115568"/>
+            <a:ext cx="6035040" cy="274320"/>
           </a:xfrm>
           <a:prstGeom prst="rect">
             <a:avLst/>
@@ -19001,7 +19001,7 @@
                 </a:solidFill>
                 <a:latin typeface="Arial"/>
               </a:rPr>
-              <a:t> synthesizer 2 at 80 MHz + 5 kHz; the ×4 / 30 Hz trigger chain becomes the 5 kHz reference, fed to the pixels' transfer gates; the camera is drawn as the chain inside one pixel (slide 6: photodiode → gates → nodes → A − B, C − D → the sensor's own ADCs, 2 × 10 bit per pixel) so only digital I/Q leaves the camera, into a GigE receiver; the processing is atan2(Q, I) per sample, decimated to the loop rate.  Fiber, LO and hold loop are unchanged.</a:t>
+              <a:t> synthesizer 2 at 80 MHz + 5 kHz; the trigger chain becomes the 5 kHz reference to the pixels' gates; the camera is one pixel's chain (slide 6) ending in the sensor's ADCs — digital I/Q out to a GigE receiver; atan2(Q, I) per sample.  Fiber, LO, loop unchanged.</a:t>
             </a:r>
           </a:p>
         </p:txBody>
@@ -19014,8 +19014,8 @@
         </p:nvSpPr>
         <p:spPr>
           <a:xfrm>
-            <a:off x="3200400" y="2240280"/>
-            <a:ext cx="6080760" cy="274320"/>
+            <a:off x="5760720" y="2103120"/>
+            <a:ext cx="6035040" cy="274320"/>
           </a:xfrm>
           <a:prstGeom prst="rect">
             <a:avLst/>

--- a/demo_session/deck_cophi_edit.pptx
+++ b/demo_session/deck_cophi_edit.pptx
@@ -18468,7 +18468,7 @@
                 </a:solidFill>
                 <a:latin typeface="Arial"/>
               </a:rPr>
-              <a:t> phase noise per pixel vs flux at t_c = 100 ms, and whether the full well bounds each internal 1 MSa/s sample or the 5.6 kSa/s output</a:t>
+              <a:t> do the nodes hold the full DC before A − B is formed, or only the difference (slide 6)? is the 1 MSa/s internal sampling an analog accumulation read once per output sample? phase noise per pixel vs flux at t_c = 100 ms</a:t>
             </a:r>
           </a:p>
         </p:txBody>
@@ -18647,7 +18647,7 @@
         <p:spPr>
           <a:xfrm>
             <a:off x="411480" y="1188720"/>
-            <a:ext cx="11365992" cy="4681728"/>
+            <a:ext cx="11365992" cy="3931920"/>
           </a:xfrm>
           <a:prstGeom prst="rect">
             <a:avLst/>
@@ -18662,7 +18662,7 @@
         </p:nvSpPr>
         <p:spPr>
           <a:xfrm>
-            <a:off x="411480" y="5870448"/>
+            <a:off x="411480" y="5120640"/>
             <a:ext cx="5806440" cy="274320"/>
           </a:xfrm>
           <a:prstGeom prst="rect">
@@ -18719,7 +18719,7 @@
         </p:nvSpPr>
         <p:spPr>
           <a:xfrm>
-            <a:off x="6400800" y="5870448"/>
+            <a:off x="6400800" y="5120640"/>
             <a:ext cx="5394960" cy="274320"/>
           </a:xfrm>
           <a:prstGeom prst="rect">
@@ -18763,7 +18763,39 @@
                 </a:solidFill>
                 <a:latin typeface="Arial"/>
               </a:rPr>
-              <a:t> N cycles per sample, not a quarter cycle; the DC cancels in the difference (does it fill the nodes? vendor question 2); the square wave costs ×1.11 in σ (eq. 6).</a:t>
+              <a:t> N cycles per sample, not a quarter cycle; the square wave costs ×1.11 in σ (eq. 6).</a:t>
+            </a:r>
+          </a:p>
+          <a:p>
+            <a:pPr marL="594360" indent="-137160">
+              <a:spcAft>
+                <a:spcPts val="500"/>
+              </a:spcAft>
+            </a:pPr>
+            <a:r>
+              <a:rPr sz="1050" b="0">
+                <a:solidFill>
+                  <a:srgbClr val="6E6E6E"/>
+                </a:solidFill>
+                <a:latin typeface="Arial"/>
+              </a:rPr>
+              <a:t>–  read noise is paid once per N-cycle sample, not per bucket: 1/N in variance per photon; shot noise unchanged (every photoelectron counts, stored or drained)</a:t>
+            </a:r>
+          </a:p>
+          <a:p>
+            <a:pPr marL="594360" indent="-137160">
+              <a:spcAft>
+                <a:spcPts val="500"/>
+              </a:spcAft>
+            </a:pPr>
+            <a:r>
+              <a:rPr sz="1050" b="0">
+                <a:solidFill>
+                  <a:srgbClr val="6E6E6E"/>
+                </a:solidFill>
+                <a:latin typeface="Arial"/>
+              </a:rPr>
+              <a:t>–  the vendor question: must the nodes hold the full DC before A − B is formed (the well caps photons per sample — our numbers), or is the common part drained so they hold only the difference (~10× more photons)?</a:t>
             </a:r>
           </a:p>
         </p:txBody>
@@ -18776,7 +18808,7 @@
         </p:nvSpPr>
         <p:spPr>
           <a:xfrm>
-            <a:off x="4343400" y="6565392"/>
+            <a:off x="4343400" y="6601968"/>
             <a:ext cx="7452360" cy="274320"/>
           </a:xfrm>
           <a:prstGeom prst="rect">

--- a/demo_session/deck_cophi_edit.pptx
+++ b/demo_session/deck_cophi_edit.pptx
@@ -18779,7 +18779,7 @@
                 </a:solidFill>
                 <a:latin typeface="Arial"/>
               </a:rPr>
-              <a:t>–  read noise is paid once per N-cycle sample, not per bucket: 1/N in variance per photon; shot noise unchanged (every photoelectron counts, stored or drained)</a:t>
+              <a:t>–  per PHOTON: read noise is paid once per N-cycle sample, not per bucket (1/N in variance); shot noise is unchanged — averaging more samples helps only by bringing more photons, as it would any camera</a:t>
             </a:r>
           </a:p>
           <a:p>
@@ -18795,7 +18795,7 @@
                 </a:solidFill>
                 <a:latin typeface="Arial"/>
               </a:rPr>
-              <a:t>–  the vendor question: must the nodes hold the full DC before A − B is formed (the well caps photons per sample — our numbers), or is the common part drained so they hold only the difference (~10× more photons)?</a:t>
+              <a:t>–  per SECOND: the well empties every 1 ms sample — 5 × 10⁸ e⁻/s per pixel usable vs the Photonfocus's 3 × 10⁷ (200 ke × 150 fps); that 17× in photons is most of 42 → 3.4 s per pm (the vendor's drain question: slide 5)</a:t>
             </a:r>
           </a:p>
         </p:txBody>

--- a/demo_session/deck_cophi_edit.pptx
+++ b/demo_session/deck_cophi_edit.pptx
@@ -4738,8 +4738,8 @@
         </p:nvSpPr>
         <p:spPr>
           <a:xfrm>
-            <a:off x="411480" y="6834505"/>
-            <a:ext cx="11368735" cy="274320"/>
+            <a:off x="411480" y="6428232"/>
+            <a:ext cx="11365992" cy="274320"/>
           </a:xfrm>
           <a:prstGeom prst="rect">
             <a:avLst/>
@@ -5822,8 +5822,8 @@
         </p:nvSpPr>
         <p:spPr>
           <a:xfrm>
-            <a:off x="411480" y="5257800"/>
-            <a:ext cx="11368735" cy="274320"/>
+            <a:off x="411480" y="4572000"/>
+            <a:ext cx="11365992" cy="274320"/>
           </a:xfrm>
           <a:prstGeom prst="rect">
             <a:avLst/>
@@ -5842,7 +5842,7 @@
               </a:spcAft>
             </a:pPr>
             <a:r>
-              <a:rPr sz="1200" b="0">
+              <a:rPr sz="1400" b="0">
                 <a:solidFill>
                   <a:srgbClr val="282828"/>
                 </a:solidFill>
@@ -5851,7 +5851,7 @@
               <a:t>•  </a:t>
             </a:r>
             <a:r>
-              <a:rPr sz="1200" b="1">
+              <a:rPr sz="1400" b="1">
                 <a:solidFill>
                   <a:srgbClr val="282828"/>
                 </a:solidFill>
@@ -5860,7 +5860,7 @@
               <a:t>The one-step rows sit 0.5 % low for HET on both rigs — the estimator, not the reading:</a:t>
             </a:r>
             <a:r>
-              <a:rPr sz="1200" b="0">
+              <a:rPr sz="1400" b="0">
                 <a:solidFill>
                   <a:srgbClr val="282828"/>
                 </a:solidFill>
@@ -5876,7 +5876,7 @@
               </a:spcAft>
             </a:pPr>
             <a:r>
-              <a:rPr sz="1200" b="0">
+              <a:rPr sz="1400" b="0">
                 <a:solidFill>
                   <a:srgbClr val="282828"/>
                 </a:solidFill>
@@ -5885,7 +5885,7 @@
               <a:t>•  </a:t>
             </a:r>
             <a:r>
-              <a:rPr sz="1200" b="1">
+              <a:rPr sz="1400" b="1">
                 <a:solidFill>
                   <a:srgbClr val="282828"/>
                 </a:solidFill>
@@ -5894,7 +5894,7 @@
               <a:t>Driven to convergence (the servo use), HET reads exactly on the mirror rig, and the IFO shows its polarization gain in the open:</a:t>
             </a:r>
             <a:r>
-              <a:rPr sz="1200" b="0">
+              <a:rPr sz="1400" b="0">
                 <a:solidFill>
                   <a:srgbClr val="282828"/>
                 </a:solidFill>
@@ -5913,8 +5913,8 @@
         </p:nvSpPr>
         <p:spPr>
           <a:xfrm>
-            <a:off x="411480" y="6565392"/>
-            <a:ext cx="11368735" cy="274320"/>
+            <a:off x="411480" y="6172200"/>
+            <a:ext cx="11365992" cy="274320"/>
           </a:xfrm>
           <a:prstGeom prst="rect">
             <a:avLst/>
@@ -8442,8 +8442,8 @@
         </p:nvSpPr>
         <p:spPr>
           <a:xfrm>
-            <a:off x="6400800" y="6254495"/>
-            <a:ext cx="5394960" cy="274320"/>
+            <a:off x="457200" y="6254496"/>
+            <a:ext cx="11338560" cy="274320"/>
           </a:xfrm>
           <a:prstGeom prst="rect">
             <a:avLst/>
@@ -12927,8 +12927,8 @@
         </p:nvSpPr>
         <p:spPr>
           <a:xfrm>
-            <a:off x="411480" y="6986270"/>
-            <a:ext cx="11368735" cy="274320"/>
+            <a:off x="420624" y="6336792"/>
+            <a:ext cx="11365992" cy="274320"/>
           </a:xfrm>
           <a:prstGeom prst="rect">
             <a:avLst/>
@@ -14256,8 +14256,8 @@
         </p:nvSpPr>
         <p:spPr>
           <a:xfrm>
-            <a:off x="411480" y="6708267"/>
-            <a:ext cx="11368735" cy="274320"/>
+            <a:off x="420624" y="6382512"/>
+            <a:ext cx="11365992" cy="274320"/>
           </a:xfrm>
           <a:prstGeom prst="rect">
             <a:avLst/>
@@ -18647,7 +18647,7 @@
         <p:spPr>
           <a:xfrm>
             <a:off x="411480" y="1188720"/>
-            <a:ext cx="11365992" cy="3931920"/>
+            <a:ext cx="11365992" cy="4389120"/>
           </a:xfrm>
           <a:prstGeom prst="rect">
             <a:avLst/>
@@ -18662,7 +18662,7 @@
         </p:nvSpPr>
         <p:spPr>
           <a:xfrm>
-            <a:off x="411480" y="5120640"/>
+            <a:off x="365760" y="5705856"/>
             <a:ext cx="5806440" cy="274320"/>
           </a:xfrm>
           <a:prstGeom prst="rect">
@@ -18709,6 +18709,40 @@
               <a:t> a square wave at the beat f_b = |f₁ − f₂| (5 kHz), locked to the AOMs through the Rb clock, fed to the camera's reference input — one clock; software does only atan2(Q, I).</a:t>
             </a:r>
           </a:p>
+          <a:p>
+            <a:pPr>
+              <a:spcAft>
+                <a:spcPts val="600"/>
+              </a:spcAft>
+            </a:pPr>
+            <a:r>
+              <a:rPr sz="1200" b="0">
+                <a:solidFill>
+                  <a:srgbClr val="282828"/>
+                </a:solidFill>
+                <a:latin typeface="Arial"/>
+              </a:rPr>
+              <a:t>•  </a:t>
+            </a:r>
+            <a:r>
+              <a:rPr sz="1200" b="1">
+                <a:solidFill>
+                  <a:srgbClr val="282828"/>
+                </a:solidFill>
+                <a:latin typeface="Arial"/>
+              </a:rPr>
+              <a:t>The ADC is on chip:</a:t>
+            </a:r>
+            <a:r>
+              <a:rPr sz="1200" b="0">
+                <a:solidFill>
+                  <a:srgbClr val="282828"/>
+                </a:solidFill>
+                <a:latin typeface="Arial"/>
+              </a:rPr>
+              <a:t> readouts are digital I and Q.</a:t>
+            </a:r>
+          </a:p>
         </p:txBody>
       </p:sp>
       <p:sp>
@@ -18719,8 +18753,8 @@
         </p:nvSpPr>
         <p:spPr>
           <a:xfrm>
-            <a:off x="6400800" y="5120640"/>
-            <a:ext cx="5394960" cy="274320"/>
+            <a:off x="6382512" y="5715000"/>
+            <a:ext cx="5733288" cy="274320"/>
           </a:xfrm>
           <a:prstGeom prst="rect">
             <a:avLst/>
@@ -18763,7 +18797,7 @@
                 </a:solidFill>
                 <a:latin typeface="Arial"/>
               </a:rPr>
-              <a:t> N cycles per sample, not a quarter cycle; the square wave costs ×1.11 in σ (eq. 6).</a:t>
+              <a:t> N cycles per sample, not 1 sample per quarter cycle.</a:t>
             </a:r>
           </a:p>
           <a:p>
@@ -18779,23 +18813,7 @@
                 </a:solidFill>
                 <a:latin typeface="Arial"/>
               </a:rPr>
-              <a:t>–  per PHOTON: read noise is paid once per N-cycle sample, not per bucket (1/N in variance); shot noise is unchanged — averaging more samples helps only by bringing more photons, as it would any camera</a:t>
-            </a:r>
-          </a:p>
-          <a:p>
-            <a:pPr marL="594360" indent="-137160">
-              <a:spcAft>
-                <a:spcPts val="500"/>
-              </a:spcAft>
-            </a:pPr>
-            <a:r>
-              <a:rPr sz="1050" b="0">
-                <a:solidFill>
-                  <a:srgbClr val="6E6E6E"/>
-                </a:solidFill>
-                <a:latin typeface="Arial"/>
-              </a:rPr>
-              <a:t>–  per SECOND: the well empties every 1 ms sample — 5 × 10⁸ e⁻/s per pixel usable vs the Photonfocus's 3 × 10⁷ (200 ke × 150 fps); that 17× in photons is most of 42 → 3.4 s per pm (the vendor's drain question: slide 5)</a:t>
+              <a:t>–  the well empties every 1 ms sample — 5 × 10⁸ e⁻/s per pixel usable vs the Photonfocus's 3 × 10⁷ (200 ke × 150 fps); that 17× in photons is most of 42 → 3.4 s per pm (the vendor's drain question: slide 5)</a:t>
             </a:r>
           </a:p>
         </p:txBody>

--- a/demo_session/deck_cophi_edit.pptx
+++ b/demo_session/deck_cophi_edit.pptx
@@ -8600,15 +8600,15 @@
         </p:nvPicPr>
         <p:blipFill>
           <a:blip r:embed="rId2"/>
-          <a:srcRect t="3060" b="2370"/>
+          <a:srcRect/>
           <a:stretch>
             <a:fillRect/>
           </a:stretch>
         </p:blipFill>
         <p:spPr>
           <a:xfrm>
-            <a:off x="731520" y="2286000"/>
-            <a:ext cx="10972800" cy="4389120"/>
+            <a:off x="2194560" y="1874519"/>
+            <a:ext cx="7799831" cy="4572000"/>
           </a:xfrm>
           <a:prstGeom prst="rect">
             <a:avLst/>
@@ -8667,7 +8667,7 @@
                 </a:solidFill>
                 <a:latin typeface="Arial"/>
               </a:rPr>
-              <a:t> beats of 7.5 Hz and 3.75 Hz are 4 and 8 frames at the same 30 fps, so each color is demodulated at its own bucket centers from the same frames; the colors do not interfere (THz apart).</a:t>
+              <a:t> beats of 7.5 Hz and 3.75 Hz are 4 and 8 frames at the same 30 fps, so each color is demodulated at its own bucket centers from the same frames; the colors do not interfere (THz apart).  Lock-in form: time-multiplexed, one color per 1 ms sample (slide 17).</a:t>
             </a:r>
           </a:p>
         </p:txBody>
@@ -8680,8 +8680,8 @@
         </p:nvSpPr>
         <p:spPr>
           <a:xfrm>
-            <a:off x="411480" y="1828800"/>
-            <a:ext cx="5852160" cy="274320"/>
+            <a:off x="411480" y="6473952"/>
+            <a:ext cx="8686800" cy="274320"/>
           </a:xfrm>
           <a:prstGeom prst="rect">
             <a:avLst/>
@@ -8719,8 +8719,8 @@
         </p:nvSpPr>
         <p:spPr>
           <a:xfrm>
-            <a:off x="6400800" y="1828800"/>
-            <a:ext cx="5394960" cy="274320"/>
+            <a:off x="411480" y="6656832"/>
+            <a:ext cx="11338560" cy="274320"/>
           </a:xfrm>
           <a:prstGeom prst="rect">
             <a:avLst/>
@@ -9062,7 +9062,23 @@
                 </a:solidFill>
                 <a:latin typeface="Arial"/>
               </a:rPr>
-              <a:t> one reference at a time, so the two colors alternate on I/Q samples (2 ms per pair) — zero wrong orders to 480 nm rms, 0.12 nm per pixel; temporal unwrapping at 1 kHz tolerates 158 µm/s.</a:t>
+              <a:t> the two colors take alternate 1 ms samples, each color's AOM pair gated on for its sample, so ONE color is on the sensor at a time (500 Hz per color, 2 ms per pair) — zero wrong orders to 480 nm rms, 0.12 nm per pixel; temporal unwrapping at 1 kHz tolerates 158 µm/s.</a:t>
+            </a:r>
+          </a:p>
+          <a:p>
+            <a:pPr marL="594360" indent="-137160">
+              <a:spcAft>
+                <a:spcPts val="500"/>
+              </a:spcAft>
+            </a:pPr>
+            <a:r>
+              <a:rPr sz="1050" b="0">
+                <a:solidFill>
+                  <a:srgbClr val="6E6E6E"/>
+                </a:solidFill>
+                <a:latin typeface="Arial"/>
+              </a:rPr>
+              <a:t>–  the pixel has one reference and one pair of accumulators: both colors on at once would put the second beat and the second color's DC into A−B and C−D.  That form works only with beats an integer number of kHz apart (the cross term then integrates to zero over the 1 ms sample, square-wave harmonics included) and costs √2 in shot noise and half the well per color; not modeled.</a:t>
             </a:r>
           </a:p>
         </p:txBody>
@@ -16264,15 +16280,15 @@
         </p:nvPicPr>
         <p:blipFill>
           <a:blip r:embed="rId2"/>
-          <a:srcRect t="3660" b="2840"/>
+          <a:srcRect/>
           <a:stretch>
             <a:fillRect/>
           </a:stretch>
         </p:blipFill>
         <p:spPr>
           <a:xfrm>
-            <a:off x="914400" y="1408176"/>
-            <a:ext cx="9994392" cy="5394960"/>
+            <a:off x="1188720" y="1572768"/>
+            <a:ext cx="9820656" cy="4937760"/>
           </a:xfrm>
           <a:prstGeom prst="rect">
             <a:avLst/>
@@ -16344,7 +16360,7 @@
         </p:nvSpPr>
         <p:spPr>
           <a:xfrm>
-            <a:off x="5486400" y="1371600"/>
+            <a:off x="5806440" y="1353312"/>
             <a:ext cx="5852160" cy="274320"/>
           </a:xfrm>
           <a:prstGeom prst="rect">
@@ -16383,8 +16399,8 @@
         </p:nvSpPr>
         <p:spPr>
           <a:xfrm>
-            <a:off x="6172200" y="2103120"/>
-            <a:ext cx="4343400" cy="274320"/>
+            <a:off x="411480" y="6510528"/>
+            <a:ext cx="11338560" cy="274320"/>
           </a:xfrm>
           <a:prstGeom prst="rect">
             <a:avLst/>
@@ -18984,15 +19000,15 @@
         </p:nvPicPr>
         <p:blipFill>
           <a:blip r:embed="rId2"/>
-          <a:srcRect t="3010" b="2600"/>
+          <a:srcRect/>
           <a:stretch>
             <a:fillRect/>
           </a:stretch>
         </p:blipFill>
         <p:spPr>
           <a:xfrm>
-            <a:off x="740664" y="1106424"/>
-            <a:ext cx="10296144" cy="5614416"/>
+            <a:off x="1380744" y="1719072"/>
+            <a:ext cx="9436608" cy="4754880"/>
           </a:xfrm>
           <a:prstGeom prst="rect">
             <a:avLst/>
@@ -19007,8 +19023,8 @@
         </p:nvSpPr>
         <p:spPr>
           <a:xfrm>
-            <a:off x="5760720" y="1115568"/>
-            <a:ext cx="6035040" cy="274320"/>
+            <a:off x="411480" y="1115568"/>
+            <a:ext cx="11338560" cy="274320"/>
           </a:xfrm>
           <a:prstGeom prst="rect">
             <a:avLst/>
@@ -19027,7 +19043,7 @@
               </a:spcAft>
             </a:pPr>
             <a:r>
-              <a:rPr sz="1200" b="0">
+              <a:rPr sz="1500" b="0">
                 <a:solidFill>
                   <a:srgbClr val="282828"/>
                 </a:solidFill>
@@ -19036,7 +19052,7 @@
               <a:t>•  </a:t>
             </a:r>
             <a:r>
-              <a:rPr sz="1200" b="1">
+              <a:rPr sz="1500" b="1">
                 <a:solidFill>
                   <a:srgbClr val="282828"/>
                 </a:solidFill>
@@ -19045,7 +19061,7 @@
               <a:t>What changes from slide 3:</a:t>
             </a:r>
             <a:r>
-              <a:rPr sz="1200" b="0">
+              <a:rPr sz="1500" b="0">
                 <a:solidFill>
                   <a:srgbClr val="282828"/>
                 </a:solidFill>
@@ -19064,8 +19080,8 @@
         </p:nvSpPr>
         <p:spPr>
           <a:xfrm>
-            <a:off x="5760720" y="2103120"/>
-            <a:ext cx="6035040" cy="274320"/>
+            <a:off x="411480" y="6473952"/>
+            <a:ext cx="8686800" cy="274320"/>
           </a:xfrm>
           <a:prstGeom prst="rect">
             <a:avLst/>
@@ -19103,8 +19119,8 @@
         </p:nvSpPr>
         <p:spPr>
           <a:xfrm>
-            <a:off x="6172200" y="6611112"/>
-            <a:ext cx="5650992" cy="274320"/>
+            <a:off x="411480" y="6656832"/>
+            <a:ext cx="11338560" cy="274320"/>
           </a:xfrm>
           <a:prstGeom prst="rect">
             <a:avLst/>
